--- a/docs/ClaimsAgent_CA3.pptx
+++ b/docs/ClaimsAgent_CA3.pptx
@@ -15,9 +15,10 @@
     <p:sldId id="263" r:id="rId9"/>
     <p:sldId id="264" r:id="rId10"/>
     <p:sldId id="265" r:id="rId11"/>
+    <p:sldId id="266" r:id="rId12"/>
   </p:sldIdLst>
   <p:notesMasterIdLst>
-    <p:notesMasterId r:id="rId12"/>
+    <p:notesMasterId r:id="rId13"/>
   </p:notesMasterIdLst>
   <p:sldSz cx="9144000" cy="5143500"/>
   <p:notesSz cx="5143500" cy="9144000"/>
@@ -116,42 +117,43 @@
   <p:extLst>
     <p:ext uri="{521415D9-36F7-43E2-AB2F-B90AF26B5E84}">
       <p14:sectionLst xmlns:p14="http://schemas.microsoft.com/office/powerpoint/2010/main">
-        <p14:section name="Opening" id="{56a441f9-f0da-8c2a-39af-e42b98b1ffc3}">
+        <p14:section name="Opening" id="{4f1a2292-c2ee-29e1-6b09-efb8d2f50295}">
           <p14:sldIdLst>
             <p14:sldId id="256"/>
           </p14:sldIdLst>
         </p14:section>
-        <p14:section name="Problem" id="{dcce77be-aa37-a0e3-6796-44d1a35d3830}">
+        <p14:section name="Problem" id="{eda0fa26-595e-3437-2efa-ccfa7b496306}">
           <p14:sldIdLst>
             <p14:sldId id="257"/>
             <p14:sldId id="258"/>
           </p14:sldIdLst>
         </p14:section>
-        <p14:section name="Solution" id="{c3d87040-c317-f9f5-dbba-df208a5c809d}">
+        <p14:section name="Solution" id="{a32b620a-20be-be5e-a68a-9734241c631f}">
           <p14:sldIdLst>
             <p14:sldId id="259"/>
             <p14:sldId id="260"/>
-          </p14:sldIdLst>
-        </p14:section>
-        <p14:section name="Demonstration" id="{725b05c0-699e-407f-aea1-3f23262116f7}">
-          <p14:sldIdLst>
             <p14:sldId id="261"/>
           </p14:sldIdLst>
         </p14:section>
-        <p14:section name="Validation" id="{36b0f3ec-4781-5191-ba55-c9147438f0f4}">
+        <p14:section name="Demonstration" id="{da163610-c58f-ee43-1da9-54b392e8cbce}">
           <p14:sldIdLst>
             <p14:sldId id="262"/>
           </p14:sldIdLst>
         </p14:section>
-        <p14:section name="Close" id="{0aa1044a-988a-df05-2491-c743c51cfc31}">
+        <p14:section name="Validation" id="{bd9c42f3-0aaf-3701-83c4-9e498b922302}">
           <p14:sldIdLst>
             <p14:sldId id="263"/>
-            <p14:sldId id="264"/>
           </p14:sldIdLst>
         </p14:section>
-        <p14:section name="Appendix" id="{a06781fa-7136-adb0-fd95-504c1a52d77a}">
+        <p14:section name="Close" id="{a95fee85-736e-2ad1-3e83-f85f25b020e4}">
           <p14:sldIdLst>
+            <p14:sldId id="264"/>
             <p14:sldId id="265"/>
+          </p14:sldIdLst>
+        </p14:section>
+        <p14:section name="Appendix" id="{d66d2236-0d2d-6932-a280-740f94f1a59b}">
+          <p14:sldIdLst>
+            <p14:sldId id="266"/>
           </p14:sldIdLst>
         </p14:section>
       </p14:sectionLst>
@@ -1081,7 +1083,7 @@
           <a:p>
             <a:r>
               <a:rPr lang="en-US" dirty="0"/>
-              <a:t>Backup slide with the complete architecture: agents, tool belt, data stores, model layer and the feedback loop.</a:t>
+              <a:t/>
             </a:r>
             <a:endParaRPr lang="en-US" dirty="0"/>
           </a:p>
@@ -1105,6 +1107,94 @@
             <a:fld id="{F7021451-1387-4CA6-816F-3879F97B5CBC}" type="slidenum">
               <a:rPr lang="en-US"/>
               <a:t>10</a:t>
+            </a:fld>
+            <a:endParaRPr lang="en-US"/>
+          </a:p>
+        </p:txBody>
+      </p:sp>
+    </p:spTree>
+    <p:extLst>
+      <p:ext uri="{BB962C8B-B14F-4D97-AF65-F5344CB8AC3E}">
+        <p14:creationId xmlns:p14="http://schemas.microsoft.com/office/powerpoint/2010/main" val="1024086991"/>
+      </p:ext>
+    </p:extLst>
+  </p:cSld>
+  <p:clrMapOvr>
+    <a:masterClrMapping/>
+  </p:clrMapOvr>
+</p:notes>
+</file>
+
+<file path=ppt/notesSlides/notesSlide11.xml><?xml version="1.0" encoding="utf-8"?>
+<p:notes xmlns:a="http://schemas.openxmlformats.org/drawingml/2006/main" xmlns:r="http://schemas.openxmlformats.org/officeDocument/2006/relationships" xmlns:p="http://schemas.openxmlformats.org/presentationml/2006/main">
+  <p:cSld>
+    <p:spTree>
+      <p:nvGrpSpPr>
+        <p:cNvPr id="1" name=""/>
+        <p:cNvGrpSpPr/>
+        <p:nvPr/>
+      </p:nvGrpSpPr>
+      <p:grpSpPr>
+        <a:xfrm>
+          <a:off x="0" y="0"/>
+          <a:ext cx="0" cy="0"/>
+          <a:chOff x="0" y="0"/>
+          <a:chExt cx="0" cy="0"/>
+        </a:xfrm>
+      </p:grpSpPr>
+      <p:sp>
+        <p:nvSpPr>
+          <p:cNvPr id="2" name="Slide Image Placeholder 1"/>
+          <p:cNvSpPr>
+            <a:spLocks noGrp="1" noRot="1" noChangeAspect="1"/>
+          </p:cNvSpPr>
+          <p:nvPr>
+            <p:ph type="sldImg"/>
+          </p:nvPr>
+        </p:nvSpPr>
+        <p:spPr/>
+      </p:sp>
+      <p:sp>
+        <p:nvSpPr>
+          <p:cNvPr id="3" name="Notes Placeholder 2"/>
+          <p:cNvSpPr>
+            <a:spLocks noGrp="1"/>
+          </p:cNvSpPr>
+          <p:nvPr>
+            <p:ph type="body" idx="1"/>
+          </p:nvPr>
+        </p:nvSpPr>
+        <p:spPr/>
+        <p:txBody>
+          <a:bodyPr/>
+          <a:lstStyle/>
+          <a:p>
+            <a:r>
+              <a:rPr lang="en-US" dirty="0"/>
+              <a:t>Backup slide with the complete architecture: agents, tool belt, data stores, model layer and the feedback loop.</a:t>
+            </a:r>
+            <a:endParaRPr lang="en-US" dirty="0"/>
+          </a:p>
+        </p:txBody>
+      </p:sp>
+      <p:sp>
+        <p:nvSpPr>
+          <p:cNvPr id="4" name="Slide Number Placeholder 3"/>
+          <p:cNvSpPr>
+            <a:spLocks noGrp="1"/>
+          </p:cNvSpPr>
+          <p:nvPr>
+            <p:ph type="sldNum" sz="quarter" idx="10"/>
+          </p:nvPr>
+        </p:nvSpPr>
+        <p:spPr/>
+        <p:txBody>
+          <a:bodyPr/>
+          <a:lstStyle/>
+          <a:p>
+            <a:fld id="{F7021451-1387-4CA6-816F-3879F97B5CBC}" type="slidenum">
+              <a:rPr lang="en-US"/>
+              <a:t>11</a:t>
             </a:fld>
             <a:endParaRPr lang="en-US"/>
           </a:p>
@@ -1433,7 +1523,7 @@
           <a:p>
             <a:r>
               <a:rPr lang="en-US" dirty="0"/>
-              <a:t>Read the ladder top to bottom: a hard rule failure always wins, then missing documents, then risk flags, then deductions. Every outcome cites policy clause ids, which is the audit trail. The Critic on the right is a separate validator: it recomputes the payout, checks limits and citations, and asks whether the fraud screening matched the risk.</a:t>
+              <a:t>Use this slide before the live demo, so the audience knows what they are about to see. This is claim CLM-26-0019. The quick plan skipped the fraud check because the claim looked small and normal. The Critic noticed the price was about 2.4 times the normal cost, so it sent the claim back. After the re-check, the fraud score was 60 out of 100 and the claim went to a human.</a:t>
             </a:r>
             <a:endParaRPr lang="en-US" dirty="0"/>
           </a:p>
@@ -1521,7 +1611,7 @@
           <a:p>
             <a:r>
               <a:rPr lang="en-US" dirty="0"/>
-              <a:t>Switch to the Streamlit app and run these four in order. Claim 0019 is the best one: the Planner chooses a lean plan, the Critic notices the non-room charges are about twice the benchmark, sends it back, and the second round adds the fraud screening and escalates. Then toggle the fault injection on claim 0003 to show the Critic catching a deliberate overpayment.</a:t>
+              <a:t>Read the ladder top to bottom: a hard rule failure always wins, then missing documents, then risk flags, then deductions. Every outcome cites policy clause ids, which is the audit trail. The Critic on the right is a separate validator: it recomputes the payout, checks limits and citations, and asks whether the fraud screening matched the risk.</a:t>
             </a:r>
             <a:endParaRPr lang="en-US" dirty="0"/>
           </a:p>
@@ -1609,7 +1699,7 @@
           <a:p>
             <a:r>
               <a:rPr lang="en-US" dirty="0"/>
-              <a:t>Be candid here. The main set scores 89 of 89, but its labels come from the same design as the rules, so that proves coverage, not real-world accuracy. So we built a harder test: 445 held-out claims, five kinds of noise, and 23 boundary cases. The first run, the grey bars, exposed real weaknesses and we fixed them. The two UNSEEN rows were added after the fixes and were not tuned against. Clinical abbreviations like TKR or k/c/o DM-2 are still a real gap: 23 risky claims slipped through. That motivates a language-model extractor.</a:t>
+              <a:t>Switch to the Streamlit app and run these four in order. Claim 0019 is the best one: the Planner chooses a lean plan, the Critic notices the non-room charges are about twice the benchmark, sends it back, and the second round adds the fraud screening and escalates. Then toggle the fault injection on claim 0003 to show the Critic catching a deliberate overpayment.</a:t>
             </a:r>
             <a:endParaRPr lang="en-US" dirty="0"/>
           </a:p>
@@ -1697,7 +1787,7 @@
           <a:p>
             <a:r>
               <a:rPr lang="en-US" dirty="0"/>
-              <a:t>Limitations first, because the evaluators will ask. The abbreviation gap is the one we know about and measured. The next step is a language-model extractor, which our pluggable model layer already supports, plus a strict mode that trades more manual reviews for fewer missed pre-existing conditions.</a:t>
+              <a:t>Be candid here. The main set scores 89 of 89, but its labels come from the same design as the rules, so that proves coverage, not real-world accuracy. So we built a harder test: 445 held-out claims, five kinds of noise, and 23 boundary cases. The first run, the grey bars, exposed real weaknesses and we fixed them. The two UNSEEN rows were added after the fixes and were not tuned against. Clinical abbreviations like TKR or k/c/o DM-2 are still a real gap: 23 risky claims slipped through. That motivates a language-model extractor.</a:t>
             </a:r>
             <a:endParaRPr lang="en-US" dirty="0"/>
           </a:p>
@@ -1785,7 +1875,7 @@
           <a:p>
             <a:r>
               <a:rPr lang="en-US" dirty="0"/>
-              <a:t/>
+              <a:t>Limitations first, because the evaluators will ask. The abbreviation gap is the one we know about and measured. The next step is a language-model extractor, which our pluggable model layer already supports, plus a strict mode that trades more manual reviews for fewer missed pre-existing conditions.</a:t>
             </a:r>
             <a:endParaRPr lang="en-US" dirty="0"/>
           </a:p>
@@ -3193,6 +3283,107 @@
         </p:nvSpPr>
         <p:spPr>
           <a:xfrm>
+            <a:off x="548640" y="1554480"/>
+            <a:ext cx="8046720" cy="914400"/>
+          </a:xfrm>
+          <a:prstGeom prst="rect">
+            <a:avLst/>
+          </a:prstGeom>
+          <a:noFill/>
+          <a:ln/>
+        </p:spPr>
+        <p:txBody>
+          <a:bodyPr wrap="square" lIns="0" tIns="0" rIns="0" bIns="0" rtlCol="0" anchor="t"/>
+          <a:lstStyle/>
+          <a:p>
+            <a:pPr algn="l" indent="0" marL="0">
+              <a:buNone/>
+            </a:pPr>
+            <a:r>
+              <a:rPr lang="en-US" sz="4000" b="1" dirty="0">
+                <a:solidFill>
+                  <a:schemeClr val="bg1"/>
+                </a:solidFill>
+              </a:rPr>
+              <a:t>Thank you</a:t>
+            </a:r>
+            <a:endParaRPr lang="en-US" sz="4000" dirty="0"/>
+          </a:p>
+        </p:txBody>
+      </p:sp>
+      <p:sp>
+        <p:nvSpPr>
+          <p:cNvPr id="3" name="Text 0"/>
+          <p:cNvSpPr/>
+          <p:nvPr>
+            <p:ph idx="101" type="body" hasCustomPrompt="1"/>
+          </p:nvPr>
+        </p:nvSpPr>
+        <p:spPr>
+          <a:xfrm>
+            <a:off x="548640" y="2560320"/>
+            <a:ext cx="7315200" cy="1097280"/>
+          </a:xfrm>
+          <a:prstGeom prst="rect">
+            <a:avLst/>
+          </a:prstGeom>
+          <a:noFill/>
+          <a:ln/>
+        </p:spPr>
+        <p:txBody>
+          <a:bodyPr wrap="square" lIns="0" tIns="0" rIns="0" bIns="0" rtlCol="0" anchor="t"/>
+          <a:lstStyle/>
+          <a:p>
+            <a:pPr indent="0" marL="0">
+              <a:buNone/>
+            </a:pPr>
+            <a:r>
+              <a:rPr lang="en-US" sz="1800" dirty="0">
+                <a:solidFill>
+                  <a:schemeClr val="bg2"/>
+                </a:solidFill>
+              </a:rPr>
+              <a:t>Questions welcome. The Streamlit app, the architecture diagram and the robustness reports are all in the project folder.</a:t>
+            </a:r>
+            <a:endParaRPr lang="en-US" sz="1800" dirty="0"/>
+          </a:p>
+        </p:txBody>
+      </p:sp>
+    </p:spTree>
+  </p:cSld>
+  <p:clrMapOvr>
+    <a:masterClrMapping/>
+  </p:clrMapOvr>
+</p:sld>
+</file>
+
+<file path=ppt/slides/slide11.xml><?xml version="1.0" encoding="utf-8"?>
+<p:sld xmlns:a="http://schemas.openxmlformats.org/drawingml/2006/main" xmlns:r="http://schemas.openxmlformats.org/officeDocument/2006/relationships" xmlns:p="http://schemas.openxmlformats.org/presentationml/2006/main">
+  <p:cSld name="Slide 11">
+    <p:spTree>
+      <p:nvGrpSpPr>
+        <p:cNvPr id="1" name=""/>
+        <p:cNvGrpSpPr/>
+        <p:nvPr/>
+      </p:nvGrpSpPr>
+      <p:grpSpPr>
+        <a:xfrm>
+          <a:off x="0" y="0"/>
+          <a:ext cx="0" cy="0"/>
+          <a:chOff x="0" y="0"/>
+          <a:chExt cx="0" cy="0"/>
+        </a:xfrm>
+      </p:grpSpPr>
+      <p:sp>
+        <p:nvSpPr>
+          <p:cNvPr id="2" name="Text 0"/>
+          <p:cNvSpPr/>
+          <p:nvPr>
+            <p:ph idx="100" type="title" hasCustomPrompt="1"/>
+          </p:nvPr>
+        </p:nvSpPr>
+        <p:spPr>
+          <a:xfrm>
             <a:off x="457200" y="292608"/>
             <a:ext cx="8229600" cy="777240"/>
           </a:xfrm>
@@ -3284,7 +3475,7 @@
             <a:pPr algn="r"/>
             <a:fld id="{F7021451-1387-4CA6-816F-3879F97B5CBC}" type="slidenum">
               <a:rPr b="0" lang="en-US"/>
-              <a:t>10</a:t>
+              <a:t>11</a:t>
             </a:fld>
             <a:endParaRPr lang="en-US"/>
           </a:p>
@@ -6240,7 +6431,7 @@
                   <a:schemeClr val="tx1"/>
                 </a:solidFill>
               </a:rPr>
-              <a:t>Decisions follow a fixed precedence</a:t>
+              <a:t>One claim, followed in plain English</a:t>
             </a:r>
             <a:endParaRPr lang="en-US" sz="2800" dirty="0"/>
           </a:p>
@@ -6248,14 +6439,14 @@
       </p:sp>
       <p:sp>
         <p:nvSpPr>
-          <p:cNvPr id="3" name="Outcome REJECT"/>
+          <p:cNvPr id="3" name="Walk row 1"/>
           <p:cNvSpPr/>
           <p:nvPr/>
         </p:nvSpPr>
         <p:spPr>
           <a:xfrm>
-            <a:off x="457200" y="1234440"/>
-            <a:ext cx="1234440" cy="530352"/>
+            <a:off x="457200" y="1188720"/>
+            <a:ext cx="6035040" cy="530352"/>
           </a:xfrm>
           <a:prstGeom prst="roundRect">
             <a:avLst>
@@ -6263,21 +6454,41 @@
             </a:avLst>
           </a:prstGeom>
           <a:solidFill>
-            <a:schemeClr val="accent5"/>
+            <a:schemeClr val="bg2"/>
           </a:solidFill>
           <a:ln/>
         </p:spPr>
       </p:sp>
       <p:sp>
         <p:nvSpPr>
-          <p:cNvPr id="4" name="Outcome REJECT label"/>
-          <p:cNvSpPr txBox="1"/>
-          <p:nvPr/>
-        </p:nvSpPr>
-        <p:spPr>
-          <a:xfrm>
-            <a:off x="457200" y="1234440"/>
-            <a:ext cx="1234440" cy="530352"/>
+          <p:cNvPr id="4" name="Badge 1"/>
+          <p:cNvSpPr/>
+          <p:nvPr/>
+        </p:nvSpPr>
+        <p:spPr>
+          <a:xfrm>
+            <a:off x="566928" y="1261872"/>
+            <a:ext cx="384048" cy="384048"/>
+          </a:xfrm>
+          <a:prstGeom prst="ellipse">
+            <a:avLst/>
+          </a:prstGeom>
+          <a:solidFill>
+            <a:schemeClr val="accent1"/>
+          </a:solidFill>
+          <a:ln/>
+        </p:spPr>
+      </p:sp>
+      <p:sp>
+        <p:nvSpPr>
+          <p:cNvPr id="5" name="Badge 1 label"/>
+          <p:cNvSpPr txBox="1"/>
+          <p:nvPr/>
+        </p:nvSpPr>
+        <p:spPr>
+          <a:xfrm>
+            <a:off x="566928" y="1261872"/>
+            <a:ext cx="384048" cy="384048"/>
           </a:xfrm>
           <a:prstGeom prst="rect">
             <a:avLst/>
@@ -6293,12 +6504,90 @@
               <a:buNone/>
             </a:pPr>
             <a:r>
-              <a:rPr lang="en-US" sz="1300" b="1" dirty="0">
+              <a:rPr lang="en-US" sz="1500" b="1" dirty="0">
                 <a:solidFill>
                   <a:schemeClr val="bg1"/>
                 </a:solidFill>
-              </a:rPr>
-              <a:t>1  REJECT</a:t>
+                <a:latin typeface="Cambria" pitchFamily="34" charset="0"/>
+                <a:ea typeface="Cambria" pitchFamily="34" charset="-122"/>
+                <a:cs typeface="Cambria" pitchFamily="34" charset="-120"/>
+              </a:rPr>
+              <a:t>1</a:t>
+            </a:r>
+            <a:endParaRPr lang="en-US" sz="1500" dirty="0"/>
+          </a:p>
+        </p:txBody>
+      </p:sp>
+      <p:sp>
+        <p:nvSpPr>
+          <p:cNvPr id="6" name="Walk agent 1"/>
+          <p:cNvSpPr txBox="1"/>
+          <p:nvPr/>
+        </p:nvSpPr>
+        <p:spPr>
+          <a:xfrm>
+            <a:off x="1097280" y="1188720"/>
+            <a:ext cx="1143000" cy="530352"/>
+          </a:xfrm>
+          <a:prstGeom prst="rect">
+            <a:avLst/>
+          </a:prstGeom>
+          <a:noFill/>
+          <a:ln/>
+        </p:spPr>
+        <p:txBody>
+          <a:bodyPr wrap="square" lIns="0" tIns="0" rIns="0" bIns="0" rtlCol="0" anchor="ctr"/>
+          <a:lstStyle/>
+          <a:p>
+            <a:pPr indent="0" marL="0">
+              <a:buNone/>
+            </a:pPr>
+            <a:r>
+              <a:rPr lang="en-US" sz="1500" b="1" dirty="0">
+                <a:solidFill>
+                  <a:schemeClr val="tx1"/>
+                </a:solidFill>
+                <a:latin typeface="Cambria" pitchFamily="34" charset="0"/>
+                <a:ea typeface="Cambria" pitchFamily="34" charset="-122"/>
+                <a:cs typeface="Cambria" pitchFamily="34" charset="-120"/>
+              </a:rPr>
+              <a:t>Planner</a:t>
+            </a:r>
+            <a:endParaRPr lang="en-US" sz="1500" dirty="0"/>
+          </a:p>
+        </p:txBody>
+      </p:sp>
+      <p:sp>
+        <p:nvSpPr>
+          <p:cNvPr id="7" name="Walk text 1"/>
+          <p:cNvSpPr txBox="1"/>
+          <p:nvPr/>
+        </p:nvSpPr>
+        <p:spPr>
+          <a:xfrm>
+            <a:off x="2286000" y="1188720"/>
+            <a:ext cx="4114800" cy="530352"/>
+          </a:xfrm>
+          <a:prstGeom prst="rect">
+            <a:avLst/>
+          </a:prstGeom>
+          <a:noFill/>
+          <a:ln/>
+        </p:spPr>
+        <p:txBody>
+          <a:bodyPr wrap="square" lIns="0" tIns="0" rIns="0" bIns="0" rtlCol="0" anchor="ctr"/>
+          <a:lstStyle/>
+          <a:p>
+            <a:pPr indent="0" marL="0">
+              <a:buNone/>
+            </a:pPr>
+            <a:r>
+              <a:rPr lang="en-US" sz="1300" dirty="0">
+                <a:solidFill>
+                  <a:schemeClr val="tx1"/>
+                </a:solidFill>
+              </a:rPr>
+              <a:t>Small claim at a normal hospital, so it picks a quick check.</a:t>
             </a:r>
             <a:endParaRPr lang="en-US" sz="1300" dirty="0"/>
           </a:p>
@@ -6306,50 +6595,14 @@
       </p:sp>
       <p:sp>
         <p:nvSpPr>
-          <p:cNvPr id="5" name="Outcome REJECT text"/>
-          <p:cNvSpPr txBox="1"/>
-          <p:nvPr/>
-        </p:nvSpPr>
-        <p:spPr>
-          <a:xfrm>
-            <a:off x="1828800" y="1234440"/>
-            <a:ext cx="3246120" cy="530352"/>
-          </a:xfrm>
-          <a:prstGeom prst="rect">
-            <a:avLst/>
-          </a:prstGeom>
-          <a:noFill/>
-          <a:ln/>
-        </p:spPr>
-        <p:txBody>
-          <a:bodyPr wrap="square" lIns="0" tIns="0" rIns="0" bIns="0" rtlCol="0" anchor="ctr"/>
-          <a:lstStyle/>
-          <a:p>
-            <a:pPr indent="0" marL="0">
-              <a:buNone/>
-            </a:pPr>
-            <a:r>
-              <a:rPr lang="en-US" sz="1300" dirty="0">
-                <a:solidFill>
-                  <a:schemeClr val="tx1"/>
-                </a:solidFill>
-              </a:rPr>
-              <a:t>hard rule broken: waiting period, exclusion, lapsed policy, duplicate</a:t>
-            </a:r>
-            <a:endParaRPr lang="en-US" sz="1300" dirty="0"/>
-          </a:p>
-        </p:txBody>
-      </p:sp>
-      <p:sp>
-        <p:nvSpPr>
-          <p:cNvPr id="6" name="Outcome QUERY"/>
+          <p:cNvPr id="8" name="Walk row 2"/>
           <p:cNvSpPr/>
           <p:nvPr/>
         </p:nvSpPr>
         <p:spPr>
           <a:xfrm>
-            <a:off x="457200" y="1874520"/>
-            <a:ext cx="1234440" cy="530352"/>
+            <a:off x="457200" y="1828800"/>
+            <a:ext cx="6035040" cy="530352"/>
           </a:xfrm>
           <a:prstGeom prst="roundRect">
             <a:avLst>
@@ -6357,21 +6610,41 @@
             </a:avLst>
           </a:prstGeom>
           <a:solidFill>
-            <a:schemeClr val="accent3"/>
+            <a:schemeClr val="bg2"/>
           </a:solidFill>
           <a:ln/>
         </p:spPr>
       </p:sp>
       <p:sp>
         <p:nvSpPr>
-          <p:cNvPr id="7" name="Outcome QUERY label"/>
-          <p:cNvSpPr txBox="1"/>
-          <p:nvPr/>
-        </p:nvSpPr>
-        <p:spPr>
-          <a:xfrm>
-            <a:off x="457200" y="1874520"/>
-            <a:ext cx="1234440" cy="530352"/>
+          <p:cNvPr id="9" name="Badge 2"/>
+          <p:cNvSpPr/>
+          <p:nvPr/>
+        </p:nvSpPr>
+        <p:spPr>
+          <a:xfrm>
+            <a:off x="566928" y="1901952"/>
+            <a:ext cx="384048" cy="384048"/>
+          </a:xfrm>
+          <a:prstGeom prst="ellipse">
+            <a:avLst/>
+          </a:prstGeom>
+          <a:solidFill>
+            <a:schemeClr val="accent1"/>
+          </a:solidFill>
+          <a:ln/>
+        </p:spPr>
+      </p:sp>
+      <p:sp>
+        <p:nvSpPr>
+          <p:cNvPr id="10" name="Badge 2 label"/>
+          <p:cNvSpPr txBox="1"/>
+          <p:nvPr/>
+        </p:nvSpPr>
+        <p:spPr>
+          <a:xfrm>
+            <a:off x="566928" y="1901952"/>
+            <a:ext cx="384048" cy="384048"/>
           </a:xfrm>
           <a:prstGeom prst="rect">
             <a:avLst/>
@@ -6387,12 +6660,90 @@
               <a:buNone/>
             </a:pPr>
             <a:r>
-              <a:rPr lang="en-US" sz="1300" b="1" dirty="0">
+              <a:rPr lang="en-US" sz="1500" b="1" dirty="0">
                 <a:solidFill>
                   <a:schemeClr val="bg1"/>
                 </a:solidFill>
-              </a:rPr>
-              <a:t>2  QUERY</a:t>
+                <a:latin typeface="Cambria" pitchFamily="34" charset="0"/>
+                <a:ea typeface="Cambria" pitchFamily="34" charset="-122"/>
+                <a:cs typeface="Cambria" pitchFamily="34" charset="-120"/>
+              </a:rPr>
+              <a:t>2</a:t>
+            </a:r>
+            <a:endParaRPr lang="en-US" sz="1500" dirty="0"/>
+          </a:p>
+        </p:txBody>
+      </p:sp>
+      <p:sp>
+        <p:nvSpPr>
+          <p:cNvPr id="11" name="Walk agent 2"/>
+          <p:cNvSpPr txBox="1"/>
+          <p:nvPr/>
+        </p:nvSpPr>
+        <p:spPr>
+          <a:xfrm>
+            <a:off x="1097280" y="1828800"/>
+            <a:ext cx="1143000" cy="530352"/>
+          </a:xfrm>
+          <a:prstGeom prst="rect">
+            <a:avLst/>
+          </a:prstGeom>
+          <a:noFill/>
+          <a:ln/>
+        </p:spPr>
+        <p:txBody>
+          <a:bodyPr wrap="square" lIns="0" tIns="0" rIns="0" bIns="0" rtlCol="0" anchor="ctr"/>
+          <a:lstStyle/>
+          <a:p>
+            <a:pPr indent="0" marL="0">
+              <a:buNone/>
+            </a:pPr>
+            <a:r>
+              <a:rPr lang="en-US" sz="1500" b="1" dirty="0">
+                <a:solidFill>
+                  <a:schemeClr val="tx1"/>
+                </a:solidFill>
+                <a:latin typeface="Cambria" pitchFamily="34" charset="0"/>
+                <a:ea typeface="Cambria" pitchFamily="34" charset="-122"/>
+                <a:cs typeface="Cambria" pitchFamily="34" charset="-120"/>
+              </a:rPr>
+              <a:t>Extractor</a:t>
+            </a:r>
+            <a:endParaRPr lang="en-US" sz="1500" dirty="0"/>
+          </a:p>
+        </p:txBody>
+      </p:sp>
+      <p:sp>
+        <p:nvSpPr>
+          <p:cNvPr id="12" name="Walk text 2"/>
+          <p:cNvSpPr txBox="1"/>
+          <p:nvPr/>
+        </p:nvSpPr>
+        <p:spPr>
+          <a:xfrm>
+            <a:off x="2286000" y="1828800"/>
+            <a:ext cx="4114800" cy="530352"/>
+          </a:xfrm>
+          <a:prstGeom prst="rect">
+            <a:avLst/>
+          </a:prstGeom>
+          <a:noFill/>
+          <a:ln/>
+        </p:spPr>
+        <p:txBody>
+          <a:bodyPr wrap="square" lIns="0" tIns="0" rIns="0" bIns="0" rtlCol="0" anchor="ctr"/>
+          <a:lstStyle/>
+          <a:p>
+            <a:pPr indent="0" marL="0">
+              <a:buNone/>
+            </a:pPr>
+            <a:r>
+              <a:rPr lang="en-US" sz="1300" dirty="0">
+                <a:solidFill>
+                  <a:schemeClr val="tx1"/>
+                </a:solidFill>
+              </a:rPr>
+              <a:t>Reads the discharge summary: cataract surgery.</a:t>
             </a:r>
             <a:endParaRPr lang="en-US" sz="1300" dirty="0"/>
           </a:p>
@@ -6400,50 +6751,14 @@
       </p:sp>
       <p:sp>
         <p:nvSpPr>
-          <p:cNvPr id="8" name="Outcome QUERY text"/>
-          <p:cNvSpPr txBox="1"/>
-          <p:nvPr/>
-        </p:nvSpPr>
-        <p:spPr>
-          <a:xfrm>
-            <a:off x="1828800" y="1874520"/>
-            <a:ext cx="3246120" cy="530352"/>
-          </a:xfrm>
-          <a:prstGeom prst="rect">
-            <a:avLst/>
-          </a:prstGeom>
-          <a:noFill/>
-          <a:ln/>
-        </p:spPr>
-        <p:txBody>
-          <a:bodyPr wrap="square" lIns="0" tIns="0" rIns="0" bIns="0" rtlCol="0" anchor="ctr"/>
-          <a:lstStyle/>
-          <a:p>
-            <a:pPr indent="0" marL="0">
-              <a:buNone/>
-            </a:pPr>
-            <a:r>
-              <a:rPr lang="en-US" sz="1300" dirty="0">
-                <a:solidFill>
-                  <a:schemeClr val="tx1"/>
-                </a:solidFill>
-              </a:rPr>
-              <a:t>mandatory document missing or unreadable</a:t>
-            </a:r>
-            <a:endParaRPr lang="en-US" sz="1300" dirty="0"/>
-          </a:p>
-        </p:txBody>
-      </p:sp>
-      <p:sp>
-        <p:nvSpPr>
-          <p:cNvPr id="9" name="Outcome ESCALATE"/>
+          <p:cNvPr id="13" name="Walk row 3"/>
           <p:cNvSpPr/>
           <p:nvPr/>
         </p:nvSpPr>
         <p:spPr>
           <a:xfrm>
-            <a:off x="457200" y="2514600"/>
-            <a:ext cx="1234440" cy="530352"/>
+            <a:off x="457200" y="2468880"/>
+            <a:ext cx="6035040" cy="530352"/>
           </a:xfrm>
           <a:prstGeom prst="roundRect">
             <a:avLst>
@@ -6451,21 +6766,41 @@
             </a:avLst>
           </a:prstGeom>
           <a:solidFill>
-            <a:schemeClr val="accent2"/>
+            <a:schemeClr val="bg2"/>
           </a:solidFill>
           <a:ln/>
         </p:spPr>
       </p:sp>
       <p:sp>
         <p:nvSpPr>
-          <p:cNvPr id="10" name="Outcome ESCALATE label"/>
-          <p:cNvSpPr txBox="1"/>
-          <p:nvPr/>
-        </p:nvSpPr>
-        <p:spPr>
-          <a:xfrm>
-            <a:off x="457200" y="2514600"/>
-            <a:ext cx="1234440" cy="530352"/>
+          <p:cNvPr id="14" name="Badge 3"/>
+          <p:cNvSpPr/>
+          <p:nvPr/>
+        </p:nvSpPr>
+        <p:spPr>
+          <a:xfrm>
+            <a:off x="566928" y="2542032"/>
+            <a:ext cx="384048" cy="384048"/>
+          </a:xfrm>
+          <a:prstGeom prst="ellipse">
+            <a:avLst/>
+          </a:prstGeom>
+          <a:solidFill>
+            <a:schemeClr val="accent1"/>
+          </a:solidFill>
+          <a:ln/>
+        </p:spPr>
+      </p:sp>
+      <p:sp>
+        <p:nvSpPr>
+          <p:cNvPr id="15" name="Badge 3 label"/>
+          <p:cNvSpPr txBox="1"/>
+          <p:nvPr/>
+        </p:nvSpPr>
+        <p:spPr>
+          <a:xfrm>
+            <a:off x="566928" y="2542032"/>
+            <a:ext cx="384048" cy="384048"/>
           </a:xfrm>
           <a:prstGeom prst="rect">
             <a:avLst/>
@@ -6481,12 +6816,90 @@
               <a:buNone/>
             </a:pPr>
             <a:r>
-              <a:rPr lang="en-US" sz="1300" b="1" dirty="0">
+              <a:rPr lang="en-US" sz="1500" b="1" dirty="0">
                 <a:solidFill>
                   <a:schemeClr val="bg1"/>
                 </a:solidFill>
-              </a:rPr>
-              <a:t>3  ESCALATE</a:t>
+                <a:latin typeface="Cambria" pitchFamily="34" charset="0"/>
+                <a:ea typeface="Cambria" pitchFamily="34" charset="-122"/>
+                <a:cs typeface="Cambria" pitchFamily="34" charset="-120"/>
+              </a:rPr>
+              <a:t>3</a:t>
+            </a:r>
+            <a:endParaRPr lang="en-US" sz="1500" dirty="0"/>
+          </a:p>
+        </p:txBody>
+      </p:sp>
+      <p:sp>
+        <p:nvSpPr>
+          <p:cNvPr id="16" name="Walk agent 3"/>
+          <p:cNvSpPr txBox="1"/>
+          <p:nvPr/>
+        </p:nvSpPr>
+        <p:spPr>
+          <a:xfrm>
+            <a:off x="1097280" y="2468880"/>
+            <a:ext cx="1143000" cy="530352"/>
+          </a:xfrm>
+          <a:prstGeom prst="rect">
+            <a:avLst/>
+          </a:prstGeom>
+          <a:noFill/>
+          <a:ln/>
+        </p:spPr>
+        <p:txBody>
+          <a:bodyPr wrap="square" lIns="0" tIns="0" rIns="0" bIns="0" rtlCol="0" anchor="ctr"/>
+          <a:lstStyle/>
+          <a:p>
+            <a:pPr indent="0" marL="0">
+              <a:buNone/>
+            </a:pPr>
+            <a:r>
+              <a:rPr lang="en-US" sz="1500" b="1" dirty="0">
+                <a:solidFill>
+                  <a:schemeClr val="tx1"/>
+                </a:solidFill>
+                <a:latin typeface="Cambria" pitchFamily="34" charset="0"/>
+                <a:ea typeface="Cambria" pitchFamily="34" charset="-122"/>
+                <a:cs typeface="Cambria" pitchFamily="34" charset="-120"/>
+              </a:rPr>
+              <a:t>Executor</a:t>
+            </a:r>
+            <a:endParaRPr lang="en-US" sz="1500" dirty="0"/>
+          </a:p>
+        </p:txBody>
+      </p:sp>
+      <p:sp>
+        <p:nvSpPr>
+          <p:cNvPr id="17" name="Walk text 3"/>
+          <p:cNvSpPr txBox="1"/>
+          <p:nvPr/>
+        </p:nvSpPr>
+        <p:spPr>
+          <a:xfrm>
+            <a:off x="2286000" y="2468880"/>
+            <a:ext cx="4114800" cy="530352"/>
+          </a:xfrm>
+          <a:prstGeom prst="rect">
+            <a:avLst/>
+          </a:prstGeom>
+          <a:noFill/>
+          <a:ln/>
+        </p:spPr>
+        <p:txBody>
+          <a:bodyPr wrap="square" lIns="0" tIns="0" rIns="0" bIns="0" rtlCol="0" anchor="ctr"/>
+          <a:lstStyle/>
+          <a:p>
+            <a:pPr indent="0" marL="0">
+              <a:buNone/>
+            </a:pPr>
+            <a:r>
+              <a:rPr lang="en-US" sz="1300" dirty="0">
+                <a:solidFill>
+                  <a:schemeClr val="tx1"/>
+                </a:solidFill>
+              </a:rPr>
+              <a:t>Runs the checks. The price is 2.4 times the normal cost.</a:t>
             </a:r>
             <a:endParaRPr lang="en-US" sz="1300" dirty="0"/>
           </a:p>
@@ -6494,50 +6907,14 @@
       </p:sp>
       <p:sp>
         <p:nvSpPr>
-          <p:cNvPr id="11" name="Outcome ESCALATE text"/>
-          <p:cNvSpPr txBox="1"/>
-          <p:nvPr/>
-        </p:nvSpPr>
-        <p:spPr>
-          <a:xfrm>
-            <a:off x="1828800" y="2514600"/>
-            <a:ext cx="3246120" cy="530352"/>
-          </a:xfrm>
-          <a:prstGeom prst="rect">
-            <a:avLst/>
-          </a:prstGeom>
-          <a:noFill/>
-          <a:ln/>
-        </p:spPr>
-        <p:txBody>
-          <a:bodyPr wrap="square" lIns="0" tIns="0" rIns="0" bIns="0" rtlCol="0" anchor="ctr"/>
-          <a:lstStyle/>
-          <a:p>
-            <a:pPr indent="0" marL="0">
-              <a:buNone/>
-            </a:pPr>
-            <a:r>
-              <a:rPr lang="en-US" sz="1300" dirty="0">
-                <a:solidFill>
-                  <a:schemeClr val="tx1"/>
-                </a:solidFill>
-              </a:rPr>
-              <a:t>fraud score 60+, tampered bill, mismatch, high value, late filing</a:t>
-            </a:r>
-            <a:endParaRPr lang="en-US" sz="1300" dirty="0"/>
-          </a:p>
-        </p:txBody>
-      </p:sp>
-      <p:sp>
-        <p:nvSpPr>
-          <p:cNvPr id="12" name="Outcome PARTIAL"/>
+          <p:cNvPr id="18" name="Walk row 4"/>
           <p:cNvSpPr/>
           <p:nvPr/>
         </p:nvSpPr>
         <p:spPr>
           <a:xfrm>
-            <a:off x="457200" y="3154680"/>
-            <a:ext cx="1234440" cy="530352"/>
+            <a:off x="457200" y="3108960"/>
+            <a:ext cx="6035040" cy="530352"/>
           </a:xfrm>
           <a:prstGeom prst="roundRect">
             <a:avLst>
@@ -6545,21 +6922,41 @@
             </a:avLst>
           </a:prstGeom>
           <a:solidFill>
-            <a:schemeClr val="accent6"/>
+            <a:schemeClr val="bg2"/>
           </a:solidFill>
           <a:ln/>
         </p:spPr>
       </p:sp>
       <p:sp>
         <p:nvSpPr>
-          <p:cNvPr id="13" name="Outcome PARTIAL label"/>
-          <p:cNvSpPr txBox="1"/>
-          <p:nvPr/>
-        </p:nvSpPr>
-        <p:spPr>
-          <a:xfrm>
-            <a:off x="457200" y="3154680"/>
-            <a:ext cx="1234440" cy="530352"/>
+          <p:cNvPr id="19" name="Badge 4"/>
+          <p:cNvSpPr/>
+          <p:nvPr/>
+        </p:nvSpPr>
+        <p:spPr>
+          <a:xfrm>
+            <a:off x="566928" y="3182112"/>
+            <a:ext cx="384048" cy="384048"/>
+          </a:xfrm>
+          <a:prstGeom prst="ellipse">
+            <a:avLst/>
+          </a:prstGeom>
+          <a:solidFill>
+            <a:schemeClr val="accent2"/>
+          </a:solidFill>
+          <a:ln/>
+        </p:spPr>
+      </p:sp>
+      <p:sp>
+        <p:nvSpPr>
+          <p:cNvPr id="20" name="Badge 4 label"/>
+          <p:cNvSpPr txBox="1"/>
+          <p:nvPr/>
+        </p:nvSpPr>
+        <p:spPr>
+          <a:xfrm>
+            <a:off x="566928" y="3182112"/>
+            <a:ext cx="384048" cy="384048"/>
           </a:xfrm>
           <a:prstGeom prst="rect">
             <a:avLst/>
@@ -6575,12 +6972,90 @@
               <a:buNone/>
             </a:pPr>
             <a:r>
-              <a:rPr lang="en-US" sz="1300" b="1" dirty="0">
+              <a:rPr lang="en-US" sz="1500" b="1" dirty="0">
                 <a:solidFill>
                   <a:schemeClr val="bg1"/>
                 </a:solidFill>
-              </a:rPr>
-              <a:t>4  PARTIAL</a:t>
+                <a:latin typeface="Cambria" pitchFamily="34" charset="0"/>
+                <a:ea typeface="Cambria" pitchFamily="34" charset="-122"/>
+                <a:cs typeface="Cambria" pitchFamily="34" charset="-120"/>
+              </a:rPr>
+              <a:t>4</a:t>
+            </a:r>
+            <a:endParaRPr lang="en-US" sz="1500" dirty="0"/>
+          </a:p>
+        </p:txBody>
+      </p:sp>
+      <p:sp>
+        <p:nvSpPr>
+          <p:cNvPr id="21" name="Walk agent 4"/>
+          <p:cNvSpPr txBox="1"/>
+          <p:nvPr/>
+        </p:nvSpPr>
+        <p:spPr>
+          <a:xfrm>
+            <a:off x="1097280" y="3108960"/>
+            <a:ext cx="1143000" cy="530352"/>
+          </a:xfrm>
+          <a:prstGeom prst="rect">
+            <a:avLst/>
+          </a:prstGeom>
+          <a:noFill/>
+          <a:ln/>
+        </p:spPr>
+        <p:txBody>
+          <a:bodyPr wrap="square" lIns="0" tIns="0" rIns="0" bIns="0" rtlCol="0" anchor="ctr"/>
+          <a:lstStyle/>
+          <a:p>
+            <a:pPr indent="0" marL="0">
+              <a:buNone/>
+            </a:pPr>
+            <a:r>
+              <a:rPr lang="en-US" sz="1500" b="1" dirty="0">
+                <a:solidFill>
+                  <a:schemeClr val="accent2"/>
+                </a:solidFill>
+                <a:latin typeface="Cambria" pitchFamily="34" charset="0"/>
+                <a:ea typeface="Cambria" pitchFamily="34" charset="-122"/>
+                <a:cs typeface="Cambria" pitchFamily="34" charset="-120"/>
+              </a:rPr>
+              <a:t>Critic</a:t>
+            </a:r>
+            <a:endParaRPr lang="en-US" sz="1500" dirty="0"/>
+          </a:p>
+        </p:txBody>
+      </p:sp>
+      <p:sp>
+        <p:nvSpPr>
+          <p:cNvPr id="22" name="Walk text 4"/>
+          <p:cNvSpPr txBox="1"/>
+          <p:nvPr/>
+        </p:nvSpPr>
+        <p:spPr>
+          <a:xfrm>
+            <a:off x="2286000" y="3108960"/>
+            <a:ext cx="4114800" cy="530352"/>
+          </a:xfrm>
+          <a:prstGeom prst="rect">
+            <a:avLst/>
+          </a:prstGeom>
+          <a:noFill/>
+          <a:ln/>
+        </p:spPr>
+        <p:txBody>
+          <a:bodyPr wrap="square" lIns="0" tIns="0" rIns="0" bIns="0" rtlCol="0" anchor="ctr"/>
+          <a:lstStyle/>
+          <a:p>
+            <a:pPr indent="0" marL="0">
+              <a:buNone/>
+            </a:pPr>
+            <a:r>
+              <a:rPr lang="en-US" sz="1300" dirty="0">
+                <a:solidFill>
+                  <a:schemeClr val="tx1"/>
+                </a:solidFill>
+              </a:rPr>
+              <a:t>A price that high needed a fraud check the quick plan skipped. Sends it back.</a:t>
             </a:r>
             <a:endParaRPr lang="en-US" sz="1300" dirty="0"/>
           </a:p>
@@ -6588,50 +7063,14 @@
       </p:sp>
       <p:sp>
         <p:nvSpPr>
-          <p:cNvPr id="14" name="Outcome PARTIAL text"/>
-          <p:cNvSpPr txBox="1"/>
-          <p:nvPr/>
-        </p:nvSpPr>
-        <p:spPr>
-          <a:xfrm>
-            <a:off x="1828800" y="3154680"/>
-            <a:ext cx="3246120" cy="530352"/>
-          </a:xfrm>
-          <a:prstGeom prst="rect">
-            <a:avLst/>
-          </a:prstGeom>
-          <a:noFill/>
-          <a:ln/>
-        </p:spPr>
-        <p:txBody>
-          <a:bodyPr wrap="square" lIns="0" tIns="0" rIns="0" bIns="0" rtlCol="0" anchor="ctr"/>
-          <a:lstStyle/>
-          <a:p>
-            <a:pPr indent="0" marL="0">
-              <a:buNone/>
-            </a:pPr>
-            <a:r>
-              <a:rPr lang="en-US" sz="1300" dirty="0">
-                <a:solidFill>
-                  <a:schemeClr val="tx1"/>
-                </a:solidFill>
-              </a:rPr>
-              <a:t>deductions apply: room rent, sub-limit, co-pay, non-medical</a:t>
-            </a:r>
-            <a:endParaRPr lang="en-US" sz="1300" dirty="0"/>
-          </a:p>
-        </p:txBody>
-      </p:sp>
-      <p:sp>
-        <p:nvSpPr>
-          <p:cNvPr id="15" name="Outcome APPROVE"/>
+          <p:cNvPr id="23" name="Walk row 5"/>
           <p:cNvSpPr/>
           <p:nvPr/>
         </p:nvSpPr>
         <p:spPr>
           <a:xfrm>
-            <a:off x="457200" y="3794760"/>
-            <a:ext cx="1234440" cy="530352"/>
+            <a:off x="457200" y="3749040"/>
+            <a:ext cx="6035040" cy="530352"/>
           </a:xfrm>
           <a:prstGeom prst="roundRect">
             <a:avLst>
@@ -6639,100 +7078,6 @@
             </a:avLst>
           </a:prstGeom>
           <a:solidFill>
-            <a:schemeClr val="accent4"/>
-          </a:solidFill>
-          <a:ln/>
-        </p:spPr>
-      </p:sp>
-      <p:sp>
-        <p:nvSpPr>
-          <p:cNvPr id="16" name="Outcome APPROVE label"/>
-          <p:cNvSpPr txBox="1"/>
-          <p:nvPr/>
-        </p:nvSpPr>
-        <p:spPr>
-          <a:xfrm>
-            <a:off x="457200" y="3794760"/>
-            <a:ext cx="1234440" cy="530352"/>
-          </a:xfrm>
-          <a:prstGeom prst="rect">
-            <a:avLst/>
-          </a:prstGeom>
-          <a:noFill/>
-          <a:ln/>
-        </p:spPr>
-        <p:txBody>
-          <a:bodyPr wrap="square" lIns="0" tIns="0" rIns="0" bIns="0" rtlCol="0" anchor="ctr"/>
-          <a:lstStyle/>
-          <a:p>
-            <a:pPr algn="ctr" indent="0" marL="0">
-              <a:buNone/>
-            </a:pPr>
-            <a:r>
-              <a:rPr lang="en-US" sz="1300" b="1" dirty="0">
-                <a:solidFill>
-                  <a:schemeClr val="bg1"/>
-                </a:solidFill>
-              </a:rPr>
-              <a:t>5  APPROVE</a:t>
-            </a:r>
-            <a:endParaRPr lang="en-US" sz="1300" dirty="0"/>
-          </a:p>
-        </p:txBody>
-      </p:sp>
-      <p:sp>
-        <p:nvSpPr>
-          <p:cNvPr id="17" name="Outcome APPROVE text"/>
-          <p:cNvSpPr txBox="1"/>
-          <p:nvPr/>
-        </p:nvSpPr>
-        <p:spPr>
-          <a:xfrm>
-            <a:off x="1828800" y="3794760"/>
-            <a:ext cx="3246120" cy="530352"/>
-          </a:xfrm>
-          <a:prstGeom prst="rect">
-            <a:avLst/>
-          </a:prstGeom>
-          <a:noFill/>
-          <a:ln/>
-        </p:spPr>
-        <p:txBody>
-          <a:bodyPr wrap="square" lIns="0" tIns="0" rIns="0" bIns="0" rtlCol="0" anchor="ctr"/>
-          <a:lstStyle/>
-          <a:p>
-            <a:pPr indent="0" marL="0">
-              <a:buNone/>
-            </a:pPr>
-            <a:r>
-              <a:rPr lang="en-US" sz="1300" dirty="0">
-                <a:solidFill>
-                  <a:schemeClr val="tx1"/>
-                </a:solidFill>
-              </a:rPr>
-              <a:t>every check passed, no deduction</a:t>
-            </a:r>
-            <a:endParaRPr lang="en-US" sz="1300" dirty="0"/>
-          </a:p>
-        </p:txBody>
-      </p:sp>
-      <p:sp>
-        <p:nvSpPr>
-          <p:cNvPr id="18" name="Critic card"/>
-          <p:cNvSpPr/>
-          <p:nvPr/>
-        </p:nvSpPr>
-        <p:spPr>
-          <a:xfrm>
-            <a:off x="5349240" y="1234440"/>
-            <a:ext cx="3337560" cy="3108960"/>
-          </a:xfrm>
-          <a:prstGeom prst="roundRect">
-            <a:avLst>
-              <a:gd name="adj" fmla="val 2353"/>
-            </a:avLst>
-          </a:prstGeom>
-          <a:solidFill>
             <a:schemeClr val="bg2"/>
           </a:solidFill>
           <a:ln/>
@@ -6740,34 +7085,34 @@
       </p:sp>
       <p:sp>
         <p:nvSpPr>
-          <p:cNvPr id="19" name="Badge C"/>
+          <p:cNvPr id="24" name="Badge 5"/>
           <p:cNvSpPr/>
           <p:nvPr/>
         </p:nvSpPr>
         <p:spPr>
           <a:xfrm>
-            <a:off x="5532120" y="1371600"/>
-            <a:ext cx="365760" cy="365760"/>
+            <a:off x="566928" y="3822192"/>
+            <a:ext cx="384048" cy="384048"/>
           </a:xfrm>
           <a:prstGeom prst="ellipse">
             <a:avLst/>
           </a:prstGeom>
           <a:solidFill>
-            <a:schemeClr val="accent2"/>
+            <a:schemeClr val="accent1"/>
           </a:solidFill>
           <a:ln/>
         </p:spPr>
       </p:sp>
       <p:sp>
         <p:nvSpPr>
-          <p:cNvPr id="20" name="Badge C label"/>
-          <p:cNvSpPr txBox="1"/>
-          <p:nvPr/>
-        </p:nvSpPr>
-        <p:spPr>
-          <a:xfrm>
-            <a:off x="5532120" y="1371600"/>
-            <a:ext cx="365760" cy="365760"/>
+          <p:cNvPr id="25" name="Badge 5 label"/>
+          <p:cNvSpPr txBox="1"/>
+          <p:nvPr/>
+        </p:nvSpPr>
+        <p:spPr>
+          <a:xfrm>
+            <a:off x="566928" y="3822192"/>
+            <a:ext cx="384048" cy="384048"/>
           </a:xfrm>
           <a:prstGeom prst="rect">
             <a:avLst/>
@@ -6791,7 +7136,7 @@
                 <a:ea typeface="Cambria" pitchFamily="34" charset="-122"/>
                 <a:cs typeface="Cambria" pitchFamily="34" charset="-120"/>
               </a:rPr>
-              <a:t>C</a:t>
+              <a:t>5</a:t>
             </a:r>
             <a:endParaRPr lang="en-US" sz="1500" dirty="0"/>
           </a:p>
@@ -6799,14 +7144,14 @@
       </p:sp>
       <p:sp>
         <p:nvSpPr>
-          <p:cNvPr id="21" name="Critic heading"/>
-          <p:cNvSpPr txBox="1"/>
-          <p:nvPr/>
-        </p:nvSpPr>
-        <p:spPr>
-          <a:xfrm>
-            <a:off x="5989320" y="1371600"/>
-            <a:ext cx="2651760" cy="365760"/>
+          <p:cNvPr id="26" name="Walk agent 5"/>
+          <p:cNvSpPr txBox="1"/>
+          <p:nvPr/>
+        </p:nvSpPr>
+        <p:spPr>
+          <a:xfrm>
+            <a:off x="1097280" y="3749040"/>
+            <a:ext cx="1143000" cy="530352"/>
           </a:xfrm>
           <a:prstGeom prst="rect">
             <a:avLst/>
@@ -6822,7 +7167,7 @@
               <a:buNone/>
             </a:pPr>
             <a:r>
-              <a:rPr lang="en-US" sz="1700" b="1" dirty="0">
+              <a:rPr lang="en-US" sz="1500" b="1" dirty="0">
                 <a:solidFill>
                   <a:schemeClr val="tx1"/>
                 </a:solidFill>
@@ -6830,22 +7175,80 @@
                 <a:ea typeface="Cambria" pitchFamily="34" charset="-122"/>
                 <a:cs typeface="Cambria" pitchFamily="34" charset="-120"/>
               </a:rPr>
-              <a:t>What the Critic re-checks</a:t>
-            </a:r>
-            <a:endParaRPr lang="en-US" sz="1700" dirty="0"/>
-          </a:p>
-        </p:txBody>
-      </p:sp>
-      <p:sp>
-        <p:nvSpPr>
-          <p:cNvPr id="22" name="Critic checks"/>
-          <p:cNvSpPr txBox="1"/>
-          <p:nvPr/>
-        </p:nvSpPr>
-        <p:spPr>
-          <a:xfrm>
-            <a:off x="5532120" y="1920240"/>
-            <a:ext cx="3017520" cy="1828800"/>
+              <a:t>Decision</a:t>
+            </a:r>
+            <a:endParaRPr lang="en-US" sz="1500" dirty="0"/>
+          </a:p>
+        </p:txBody>
+      </p:sp>
+      <p:sp>
+        <p:nvSpPr>
+          <p:cNvPr id="27" name="Walk text 5"/>
+          <p:cNvSpPr txBox="1"/>
+          <p:nvPr/>
+        </p:nvSpPr>
+        <p:spPr>
+          <a:xfrm>
+            <a:off x="2286000" y="3749040"/>
+            <a:ext cx="4114800" cy="530352"/>
+          </a:xfrm>
+          <a:prstGeom prst="rect">
+            <a:avLst/>
+          </a:prstGeom>
+          <a:noFill/>
+          <a:ln/>
+        </p:spPr>
+        <p:txBody>
+          <a:bodyPr wrap="square" lIns="0" tIns="0" rIns="0" bIns="0" rtlCol="0" anchor="ctr"/>
+          <a:lstStyle/>
+          <a:p>
+            <a:pPr indent="0" marL="0">
+              <a:buNone/>
+            </a:pPr>
+            <a:r>
+              <a:rPr lang="en-US" sz="1300" dirty="0">
+                <a:solidFill>
+                  <a:schemeClr val="tx1"/>
+                </a:solidFill>
+              </a:rPr>
+              <a:t>Fraud check scores 60 out of 100, so a human officer decides.</a:t>
+            </a:r>
+            <a:endParaRPr lang="en-US" sz="1300" dirty="0"/>
+          </a:p>
+        </p:txBody>
+      </p:sp>
+      <p:sp>
+        <p:nvSpPr>
+          <p:cNvPr id="28" name="Walk callout"/>
+          <p:cNvSpPr/>
+          <p:nvPr/>
+        </p:nvSpPr>
+        <p:spPr>
+          <a:xfrm>
+            <a:off x="6766560" y="1188720"/>
+            <a:ext cx="1920240" cy="3090672"/>
+          </a:xfrm>
+          <a:prstGeom prst="roundRect">
+            <a:avLst>
+              <a:gd name="adj" fmla="val 3810"/>
+            </a:avLst>
+          </a:prstGeom>
+          <a:solidFill>
+            <a:schemeClr val="tx1"/>
+          </a:solidFill>
+          <a:ln/>
+        </p:spPr>
+      </p:sp>
+      <p:sp>
+        <p:nvSpPr>
+          <p:cNvPr id="29" name="Walk callout title"/>
+          <p:cNvSpPr txBox="1"/>
+          <p:nvPr/>
+        </p:nvSpPr>
+        <p:spPr>
+          <a:xfrm>
+            <a:off x="6949440" y="1325880"/>
+            <a:ext cx="1600200" cy="365760"/>
           </a:xfrm>
           <a:prstGeom prst="rect">
             <a:avLst/>
@@ -6857,107 +7260,70 @@
           <a:bodyPr wrap="square" lIns="0" tIns="0" rIns="0" bIns="0" rtlCol="0" anchor="t"/>
           <a:lstStyle/>
           <a:p>
-            <a:pPr marL="342900" indent="-342900">
-              <a:spcAft>
-                <a:spcPts val="500"/>
-              </a:spcAft>
-              <a:buSzPct val="100000"/>
-              <a:buChar char="•"/>
+            <a:pPr indent="0" marL="0">
+              <a:buNone/>
+            </a:pPr>
+            <a:r>
+              <a:rPr lang="en-US" sz="1600" b="1" dirty="0">
+                <a:solidFill>
+                  <a:schemeClr val="bg1"/>
+                </a:solidFill>
+                <a:latin typeface="Cambria" pitchFamily="34" charset="0"/>
+                <a:ea typeface="Cambria" pitchFamily="34" charset="-122"/>
+                <a:cs typeface="Cambria" pitchFamily="34" charset="-120"/>
+              </a:rPr>
+              <a:t>Why it matters</a:t>
+            </a:r>
+            <a:endParaRPr lang="en-US" sz="1600" dirty="0"/>
+          </a:p>
+        </p:txBody>
+      </p:sp>
+      <p:sp>
+        <p:nvSpPr>
+          <p:cNvPr id="30" name="Walk callout text"/>
+          <p:cNvSpPr txBox="1"/>
+          <p:nvPr/>
+        </p:nvSpPr>
+        <p:spPr>
+          <a:xfrm>
+            <a:off x="6949440" y="1783080"/>
+            <a:ext cx="1600200" cy="2377440"/>
+          </a:xfrm>
+          <a:prstGeom prst="rect">
+            <a:avLst/>
+          </a:prstGeom>
+          <a:noFill/>
+          <a:ln/>
+        </p:spPr>
+        <p:txBody>
+          <a:bodyPr wrap="square" lIns="0" tIns="0" rIns="0" bIns="0" rtlCol="0" anchor="t"/>
+          <a:lstStyle/>
+          <a:p>
+            <a:pPr indent="0" marL="0">
+              <a:buNone/>
             </a:pPr>
             <a:r>
               <a:rPr lang="en-US" sz="1400" dirty="0">
                 <a:solidFill>
-                  <a:schemeClr val="tx1"/>
-                </a:solidFill>
-              </a:rPr>
-              <a:t>Payout reconciles with deductions</a:t>
+                  <a:schemeClr val="bg2"/>
+                </a:solidFill>
+              </a:rPr>
+              <a:t>A single pass would have paid this claim. The Critic caught the gap, so a bad bill went to a person instead of out the door.</a:t>
             </a:r>
             <a:endParaRPr lang="en-US" sz="1400" dirty="0"/>
           </a:p>
-          <a:p>
-            <a:pPr marL="342900" indent="-342900">
-              <a:spcAft>
-                <a:spcPts val="500"/>
-              </a:spcAft>
-              <a:buSzPct val="100000"/>
-              <a:buChar char="•"/>
-            </a:pPr>
-            <a:r>
-              <a:rPr lang="en-US" sz="1400" dirty="0">
-                <a:solidFill>
-                  <a:schemeClr val="tx1"/>
-                </a:solidFill>
-              </a:rPr>
-              <a:t>Within claim and sum insured</a:t>
-            </a:r>
-            <a:endParaRPr lang="en-US" sz="1400" dirty="0"/>
-          </a:p>
-          <a:p>
-            <a:pPr marL="342900" indent="-342900">
-              <a:spcAft>
-                <a:spcPts val="500"/>
-              </a:spcAft>
-              <a:buSzPct val="100000"/>
-              <a:buChar char="•"/>
-            </a:pPr>
-            <a:r>
-              <a:rPr lang="en-US" sz="1400" dirty="0">
-                <a:solidFill>
-                  <a:schemeClr val="tx1"/>
-                </a:solidFill>
-              </a:rPr>
-              <a:t>Every finding cites a real clause</a:t>
-            </a:r>
-            <a:endParaRPr lang="en-US" sz="1400" dirty="0"/>
-          </a:p>
-          <a:p>
-            <a:pPr marL="342900" indent="-342900">
-              <a:spcAft>
-                <a:spcPts val="500"/>
-              </a:spcAft>
-              <a:buSzPct val="100000"/>
-              <a:buChar char="•"/>
-            </a:pPr>
-            <a:r>
-              <a:rPr lang="en-US" sz="1400" dirty="0">
-                <a:solidFill>
-                  <a:schemeClr val="tx1"/>
-                </a:solidFill>
-              </a:rPr>
-              <a:t>Extraction agrees with the form</a:t>
-            </a:r>
-            <a:endParaRPr lang="en-US" sz="1400" dirty="0"/>
-          </a:p>
-          <a:p>
-            <a:pPr marL="342900" indent="-342900">
-              <a:spcAft>
-                <a:spcPts val="500"/>
-              </a:spcAft>
-              <a:buSzPct val="100000"/>
-              <a:buChar char="•"/>
-            </a:pPr>
-            <a:r>
-              <a:rPr lang="en-US" sz="1400" dirty="0">
-                <a:solidFill>
-                  <a:schemeClr val="tx1"/>
-                </a:solidFill>
-              </a:rPr>
-              <a:t>Fraud screening matched the risk</a:t>
-            </a:r>
-            <a:endParaRPr lang="en-US" sz="1400" dirty="0"/>
-          </a:p>
-        </p:txBody>
-      </p:sp>
-      <p:sp>
-        <p:nvSpPr>
-          <p:cNvPr id="23" name="Critic outcome"/>
-          <p:cNvSpPr txBox="1"/>
-          <p:nvPr/>
-        </p:nvSpPr>
-        <p:spPr>
-          <a:xfrm>
-            <a:off x="5532120" y="3657600"/>
-            <a:ext cx="3017520" cy="594360"/>
+        </p:txBody>
+      </p:sp>
+      <p:sp>
+        <p:nvSpPr>
+          <p:cNvPr id="31" name="Walk claim id"/>
+          <p:cNvSpPr txBox="1"/>
+          <p:nvPr/>
+        </p:nvSpPr>
+        <p:spPr>
+          <a:xfrm>
+            <a:off x="457200" y="4434840"/>
+            <a:ext cx="6035040" cy="274320"/>
           </a:xfrm>
           <a:prstGeom prst="rect">
             <a:avLst/>
@@ -6978,7 +7344,7 @@
                   <a:schemeClr val="tx2"/>
                 </a:solidFill>
               </a:rPr>
-              <a:t>Any failure sends the claim back to the Planner. After two rounds it goes to a human.</a:t>
+              <a:t>Claim CLM-26-0019, in the demo</a:t>
             </a:r>
             <a:endParaRPr lang="en-US" sz="1200" dirty="0"/>
           </a:p>
@@ -7086,7 +7452,7 @@
                   <a:schemeClr val="tx1"/>
                 </a:solidFill>
               </a:rPr>
-              <a:t>Live demo: four claims, four behaviours</a:t>
+              <a:t>Decisions follow a fixed precedence</a:t>
             </a:r>
             <a:endParaRPr lang="en-US" sz="2800" dirty="0"/>
           </a:p>
@@ -7094,18 +7460,488 @@
       </p:sp>
       <p:sp>
         <p:nvSpPr>
-          <p:cNvPr id="3" name="Demo card 1"/>
+          <p:cNvPr id="3" name="Outcome REJECT"/>
           <p:cNvSpPr/>
           <p:nvPr/>
         </p:nvSpPr>
         <p:spPr>
           <a:xfrm>
             <a:off x="457200" y="1234440"/>
-            <a:ext cx="4023360" cy="1463040"/>
+            <a:ext cx="1234440" cy="530352"/>
           </a:xfrm>
           <a:prstGeom prst="roundRect">
             <a:avLst>
-              <a:gd name="adj" fmla="val 5000"/>
+              <a:gd name="adj" fmla="val 13793"/>
+            </a:avLst>
+          </a:prstGeom>
+          <a:solidFill>
+            <a:schemeClr val="accent5"/>
+          </a:solidFill>
+          <a:ln/>
+        </p:spPr>
+      </p:sp>
+      <p:sp>
+        <p:nvSpPr>
+          <p:cNvPr id="4" name="Outcome REJECT label"/>
+          <p:cNvSpPr txBox="1"/>
+          <p:nvPr/>
+        </p:nvSpPr>
+        <p:spPr>
+          <a:xfrm>
+            <a:off x="457200" y="1234440"/>
+            <a:ext cx="1234440" cy="530352"/>
+          </a:xfrm>
+          <a:prstGeom prst="rect">
+            <a:avLst/>
+          </a:prstGeom>
+          <a:noFill/>
+          <a:ln/>
+        </p:spPr>
+        <p:txBody>
+          <a:bodyPr wrap="square" lIns="0" tIns="0" rIns="0" bIns="0" rtlCol="0" anchor="ctr"/>
+          <a:lstStyle/>
+          <a:p>
+            <a:pPr algn="ctr" indent="0" marL="0">
+              <a:buNone/>
+            </a:pPr>
+            <a:r>
+              <a:rPr lang="en-US" sz="1300" b="1" dirty="0">
+                <a:solidFill>
+                  <a:schemeClr val="bg1"/>
+                </a:solidFill>
+              </a:rPr>
+              <a:t>1  REJECT</a:t>
+            </a:r>
+            <a:endParaRPr lang="en-US" sz="1300" dirty="0"/>
+          </a:p>
+        </p:txBody>
+      </p:sp>
+      <p:sp>
+        <p:nvSpPr>
+          <p:cNvPr id="5" name="Outcome REJECT text"/>
+          <p:cNvSpPr txBox="1"/>
+          <p:nvPr/>
+        </p:nvSpPr>
+        <p:spPr>
+          <a:xfrm>
+            <a:off x="1828800" y="1234440"/>
+            <a:ext cx="3246120" cy="530352"/>
+          </a:xfrm>
+          <a:prstGeom prst="rect">
+            <a:avLst/>
+          </a:prstGeom>
+          <a:noFill/>
+          <a:ln/>
+        </p:spPr>
+        <p:txBody>
+          <a:bodyPr wrap="square" lIns="0" tIns="0" rIns="0" bIns="0" rtlCol="0" anchor="ctr"/>
+          <a:lstStyle/>
+          <a:p>
+            <a:pPr indent="0" marL="0">
+              <a:buNone/>
+            </a:pPr>
+            <a:r>
+              <a:rPr lang="en-US" sz="1300" dirty="0">
+                <a:solidFill>
+                  <a:schemeClr val="tx1"/>
+                </a:solidFill>
+              </a:rPr>
+              <a:t>hard rule broken: waiting period, exclusion, lapsed policy, duplicate</a:t>
+            </a:r>
+            <a:endParaRPr lang="en-US" sz="1300" dirty="0"/>
+          </a:p>
+        </p:txBody>
+      </p:sp>
+      <p:sp>
+        <p:nvSpPr>
+          <p:cNvPr id="6" name="Outcome QUERY"/>
+          <p:cNvSpPr/>
+          <p:nvPr/>
+        </p:nvSpPr>
+        <p:spPr>
+          <a:xfrm>
+            <a:off x="457200" y="1874520"/>
+            <a:ext cx="1234440" cy="530352"/>
+          </a:xfrm>
+          <a:prstGeom prst="roundRect">
+            <a:avLst>
+              <a:gd name="adj" fmla="val 13793"/>
+            </a:avLst>
+          </a:prstGeom>
+          <a:solidFill>
+            <a:schemeClr val="accent3"/>
+          </a:solidFill>
+          <a:ln/>
+        </p:spPr>
+      </p:sp>
+      <p:sp>
+        <p:nvSpPr>
+          <p:cNvPr id="7" name="Outcome QUERY label"/>
+          <p:cNvSpPr txBox="1"/>
+          <p:nvPr/>
+        </p:nvSpPr>
+        <p:spPr>
+          <a:xfrm>
+            <a:off x="457200" y="1874520"/>
+            <a:ext cx="1234440" cy="530352"/>
+          </a:xfrm>
+          <a:prstGeom prst="rect">
+            <a:avLst/>
+          </a:prstGeom>
+          <a:noFill/>
+          <a:ln/>
+        </p:spPr>
+        <p:txBody>
+          <a:bodyPr wrap="square" lIns="0" tIns="0" rIns="0" bIns="0" rtlCol="0" anchor="ctr"/>
+          <a:lstStyle/>
+          <a:p>
+            <a:pPr algn="ctr" indent="0" marL="0">
+              <a:buNone/>
+            </a:pPr>
+            <a:r>
+              <a:rPr lang="en-US" sz="1300" b="1" dirty="0">
+                <a:solidFill>
+                  <a:schemeClr val="bg1"/>
+                </a:solidFill>
+              </a:rPr>
+              <a:t>2  QUERY</a:t>
+            </a:r>
+            <a:endParaRPr lang="en-US" sz="1300" dirty="0"/>
+          </a:p>
+        </p:txBody>
+      </p:sp>
+      <p:sp>
+        <p:nvSpPr>
+          <p:cNvPr id="8" name="Outcome QUERY text"/>
+          <p:cNvSpPr txBox="1"/>
+          <p:nvPr/>
+        </p:nvSpPr>
+        <p:spPr>
+          <a:xfrm>
+            <a:off x="1828800" y="1874520"/>
+            <a:ext cx="3246120" cy="530352"/>
+          </a:xfrm>
+          <a:prstGeom prst="rect">
+            <a:avLst/>
+          </a:prstGeom>
+          <a:noFill/>
+          <a:ln/>
+        </p:spPr>
+        <p:txBody>
+          <a:bodyPr wrap="square" lIns="0" tIns="0" rIns="0" bIns="0" rtlCol="0" anchor="ctr"/>
+          <a:lstStyle/>
+          <a:p>
+            <a:pPr indent="0" marL="0">
+              <a:buNone/>
+            </a:pPr>
+            <a:r>
+              <a:rPr lang="en-US" sz="1300" dirty="0">
+                <a:solidFill>
+                  <a:schemeClr val="tx1"/>
+                </a:solidFill>
+              </a:rPr>
+              <a:t>mandatory document missing or unreadable</a:t>
+            </a:r>
+            <a:endParaRPr lang="en-US" sz="1300" dirty="0"/>
+          </a:p>
+        </p:txBody>
+      </p:sp>
+      <p:sp>
+        <p:nvSpPr>
+          <p:cNvPr id="9" name="Outcome ESCALATE"/>
+          <p:cNvSpPr/>
+          <p:nvPr/>
+        </p:nvSpPr>
+        <p:spPr>
+          <a:xfrm>
+            <a:off x="457200" y="2514600"/>
+            <a:ext cx="1234440" cy="530352"/>
+          </a:xfrm>
+          <a:prstGeom prst="roundRect">
+            <a:avLst>
+              <a:gd name="adj" fmla="val 13793"/>
+            </a:avLst>
+          </a:prstGeom>
+          <a:solidFill>
+            <a:schemeClr val="accent2"/>
+          </a:solidFill>
+          <a:ln/>
+        </p:spPr>
+      </p:sp>
+      <p:sp>
+        <p:nvSpPr>
+          <p:cNvPr id="10" name="Outcome ESCALATE label"/>
+          <p:cNvSpPr txBox="1"/>
+          <p:nvPr/>
+        </p:nvSpPr>
+        <p:spPr>
+          <a:xfrm>
+            <a:off x="457200" y="2514600"/>
+            <a:ext cx="1234440" cy="530352"/>
+          </a:xfrm>
+          <a:prstGeom prst="rect">
+            <a:avLst/>
+          </a:prstGeom>
+          <a:noFill/>
+          <a:ln/>
+        </p:spPr>
+        <p:txBody>
+          <a:bodyPr wrap="square" lIns="0" tIns="0" rIns="0" bIns="0" rtlCol="0" anchor="ctr"/>
+          <a:lstStyle/>
+          <a:p>
+            <a:pPr algn="ctr" indent="0" marL="0">
+              <a:buNone/>
+            </a:pPr>
+            <a:r>
+              <a:rPr lang="en-US" sz="1300" b="1" dirty="0">
+                <a:solidFill>
+                  <a:schemeClr val="bg1"/>
+                </a:solidFill>
+              </a:rPr>
+              <a:t>3  ESCALATE</a:t>
+            </a:r>
+            <a:endParaRPr lang="en-US" sz="1300" dirty="0"/>
+          </a:p>
+        </p:txBody>
+      </p:sp>
+      <p:sp>
+        <p:nvSpPr>
+          <p:cNvPr id="11" name="Outcome ESCALATE text"/>
+          <p:cNvSpPr txBox="1"/>
+          <p:nvPr/>
+        </p:nvSpPr>
+        <p:spPr>
+          <a:xfrm>
+            <a:off x="1828800" y="2514600"/>
+            <a:ext cx="3246120" cy="530352"/>
+          </a:xfrm>
+          <a:prstGeom prst="rect">
+            <a:avLst/>
+          </a:prstGeom>
+          <a:noFill/>
+          <a:ln/>
+        </p:spPr>
+        <p:txBody>
+          <a:bodyPr wrap="square" lIns="0" tIns="0" rIns="0" bIns="0" rtlCol="0" anchor="ctr"/>
+          <a:lstStyle/>
+          <a:p>
+            <a:pPr indent="0" marL="0">
+              <a:buNone/>
+            </a:pPr>
+            <a:r>
+              <a:rPr lang="en-US" sz="1300" dirty="0">
+                <a:solidFill>
+                  <a:schemeClr val="tx1"/>
+                </a:solidFill>
+              </a:rPr>
+              <a:t>fraud score 60+, tampered bill, mismatch, high value, late filing</a:t>
+            </a:r>
+            <a:endParaRPr lang="en-US" sz="1300" dirty="0"/>
+          </a:p>
+        </p:txBody>
+      </p:sp>
+      <p:sp>
+        <p:nvSpPr>
+          <p:cNvPr id="12" name="Outcome PARTIAL"/>
+          <p:cNvSpPr/>
+          <p:nvPr/>
+        </p:nvSpPr>
+        <p:spPr>
+          <a:xfrm>
+            <a:off x="457200" y="3154680"/>
+            <a:ext cx="1234440" cy="530352"/>
+          </a:xfrm>
+          <a:prstGeom prst="roundRect">
+            <a:avLst>
+              <a:gd name="adj" fmla="val 13793"/>
+            </a:avLst>
+          </a:prstGeom>
+          <a:solidFill>
+            <a:schemeClr val="accent6"/>
+          </a:solidFill>
+          <a:ln/>
+        </p:spPr>
+      </p:sp>
+      <p:sp>
+        <p:nvSpPr>
+          <p:cNvPr id="13" name="Outcome PARTIAL label"/>
+          <p:cNvSpPr txBox="1"/>
+          <p:nvPr/>
+        </p:nvSpPr>
+        <p:spPr>
+          <a:xfrm>
+            <a:off x="457200" y="3154680"/>
+            <a:ext cx="1234440" cy="530352"/>
+          </a:xfrm>
+          <a:prstGeom prst="rect">
+            <a:avLst/>
+          </a:prstGeom>
+          <a:noFill/>
+          <a:ln/>
+        </p:spPr>
+        <p:txBody>
+          <a:bodyPr wrap="square" lIns="0" tIns="0" rIns="0" bIns="0" rtlCol="0" anchor="ctr"/>
+          <a:lstStyle/>
+          <a:p>
+            <a:pPr algn="ctr" indent="0" marL="0">
+              <a:buNone/>
+            </a:pPr>
+            <a:r>
+              <a:rPr lang="en-US" sz="1300" b="1" dirty="0">
+                <a:solidFill>
+                  <a:schemeClr val="bg1"/>
+                </a:solidFill>
+              </a:rPr>
+              <a:t>4  PARTIAL</a:t>
+            </a:r>
+            <a:endParaRPr lang="en-US" sz="1300" dirty="0"/>
+          </a:p>
+        </p:txBody>
+      </p:sp>
+      <p:sp>
+        <p:nvSpPr>
+          <p:cNvPr id="14" name="Outcome PARTIAL text"/>
+          <p:cNvSpPr txBox="1"/>
+          <p:nvPr/>
+        </p:nvSpPr>
+        <p:spPr>
+          <a:xfrm>
+            <a:off x="1828800" y="3154680"/>
+            <a:ext cx="3246120" cy="530352"/>
+          </a:xfrm>
+          <a:prstGeom prst="rect">
+            <a:avLst/>
+          </a:prstGeom>
+          <a:noFill/>
+          <a:ln/>
+        </p:spPr>
+        <p:txBody>
+          <a:bodyPr wrap="square" lIns="0" tIns="0" rIns="0" bIns="0" rtlCol="0" anchor="ctr"/>
+          <a:lstStyle/>
+          <a:p>
+            <a:pPr indent="0" marL="0">
+              <a:buNone/>
+            </a:pPr>
+            <a:r>
+              <a:rPr lang="en-US" sz="1300" dirty="0">
+                <a:solidFill>
+                  <a:schemeClr val="tx1"/>
+                </a:solidFill>
+              </a:rPr>
+              <a:t>deductions apply: room rent, sub-limit, co-pay, non-medical</a:t>
+            </a:r>
+            <a:endParaRPr lang="en-US" sz="1300" dirty="0"/>
+          </a:p>
+        </p:txBody>
+      </p:sp>
+      <p:sp>
+        <p:nvSpPr>
+          <p:cNvPr id="15" name="Outcome APPROVE"/>
+          <p:cNvSpPr/>
+          <p:nvPr/>
+        </p:nvSpPr>
+        <p:spPr>
+          <a:xfrm>
+            <a:off x="457200" y="3794760"/>
+            <a:ext cx="1234440" cy="530352"/>
+          </a:xfrm>
+          <a:prstGeom prst="roundRect">
+            <a:avLst>
+              <a:gd name="adj" fmla="val 13793"/>
+            </a:avLst>
+          </a:prstGeom>
+          <a:solidFill>
+            <a:schemeClr val="accent4"/>
+          </a:solidFill>
+          <a:ln/>
+        </p:spPr>
+      </p:sp>
+      <p:sp>
+        <p:nvSpPr>
+          <p:cNvPr id="16" name="Outcome APPROVE label"/>
+          <p:cNvSpPr txBox="1"/>
+          <p:nvPr/>
+        </p:nvSpPr>
+        <p:spPr>
+          <a:xfrm>
+            <a:off x="457200" y="3794760"/>
+            <a:ext cx="1234440" cy="530352"/>
+          </a:xfrm>
+          <a:prstGeom prst="rect">
+            <a:avLst/>
+          </a:prstGeom>
+          <a:noFill/>
+          <a:ln/>
+        </p:spPr>
+        <p:txBody>
+          <a:bodyPr wrap="square" lIns="0" tIns="0" rIns="0" bIns="0" rtlCol="0" anchor="ctr"/>
+          <a:lstStyle/>
+          <a:p>
+            <a:pPr algn="ctr" indent="0" marL="0">
+              <a:buNone/>
+            </a:pPr>
+            <a:r>
+              <a:rPr lang="en-US" sz="1300" b="1" dirty="0">
+                <a:solidFill>
+                  <a:schemeClr val="bg1"/>
+                </a:solidFill>
+              </a:rPr>
+              <a:t>5  APPROVE</a:t>
+            </a:r>
+            <a:endParaRPr lang="en-US" sz="1300" dirty="0"/>
+          </a:p>
+        </p:txBody>
+      </p:sp>
+      <p:sp>
+        <p:nvSpPr>
+          <p:cNvPr id="17" name="Outcome APPROVE text"/>
+          <p:cNvSpPr txBox="1"/>
+          <p:nvPr/>
+        </p:nvSpPr>
+        <p:spPr>
+          <a:xfrm>
+            <a:off x="1828800" y="3794760"/>
+            <a:ext cx="3246120" cy="530352"/>
+          </a:xfrm>
+          <a:prstGeom prst="rect">
+            <a:avLst/>
+          </a:prstGeom>
+          <a:noFill/>
+          <a:ln/>
+        </p:spPr>
+        <p:txBody>
+          <a:bodyPr wrap="square" lIns="0" tIns="0" rIns="0" bIns="0" rtlCol="0" anchor="ctr"/>
+          <a:lstStyle/>
+          <a:p>
+            <a:pPr indent="0" marL="0">
+              <a:buNone/>
+            </a:pPr>
+            <a:r>
+              <a:rPr lang="en-US" sz="1300" dirty="0">
+                <a:solidFill>
+                  <a:schemeClr val="tx1"/>
+                </a:solidFill>
+              </a:rPr>
+              <a:t>every check passed, no deduction</a:t>
+            </a:r>
+            <a:endParaRPr lang="en-US" sz="1300" dirty="0"/>
+          </a:p>
+        </p:txBody>
+      </p:sp>
+      <p:sp>
+        <p:nvSpPr>
+          <p:cNvPr id="18" name="Critic card"/>
+          <p:cNvSpPr/>
+          <p:nvPr/>
+        </p:nvSpPr>
+        <p:spPr>
+          <a:xfrm>
+            <a:off x="5349240" y="1234440"/>
+            <a:ext cx="3337560" cy="3108960"/>
+          </a:xfrm>
+          <a:prstGeom prst="roundRect">
+            <a:avLst>
+              <a:gd name="adj" fmla="val 2353"/>
             </a:avLst>
           </a:prstGeom>
           <a:solidFill>
@@ -7116,431 +7952,17 @@
       </p:sp>
       <p:sp>
         <p:nvSpPr>
-          <p:cNvPr id="4" name="Demo id 1"/>
-          <p:cNvSpPr txBox="1"/>
-          <p:nvPr/>
-        </p:nvSpPr>
-        <p:spPr>
-          <a:xfrm>
-            <a:off x="640080" y="1371600"/>
-            <a:ext cx="2377440" cy="274320"/>
-          </a:xfrm>
-          <a:prstGeom prst="rect">
-            <a:avLst/>
-          </a:prstGeom>
-          <a:noFill/>
-          <a:ln/>
-        </p:spPr>
-        <p:txBody>
-          <a:bodyPr wrap="square" lIns="0" tIns="0" rIns="0" bIns="0" rtlCol="0" anchor="t"/>
-          <a:lstStyle/>
-          <a:p>
-            <a:pPr indent="0" marL="0">
-              <a:buNone/>
-            </a:pPr>
-            <a:r>
-              <a:rPr lang="en-US" sz="1200" b="1" dirty="0">
-                <a:solidFill>
-                  <a:schemeClr val="tx2"/>
-                </a:solidFill>
-              </a:rPr>
-              <a:t>CLM-26-0001</a:t>
-            </a:r>
-            <a:endParaRPr lang="en-US" sz="1200" dirty="0"/>
-          </a:p>
-        </p:txBody>
-      </p:sp>
-      <p:sp>
-        <p:nvSpPr>
-          <p:cNvPr id="5" name="Demo outcome 1"/>
+          <p:cNvPr id="19" name="Badge C"/>
           <p:cNvSpPr/>
           <p:nvPr/>
         </p:nvSpPr>
         <p:spPr>
           <a:xfrm>
-            <a:off x="3246120" y="1353312"/>
-            <a:ext cx="1051560" cy="292608"/>
-          </a:xfrm>
-          <a:prstGeom prst="roundRect">
-            <a:avLst>
-              <a:gd name="adj" fmla="val 50000"/>
-            </a:avLst>
-          </a:prstGeom>
-          <a:solidFill>
-            <a:schemeClr val="accent6"/>
-          </a:solidFill>
-          <a:ln/>
-        </p:spPr>
-      </p:sp>
-      <p:sp>
-        <p:nvSpPr>
-          <p:cNvPr id="6" name="Demo outcome label 1"/>
-          <p:cNvSpPr txBox="1"/>
-          <p:nvPr/>
-        </p:nvSpPr>
-        <p:spPr>
-          <a:xfrm>
-            <a:off x="3246120" y="1353312"/>
-            <a:ext cx="1051560" cy="292608"/>
-          </a:xfrm>
-          <a:prstGeom prst="rect">
-            <a:avLst/>
-          </a:prstGeom>
-          <a:noFill/>
-          <a:ln/>
-        </p:spPr>
-        <p:txBody>
-          <a:bodyPr wrap="square" lIns="0" tIns="0" rIns="0" bIns="0" rtlCol="0" anchor="ctr"/>
-          <a:lstStyle/>
-          <a:p>
-            <a:pPr algn="ctr" indent="0" marL="0">
-              <a:buNone/>
-            </a:pPr>
-            <a:r>
-              <a:rPr lang="en-US" sz="1100" b="1" dirty="0">
-                <a:solidFill>
-                  <a:schemeClr val="bg1"/>
-                </a:solidFill>
-              </a:rPr>
-              <a:t>PARTIAL</a:t>
-            </a:r>
-            <a:endParaRPr lang="en-US" sz="1100" dirty="0"/>
-          </a:p>
-        </p:txBody>
-      </p:sp>
-      <p:sp>
-        <p:nvSpPr>
-          <p:cNvPr id="7" name="Demo headline 1"/>
-          <p:cNvSpPr txBox="1"/>
-          <p:nvPr/>
-        </p:nvSpPr>
-        <p:spPr>
-          <a:xfrm>
-            <a:off x="640080" y="1737360"/>
-            <a:ext cx="3657600" cy="502920"/>
-          </a:xfrm>
-          <a:prstGeom prst="rect">
-            <a:avLst/>
-          </a:prstGeom>
-          <a:noFill/>
-          <a:ln/>
-        </p:spPr>
-        <p:txBody>
-          <a:bodyPr wrap="square" lIns="0" tIns="0" rIns="0" bIns="0" rtlCol="0" anchor="t"/>
-          <a:lstStyle/>
-          <a:p>
-            <a:pPr indent="0" marL="0">
-              <a:buNone/>
-            </a:pPr>
-            <a:r>
-              <a:rPr lang="en-US" sz="1600" b="1" dirty="0">
-                <a:solidFill>
-                  <a:schemeClr val="tx1"/>
-                </a:solidFill>
-              </a:rPr>
-              <a:t>Room rent above the plan cap</a:t>
-            </a:r>
-            <a:endParaRPr lang="en-US" sz="1600" dirty="0"/>
-          </a:p>
-        </p:txBody>
-      </p:sp>
-      <p:sp>
-        <p:nvSpPr>
-          <p:cNvPr id="8" name="Demo detail 1"/>
-          <p:cNvSpPr txBox="1"/>
-          <p:nvPr/>
-        </p:nvSpPr>
-        <p:spPr>
-          <a:xfrm>
-            <a:off x="640080" y="2240280"/>
-            <a:ext cx="3657600" cy="365760"/>
-          </a:xfrm>
-          <a:prstGeom prst="rect">
-            <a:avLst/>
-          </a:prstGeom>
-          <a:noFill/>
-          <a:ln/>
-        </p:spPr>
-        <p:txBody>
-          <a:bodyPr wrap="square" lIns="0" tIns="0" rIns="0" bIns="0" rtlCol="0" anchor="t"/>
-          <a:lstStyle/>
-          <a:p>
-            <a:pPr indent="0" marL="0">
-              <a:buNone/>
-            </a:pPr>
-            <a:r>
-              <a:rPr lang="en-US" sz="1300" dirty="0">
-                <a:solidFill>
-                  <a:schemeClr val="tx2"/>
-                </a:solidFill>
-              </a:rPr>
-              <a:t>Proportionate deduction, clause C6</a:t>
-            </a:r>
-            <a:endParaRPr lang="en-US" sz="1300" dirty="0"/>
-          </a:p>
-        </p:txBody>
-      </p:sp>
-      <p:sp>
-        <p:nvSpPr>
-          <p:cNvPr id="9" name="Demo card 2"/>
-          <p:cNvSpPr/>
-          <p:nvPr/>
-        </p:nvSpPr>
-        <p:spPr>
-          <a:xfrm>
-            <a:off x="4663440" y="1234440"/>
-            <a:ext cx="4023360" cy="1463040"/>
-          </a:xfrm>
-          <a:prstGeom prst="roundRect">
-            <a:avLst>
-              <a:gd name="adj" fmla="val 5000"/>
-            </a:avLst>
-          </a:prstGeom>
-          <a:solidFill>
-            <a:schemeClr val="bg2"/>
-          </a:solidFill>
-          <a:ln/>
-        </p:spPr>
-      </p:sp>
-      <p:sp>
-        <p:nvSpPr>
-          <p:cNvPr id="10" name="Demo id 2"/>
-          <p:cNvSpPr txBox="1"/>
-          <p:nvPr/>
-        </p:nvSpPr>
-        <p:spPr>
-          <a:xfrm>
-            <a:off x="4846320" y="1371600"/>
-            <a:ext cx="2377440" cy="274320"/>
-          </a:xfrm>
-          <a:prstGeom prst="rect">
-            <a:avLst/>
-          </a:prstGeom>
-          <a:noFill/>
-          <a:ln/>
-        </p:spPr>
-        <p:txBody>
-          <a:bodyPr wrap="square" lIns="0" tIns="0" rIns="0" bIns="0" rtlCol="0" anchor="t"/>
-          <a:lstStyle/>
-          <a:p>
-            <a:pPr indent="0" marL="0">
-              <a:buNone/>
-            </a:pPr>
-            <a:r>
-              <a:rPr lang="en-US" sz="1200" b="1" dirty="0">
-                <a:solidFill>
-                  <a:schemeClr val="tx2"/>
-                </a:solidFill>
-              </a:rPr>
-              <a:t>CLM-26-0007</a:t>
-            </a:r>
-            <a:endParaRPr lang="en-US" sz="1200" dirty="0"/>
-          </a:p>
-        </p:txBody>
-      </p:sp>
-      <p:sp>
-        <p:nvSpPr>
-          <p:cNvPr id="11" name="Demo outcome 2"/>
-          <p:cNvSpPr/>
-          <p:nvPr/>
-        </p:nvSpPr>
-        <p:spPr>
-          <a:xfrm>
-            <a:off x="7452360" y="1353312"/>
-            <a:ext cx="1051560" cy="292608"/>
-          </a:xfrm>
-          <a:prstGeom prst="roundRect">
-            <a:avLst>
-              <a:gd name="adj" fmla="val 50000"/>
-            </a:avLst>
-          </a:prstGeom>
-          <a:solidFill>
-            <a:schemeClr val="accent5"/>
-          </a:solidFill>
-          <a:ln/>
-        </p:spPr>
-      </p:sp>
-      <p:sp>
-        <p:nvSpPr>
-          <p:cNvPr id="12" name="Demo outcome label 2"/>
-          <p:cNvSpPr txBox="1"/>
-          <p:nvPr/>
-        </p:nvSpPr>
-        <p:spPr>
-          <a:xfrm>
-            <a:off x="7452360" y="1353312"/>
-            <a:ext cx="1051560" cy="292608"/>
-          </a:xfrm>
-          <a:prstGeom prst="rect">
-            <a:avLst/>
-          </a:prstGeom>
-          <a:noFill/>
-          <a:ln/>
-        </p:spPr>
-        <p:txBody>
-          <a:bodyPr wrap="square" lIns="0" tIns="0" rIns="0" bIns="0" rtlCol="0" anchor="ctr"/>
-          <a:lstStyle/>
-          <a:p>
-            <a:pPr algn="ctr" indent="0" marL="0">
-              <a:buNone/>
-            </a:pPr>
-            <a:r>
-              <a:rPr lang="en-US" sz="1100" b="1" dirty="0">
-                <a:solidFill>
-                  <a:schemeClr val="bg1"/>
-                </a:solidFill>
-              </a:rPr>
-              <a:t>REJECT</a:t>
-            </a:r>
-            <a:endParaRPr lang="en-US" sz="1100" dirty="0"/>
-          </a:p>
-        </p:txBody>
-      </p:sp>
-      <p:sp>
-        <p:nvSpPr>
-          <p:cNvPr id="13" name="Demo headline 2"/>
-          <p:cNvSpPr txBox="1"/>
-          <p:nvPr/>
-        </p:nvSpPr>
-        <p:spPr>
-          <a:xfrm>
-            <a:off x="4846320" y="1737360"/>
-            <a:ext cx="3657600" cy="502920"/>
-          </a:xfrm>
-          <a:prstGeom prst="rect">
-            <a:avLst/>
-          </a:prstGeom>
-          <a:noFill/>
-          <a:ln/>
-        </p:spPr>
-        <p:txBody>
-          <a:bodyPr wrap="square" lIns="0" tIns="0" rIns="0" bIns="0" rtlCol="0" anchor="t"/>
-          <a:lstStyle/>
-          <a:p>
-            <a:pPr indent="0" marL="0">
-              <a:buNone/>
-            </a:pPr>
-            <a:r>
-              <a:rPr lang="en-US" sz="1600" b="1" dirty="0">
-                <a:solidFill>
-                  <a:schemeClr val="tx1"/>
-                </a:solidFill>
-              </a:rPr>
-              <a:t>Pre-existing condition inside 24 months</a:t>
-            </a:r>
-            <a:endParaRPr lang="en-US" sz="1600" dirty="0"/>
-          </a:p>
-        </p:txBody>
-      </p:sp>
-      <p:sp>
-        <p:nvSpPr>
-          <p:cNvPr id="14" name="Demo detail 2"/>
-          <p:cNvSpPr txBox="1"/>
-          <p:nvPr/>
-        </p:nvSpPr>
-        <p:spPr>
-          <a:xfrm>
-            <a:off x="4846320" y="2240280"/>
-            <a:ext cx="3657600" cy="365760"/>
-          </a:xfrm>
-          <a:prstGeom prst="rect">
-            <a:avLst/>
-          </a:prstGeom>
-          <a:noFill/>
-          <a:ln/>
-        </p:spPr>
-        <p:txBody>
-          <a:bodyPr wrap="square" lIns="0" tIns="0" rIns="0" bIns="0" rtlCol="0" anchor="t"/>
-          <a:lstStyle/>
-          <a:p>
-            <a:pPr indent="0" marL="0">
-              <a:buNone/>
-            </a:pPr>
-            <a:r>
-              <a:rPr lang="en-US" sz="1300" dirty="0">
-                <a:solidFill>
-                  <a:schemeClr val="tx2"/>
-                </a:solidFill>
-              </a:rPr>
-              <a:t>Early exit, remaining checks skipped, clause C3</a:t>
-            </a:r>
-            <a:endParaRPr lang="en-US" sz="1300" dirty="0"/>
-          </a:p>
-        </p:txBody>
-      </p:sp>
-      <p:sp>
-        <p:nvSpPr>
-          <p:cNvPr id="15" name="Demo card 3"/>
-          <p:cNvSpPr/>
-          <p:nvPr/>
-        </p:nvSpPr>
-        <p:spPr>
-          <a:xfrm>
-            <a:off x="457200" y="2880360"/>
-            <a:ext cx="4023360" cy="1463040"/>
-          </a:xfrm>
-          <a:prstGeom prst="roundRect">
-            <a:avLst>
-              <a:gd name="adj" fmla="val 5000"/>
-            </a:avLst>
-          </a:prstGeom>
-          <a:solidFill>
-            <a:schemeClr val="bg2"/>
-          </a:solidFill>
-          <a:ln/>
-        </p:spPr>
-      </p:sp>
-      <p:sp>
-        <p:nvSpPr>
-          <p:cNvPr id="16" name="Demo id 3"/>
-          <p:cNvSpPr txBox="1"/>
-          <p:nvPr/>
-        </p:nvSpPr>
-        <p:spPr>
-          <a:xfrm>
-            <a:off x="640080" y="3017520"/>
-            <a:ext cx="2377440" cy="274320"/>
-          </a:xfrm>
-          <a:prstGeom prst="rect">
-            <a:avLst/>
-          </a:prstGeom>
-          <a:noFill/>
-          <a:ln/>
-        </p:spPr>
-        <p:txBody>
-          <a:bodyPr wrap="square" lIns="0" tIns="0" rIns="0" bIns="0" rtlCol="0" anchor="t"/>
-          <a:lstStyle/>
-          <a:p>
-            <a:pPr indent="0" marL="0">
-              <a:buNone/>
-            </a:pPr>
-            <a:r>
-              <a:rPr lang="en-US" sz="1200" b="1" dirty="0">
-                <a:solidFill>
-                  <a:schemeClr val="tx2"/>
-                </a:solidFill>
-              </a:rPr>
-              <a:t>CLM-26-0019</a:t>
-            </a:r>
-            <a:endParaRPr lang="en-US" sz="1200" dirty="0"/>
-          </a:p>
-        </p:txBody>
-      </p:sp>
-      <p:sp>
-        <p:nvSpPr>
-          <p:cNvPr id="17" name="Demo outcome 3"/>
-          <p:cNvSpPr/>
-          <p:nvPr/>
-        </p:nvSpPr>
-        <p:spPr>
-          <a:xfrm>
-            <a:off x="3246120" y="2999232"/>
-            <a:ext cx="1051560" cy="292608"/>
-          </a:xfrm>
-          <a:prstGeom prst="roundRect">
-            <a:avLst>
-              <a:gd name="adj" fmla="val 50000"/>
-            </a:avLst>
+            <a:off x="5532120" y="1371600"/>
+            <a:ext cx="365760" cy="365760"/>
+          </a:xfrm>
+          <a:prstGeom prst="ellipse">
+            <a:avLst/>
           </a:prstGeom>
           <a:solidFill>
             <a:schemeClr val="accent2"/>
@@ -7550,14 +7972,14 @@
       </p:sp>
       <p:sp>
         <p:nvSpPr>
-          <p:cNvPr id="18" name="Demo outcome label 3"/>
-          <p:cNvSpPr txBox="1"/>
-          <p:nvPr/>
-        </p:nvSpPr>
-        <p:spPr>
-          <a:xfrm>
-            <a:off x="3246120" y="2999232"/>
-            <a:ext cx="1051560" cy="292608"/>
+          <p:cNvPr id="20" name="Badge C label"/>
+          <p:cNvSpPr txBox="1"/>
+          <p:nvPr/>
+        </p:nvSpPr>
+        <p:spPr>
+          <a:xfrm>
+            <a:off x="5532120" y="1371600"/>
+            <a:ext cx="365760" cy="365760"/>
           </a:xfrm>
           <a:prstGeom prst="rect">
             <a:avLst/>
@@ -7573,27 +7995,69 @@
               <a:buNone/>
             </a:pPr>
             <a:r>
-              <a:rPr lang="en-US" sz="1100" b="1" dirty="0">
+              <a:rPr lang="en-US" sz="1500" b="1" dirty="0">
                 <a:solidFill>
                   <a:schemeClr val="bg1"/>
                 </a:solidFill>
-              </a:rPr>
-              <a:t>ESCALATE</a:t>
-            </a:r>
-            <a:endParaRPr lang="en-US" sz="1100" dirty="0"/>
-          </a:p>
-        </p:txBody>
-      </p:sp>
-      <p:sp>
-        <p:nvSpPr>
-          <p:cNvPr id="19" name="Demo headline 3"/>
-          <p:cNvSpPr txBox="1"/>
-          <p:nvPr/>
-        </p:nvSpPr>
-        <p:spPr>
-          <a:xfrm>
-            <a:off x="640080" y="3383280"/>
-            <a:ext cx="3657600" cy="502920"/>
+                <a:latin typeface="Cambria" pitchFamily="34" charset="0"/>
+                <a:ea typeface="Cambria" pitchFamily="34" charset="-122"/>
+                <a:cs typeface="Cambria" pitchFamily="34" charset="-120"/>
+              </a:rPr>
+              <a:t>C</a:t>
+            </a:r>
+            <a:endParaRPr lang="en-US" sz="1500" dirty="0"/>
+          </a:p>
+        </p:txBody>
+      </p:sp>
+      <p:sp>
+        <p:nvSpPr>
+          <p:cNvPr id="21" name="Critic heading"/>
+          <p:cNvSpPr txBox="1"/>
+          <p:nvPr/>
+        </p:nvSpPr>
+        <p:spPr>
+          <a:xfrm>
+            <a:off x="5989320" y="1371600"/>
+            <a:ext cx="2651760" cy="365760"/>
+          </a:xfrm>
+          <a:prstGeom prst="rect">
+            <a:avLst/>
+          </a:prstGeom>
+          <a:noFill/>
+          <a:ln/>
+        </p:spPr>
+        <p:txBody>
+          <a:bodyPr wrap="square" lIns="0" tIns="0" rIns="0" bIns="0" rtlCol="0" anchor="ctr"/>
+          <a:lstStyle/>
+          <a:p>
+            <a:pPr indent="0" marL="0">
+              <a:buNone/>
+            </a:pPr>
+            <a:r>
+              <a:rPr lang="en-US" sz="1700" b="1" dirty="0">
+                <a:solidFill>
+                  <a:schemeClr val="tx1"/>
+                </a:solidFill>
+                <a:latin typeface="Cambria" pitchFamily="34" charset="0"/>
+                <a:ea typeface="Cambria" pitchFamily="34" charset="-122"/>
+                <a:cs typeface="Cambria" pitchFamily="34" charset="-120"/>
+              </a:rPr>
+              <a:t>What the Critic re-checks</a:t>
+            </a:r>
+            <a:endParaRPr lang="en-US" sz="1700" dirty="0"/>
+          </a:p>
+        </p:txBody>
+      </p:sp>
+      <p:sp>
+        <p:nvSpPr>
+          <p:cNvPr id="22" name="Critic checks"/>
+          <p:cNvSpPr txBox="1"/>
+          <p:nvPr/>
+        </p:nvSpPr>
+        <p:spPr>
+          <a:xfrm>
+            <a:off x="5532120" y="1920240"/>
+            <a:ext cx="3017520" cy="1828800"/>
           </a:xfrm>
           <a:prstGeom prst="rect">
             <a:avLst/>
@@ -7605,242 +8069,130 @@
           <a:bodyPr wrap="square" lIns="0" tIns="0" rIns="0" bIns="0" rtlCol="0" anchor="t"/>
           <a:lstStyle/>
           <a:p>
+            <a:pPr marL="342900" indent="-342900">
+              <a:spcAft>
+                <a:spcPts val="500"/>
+              </a:spcAft>
+              <a:buSzPct val="100000"/>
+              <a:buChar char="•"/>
+            </a:pPr>
+            <a:r>
+              <a:rPr lang="en-US" sz="1400" dirty="0">
+                <a:solidFill>
+                  <a:schemeClr val="tx1"/>
+                </a:solidFill>
+              </a:rPr>
+              <a:t>Payout reconciles with deductions</a:t>
+            </a:r>
+            <a:endParaRPr lang="en-US" sz="1400" dirty="0"/>
+          </a:p>
+          <a:p>
+            <a:pPr marL="342900" indent="-342900">
+              <a:spcAft>
+                <a:spcPts val="500"/>
+              </a:spcAft>
+              <a:buSzPct val="100000"/>
+              <a:buChar char="•"/>
+            </a:pPr>
+            <a:r>
+              <a:rPr lang="en-US" sz="1400" dirty="0">
+                <a:solidFill>
+                  <a:schemeClr val="tx1"/>
+                </a:solidFill>
+              </a:rPr>
+              <a:t>Within claim and sum insured</a:t>
+            </a:r>
+            <a:endParaRPr lang="en-US" sz="1400" dirty="0"/>
+          </a:p>
+          <a:p>
+            <a:pPr marL="342900" indent="-342900">
+              <a:spcAft>
+                <a:spcPts val="500"/>
+              </a:spcAft>
+              <a:buSzPct val="100000"/>
+              <a:buChar char="•"/>
+            </a:pPr>
+            <a:r>
+              <a:rPr lang="en-US" sz="1400" dirty="0">
+                <a:solidFill>
+                  <a:schemeClr val="tx1"/>
+                </a:solidFill>
+              </a:rPr>
+              <a:t>Every finding cites a real clause</a:t>
+            </a:r>
+            <a:endParaRPr lang="en-US" sz="1400" dirty="0"/>
+          </a:p>
+          <a:p>
+            <a:pPr marL="342900" indent="-342900">
+              <a:spcAft>
+                <a:spcPts val="500"/>
+              </a:spcAft>
+              <a:buSzPct val="100000"/>
+              <a:buChar char="•"/>
+            </a:pPr>
+            <a:r>
+              <a:rPr lang="en-US" sz="1400" dirty="0">
+                <a:solidFill>
+                  <a:schemeClr val="tx1"/>
+                </a:solidFill>
+              </a:rPr>
+              <a:t>Extraction agrees with the form</a:t>
+            </a:r>
+            <a:endParaRPr lang="en-US" sz="1400" dirty="0"/>
+          </a:p>
+          <a:p>
+            <a:pPr marL="342900" indent="-342900">
+              <a:spcAft>
+                <a:spcPts val="500"/>
+              </a:spcAft>
+              <a:buSzPct val="100000"/>
+              <a:buChar char="•"/>
+            </a:pPr>
+            <a:r>
+              <a:rPr lang="en-US" sz="1400" dirty="0">
+                <a:solidFill>
+                  <a:schemeClr val="tx1"/>
+                </a:solidFill>
+              </a:rPr>
+              <a:t>Fraud screening matched the risk</a:t>
+            </a:r>
+            <a:endParaRPr lang="en-US" sz="1400" dirty="0"/>
+          </a:p>
+        </p:txBody>
+      </p:sp>
+      <p:sp>
+        <p:nvSpPr>
+          <p:cNvPr id="23" name="Critic outcome"/>
+          <p:cNvSpPr txBox="1"/>
+          <p:nvPr/>
+        </p:nvSpPr>
+        <p:spPr>
+          <a:xfrm>
+            <a:off x="5532120" y="3657600"/>
+            <a:ext cx="3017520" cy="594360"/>
+          </a:xfrm>
+          <a:prstGeom prst="rect">
+            <a:avLst/>
+          </a:prstGeom>
+          <a:noFill/>
+          <a:ln/>
+        </p:spPr>
+        <p:txBody>
+          <a:bodyPr wrap="square" lIns="0" tIns="0" rIns="0" bIns="0" rtlCol="0" anchor="t"/>
+          <a:lstStyle/>
+          <a:p>
             <a:pPr indent="0" marL="0">
               <a:buNone/>
             </a:pPr>
             <a:r>
-              <a:rPr lang="en-US" sz="1600" b="1" dirty="0">
-                <a:solidFill>
-                  <a:schemeClr val="tx1"/>
-                </a:solidFill>
-              </a:rPr>
-              <a:t>Lean plan misses an inflated bill</a:t>
-            </a:r>
-            <a:endParaRPr lang="en-US" sz="1600" dirty="0"/>
-          </a:p>
-        </p:txBody>
-      </p:sp>
-      <p:sp>
-        <p:nvSpPr>
-          <p:cNvPr id="20" name="Demo detail 3"/>
-          <p:cNvSpPr txBox="1"/>
-          <p:nvPr/>
-        </p:nvSpPr>
-        <p:spPr>
-          <a:xfrm>
-            <a:off x="640080" y="3886200"/>
-            <a:ext cx="3657600" cy="365760"/>
-          </a:xfrm>
-          <a:prstGeom prst="rect">
-            <a:avLst/>
-          </a:prstGeom>
-          <a:noFill/>
-          <a:ln/>
-        </p:spPr>
-        <p:txBody>
-          <a:bodyPr wrap="square" lIns="0" tIns="0" rIns="0" bIns="0" rtlCol="0" anchor="t"/>
-          <a:lstStyle/>
-          <a:p>
-            <a:pPr indent="0" marL="0">
-              <a:buNone/>
-            </a:pPr>
-            <a:r>
-              <a:rPr lang="en-US" sz="1300" dirty="0">
+              <a:rPr lang="en-US" sz="1200" i="1" dirty="0">
                 <a:solidFill>
                   <a:schemeClr val="tx2"/>
                 </a:solidFill>
               </a:rPr>
-              <a:t>Critic sends it back, fraud score, human review</a:t>
-            </a:r>
-            <a:endParaRPr lang="en-US" sz="1300" dirty="0"/>
-          </a:p>
-        </p:txBody>
-      </p:sp>
-      <p:sp>
-        <p:nvSpPr>
-          <p:cNvPr id="21" name="Demo card 4"/>
-          <p:cNvSpPr/>
-          <p:nvPr/>
-        </p:nvSpPr>
-        <p:spPr>
-          <a:xfrm>
-            <a:off x="4663440" y="2880360"/>
-            <a:ext cx="4023360" cy="1463040"/>
-          </a:xfrm>
-          <a:prstGeom prst="roundRect">
-            <a:avLst>
-              <a:gd name="adj" fmla="val 5000"/>
-            </a:avLst>
-          </a:prstGeom>
-          <a:solidFill>
-            <a:schemeClr val="bg2"/>
-          </a:solidFill>
-          <a:ln/>
-        </p:spPr>
-      </p:sp>
-      <p:sp>
-        <p:nvSpPr>
-          <p:cNvPr id="22" name="Demo id 4"/>
-          <p:cNvSpPr txBox="1"/>
-          <p:nvPr/>
-        </p:nvSpPr>
-        <p:spPr>
-          <a:xfrm>
-            <a:off x="4846320" y="3017520"/>
-            <a:ext cx="2377440" cy="274320"/>
-          </a:xfrm>
-          <a:prstGeom prst="rect">
-            <a:avLst/>
-          </a:prstGeom>
-          <a:noFill/>
-          <a:ln/>
-        </p:spPr>
-        <p:txBody>
-          <a:bodyPr wrap="square" lIns="0" tIns="0" rIns="0" bIns="0" rtlCol="0" anchor="t"/>
-          <a:lstStyle/>
-          <a:p>
-            <a:pPr indent="0" marL="0">
-              <a:buNone/>
-            </a:pPr>
-            <a:r>
-              <a:rPr lang="en-US" sz="1200" b="1" dirty="0">
-                <a:solidFill>
-                  <a:schemeClr val="tx2"/>
-                </a:solidFill>
-              </a:rPr>
-              <a:t>CLM-26-0003 + fault</a:t>
+              <a:t>Any failure sends the claim back to the Planner. After two rounds it goes to a human.</a:t>
             </a:r>
             <a:endParaRPr lang="en-US" sz="1200" dirty="0"/>
-          </a:p>
-        </p:txBody>
-      </p:sp>
-      <p:sp>
-        <p:nvSpPr>
-          <p:cNvPr id="23" name="Demo outcome 4"/>
-          <p:cNvSpPr/>
-          <p:nvPr/>
-        </p:nvSpPr>
-        <p:spPr>
-          <a:xfrm>
-            <a:off x="7452360" y="2999232"/>
-            <a:ext cx="1051560" cy="292608"/>
-          </a:xfrm>
-          <a:prstGeom prst="roundRect">
-            <a:avLst>
-              <a:gd name="adj" fmla="val 50000"/>
-            </a:avLst>
-          </a:prstGeom>
-          <a:solidFill>
-            <a:schemeClr val="accent4"/>
-          </a:solidFill>
-          <a:ln/>
-        </p:spPr>
-      </p:sp>
-      <p:sp>
-        <p:nvSpPr>
-          <p:cNvPr id="24" name="Demo outcome label 4"/>
-          <p:cNvSpPr txBox="1"/>
-          <p:nvPr/>
-        </p:nvSpPr>
-        <p:spPr>
-          <a:xfrm>
-            <a:off x="7452360" y="2999232"/>
-            <a:ext cx="1051560" cy="292608"/>
-          </a:xfrm>
-          <a:prstGeom prst="rect">
-            <a:avLst/>
-          </a:prstGeom>
-          <a:noFill/>
-          <a:ln/>
-        </p:spPr>
-        <p:txBody>
-          <a:bodyPr wrap="square" lIns="0" tIns="0" rIns="0" bIns="0" rtlCol="0" anchor="ctr"/>
-          <a:lstStyle/>
-          <a:p>
-            <a:pPr algn="ctr" indent="0" marL="0">
-              <a:buNone/>
-            </a:pPr>
-            <a:r>
-              <a:rPr lang="en-US" sz="1100" b="1" dirty="0">
-                <a:solidFill>
-                  <a:schemeClr val="bg1"/>
-                </a:solidFill>
-              </a:rPr>
-              <a:t>APPROVE</a:t>
-            </a:r>
-            <a:endParaRPr lang="en-US" sz="1100" dirty="0"/>
-          </a:p>
-        </p:txBody>
-      </p:sp>
-      <p:sp>
-        <p:nvSpPr>
-          <p:cNvPr id="25" name="Demo headline 4"/>
-          <p:cNvSpPr txBox="1"/>
-          <p:nvPr/>
-        </p:nvSpPr>
-        <p:spPr>
-          <a:xfrm>
-            <a:off x="4846320" y="3383280"/>
-            <a:ext cx="3657600" cy="502920"/>
-          </a:xfrm>
-          <a:prstGeom prst="rect">
-            <a:avLst/>
-          </a:prstGeom>
-          <a:noFill/>
-          <a:ln/>
-        </p:spPr>
-        <p:txBody>
-          <a:bodyPr wrap="square" lIns="0" tIns="0" rIns="0" bIns="0" rtlCol="0" anchor="t"/>
-          <a:lstStyle/>
-          <a:p>
-            <a:pPr indent="0" marL="0">
-              <a:buNone/>
-            </a:pPr>
-            <a:r>
-              <a:rPr lang="en-US" sz="1600" b="1" dirty="0">
-                <a:solidFill>
-                  <a:schemeClr val="tx1"/>
-                </a:solidFill>
-              </a:rPr>
-              <a:t>Executor overpays by 15% on purpose</a:t>
-            </a:r>
-            <a:endParaRPr lang="en-US" sz="1600" dirty="0"/>
-          </a:p>
-        </p:txBody>
-      </p:sp>
-      <p:sp>
-        <p:nvSpPr>
-          <p:cNvPr id="26" name="Demo detail 4"/>
-          <p:cNvSpPr txBox="1"/>
-          <p:nvPr/>
-        </p:nvSpPr>
-        <p:spPr>
-          <a:xfrm>
-            <a:off x="4846320" y="3886200"/>
-            <a:ext cx="3657600" cy="365760"/>
-          </a:xfrm>
-          <a:prstGeom prst="rect">
-            <a:avLst/>
-          </a:prstGeom>
-          <a:noFill/>
-          <a:ln/>
-        </p:spPr>
-        <p:txBody>
-          <a:bodyPr wrap="square" lIns="0" tIns="0" rIns="0" bIns="0" rtlCol="0" anchor="t"/>
-          <a:lstStyle/>
-          <a:p>
-            <a:pPr indent="0" marL="0">
-              <a:buNone/>
-            </a:pPr>
-            <a:r>
-              <a:rPr lang="en-US" sz="1300" dirty="0">
-                <a:solidFill>
-                  <a:schemeClr val="tx2"/>
-                </a:solidFill>
-              </a:rPr>
-              <a:t>Critic catches it, recomputes, passes</a:t>
-            </a:r>
-            <a:endParaRPr lang="en-US" sz="1300" dirty="0"/>
           </a:p>
         </p:txBody>
       </p:sp>
@@ -7946,78 +8298,26 @@
                   <a:schemeClr val="tx1"/>
                 </a:solidFill>
               </a:rPr>
-              <a:t>Tested on held-out claims with added noise</a:t>
+              <a:t>Live demo: four claims, four behaviours</a:t>
             </a:r>
             <a:endParaRPr lang="en-US" sz="2800" dirty="0"/>
           </a:p>
         </p:txBody>
       </p:sp>
-      <p:graphicFrame>
-        <p:nvGraphicFramePr>
-          <p:cNvPr id="3" name="Chart 0" descr=""/>
-          <p:cNvGraphicFramePr/>
-          <p:nvPr/>
-        </p:nvGraphicFramePr>
-        <p:xfrm>
-          <a:off x="365760" y="1097280"/>
-          <a:ext cx="5394960" cy="3246120"/>
-        </p:xfrm>
-        <a:graphic xmlns:a="http://schemas.openxmlformats.org/drawingml/2006/main">
-          <a:graphicData uri="http://schemas.openxmlformats.org/drawingml/2006/chart">
-            <c:chart xmlns:c="http://schemas.openxmlformats.org/drawingml/2006/chart" r:id="rId1"/>
-          </a:graphicData>
-        </a:graphic>
-      </p:graphicFrame>
-      <p:sp>
-        <p:nvSpPr>
-          <p:cNvPr id="4" name="Chart note"/>
-          <p:cNvSpPr txBox="1"/>
-          <p:nvPr/>
-        </p:nvSpPr>
-        <p:spPr>
-          <a:xfrm>
-            <a:off x="457200" y="4434840"/>
-            <a:ext cx="5303520" cy="228600"/>
-          </a:xfrm>
-          <a:prstGeom prst="rect">
-            <a:avLst/>
-          </a:prstGeom>
-          <a:noFill/>
-          <a:ln/>
-        </p:spPr>
-        <p:txBody>
-          <a:bodyPr wrap="square" lIns="0" tIns="0" rIns="0" bIns="0" rtlCol="0" anchor="t"/>
-          <a:lstStyle/>
-          <a:p>
-            <a:pPr indent="0" marL="0">
-              <a:buNone/>
-            </a:pPr>
-            <a:r>
-              <a:rPr lang="en-US" sz="1100" i="1" dirty="0">
-                <a:solidFill>
-                  <a:schemeClr val="tx2"/>
-                </a:solidFill>
-              </a:rPr>
-              <a:t>UNSEEN rows were added after the fixes, so they have no first-run bar.</a:t>
-            </a:r>
-            <a:endParaRPr lang="en-US" sz="1100" dirty="0"/>
-          </a:p>
-        </p:txBody>
-      </p:sp>
-      <p:sp>
-        <p:nvSpPr>
-          <p:cNvPr id="5" name="Result card 1"/>
+      <p:sp>
+        <p:nvSpPr>
+          <p:cNvPr id="3" name="Demo card 1"/>
           <p:cNvSpPr/>
           <p:nvPr/>
         </p:nvSpPr>
         <p:spPr>
           <a:xfrm>
-            <a:off x="5989320" y="1188720"/>
-            <a:ext cx="2697480" cy="1024128"/>
+            <a:off x="457200" y="1234440"/>
+            <a:ext cx="4023360" cy="1463040"/>
           </a:xfrm>
           <a:prstGeom prst="roundRect">
             <a:avLst>
-              <a:gd name="adj" fmla="val 7143"/>
+              <a:gd name="adj" fmla="val 5000"/>
             </a:avLst>
           </a:prstGeom>
           <a:solidFill>
@@ -8028,93 +8328,184 @@
       </p:sp>
       <p:sp>
         <p:nvSpPr>
-          <p:cNvPr id="6" name="Result number 1"/>
-          <p:cNvSpPr txBox="1"/>
-          <p:nvPr/>
-        </p:nvSpPr>
-        <p:spPr>
-          <a:xfrm>
-            <a:off x="6126480" y="1261872"/>
-            <a:ext cx="1188720" cy="877824"/>
-          </a:xfrm>
-          <a:prstGeom prst="rect">
-            <a:avLst/>
-          </a:prstGeom>
-          <a:noFill/>
-          <a:ln/>
-        </p:spPr>
-        <p:txBody>
-          <a:bodyPr wrap="square" lIns="0" tIns="0" rIns="0" bIns="0" rtlCol="0" anchor="ctr"/>
+          <p:cNvPr id="4" name="Demo id 1"/>
+          <p:cNvSpPr txBox="1"/>
+          <p:nvPr/>
+        </p:nvSpPr>
+        <p:spPr>
+          <a:xfrm>
+            <a:off x="640080" y="1371600"/>
+            <a:ext cx="2377440" cy="274320"/>
+          </a:xfrm>
+          <a:prstGeom prst="rect">
+            <a:avLst/>
+          </a:prstGeom>
+          <a:noFill/>
+          <a:ln/>
+        </p:spPr>
+        <p:txBody>
+          <a:bodyPr wrap="square" lIns="0" tIns="0" rIns="0" bIns="0" rtlCol="0" anchor="t"/>
           <a:lstStyle/>
           <a:p>
             <a:pPr indent="0" marL="0">
               <a:buNone/>
             </a:pPr>
             <a:r>
-              <a:rPr lang="en-US" sz="2600" b="1" dirty="0">
-                <a:solidFill>
-                  <a:schemeClr val="accent1"/>
-                </a:solidFill>
-                <a:latin typeface="Cambria" pitchFamily="34" charset="0"/>
-                <a:ea typeface="Cambria" pitchFamily="34" charset="-122"/>
-                <a:cs typeface="Cambria" pitchFamily="34" charset="-120"/>
-              </a:rPr>
-              <a:t>89/89</a:t>
-            </a:r>
-            <a:endParaRPr lang="en-US" sz="2600" dirty="0"/>
-          </a:p>
-        </p:txBody>
-      </p:sp>
-      <p:sp>
-        <p:nvSpPr>
-          <p:cNvPr id="7" name="Result caption 1"/>
-          <p:cNvSpPr txBox="1"/>
-          <p:nvPr/>
-        </p:nvSpPr>
-        <p:spPr>
-          <a:xfrm>
-            <a:off x="7315200" y="1261872"/>
-            <a:ext cx="1280160" cy="877824"/>
-          </a:xfrm>
-          <a:prstGeom prst="rect">
-            <a:avLst/>
-          </a:prstGeom>
-          <a:noFill/>
-          <a:ln/>
-        </p:spPr>
-        <p:txBody>
-          <a:bodyPr wrap="square" lIns="0" tIns="0" rIns="0" bIns="0" rtlCol="0" anchor="ctr"/>
-          <a:lstStyle/>
-          <a:p>
-            <a:pPr indent="0" marL="0">
-              <a:buNone/>
-            </a:pPr>
-            <a:r>
-              <a:rPr lang="en-US" sz="1100" dirty="0">
-                <a:solidFill>
-                  <a:schemeClr val="tx1"/>
-                </a:solidFill>
-              </a:rPr>
-              <a:t>main labelled set</a:t>
-            </a:r>
-            <a:endParaRPr lang="en-US" sz="1100" dirty="0"/>
-          </a:p>
-        </p:txBody>
-      </p:sp>
-      <p:sp>
-        <p:nvSpPr>
-          <p:cNvPr id="8" name="Result card 2"/>
+              <a:rPr lang="en-US" sz="1200" b="1" dirty="0">
+                <a:solidFill>
+                  <a:schemeClr val="tx2"/>
+                </a:solidFill>
+              </a:rPr>
+              <a:t>CLM-26-0001</a:t>
+            </a:r>
+            <a:endParaRPr lang="en-US" sz="1200" dirty="0"/>
+          </a:p>
+        </p:txBody>
+      </p:sp>
+      <p:sp>
+        <p:nvSpPr>
+          <p:cNvPr id="5" name="Demo outcome 1"/>
           <p:cNvSpPr/>
           <p:nvPr/>
         </p:nvSpPr>
         <p:spPr>
           <a:xfrm>
-            <a:off x="5989320" y="2359152"/>
-            <a:ext cx="2697480" cy="1024128"/>
+            <a:off x="3246120" y="1353312"/>
+            <a:ext cx="1051560" cy="292608"/>
           </a:xfrm>
           <a:prstGeom prst="roundRect">
             <a:avLst>
-              <a:gd name="adj" fmla="val 7143"/>
+              <a:gd name="adj" fmla="val 50000"/>
+            </a:avLst>
+          </a:prstGeom>
+          <a:solidFill>
+            <a:schemeClr val="accent6"/>
+          </a:solidFill>
+          <a:ln/>
+        </p:spPr>
+      </p:sp>
+      <p:sp>
+        <p:nvSpPr>
+          <p:cNvPr id="6" name="Demo outcome label 1"/>
+          <p:cNvSpPr txBox="1"/>
+          <p:nvPr/>
+        </p:nvSpPr>
+        <p:spPr>
+          <a:xfrm>
+            <a:off x="3246120" y="1353312"/>
+            <a:ext cx="1051560" cy="292608"/>
+          </a:xfrm>
+          <a:prstGeom prst="rect">
+            <a:avLst/>
+          </a:prstGeom>
+          <a:noFill/>
+          <a:ln/>
+        </p:spPr>
+        <p:txBody>
+          <a:bodyPr wrap="square" lIns="0" tIns="0" rIns="0" bIns="0" rtlCol="0" anchor="ctr"/>
+          <a:lstStyle/>
+          <a:p>
+            <a:pPr algn="ctr" indent="0" marL="0">
+              <a:buNone/>
+            </a:pPr>
+            <a:r>
+              <a:rPr lang="en-US" sz="1100" b="1" dirty="0">
+                <a:solidFill>
+                  <a:schemeClr val="bg1"/>
+                </a:solidFill>
+              </a:rPr>
+              <a:t>PARTIAL</a:t>
+            </a:r>
+            <a:endParaRPr lang="en-US" sz="1100" dirty="0"/>
+          </a:p>
+        </p:txBody>
+      </p:sp>
+      <p:sp>
+        <p:nvSpPr>
+          <p:cNvPr id="7" name="Demo headline 1"/>
+          <p:cNvSpPr txBox="1"/>
+          <p:nvPr/>
+        </p:nvSpPr>
+        <p:spPr>
+          <a:xfrm>
+            <a:off x="640080" y="1737360"/>
+            <a:ext cx="3657600" cy="502920"/>
+          </a:xfrm>
+          <a:prstGeom prst="rect">
+            <a:avLst/>
+          </a:prstGeom>
+          <a:noFill/>
+          <a:ln/>
+        </p:spPr>
+        <p:txBody>
+          <a:bodyPr wrap="square" lIns="0" tIns="0" rIns="0" bIns="0" rtlCol="0" anchor="t"/>
+          <a:lstStyle/>
+          <a:p>
+            <a:pPr indent="0" marL="0">
+              <a:buNone/>
+            </a:pPr>
+            <a:r>
+              <a:rPr lang="en-US" sz="1600" b="1" dirty="0">
+                <a:solidFill>
+                  <a:schemeClr val="tx1"/>
+                </a:solidFill>
+              </a:rPr>
+              <a:t>Room rent above the plan cap</a:t>
+            </a:r>
+            <a:endParaRPr lang="en-US" sz="1600" dirty="0"/>
+          </a:p>
+        </p:txBody>
+      </p:sp>
+      <p:sp>
+        <p:nvSpPr>
+          <p:cNvPr id="8" name="Demo detail 1"/>
+          <p:cNvSpPr txBox="1"/>
+          <p:nvPr/>
+        </p:nvSpPr>
+        <p:spPr>
+          <a:xfrm>
+            <a:off x="640080" y="2240280"/>
+            <a:ext cx="3657600" cy="365760"/>
+          </a:xfrm>
+          <a:prstGeom prst="rect">
+            <a:avLst/>
+          </a:prstGeom>
+          <a:noFill/>
+          <a:ln/>
+        </p:spPr>
+        <p:txBody>
+          <a:bodyPr wrap="square" lIns="0" tIns="0" rIns="0" bIns="0" rtlCol="0" anchor="t"/>
+          <a:lstStyle/>
+          <a:p>
+            <a:pPr indent="0" marL="0">
+              <a:buNone/>
+            </a:pPr>
+            <a:r>
+              <a:rPr lang="en-US" sz="1300" dirty="0">
+                <a:solidFill>
+                  <a:schemeClr val="tx2"/>
+                </a:solidFill>
+              </a:rPr>
+              <a:t>Proportionate deduction, clause C6</a:t>
+            </a:r>
+            <a:endParaRPr lang="en-US" sz="1300" dirty="0"/>
+          </a:p>
+        </p:txBody>
+      </p:sp>
+      <p:sp>
+        <p:nvSpPr>
+          <p:cNvPr id="9" name="Demo card 2"/>
+          <p:cNvSpPr/>
+          <p:nvPr/>
+        </p:nvSpPr>
+        <p:spPr>
+          <a:xfrm>
+            <a:off x="4663440" y="1234440"/>
+            <a:ext cx="4023360" cy="1463040"/>
+          </a:xfrm>
+          <a:prstGeom prst="roundRect">
+            <a:avLst>
+              <a:gd name="adj" fmla="val 5000"/>
             </a:avLst>
           </a:prstGeom>
           <a:solidFill>
@@ -8125,93 +8516,184 @@
       </p:sp>
       <p:sp>
         <p:nvSpPr>
-          <p:cNvPr id="9" name="Result number 2"/>
-          <p:cNvSpPr txBox="1"/>
-          <p:nvPr/>
-        </p:nvSpPr>
-        <p:spPr>
-          <a:xfrm>
-            <a:off x="6126480" y="2432304"/>
-            <a:ext cx="1188720" cy="877824"/>
-          </a:xfrm>
-          <a:prstGeom prst="rect">
-            <a:avLst/>
-          </a:prstGeom>
-          <a:noFill/>
-          <a:ln/>
-        </p:spPr>
-        <p:txBody>
-          <a:bodyPr wrap="square" lIns="0" tIns="0" rIns="0" bIns="0" rtlCol="0" anchor="ctr"/>
+          <p:cNvPr id="10" name="Demo id 2"/>
+          <p:cNvSpPr txBox="1"/>
+          <p:nvPr/>
+        </p:nvSpPr>
+        <p:spPr>
+          <a:xfrm>
+            <a:off x="4846320" y="1371600"/>
+            <a:ext cx="2377440" cy="274320"/>
+          </a:xfrm>
+          <a:prstGeom prst="rect">
+            <a:avLst/>
+          </a:prstGeom>
+          <a:noFill/>
+          <a:ln/>
+        </p:spPr>
+        <p:txBody>
+          <a:bodyPr wrap="square" lIns="0" tIns="0" rIns="0" bIns="0" rtlCol="0" anchor="t"/>
           <a:lstStyle/>
           <a:p>
             <a:pPr indent="0" marL="0">
               <a:buNone/>
             </a:pPr>
             <a:r>
-              <a:rPr lang="en-US" sz="2600" b="1" dirty="0">
-                <a:solidFill>
-                  <a:schemeClr val="accent1"/>
-                </a:solidFill>
-                <a:latin typeface="Cambria" pitchFamily="34" charset="0"/>
-                <a:ea typeface="Cambria" pitchFamily="34" charset="-122"/>
-                <a:cs typeface="Cambria" pitchFamily="34" charset="-120"/>
-              </a:rPr>
-              <a:t>23/23</a:t>
-            </a:r>
-            <a:endParaRPr lang="en-US" sz="2600" dirty="0"/>
-          </a:p>
-        </p:txBody>
-      </p:sp>
-      <p:sp>
-        <p:nvSpPr>
-          <p:cNvPr id="10" name="Result caption 2"/>
-          <p:cNvSpPr txBox="1"/>
-          <p:nvPr/>
-        </p:nvSpPr>
-        <p:spPr>
-          <a:xfrm>
-            <a:off x="7315200" y="2432304"/>
-            <a:ext cx="1280160" cy="877824"/>
-          </a:xfrm>
-          <a:prstGeom prst="rect">
-            <a:avLst/>
-          </a:prstGeom>
-          <a:noFill/>
-          <a:ln/>
-        </p:spPr>
-        <p:txBody>
-          <a:bodyPr wrap="square" lIns="0" tIns="0" rIns="0" bIns="0" rtlCol="0" anchor="ctr"/>
-          <a:lstStyle/>
-          <a:p>
-            <a:pPr indent="0" marL="0">
-              <a:buNone/>
-            </a:pPr>
-            <a:r>
-              <a:rPr lang="en-US" sz="1100" dirty="0">
-                <a:solidFill>
-                  <a:schemeClr val="tx1"/>
-                </a:solidFill>
-              </a:rPr>
-              <a:t>boundary cases, e.g. 29 vs 30 days</a:t>
-            </a:r>
-            <a:endParaRPr lang="en-US" sz="1100" dirty="0"/>
-          </a:p>
-        </p:txBody>
-      </p:sp>
-      <p:sp>
-        <p:nvSpPr>
-          <p:cNvPr id="11" name="Result card 3"/>
+              <a:rPr lang="en-US" sz="1200" b="1" dirty="0">
+                <a:solidFill>
+                  <a:schemeClr val="tx2"/>
+                </a:solidFill>
+              </a:rPr>
+              <a:t>CLM-26-0007</a:t>
+            </a:r>
+            <a:endParaRPr lang="en-US" sz="1200" dirty="0"/>
+          </a:p>
+        </p:txBody>
+      </p:sp>
+      <p:sp>
+        <p:nvSpPr>
+          <p:cNvPr id="11" name="Demo outcome 2"/>
           <p:cNvSpPr/>
           <p:nvPr/>
         </p:nvSpPr>
         <p:spPr>
           <a:xfrm>
-            <a:off x="5989320" y="3529584"/>
-            <a:ext cx="2697480" cy="1024128"/>
+            <a:off x="7452360" y="1353312"/>
+            <a:ext cx="1051560" cy="292608"/>
           </a:xfrm>
           <a:prstGeom prst="roundRect">
             <a:avLst>
-              <a:gd name="adj" fmla="val 7143"/>
+              <a:gd name="adj" fmla="val 50000"/>
+            </a:avLst>
+          </a:prstGeom>
+          <a:solidFill>
+            <a:schemeClr val="accent5"/>
+          </a:solidFill>
+          <a:ln/>
+        </p:spPr>
+      </p:sp>
+      <p:sp>
+        <p:nvSpPr>
+          <p:cNvPr id="12" name="Demo outcome label 2"/>
+          <p:cNvSpPr txBox="1"/>
+          <p:nvPr/>
+        </p:nvSpPr>
+        <p:spPr>
+          <a:xfrm>
+            <a:off x="7452360" y="1353312"/>
+            <a:ext cx="1051560" cy="292608"/>
+          </a:xfrm>
+          <a:prstGeom prst="rect">
+            <a:avLst/>
+          </a:prstGeom>
+          <a:noFill/>
+          <a:ln/>
+        </p:spPr>
+        <p:txBody>
+          <a:bodyPr wrap="square" lIns="0" tIns="0" rIns="0" bIns="0" rtlCol="0" anchor="ctr"/>
+          <a:lstStyle/>
+          <a:p>
+            <a:pPr algn="ctr" indent="0" marL="0">
+              <a:buNone/>
+            </a:pPr>
+            <a:r>
+              <a:rPr lang="en-US" sz="1100" b="1" dirty="0">
+                <a:solidFill>
+                  <a:schemeClr val="bg1"/>
+                </a:solidFill>
+              </a:rPr>
+              <a:t>REJECT</a:t>
+            </a:r>
+            <a:endParaRPr lang="en-US" sz="1100" dirty="0"/>
+          </a:p>
+        </p:txBody>
+      </p:sp>
+      <p:sp>
+        <p:nvSpPr>
+          <p:cNvPr id="13" name="Demo headline 2"/>
+          <p:cNvSpPr txBox="1"/>
+          <p:nvPr/>
+        </p:nvSpPr>
+        <p:spPr>
+          <a:xfrm>
+            <a:off x="4846320" y="1737360"/>
+            <a:ext cx="3657600" cy="502920"/>
+          </a:xfrm>
+          <a:prstGeom prst="rect">
+            <a:avLst/>
+          </a:prstGeom>
+          <a:noFill/>
+          <a:ln/>
+        </p:spPr>
+        <p:txBody>
+          <a:bodyPr wrap="square" lIns="0" tIns="0" rIns="0" bIns="0" rtlCol="0" anchor="t"/>
+          <a:lstStyle/>
+          <a:p>
+            <a:pPr indent="0" marL="0">
+              <a:buNone/>
+            </a:pPr>
+            <a:r>
+              <a:rPr lang="en-US" sz="1600" b="1" dirty="0">
+                <a:solidFill>
+                  <a:schemeClr val="tx1"/>
+                </a:solidFill>
+              </a:rPr>
+              <a:t>Pre-existing condition inside 24 months</a:t>
+            </a:r>
+            <a:endParaRPr lang="en-US" sz="1600" dirty="0"/>
+          </a:p>
+        </p:txBody>
+      </p:sp>
+      <p:sp>
+        <p:nvSpPr>
+          <p:cNvPr id="14" name="Demo detail 2"/>
+          <p:cNvSpPr txBox="1"/>
+          <p:nvPr/>
+        </p:nvSpPr>
+        <p:spPr>
+          <a:xfrm>
+            <a:off x="4846320" y="2240280"/>
+            <a:ext cx="3657600" cy="365760"/>
+          </a:xfrm>
+          <a:prstGeom prst="rect">
+            <a:avLst/>
+          </a:prstGeom>
+          <a:noFill/>
+          <a:ln/>
+        </p:spPr>
+        <p:txBody>
+          <a:bodyPr wrap="square" lIns="0" tIns="0" rIns="0" bIns="0" rtlCol="0" anchor="t"/>
+          <a:lstStyle/>
+          <a:p>
+            <a:pPr indent="0" marL="0">
+              <a:buNone/>
+            </a:pPr>
+            <a:r>
+              <a:rPr lang="en-US" sz="1300" dirty="0">
+                <a:solidFill>
+                  <a:schemeClr val="tx2"/>
+                </a:solidFill>
+              </a:rPr>
+              <a:t>Early exit, remaining checks skipped, clause C3</a:t>
+            </a:r>
+            <a:endParaRPr lang="en-US" sz="1300" dirty="0"/>
+          </a:p>
+        </p:txBody>
+      </p:sp>
+      <p:sp>
+        <p:nvSpPr>
+          <p:cNvPr id="15" name="Demo card 3"/>
+          <p:cNvSpPr/>
+          <p:nvPr/>
+        </p:nvSpPr>
+        <p:spPr>
+          <a:xfrm>
+            <a:off x="457200" y="2880360"/>
+            <a:ext cx="4023360" cy="1463040"/>
+          </a:xfrm>
+          <a:prstGeom prst="roundRect">
+            <a:avLst>
+              <a:gd name="adj" fmla="val 5000"/>
             </a:avLst>
           </a:prstGeom>
           <a:solidFill>
@@ -8222,14 +8704,72 @@
       </p:sp>
       <p:sp>
         <p:nvSpPr>
-          <p:cNvPr id="12" name="Result number 3"/>
-          <p:cNvSpPr txBox="1"/>
-          <p:nvPr/>
-        </p:nvSpPr>
-        <p:spPr>
-          <a:xfrm>
-            <a:off x="6126480" y="3602736"/>
-            <a:ext cx="1188720" cy="877824"/>
+          <p:cNvPr id="16" name="Demo id 3"/>
+          <p:cNvSpPr txBox="1"/>
+          <p:nvPr/>
+        </p:nvSpPr>
+        <p:spPr>
+          <a:xfrm>
+            <a:off x="640080" y="3017520"/>
+            <a:ext cx="2377440" cy="274320"/>
+          </a:xfrm>
+          <a:prstGeom prst="rect">
+            <a:avLst/>
+          </a:prstGeom>
+          <a:noFill/>
+          <a:ln/>
+        </p:spPr>
+        <p:txBody>
+          <a:bodyPr wrap="square" lIns="0" tIns="0" rIns="0" bIns="0" rtlCol="0" anchor="t"/>
+          <a:lstStyle/>
+          <a:p>
+            <a:pPr indent="0" marL="0">
+              <a:buNone/>
+            </a:pPr>
+            <a:r>
+              <a:rPr lang="en-US" sz="1200" b="1" dirty="0">
+                <a:solidFill>
+                  <a:schemeClr val="tx2"/>
+                </a:solidFill>
+              </a:rPr>
+              <a:t>CLM-26-0019</a:t>
+            </a:r>
+            <a:endParaRPr lang="en-US" sz="1200" dirty="0"/>
+          </a:p>
+        </p:txBody>
+      </p:sp>
+      <p:sp>
+        <p:nvSpPr>
+          <p:cNvPr id="17" name="Demo outcome 3"/>
+          <p:cNvSpPr/>
+          <p:nvPr/>
+        </p:nvSpPr>
+        <p:spPr>
+          <a:xfrm>
+            <a:off x="3246120" y="2999232"/>
+            <a:ext cx="1051560" cy="292608"/>
+          </a:xfrm>
+          <a:prstGeom prst="roundRect">
+            <a:avLst>
+              <a:gd name="adj" fmla="val 50000"/>
+            </a:avLst>
+          </a:prstGeom>
+          <a:solidFill>
+            <a:schemeClr val="accent2"/>
+          </a:solidFill>
+          <a:ln/>
+        </p:spPr>
+      </p:sp>
+      <p:sp>
+        <p:nvSpPr>
+          <p:cNvPr id="18" name="Demo outcome label 3"/>
+          <p:cNvSpPr txBox="1"/>
+          <p:nvPr/>
+        </p:nvSpPr>
+        <p:spPr>
+          <a:xfrm>
+            <a:off x="3246120" y="2999232"/>
+            <a:ext cx="1051560" cy="292608"/>
           </a:xfrm>
           <a:prstGeom prst="rect">
             <a:avLst/>
@@ -8241,34 +8781,183 @@
           <a:bodyPr wrap="square" lIns="0" tIns="0" rIns="0" bIns="0" rtlCol="0" anchor="ctr"/>
           <a:lstStyle/>
           <a:p>
+            <a:pPr algn="ctr" indent="0" marL="0">
+              <a:buNone/>
+            </a:pPr>
+            <a:r>
+              <a:rPr lang="en-US" sz="1100" b="1" dirty="0">
+                <a:solidFill>
+                  <a:schemeClr val="bg1"/>
+                </a:solidFill>
+              </a:rPr>
+              <a:t>ESCALATE</a:t>
+            </a:r>
+            <a:endParaRPr lang="en-US" sz="1100" dirty="0"/>
+          </a:p>
+        </p:txBody>
+      </p:sp>
+      <p:sp>
+        <p:nvSpPr>
+          <p:cNvPr id="19" name="Demo headline 3"/>
+          <p:cNvSpPr txBox="1"/>
+          <p:nvPr/>
+        </p:nvSpPr>
+        <p:spPr>
+          <a:xfrm>
+            <a:off x="640080" y="3383280"/>
+            <a:ext cx="3657600" cy="502920"/>
+          </a:xfrm>
+          <a:prstGeom prst="rect">
+            <a:avLst/>
+          </a:prstGeom>
+          <a:noFill/>
+          <a:ln/>
+        </p:spPr>
+        <p:txBody>
+          <a:bodyPr wrap="square" lIns="0" tIns="0" rIns="0" bIns="0" rtlCol="0" anchor="t"/>
+          <a:lstStyle/>
+          <a:p>
             <a:pPr indent="0" marL="0">
               <a:buNone/>
             </a:pPr>
             <a:r>
-              <a:rPr lang="en-US" sz="2600" b="1" dirty="0">
-                <a:solidFill>
-                  <a:schemeClr val="accent2"/>
-                </a:solidFill>
-                <a:latin typeface="Cambria" pitchFamily="34" charset="0"/>
-                <a:ea typeface="Cambria" pitchFamily="34" charset="-122"/>
-                <a:cs typeface="Cambria" pitchFamily="34" charset="-120"/>
-              </a:rPr>
-              <a:t>94.8%</a:t>
-            </a:r>
-            <a:endParaRPr lang="en-US" sz="2600" dirty="0"/>
-          </a:p>
-        </p:txBody>
-      </p:sp>
-      <p:sp>
-        <p:nvSpPr>
-          <p:cNvPr id="13" name="Result caption 3"/>
-          <p:cNvSpPr txBox="1"/>
-          <p:nvPr/>
-        </p:nvSpPr>
-        <p:spPr>
-          <a:xfrm>
-            <a:off x="7315200" y="3602736"/>
-            <a:ext cx="1280160" cy="877824"/>
+              <a:rPr lang="en-US" sz="1600" b="1" dirty="0">
+                <a:solidFill>
+                  <a:schemeClr val="tx1"/>
+                </a:solidFill>
+              </a:rPr>
+              <a:t>Lean plan misses an inflated bill</a:t>
+            </a:r>
+            <a:endParaRPr lang="en-US" sz="1600" dirty="0"/>
+          </a:p>
+        </p:txBody>
+      </p:sp>
+      <p:sp>
+        <p:nvSpPr>
+          <p:cNvPr id="20" name="Demo detail 3"/>
+          <p:cNvSpPr txBox="1"/>
+          <p:nvPr/>
+        </p:nvSpPr>
+        <p:spPr>
+          <a:xfrm>
+            <a:off x="640080" y="3886200"/>
+            <a:ext cx="3657600" cy="365760"/>
+          </a:xfrm>
+          <a:prstGeom prst="rect">
+            <a:avLst/>
+          </a:prstGeom>
+          <a:noFill/>
+          <a:ln/>
+        </p:spPr>
+        <p:txBody>
+          <a:bodyPr wrap="square" lIns="0" tIns="0" rIns="0" bIns="0" rtlCol="0" anchor="t"/>
+          <a:lstStyle/>
+          <a:p>
+            <a:pPr indent="0" marL="0">
+              <a:buNone/>
+            </a:pPr>
+            <a:r>
+              <a:rPr lang="en-US" sz="1300" dirty="0">
+                <a:solidFill>
+                  <a:schemeClr val="tx2"/>
+                </a:solidFill>
+              </a:rPr>
+              <a:t>Critic sends it back, fraud score, human review</a:t>
+            </a:r>
+            <a:endParaRPr lang="en-US" sz="1300" dirty="0"/>
+          </a:p>
+        </p:txBody>
+      </p:sp>
+      <p:sp>
+        <p:nvSpPr>
+          <p:cNvPr id="21" name="Demo card 4"/>
+          <p:cNvSpPr/>
+          <p:nvPr/>
+        </p:nvSpPr>
+        <p:spPr>
+          <a:xfrm>
+            <a:off x="4663440" y="2880360"/>
+            <a:ext cx="4023360" cy="1463040"/>
+          </a:xfrm>
+          <a:prstGeom prst="roundRect">
+            <a:avLst>
+              <a:gd name="adj" fmla="val 5000"/>
+            </a:avLst>
+          </a:prstGeom>
+          <a:solidFill>
+            <a:schemeClr val="bg2"/>
+          </a:solidFill>
+          <a:ln/>
+        </p:spPr>
+      </p:sp>
+      <p:sp>
+        <p:nvSpPr>
+          <p:cNvPr id="22" name="Demo id 4"/>
+          <p:cNvSpPr txBox="1"/>
+          <p:nvPr/>
+        </p:nvSpPr>
+        <p:spPr>
+          <a:xfrm>
+            <a:off x="4846320" y="3017520"/>
+            <a:ext cx="2377440" cy="274320"/>
+          </a:xfrm>
+          <a:prstGeom prst="rect">
+            <a:avLst/>
+          </a:prstGeom>
+          <a:noFill/>
+          <a:ln/>
+        </p:spPr>
+        <p:txBody>
+          <a:bodyPr wrap="square" lIns="0" tIns="0" rIns="0" bIns="0" rtlCol="0" anchor="t"/>
+          <a:lstStyle/>
+          <a:p>
+            <a:pPr indent="0" marL="0">
+              <a:buNone/>
+            </a:pPr>
+            <a:r>
+              <a:rPr lang="en-US" sz="1200" b="1" dirty="0">
+                <a:solidFill>
+                  <a:schemeClr val="tx2"/>
+                </a:solidFill>
+              </a:rPr>
+              <a:t>CLM-26-0003 + fault</a:t>
+            </a:r>
+            <a:endParaRPr lang="en-US" sz="1200" dirty="0"/>
+          </a:p>
+        </p:txBody>
+      </p:sp>
+      <p:sp>
+        <p:nvSpPr>
+          <p:cNvPr id="23" name="Demo outcome 4"/>
+          <p:cNvSpPr/>
+          <p:nvPr/>
+        </p:nvSpPr>
+        <p:spPr>
+          <a:xfrm>
+            <a:off x="7452360" y="2999232"/>
+            <a:ext cx="1051560" cy="292608"/>
+          </a:xfrm>
+          <a:prstGeom prst="roundRect">
+            <a:avLst>
+              <a:gd name="adj" fmla="val 50000"/>
+            </a:avLst>
+          </a:prstGeom>
+          <a:solidFill>
+            <a:schemeClr val="accent4"/>
+          </a:solidFill>
+          <a:ln/>
+        </p:spPr>
+      </p:sp>
+      <p:sp>
+        <p:nvSpPr>
+          <p:cNvPr id="24" name="Demo outcome label 4"/>
+          <p:cNvSpPr txBox="1"/>
+          <p:nvPr/>
+        </p:nvSpPr>
+        <p:spPr>
+          <a:xfrm>
+            <a:off x="7452360" y="2999232"/>
+            <a:ext cx="1051560" cy="292608"/>
           </a:xfrm>
           <a:prstGeom prst="rect">
             <a:avLst/>
@@ -8280,18 +8969,90 @@
           <a:bodyPr wrap="square" lIns="0" tIns="0" rIns="0" bIns="0" rtlCol="0" anchor="ctr"/>
           <a:lstStyle/>
           <a:p>
+            <a:pPr algn="ctr" indent="0" marL="0">
+              <a:buNone/>
+            </a:pPr>
+            <a:r>
+              <a:rPr lang="en-US" sz="1100" b="1" dirty="0">
+                <a:solidFill>
+                  <a:schemeClr val="bg1"/>
+                </a:solidFill>
+              </a:rPr>
+              <a:t>APPROVE</a:t>
+            </a:r>
+            <a:endParaRPr lang="en-US" sz="1100" dirty="0"/>
+          </a:p>
+        </p:txBody>
+      </p:sp>
+      <p:sp>
+        <p:nvSpPr>
+          <p:cNvPr id="25" name="Demo headline 4"/>
+          <p:cNvSpPr txBox="1"/>
+          <p:nvPr/>
+        </p:nvSpPr>
+        <p:spPr>
+          <a:xfrm>
+            <a:off x="4846320" y="3383280"/>
+            <a:ext cx="3657600" cy="502920"/>
+          </a:xfrm>
+          <a:prstGeom prst="rect">
+            <a:avLst/>
+          </a:prstGeom>
+          <a:noFill/>
+          <a:ln/>
+        </p:spPr>
+        <p:txBody>
+          <a:bodyPr wrap="square" lIns="0" tIns="0" rIns="0" bIns="0" rtlCol="0" anchor="t"/>
+          <a:lstStyle/>
+          <a:p>
             <a:pPr indent="0" marL="0">
               <a:buNone/>
             </a:pPr>
             <a:r>
-              <a:rPr lang="en-US" sz="1100" dirty="0">
+              <a:rPr lang="en-US" sz="1600" b="1" dirty="0">
                 <a:solidFill>
                   <a:schemeClr val="tx1"/>
                 </a:solidFill>
               </a:rPr>
-              <a:t>on unseen abbreviations, 23 of 240 risky claims wrongly paid</a:t>
-            </a:r>
-            <a:endParaRPr lang="en-US" sz="1100" dirty="0"/>
+              <a:t>Executor overpays by 15% on purpose</a:t>
+            </a:r>
+            <a:endParaRPr lang="en-US" sz="1600" dirty="0"/>
+          </a:p>
+        </p:txBody>
+      </p:sp>
+      <p:sp>
+        <p:nvSpPr>
+          <p:cNvPr id="26" name="Demo detail 4"/>
+          <p:cNvSpPr txBox="1"/>
+          <p:nvPr/>
+        </p:nvSpPr>
+        <p:spPr>
+          <a:xfrm>
+            <a:off x="4846320" y="3886200"/>
+            <a:ext cx="3657600" cy="365760"/>
+          </a:xfrm>
+          <a:prstGeom prst="rect">
+            <a:avLst/>
+          </a:prstGeom>
+          <a:noFill/>
+          <a:ln/>
+        </p:spPr>
+        <p:txBody>
+          <a:bodyPr wrap="square" lIns="0" tIns="0" rIns="0" bIns="0" rtlCol="0" anchor="t"/>
+          <a:lstStyle/>
+          <a:p>
+            <a:pPr indent="0" marL="0">
+              <a:buNone/>
+            </a:pPr>
+            <a:r>
+              <a:rPr lang="en-US" sz="1300" dirty="0">
+                <a:solidFill>
+                  <a:schemeClr val="tx2"/>
+                </a:solidFill>
+              </a:rPr>
+              <a:t>Critic catches it, recomputes, passes</a:t>
+            </a:r>
+            <a:endParaRPr lang="en-US" sz="1300" dirty="0"/>
           </a:p>
         </p:txBody>
       </p:sp>
@@ -8397,26 +9158,78 @@
                   <a:schemeClr val="tx1"/>
                 </a:solidFill>
               </a:rPr>
-              <a:t>Limitations and what comes next</a:t>
+              <a:t>Tested on held-out claims with added noise</a:t>
             </a:r>
             <a:endParaRPr lang="en-US" sz="2800" dirty="0"/>
           </a:p>
         </p:txBody>
       </p:sp>
-      <p:sp>
-        <p:nvSpPr>
-          <p:cNvPr id="3" name="Limits card"/>
+      <p:graphicFrame>
+        <p:nvGraphicFramePr>
+          <p:cNvPr id="3" name="Chart 0" descr=""/>
+          <p:cNvGraphicFramePr/>
+          <p:nvPr/>
+        </p:nvGraphicFramePr>
+        <p:xfrm>
+          <a:off x="365760" y="1097280"/>
+          <a:ext cx="5394960" cy="3246120"/>
+        </p:xfrm>
+        <a:graphic xmlns:a="http://schemas.openxmlformats.org/drawingml/2006/main">
+          <a:graphicData uri="http://schemas.openxmlformats.org/drawingml/2006/chart">
+            <c:chart xmlns:c="http://schemas.openxmlformats.org/drawingml/2006/chart" r:id="rId1"/>
+          </a:graphicData>
+        </a:graphic>
+      </p:graphicFrame>
+      <p:sp>
+        <p:nvSpPr>
+          <p:cNvPr id="4" name="Chart note"/>
+          <p:cNvSpPr txBox="1"/>
+          <p:nvPr/>
+        </p:nvSpPr>
+        <p:spPr>
+          <a:xfrm>
+            <a:off x="457200" y="4434840"/>
+            <a:ext cx="5303520" cy="228600"/>
+          </a:xfrm>
+          <a:prstGeom prst="rect">
+            <a:avLst/>
+          </a:prstGeom>
+          <a:noFill/>
+          <a:ln/>
+        </p:spPr>
+        <p:txBody>
+          <a:bodyPr wrap="square" lIns="0" tIns="0" rIns="0" bIns="0" rtlCol="0" anchor="t"/>
+          <a:lstStyle/>
+          <a:p>
+            <a:pPr indent="0" marL="0">
+              <a:buNone/>
+            </a:pPr>
+            <a:r>
+              <a:rPr lang="en-US" sz="1100" i="1" dirty="0">
+                <a:solidFill>
+                  <a:schemeClr val="tx2"/>
+                </a:solidFill>
+              </a:rPr>
+              <a:t>UNSEEN rows were added after the fixes, so they have no first-run bar.</a:t>
+            </a:r>
+            <a:endParaRPr lang="en-US" sz="1100" dirty="0"/>
+          </a:p>
+        </p:txBody>
+      </p:sp>
+      <p:sp>
+        <p:nvSpPr>
+          <p:cNvPr id="5" name="Result card 1"/>
           <p:cNvSpPr/>
           <p:nvPr/>
         </p:nvSpPr>
         <p:spPr>
           <a:xfrm>
-            <a:off x="457200" y="1234440"/>
-            <a:ext cx="3977640" cy="3246120"/>
+            <a:off x="5989320" y="1188720"/>
+            <a:ext cx="2697480" cy="1024128"/>
           </a:xfrm>
           <a:prstGeom prst="roundRect">
             <a:avLst>
-              <a:gd name="adj" fmla="val 2254"/>
+              <a:gd name="adj" fmla="val 7143"/>
             </a:avLst>
           </a:prstGeom>
           <a:solidFill>
@@ -8427,151 +9240,93 @@
       </p:sp>
       <p:sp>
         <p:nvSpPr>
-          <p:cNvPr id="4" name="Limits heading"/>
-          <p:cNvSpPr txBox="1"/>
-          <p:nvPr/>
-        </p:nvSpPr>
-        <p:spPr>
-          <a:xfrm>
-            <a:off x="685800" y="1371600"/>
-            <a:ext cx="3566160" cy="365760"/>
-          </a:xfrm>
-          <a:prstGeom prst="rect">
-            <a:avLst/>
-          </a:prstGeom>
-          <a:noFill/>
-          <a:ln/>
-        </p:spPr>
-        <p:txBody>
-          <a:bodyPr wrap="square" lIns="0" tIns="0" rIns="0" bIns="0" rtlCol="0" anchor="t"/>
+          <p:cNvPr id="6" name="Result number 1"/>
+          <p:cNvSpPr txBox="1"/>
+          <p:nvPr/>
+        </p:nvSpPr>
+        <p:spPr>
+          <a:xfrm>
+            <a:off x="6126480" y="1261872"/>
+            <a:ext cx="1188720" cy="877824"/>
+          </a:xfrm>
+          <a:prstGeom prst="rect">
+            <a:avLst/>
+          </a:prstGeom>
+          <a:noFill/>
+          <a:ln/>
+        </p:spPr>
+        <p:txBody>
+          <a:bodyPr wrap="square" lIns="0" tIns="0" rIns="0" bIns="0" rtlCol="0" anchor="ctr"/>
           <a:lstStyle/>
           <a:p>
             <a:pPr indent="0" marL="0">
               <a:buNone/>
             </a:pPr>
             <a:r>
-              <a:rPr lang="en-US" sz="2000" b="1" dirty="0">
-                <a:solidFill>
-                  <a:schemeClr val="accent2"/>
+              <a:rPr lang="en-US" sz="2600" b="1" dirty="0">
+                <a:solidFill>
+                  <a:schemeClr val="accent1"/>
                 </a:solidFill>
                 <a:latin typeface="Cambria" pitchFamily="34" charset="0"/>
                 <a:ea typeface="Cambria" pitchFamily="34" charset="-122"/>
                 <a:cs typeface="Cambria" pitchFamily="34" charset="-120"/>
               </a:rPr>
-              <a:t>Limitations</a:t>
-            </a:r>
-            <a:endParaRPr lang="en-US" sz="2000" dirty="0"/>
-          </a:p>
-        </p:txBody>
-      </p:sp>
-      <p:sp>
-        <p:nvSpPr>
-          <p:cNvPr id="5" name="Limits list"/>
-          <p:cNvSpPr txBox="1"/>
-          <p:nvPr/>
-        </p:nvSpPr>
-        <p:spPr>
-          <a:xfrm>
-            <a:off x="685800" y="1828800"/>
-            <a:ext cx="3566160" cy="2560320"/>
-          </a:xfrm>
-          <a:prstGeom prst="rect">
-            <a:avLst/>
-          </a:prstGeom>
-          <a:noFill/>
-          <a:ln/>
-        </p:spPr>
-        <p:txBody>
-          <a:bodyPr wrap="square" lIns="0" tIns="0" rIns="0" bIns="0" rtlCol="0" anchor="t"/>
-          <a:lstStyle/>
-          <a:p>
-            <a:pPr marL="342900" indent="-342900">
-              <a:spcAft>
-                <a:spcPts val="700"/>
-              </a:spcAft>
-              <a:buSzPct val="100000"/>
-              <a:buChar char="•"/>
-            </a:pPr>
-            <a:r>
-              <a:rPr lang="en-US" sz="1400" dirty="0">
+              <a:t>89/89</a:t>
+            </a:r>
+            <a:endParaRPr lang="en-US" sz="2600" dirty="0"/>
+          </a:p>
+        </p:txBody>
+      </p:sp>
+      <p:sp>
+        <p:nvSpPr>
+          <p:cNvPr id="7" name="Result caption 1"/>
+          <p:cNvSpPr txBox="1"/>
+          <p:nvPr/>
+        </p:nvSpPr>
+        <p:spPr>
+          <a:xfrm>
+            <a:off x="7315200" y="1261872"/>
+            <a:ext cx="1280160" cy="877824"/>
+          </a:xfrm>
+          <a:prstGeom prst="rect">
+            <a:avLst/>
+          </a:prstGeom>
+          <a:noFill/>
+          <a:ln/>
+        </p:spPr>
+        <p:txBody>
+          <a:bodyPr wrap="square" lIns="0" tIns="0" rIns="0" bIns="0" rtlCol="0" anchor="ctr"/>
+          <a:lstStyle/>
+          <a:p>
+            <a:pPr indent="0" marL="0">
+              <a:buNone/>
+            </a:pPr>
+            <a:r>
+              <a:rPr lang="en-US" sz="1100" dirty="0">
                 <a:solidFill>
                   <a:schemeClr val="tx1"/>
                 </a:solidFill>
               </a:rPr>
-              <a:t>All data is synthetic and the summaries are templated</a:t>
-            </a:r>
-            <a:endParaRPr lang="en-US" sz="1400" dirty="0"/>
-          </a:p>
-          <a:p>
-            <a:pPr marL="342900" indent="-342900">
-              <a:spcAft>
-                <a:spcPts val="700"/>
-              </a:spcAft>
-              <a:buSzPct val="100000"/>
-              <a:buChar char="•"/>
-            </a:pPr>
-            <a:r>
-              <a:rPr lang="en-US" sz="1400" dirty="0">
-                <a:solidFill>
-                  <a:schemeClr val="tx1"/>
-                </a:solidFill>
-              </a:rPr>
-              <a:t>Clinical abbreviations can hide a pre-existing condition</a:t>
-            </a:r>
-            <a:endParaRPr lang="en-US" sz="1400" dirty="0"/>
-          </a:p>
-          <a:p>
-            <a:pPr marL="342900" indent="-342900">
-              <a:spcAft>
-                <a:spcPts val="700"/>
-              </a:spcAft>
-              <a:buSzPct val="100000"/>
-              <a:buChar char="•"/>
-            </a:pPr>
-            <a:r>
-              <a:rPr lang="en-US" sz="1400" dirty="0">
-                <a:solidFill>
-                  <a:schemeClr val="tx1"/>
-                </a:solidFill>
-              </a:rPr>
-              <a:t>Fraud weights and tariffs are hand-set, not learned</a:t>
-            </a:r>
-            <a:endParaRPr lang="en-US" sz="1400" dirty="0"/>
-          </a:p>
-          <a:p>
-            <a:pPr marL="342900" indent="-342900">
-              <a:spcAft>
-                <a:spcPts val="700"/>
-              </a:spcAft>
-              <a:buSzPct val="100000"/>
-              <a:buChar char="•"/>
-            </a:pPr>
-            <a:r>
-              <a:rPr lang="en-US" sz="1400" dirty="0">
-                <a:solidFill>
-                  <a:schemeClr val="tx1"/>
-                </a:solidFill>
-              </a:rPr>
-              <a:t>The 25-minute manual baseline is an assumption</a:t>
-            </a:r>
-            <a:endParaRPr lang="en-US" sz="1400" dirty="0"/>
-          </a:p>
-        </p:txBody>
-      </p:sp>
-      <p:sp>
-        <p:nvSpPr>
-          <p:cNvPr id="6" name="Future card"/>
+              <a:t>main labelled set</a:t>
+            </a:r>
+            <a:endParaRPr lang="en-US" sz="1100" dirty="0"/>
+          </a:p>
+        </p:txBody>
+      </p:sp>
+      <p:sp>
+        <p:nvSpPr>
+          <p:cNvPr id="8" name="Result card 2"/>
           <p:cNvSpPr/>
           <p:nvPr/>
         </p:nvSpPr>
         <p:spPr>
           <a:xfrm>
-            <a:off x="4709160" y="1234440"/>
-            <a:ext cx="3977640" cy="3246120"/>
+            <a:off x="5989320" y="2359152"/>
+            <a:ext cx="2697480" cy="1024128"/>
           </a:xfrm>
           <a:prstGeom prst="roundRect">
             <a:avLst>
-              <a:gd name="adj" fmla="val 2254"/>
+              <a:gd name="adj" fmla="val 7143"/>
             </a:avLst>
           </a:prstGeom>
           <a:solidFill>
@@ -8582,30 +9337,30 @@
       </p:sp>
       <p:sp>
         <p:nvSpPr>
-          <p:cNvPr id="7" name="Future heading"/>
-          <p:cNvSpPr txBox="1"/>
-          <p:nvPr/>
-        </p:nvSpPr>
-        <p:spPr>
-          <a:xfrm>
-            <a:off x="4937760" y="1371600"/>
-            <a:ext cx="3566160" cy="365760"/>
-          </a:xfrm>
-          <a:prstGeom prst="rect">
-            <a:avLst/>
-          </a:prstGeom>
-          <a:noFill/>
-          <a:ln/>
-        </p:spPr>
-        <p:txBody>
-          <a:bodyPr wrap="square" lIns="0" tIns="0" rIns="0" bIns="0" rtlCol="0" anchor="t"/>
+          <p:cNvPr id="9" name="Result number 2"/>
+          <p:cNvSpPr txBox="1"/>
+          <p:nvPr/>
+        </p:nvSpPr>
+        <p:spPr>
+          <a:xfrm>
+            <a:off x="6126480" y="2432304"/>
+            <a:ext cx="1188720" cy="877824"/>
+          </a:xfrm>
+          <a:prstGeom prst="rect">
+            <a:avLst/>
+          </a:prstGeom>
+          <a:noFill/>
+          <a:ln/>
+        </p:spPr>
+        <p:txBody>
+          <a:bodyPr wrap="square" lIns="0" tIns="0" rIns="0" bIns="0" rtlCol="0" anchor="ctr"/>
           <a:lstStyle/>
           <a:p>
             <a:pPr indent="0" marL="0">
               <a:buNone/>
             </a:pPr>
             <a:r>
-              <a:rPr lang="en-US" sz="2000" b="1" dirty="0">
+              <a:rPr lang="en-US" sz="2600" b="1" dirty="0">
                 <a:solidFill>
                   <a:schemeClr val="accent1"/>
                 </a:solidFill>
@@ -8613,103 +9368,142 @@
                 <a:ea typeface="Cambria" pitchFamily="34" charset="-122"/>
                 <a:cs typeface="Cambria" pitchFamily="34" charset="-120"/>
               </a:rPr>
-              <a:t>Future scope</a:t>
-            </a:r>
-            <a:endParaRPr lang="en-US" sz="2000" dirty="0"/>
-          </a:p>
-        </p:txBody>
-      </p:sp>
-      <p:sp>
-        <p:nvSpPr>
-          <p:cNvPr id="8" name="Future list"/>
-          <p:cNvSpPr txBox="1"/>
-          <p:nvPr/>
-        </p:nvSpPr>
-        <p:spPr>
-          <a:xfrm>
-            <a:off x="4937760" y="1828800"/>
-            <a:ext cx="3566160" cy="2560320"/>
-          </a:xfrm>
-          <a:prstGeom prst="rect">
-            <a:avLst/>
-          </a:prstGeom>
-          <a:noFill/>
-          <a:ln/>
-        </p:spPr>
-        <p:txBody>
-          <a:bodyPr wrap="square" lIns="0" tIns="0" rIns="0" bIns="0" rtlCol="0" anchor="t"/>
-          <a:lstStyle/>
-          <a:p>
-            <a:pPr marL="342900" indent="-342900">
-              <a:spcAft>
-                <a:spcPts val="700"/>
-              </a:spcAft>
-              <a:buSzPct val="100000"/>
-              <a:buChar char="•"/>
-            </a:pPr>
-            <a:r>
-              <a:rPr lang="en-US" sz="1400" dirty="0">
+              <a:t>23/23</a:t>
+            </a:r>
+            <a:endParaRPr lang="en-US" sz="2600" dirty="0"/>
+          </a:p>
+        </p:txBody>
+      </p:sp>
+      <p:sp>
+        <p:nvSpPr>
+          <p:cNvPr id="10" name="Result caption 2"/>
+          <p:cNvSpPr txBox="1"/>
+          <p:nvPr/>
+        </p:nvSpPr>
+        <p:spPr>
+          <a:xfrm>
+            <a:off x="7315200" y="2432304"/>
+            <a:ext cx="1280160" cy="877824"/>
+          </a:xfrm>
+          <a:prstGeom prst="rect">
+            <a:avLst/>
+          </a:prstGeom>
+          <a:noFill/>
+          <a:ln/>
+        </p:spPr>
+        <p:txBody>
+          <a:bodyPr wrap="square" lIns="0" tIns="0" rIns="0" bIns="0" rtlCol="0" anchor="ctr"/>
+          <a:lstStyle/>
+          <a:p>
+            <a:pPr indent="0" marL="0">
+              <a:buNone/>
+            </a:pPr>
+            <a:r>
+              <a:rPr lang="en-US" sz="1100" dirty="0">
                 <a:solidFill>
                   <a:schemeClr val="tx1"/>
                 </a:solidFill>
               </a:rPr>
-              <a:t>Language-model extractor for real, messy documents</a:t>
-            </a:r>
-            <a:endParaRPr lang="en-US" sz="1400" dirty="0"/>
-          </a:p>
-          <a:p>
-            <a:pPr marL="342900" indent="-342900">
-              <a:spcAft>
-                <a:spcPts val="700"/>
-              </a:spcAft>
-              <a:buSzPct val="100000"/>
-              <a:buChar char="•"/>
-            </a:pPr>
-            <a:r>
-              <a:rPr lang="en-US" sz="1400" dirty="0">
+              <a:t>boundary cases, e.g. 29 vs 30 days</a:t>
+            </a:r>
+            <a:endParaRPr lang="en-US" sz="1100" dirty="0"/>
+          </a:p>
+        </p:txBody>
+      </p:sp>
+      <p:sp>
+        <p:nvSpPr>
+          <p:cNvPr id="11" name="Result card 3"/>
+          <p:cNvSpPr/>
+          <p:nvPr/>
+        </p:nvSpPr>
+        <p:spPr>
+          <a:xfrm>
+            <a:off x="5989320" y="3529584"/>
+            <a:ext cx="2697480" cy="1024128"/>
+          </a:xfrm>
+          <a:prstGeom prst="roundRect">
+            <a:avLst>
+              <a:gd name="adj" fmla="val 7143"/>
+            </a:avLst>
+          </a:prstGeom>
+          <a:solidFill>
+            <a:schemeClr val="bg2"/>
+          </a:solidFill>
+          <a:ln/>
+        </p:spPr>
+      </p:sp>
+      <p:sp>
+        <p:nvSpPr>
+          <p:cNvPr id="12" name="Result number 3"/>
+          <p:cNvSpPr txBox="1"/>
+          <p:nvPr/>
+        </p:nvSpPr>
+        <p:spPr>
+          <a:xfrm>
+            <a:off x="6126480" y="3602736"/>
+            <a:ext cx="1188720" cy="877824"/>
+          </a:xfrm>
+          <a:prstGeom prst="rect">
+            <a:avLst/>
+          </a:prstGeom>
+          <a:noFill/>
+          <a:ln/>
+        </p:spPr>
+        <p:txBody>
+          <a:bodyPr wrap="square" lIns="0" tIns="0" rIns="0" bIns="0" rtlCol="0" anchor="ctr"/>
+          <a:lstStyle/>
+          <a:p>
+            <a:pPr indent="0" marL="0">
+              <a:buNone/>
+            </a:pPr>
+            <a:r>
+              <a:rPr lang="en-US" sz="2600" b="1" dirty="0">
+                <a:solidFill>
+                  <a:schemeClr val="accent2"/>
+                </a:solidFill>
+                <a:latin typeface="Cambria" pitchFamily="34" charset="0"/>
+                <a:ea typeface="Cambria" pitchFamily="34" charset="-122"/>
+                <a:cs typeface="Cambria" pitchFamily="34" charset="-120"/>
+              </a:rPr>
+              <a:t>94.8%</a:t>
+            </a:r>
+            <a:endParaRPr lang="en-US" sz="2600" dirty="0"/>
+          </a:p>
+        </p:txBody>
+      </p:sp>
+      <p:sp>
+        <p:nvSpPr>
+          <p:cNvPr id="13" name="Result caption 3"/>
+          <p:cNvSpPr txBox="1"/>
+          <p:nvPr/>
+        </p:nvSpPr>
+        <p:spPr>
+          <a:xfrm>
+            <a:off x="7315200" y="3602736"/>
+            <a:ext cx="1280160" cy="877824"/>
+          </a:xfrm>
+          <a:prstGeom prst="rect">
+            <a:avLst/>
+          </a:prstGeom>
+          <a:noFill/>
+          <a:ln/>
+        </p:spPr>
+        <p:txBody>
+          <a:bodyPr wrap="square" lIns="0" tIns="0" rIns="0" bIns="0" rtlCol="0" anchor="ctr"/>
+          <a:lstStyle/>
+          <a:p>
+            <a:pPr indent="0" marL="0">
+              <a:buNone/>
+            </a:pPr>
+            <a:r>
+              <a:rPr lang="en-US" sz="1100" dirty="0">
                 <a:solidFill>
                   <a:schemeClr val="tx1"/>
                 </a:solidFill>
               </a:rPr>
-              <a:t>OCR for scanned bills and summaries</a:t>
-            </a:r>
-            <a:endParaRPr lang="en-US" sz="1400" dirty="0"/>
-          </a:p>
-          <a:p>
-            <a:pPr marL="342900" indent="-342900">
-              <a:spcAft>
-                <a:spcPts val="700"/>
-              </a:spcAft>
-              <a:buSzPct val="100000"/>
-              <a:buChar char="•"/>
-            </a:pPr>
-            <a:r>
-              <a:rPr lang="en-US" sz="1400" dirty="0">
-                <a:solidFill>
-                  <a:schemeClr val="tx1"/>
-                </a:solidFill>
-              </a:rPr>
-              <a:t>Strict mode: hold any claim whose history cannot be verified</a:t>
-            </a:r>
-            <a:endParaRPr lang="en-US" sz="1400" dirty="0"/>
-          </a:p>
-          <a:p>
-            <a:pPr marL="342900" indent="-342900">
-              <a:spcAft>
-                <a:spcPts val="700"/>
-              </a:spcAft>
-              <a:buSzPct val="100000"/>
-              <a:buChar char="•"/>
-            </a:pPr>
-            <a:r>
-              <a:rPr lang="en-US" sz="1400" dirty="0">
-                <a:solidFill>
-                  <a:schemeClr val="tx1"/>
-                </a:solidFill>
-              </a:rPr>
-              <a:t>Learn fraud weights from real outcomes, with human review feedback</a:t>
-            </a:r>
-            <a:endParaRPr lang="en-US" sz="1400" dirty="0"/>
+              <a:t>on unseen abbreviations, 23 of 240 risky claims wrongly paid</a:t>
+            </a:r>
+            <a:endParaRPr lang="en-US" sz="1100" dirty="0"/>
           </a:p>
         </p:txBody>
       </p:sp>
@@ -8793,8 +9587,8 @@
         </p:nvSpPr>
         <p:spPr>
           <a:xfrm>
-            <a:off x="548640" y="1554480"/>
-            <a:ext cx="8046720" cy="914400"/>
+            <a:off x="457200" y="292608"/>
+            <a:ext cx="8229600" cy="777240"/>
           </a:xfrm>
           <a:prstGeom prst="rect">
             <a:avLst/>
@@ -8810,52 +9604,369 @@
               <a:buNone/>
             </a:pPr>
             <a:r>
-              <a:rPr lang="en-US" sz="4000" b="1" dirty="0">
-                <a:solidFill>
-                  <a:schemeClr val="bg1"/>
-                </a:solidFill>
-              </a:rPr>
-              <a:t>Thank you</a:t>
-            </a:r>
-            <a:endParaRPr lang="en-US" sz="4000" dirty="0"/>
-          </a:p>
-        </p:txBody>
-      </p:sp>
-      <p:sp>
-        <p:nvSpPr>
-          <p:cNvPr id="3" name="Text 0"/>
+              <a:rPr lang="en-US" sz="2800" b="1" dirty="0">
+                <a:solidFill>
+                  <a:schemeClr val="tx1"/>
+                </a:solidFill>
+              </a:rPr>
+              <a:t>Limitations and what comes next</a:t>
+            </a:r>
+            <a:endParaRPr lang="en-US" sz="2800" dirty="0"/>
+          </a:p>
+        </p:txBody>
+      </p:sp>
+      <p:sp>
+        <p:nvSpPr>
+          <p:cNvPr id="3" name="Limits card"/>
           <p:cNvSpPr/>
+          <p:nvPr/>
+        </p:nvSpPr>
+        <p:spPr>
+          <a:xfrm>
+            <a:off x="457200" y="1234440"/>
+            <a:ext cx="3977640" cy="3246120"/>
+          </a:xfrm>
+          <a:prstGeom prst="roundRect">
+            <a:avLst>
+              <a:gd name="adj" fmla="val 2254"/>
+            </a:avLst>
+          </a:prstGeom>
+          <a:solidFill>
+            <a:schemeClr val="bg2"/>
+          </a:solidFill>
+          <a:ln/>
+        </p:spPr>
+      </p:sp>
+      <p:sp>
+        <p:nvSpPr>
+          <p:cNvPr id="4" name="Limits heading"/>
+          <p:cNvSpPr txBox="1"/>
+          <p:nvPr/>
+        </p:nvSpPr>
+        <p:spPr>
+          <a:xfrm>
+            <a:off x="685800" y="1371600"/>
+            <a:ext cx="3566160" cy="365760"/>
+          </a:xfrm>
+          <a:prstGeom prst="rect">
+            <a:avLst/>
+          </a:prstGeom>
+          <a:noFill/>
+          <a:ln/>
+        </p:spPr>
+        <p:txBody>
+          <a:bodyPr wrap="square" lIns="0" tIns="0" rIns="0" bIns="0" rtlCol="0" anchor="t"/>
+          <a:lstStyle/>
+          <a:p>
+            <a:pPr indent="0" marL="0">
+              <a:buNone/>
+            </a:pPr>
+            <a:r>
+              <a:rPr lang="en-US" sz="2000" b="1" dirty="0">
+                <a:solidFill>
+                  <a:schemeClr val="accent2"/>
+                </a:solidFill>
+                <a:latin typeface="Cambria" pitchFamily="34" charset="0"/>
+                <a:ea typeface="Cambria" pitchFamily="34" charset="-122"/>
+                <a:cs typeface="Cambria" pitchFamily="34" charset="-120"/>
+              </a:rPr>
+              <a:t>Limitations</a:t>
+            </a:r>
+            <a:endParaRPr lang="en-US" sz="2000" dirty="0"/>
+          </a:p>
+        </p:txBody>
+      </p:sp>
+      <p:sp>
+        <p:nvSpPr>
+          <p:cNvPr id="5" name="Limits list"/>
+          <p:cNvSpPr txBox="1"/>
+          <p:nvPr/>
+        </p:nvSpPr>
+        <p:spPr>
+          <a:xfrm>
+            <a:off x="685800" y="1828800"/>
+            <a:ext cx="3566160" cy="2560320"/>
+          </a:xfrm>
+          <a:prstGeom prst="rect">
+            <a:avLst/>
+          </a:prstGeom>
+          <a:noFill/>
+          <a:ln/>
+        </p:spPr>
+        <p:txBody>
+          <a:bodyPr wrap="square" lIns="0" tIns="0" rIns="0" bIns="0" rtlCol="0" anchor="t"/>
+          <a:lstStyle/>
+          <a:p>
+            <a:pPr marL="342900" indent="-342900">
+              <a:spcAft>
+                <a:spcPts val="700"/>
+              </a:spcAft>
+              <a:buSzPct val="100000"/>
+              <a:buChar char="•"/>
+            </a:pPr>
+            <a:r>
+              <a:rPr lang="en-US" sz="1400" dirty="0">
+                <a:solidFill>
+                  <a:schemeClr val="tx1"/>
+                </a:solidFill>
+              </a:rPr>
+              <a:t>All data is synthetic and the summaries are templated</a:t>
+            </a:r>
+            <a:endParaRPr lang="en-US" sz="1400" dirty="0"/>
+          </a:p>
+          <a:p>
+            <a:pPr marL="342900" indent="-342900">
+              <a:spcAft>
+                <a:spcPts val="700"/>
+              </a:spcAft>
+              <a:buSzPct val="100000"/>
+              <a:buChar char="•"/>
+            </a:pPr>
+            <a:r>
+              <a:rPr lang="en-US" sz="1400" dirty="0">
+                <a:solidFill>
+                  <a:schemeClr val="tx1"/>
+                </a:solidFill>
+              </a:rPr>
+              <a:t>Clinical abbreviations can hide a pre-existing condition</a:t>
+            </a:r>
+            <a:endParaRPr lang="en-US" sz="1400" dirty="0"/>
+          </a:p>
+          <a:p>
+            <a:pPr marL="342900" indent="-342900">
+              <a:spcAft>
+                <a:spcPts val="700"/>
+              </a:spcAft>
+              <a:buSzPct val="100000"/>
+              <a:buChar char="•"/>
+            </a:pPr>
+            <a:r>
+              <a:rPr lang="en-US" sz="1400" dirty="0">
+                <a:solidFill>
+                  <a:schemeClr val="tx1"/>
+                </a:solidFill>
+              </a:rPr>
+              <a:t>Fraud weights and tariffs are hand-set, not learned</a:t>
+            </a:r>
+            <a:endParaRPr lang="en-US" sz="1400" dirty="0"/>
+          </a:p>
+          <a:p>
+            <a:pPr marL="342900" indent="-342900">
+              <a:spcAft>
+                <a:spcPts val="700"/>
+              </a:spcAft>
+              <a:buSzPct val="100000"/>
+              <a:buChar char="•"/>
+            </a:pPr>
+            <a:r>
+              <a:rPr lang="en-US" sz="1400" dirty="0">
+                <a:solidFill>
+                  <a:schemeClr val="tx1"/>
+                </a:solidFill>
+              </a:rPr>
+              <a:t>The 25-minute manual baseline is an assumption</a:t>
+            </a:r>
+            <a:endParaRPr lang="en-US" sz="1400" dirty="0"/>
+          </a:p>
+        </p:txBody>
+      </p:sp>
+      <p:sp>
+        <p:nvSpPr>
+          <p:cNvPr id="6" name="Future card"/>
+          <p:cNvSpPr/>
+          <p:nvPr/>
+        </p:nvSpPr>
+        <p:spPr>
+          <a:xfrm>
+            <a:off x="4709160" y="1234440"/>
+            <a:ext cx="3977640" cy="3246120"/>
+          </a:xfrm>
+          <a:prstGeom prst="roundRect">
+            <a:avLst>
+              <a:gd name="adj" fmla="val 2254"/>
+            </a:avLst>
+          </a:prstGeom>
+          <a:solidFill>
+            <a:schemeClr val="bg2"/>
+          </a:solidFill>
+          <a:ln/>
+        </p:spPr>
+      </p:sp>
+      <p:sp>
+        <p:nvSpPr>
+          <p:cNvPr id="7" name="Future heading"/>
+          <p:cNvSpPr txBox="1"/>
+          <p:nvPr/>
+        </p:nvSpPr>
+        <p:spPr>
+          <a:xfrm>
+            <a:off x="4937760" y="1371600"/>
+            <a:ext cx="3566160" cy="365760"/>
+          </a:xfrm>
+          <a:prstGeom prst="rect">
+            <a:avLst/>
+          </a:prstGeom>
+          <a:noFill/>
+          <a:ln/>
+        </p:spPr>
+        <p:txBody>
+          <a:bodyPr wrap="square" lIns="0" tIns="0" rIns="0" bIns="0" rtlCol="0" anchor="t"/>
+          <a:lstStyle/>
+          <a:p>
+            <a:pPr indent="0" marL="0">
+              <a:buNone/>
+            </a:pPr>
+            <a:r>
+              <a:rPr lang="en-US" sz="2000" b="1" dirty="0">
+                <a:solidFill>
+                  <a:schemeClr val="accent1"/>
+                </a:solidFill>
+                <a:latin typeface="Cambria" pitchFamily="34" charset="0"/>
+                <a:ea typeface="Cambria" pitchFamily="34" charset="-122"/>
+                <a:cs typeface="Cambria" pitchFamily="34" charset="-120"/>
+              </a:rPr>
+              <a:t>Future scope</a:t>
+            </a:r>
+            <a:endParaRPr lang="en-US" sz="2000" dirty="0"/>
+          </a:p>
+        </p:txBody>
+      </p:sp>
+      <p:sp>
+        <p:nvSpPr>
+          <p:cNvPr id="8" name="Future list"/>
+          <p:cNvSpPr txBox="1"/>
+          <p:nvPr/>
+        </p:nvSpPr>
+        <p:spPr>
+          <a:xfrm>
+            <a:off x="4937760" y="1828800"/>
+            <a:ext cx="3566160" cy="2560320"/>
+          </a:xfrm>
+          <a:prstGeom prst="rect">
+            <a:avLst/>
+          </a:prstGeom>
+          <a:noFill/>
+          <a:ln/>
+        </p:spPr>
+        <p:txBody>
+          <a:bodyPr wrap="square" lIns="0" tIns="0" rIns="0" bIns="0" rtlCol="0" anchor="t"/>
+          <a:lstStyle/>
+          <a:p>
+            <a:pPr marL="342900" indent="-342900">
+              <a:spcAft>
+                <a:spcPts val="700"/>
+              </a:spcAft>
+              <a:buSzPct val="100000"/>
+              <a:buChar char="•"/>
+            </a:pPr>
+            <a:r>
+              <a:rPr lang="en-US" sz="1400" dirty="0">
+                <a:solidFill>
+                  <a:schemeClr val="tx1"/>
+                </a:solidFill>
+              </a:rPr>
+              <a:t>Language-model extractor for real, messy documents</a:t>
+            </a:r>
+            <a:endParaRPr lang="en-US" sz="1400" dirty="0"/>
+          </a:p>
+          <a:p>
+            <a:pPr marL="342900" indent="-342900">
+              <a:spcAft>
+                <a:spcPts val="700"/>
+              </a:spcAft>
+              <a:buSzPct val="100000"/>
+              <a:buChar char="•"/>
+            </a:pPr>
+            <a:r>
+              <a:rPr lang="en-US" sz="1400" dirty="0">
+                <a:solidFill>
+                  <a:schemeClr val="tx1"/>
+                </a:solidFill>
+              </a:rPr>
+              <a:t>OCR for scanned bills and summaries</a:t>
+            </a:r>
+            <a:endParaRPr lang="en-US" sz="1400" dirty="0"/>
+          </a:p>
+          <a:p>
+            <a:pPr marL="342900" indent="-342900">
+              <a:spcAft>
+                <a:spcPts val="700"/>
+              </a:spcAft>
+              <a:buSzPct val="100000"/>
+              <a:buChar char="•"/>
+            </a:pPr>
+            <a:r>
+              <a:rPr lang="en-US" sz="1400" dirty="0">
+                <a:solidFill>
+                  <a:schemeClr val="tx1"/>
+                </a:solidFill>
+              </a:rPr>
+              <a:t>Strict mode: hold any claim whose history cannot be verified</a:t>
+            </a:r>
+            <a:endParaRPr lang="en-US" sz="1400" dirty="0"/>
+          </a:p>
+          <a:p>
+            <a:pPr marL="342900" indent="-342900">
+              <a:spcAft>
+                <a:spcPts val="700"/>
+              </a:spcAft>
+              <a:buSzPct val="100000"/>
+              <a:buChar char="•"/>
+            </a:pPr>
+            <a:r>
+              <a:rPr lang="en-US" sz="1400" dirty="0">
+                <a:solidFill>
+                  <a:schemeClr val="tx1"/>
+                </a:solidFill>
+              </a:rPr>
+              <a:t>Learn fraud weights from real outcomes, with human review feedback</a:t>
+            </a:r>
+            <a:endParaRPr lang="en-US" sz="1400" dirty="0"/>
+          </a:p>
+        </p:txBody>
+      </p:sp>
+      <p:sp>
+        <p:nvSpPr>
+          <p:cNvPr id="25" name="Slide Number Placeholder 0"/>
+          <p:cNvSpPr>
+            <a:spLocks noGrp="1"/>
+          </p:cNvSpPr>
           <p:nvPr>
-            <p:ph idx="101" type="body" hasCustomPrompt="1"/>
+            <p:ph type="sldNum" sz="quarter" idx="4294967295"/>
           </p:nvPr>
         </p:nvSpPr>
         <p:spPr>
           <a:xfrm>
-            <a:off x="548640" y="2560320"/>
-            <a:ext cx="7315200" cy="1097280"/>
-          </a:xfrm>
-          <a:prstGeom prst="rect">
-            <a:avLst/>
-          </a:prstGeom>
-          <a:noFill/>
-          <a:ln/>
-        </p:spPr>
-        <p:txBody>
-          <a:bodyPr wrap="square" lIns="0" tIns="0" rIns="0" bIns="0" rtlCol="0" anchor="t"/>
-          <a:lstStyle/>
-          <a:p>
-            <a:pPr indent="0" marL="0">
-              <a:buNone/>
-            </a:pPr>
-            <a:r>
-              <a:rPr lang="en-US" sz="1800" dirty="0">
-                <a:solidFill>
-                  <a:schemeClr val="bg2"/>
-                </a:solidFill>
-              </a:rPr>
-              <a:t>Questions welcome. The Streamlit app, the architecture diagram and the robustness reports are all in the project folder.</a:t>
-            </a:r>
-            <a:endParaRPr lang="en-US" sz="1800" dirty="0"/>
+            <a:off x="8321040" y="4773168"/>
+            <a:ext cx="457200" cy="228600"/>
+          </a:xfrm>
+          <a:prstGeom prst="rect">
+            <a:avLst/>
+          </a:prstGeom>
+          <a:extLst>
+            <a:ext uri="{C572A759-6A51-4108-AA02-DFA0A04FC94B}">
+              <ma14:wrappingTextBoxFlag xmlns:ma14="http://schemas.microsoft.com/office/mac/drawingml/2011/main" val="0"/>
+            </a:ext>
+          </a:extLst>
+        </p:spPr>
+        <p:txBody>
+          <a:bodyPr/>
+          <a:lstStyle>
+            <a:lvl1pPr>
+              <a:defRPr sz="1000">
+                <a:solidFill>
+                  <a:schemeClr val="tx2"/>
+                </a:solidFill>
+              </a:defRPr>
+            </a:lvl1pPr>
+          </a:lstStyle>
+          <a:p>
+            <a:pPr algn="r"/>
+            <a:fld id="{F7021451-1387-4CA6-816F-3879F97B5CBC}" type="slidenum">
+              <a:rPr b="0" lang="en-US"/>
+              <a:t>9</a:t>
+            </a:fld>
+            <a:endParaRPr lang="en-US"/>
           </a:p>
         </p:txBody>
       </p:sp>

--- a/docs/ClaimsAgent_CA3.pptx
+++ b/docs/ClaimsAgent_CA3.pptx
@@ -117,42 +117,38 @@
   <p:extLst>
     <p:ext uri="{521415D9-36F7-43E2-AB2F-B90AF26B5E84}">
       <p14:sectionLst xmlns:p14="http://schemas.microsoft.com/office/powerpoint/2010/main">
-        <p14:section name="Opening" id="{4f1a2292-c2ee-29e1-6b09-efb8d2f50295}">
+        <p14:section name="Opening" id="{bccf1a17-b97d-96d0-2fcb-007820aa0fcd}">
           <p14:sldIdLst>
             <p14:sldId id="256"/>
           </p14:sldIdLst>
         </p14:section>
-        <p14:section name="Problem" id="{eda0fa26-595e-3437-2efa-ccfa7b496306}">
+        <p14:section name="Problem" id="{95cc6792-ae7c-35ba-5b43-b9f80f38ec70}">
           <p14:sldIdLst>
             <p14:sldId id="257"/>
-            <p14:sldId id="258"/>
           </p14:sldIdLst>
         </p14:section>
-        <p14:section name="Solution" id="{a32b620a-20be-be5e-a68a-9734241c631f}">
+        <p14:section name="Solution" id="{a9ffcb44-236f-0eb1-bcf9-e85fc3430c5e}">
           <p14:sldIdLst>
+            <p14:sldId id="258"/>
             <p14:sldId id="259"/>
             <p14:sldId id="260"/>
             <p14:sldId id="261"/>
           </p14:sldIdLst>
         </p14:section>
-        <p14:section name="Demonstration" id="{da163610-c58f-ee43-1da9-54b392e8cbce}">
+        <p14:section name="Validation" id="{75084c3f-ea0a-3200-d7d3-bc0275a89d99}">
           <p14:sldIdLst>
             <p14:sldId id="262"/>
           </p14:sldIdLst>
         </p14:section>
-        <p14:section name="Validation" id="{bd9c42f3-0aaf-3701-83c4-9e498b922302}">
+        <p14:section name="Close" id="{c47f1182-5003-f5ca-b168-020bf0a950a1}">
           <p14:sldIdLst>
             <p14:sldId id="263"/>
+            <p14:sldId id="264"/>
           </p14:sldIdLst>
         </p14:section>
-        <p14:section name="Close" id="{a95fee85-736e-2ad1-3e83-f85f25b020e4}">
+        <p14:section name="Appendix" id="{3da590cd-270c-3947-a1cf-f6d30844c375}">
           <p14:sldIdLst>
-            <p14:sldId id="264"/>
             <p14:sldId id="265"/>
-          </p14:sldIdLst>
-        </p14:section>
-        <p14:section name="Appendix" id="{d66d2236-0d2d-6932-a280-740f94f1a59b}">
-          <p14:sldIdLst>
             <p14:sldId id="266"/>
           </p14:sldIdLst>
         </p14:section>
@@ -995,7 +991,7 @@
           <a:p>
             <a:r>
               <a:rPr lang="en-US" dirty="0"/>
-              <a:t>Introduce the project in one sentence: five cooperating agents that do the first pass on a health-insurance claim, and send only the risky or uncertain ones to a human. The five circles are the agents we will walk through.</a:t>
+              <a:t>Introduce yourselves and the project in one breath: five software agents that make the first decision on a health-insurance claim, and hand the doubtful ones to a person. About 15 seconds.</a:t>
             </a:r>
             <a:endParaRPr lang="en-US" dirty="0"/>
           </a:p>
@@ -1083,7 +1079,7 @@
           <a:p>
             <a:r>
               <a:rPr lang="en-US" dirty="0"/>
-              <a:t/>
+              <a:t>Backup slide. In the live app these are the demo buttons: part payment, rejection, the second-look loop, and the simulated calculation error.</a:t>
             </a:r>
             <a:endParaRPr lang="en-US" dirty="0"/>
           </a:p>
@@ -1259,7 +1255,7 @@
           <a:p>
             <a:r>
               <a:rPr lang="en-US" dirty="0"/>
-              <a:t>The manual baseline of about 25 minutes per claim is our assumption, not a measured figure. The point: this is rule-heavy, document-heavy work where mistakes are expensive and every decision has to be explainable. That is the profile where an agent workflow beats a single chatbot.</a:t>
+              <a:t>About 40 seconds. When you are treated in hospital, the hospital sends the insurer a claim. Someone has to decide whether to pay, how much, or whether it looks wrong. That is rule-heavy and document-heavy work, mistakes are expensive, and every decision must be explainable. The 25 minute figure is our assumption, not a measured number.</a:t>
             </a:r>
             <a:endParaRPr lang="en-US" dirty="0"/>
           </a:p>
@@ -1347,7 +1343,7 @@
           <a:p>
             <a:r>
               <a:rPr lang="en-US" dirty="0"/>
-              <a:t>Left is what happens today; right is our pipeline. The percentage is the share of the 89 synthetic claims settled as approve, partial or reject without a human; escalations and document queries go to a person. Timing is with the deterministic mock model, so it is a pipeline speed, not a language-model speed.</a:t>
+              <a:t>About 40 seconds. Walk left to right. The key idea is the dashed arrow: the Critic can send the claim back to the Planner, so this is a loop and not a straight pipe. The Planner keeps cheap claims on a quick plan and only adds fraud checks when risk shows up. If the Critic notices a risk the plan missed, or a wrong calculation, it triggers a re-plan, at most two rounds, then escalates to a human.</a:t>
             </a:r>
             <a:endParaRPr lang="en-US" dirty="0"/>
           </a:p>
@@ -1435,7 +1431,7 @@
           <a:p>
             <a:r>
               <a:rPr lang="en-US" dirty="0"/>
-              <a:t>Walk left to right. The key idea is the dashed arrow: the Critic can send the claim back to the Planner, so this is a loop and not a straight pipe. The Planner keeps cheap claims on a lean plan and adds fraud checks only when risk shows up. If the Critic notices a risk the plan missed, or a wrong calculation, it triggers a re-plan, at most two rounds, then escalates to a human.</a:t>
+              <a:t>About 40 seconds. This is a screenshot of our live app on claim CLM-26-0019. Point at the dashed arrow and the RE-PLAN 1 counter: the Planner and the Critic each ran twice. The quick plan skipped the fraud check because the claim looked small and normal. The Critic noticed the price was about 2.4 times the normal cost, so it sent the claim back, and the second round ran the fraud check.</a:t>
             </a:r>
             <a:endParaRPr lang="en-US" dirty="0"/>
           </a:p>
@@ -1523,7 +1519,7 @@
           <a:p>
             <a:r>
               <a:rPr lang="en-US" dirty="0"/>
-              <a:t>Use this slide before the live demo, so the audience knows what they are about to see. This is claim CLM-26-0019. The quick plan skipped the fraud check because the claim looked small and normal. The Critic noticed the price was about 2.4 times the normal cost, so it sent the claim back. After the re-check, the fraud score was 60 out of 100 and the claim went to a human.</a:t>
+              <a:t>About 30 seconds, then switch to the live app and run the demo. Every outcome comes with a plain-English reason and the policy rule behind it, which is the audit trail. The gold box is the moment the Critic sent the claim back.</a:t>
             </a:r>
             <a:endParaRPr lang="en-US" dirty="0"/>
           </a:p>
@@ -1611,7 +1607,7 @@
           <a:p>
             <a:r>
               <a:rPr lang="en-US" dirty="0"/>
-              <a:t>Read the ladder top to bottom: a hard rule failure always wins, then missing documents, then risk flags, then deductions. Every outcome cites policy clause ids, which is the audit trail. The Critic on the right is a separate validator: it recomputes the payout, checks limits and citations, and asks whether the fraud screening matched the risk.</a:t>
+              <a:t>About 30 seconds. Read the ladder top to bottom: a hard rule failure always wins, then missing documents, then risk flags, then deductions. Every outcome cites policy clause ids. The Critic on the right is a separate validator that recomputes the payout and asks whether the fraud screening matched the risk.</a:t>
             </a:r>
             <a:endParaRPr lang="en-US" dirty="0"/>
           </a:p>
@@ -1699,7 +1695,7 @@
           <a:p>
             <a:r>
               <a:rPr lang="en-US" dirty="0"/>
-              <a:t>Switch to the Streamlit app and run these four in order. Claim 0019 is the best one: the Planner chooses a lean plan, the Critic notices the non-room charges are about twice the benchmark, sends it back, and the second round adds the fraud screening and escalates. Then toggle the fault injection on claim 0003 to show the Critic catching a deliberate overpayment.</a:t>
+              <a:t>About 50 seconds, and be candid. The main set scores 89 of 89, but its labels come from the same design as the rules, so that proves coverage, not real-world accuracy. So we built a harder test: 445 held-out claims, five kinds of noise, and 23 boundary cases. The first run, the grey bars, exposed real weaknesses and we fixed them. The two UNSEEN rows were added after the fixes and were not tuned against. Clinical abbreviations like TKR or k/c/o DM-2 are still a real gap: 23 risky claims slipped through. That motivates a language-model extractor.</a:t>
             </a:r>
             <a:endParaRPr lang="en-US" dirty="0"/>
           </a:p>
@@ -1787,7 +1783,7 @@
           <a:p>
             <a:r>
               <a:rPr lang="en-US" dirty="0"/>
-              <a:t>Be candid here. The main set scores 89 of 89, but its labels come from the same design as the rules, so that proves coverage, not real-world accuracy. So we built a harder test: 445 held-out claims, five kinds of noise, and 23 boundary cases. The first run, the grey bars, exposed real weaknesses and we fixed them. The two UNSEEN rows were added after the fixes and were not tuned against. Clinical abbreviations like TKR or k/c/o DM-2 are still a real gap: 23 risky claims slipped through. That motivates a language-model extractor.</a:t>
+              <a:t>About 30 seconds. Limitations first, because the evaluators will ask. The abbreviation gap is the one we know about and measured. The next step is a language-model extractor, which our pluggable model layer already supports, plus a strict mode that trades more manual reviews for fewer missed pre-existing conditions.</a:t>
             </a:r>
             <a:endParaRPr lang="en-US" dirty="0"/>
           </a:p>
@@ -1875,7 +1871,7 @@
           <a:p>
             <a:r>
               <a:rPr lang="en-US" dirty="0"/>
-              <a:t>Limitations first, because the evaluators will ask. The abbreviation gap is the one we know about and measured. The next step is a language-model extractor, which our pluggable model layer already supports, plus a strict mode that trades more manual reviews for fewer missed pre-existing conditions.</a:t>
+              <a:t>Close, then take questions. Both members should be ready to answer on any slide.</a:t>
             </a:r>
             <a:endParaRPr lang="en-US" dirty="0"/>
           </a:p>
@@ -1981,8 +1977,8 @@
         </p:nvSpPr>
         <p:spPr>
           <a:xfrm>
-            <a:off x="548640" y="1143000"/>
-            <a:ext cx="8046720" cy="1097280"/>
+            <a:off x="548640" y="868680"/>
+            <a:ext cx="8046720" cy="868680"/>
           </a:xfrm>
           <a:prstGeom prst="rect">
             <a:avLst/>
@@ -2020,8 +2016,8 @@
         </p:nvSpPr>
         <p:spPr>
           <a:xfrm>
-            <a:off x="548640" y="2331720"/>
-            <a:ext cx="7315200" cy="822960"/>
+            <a:off x="548640" y="1783080"/>
+            <a:ext cx="7498080" cy="777240"/>
           </a:xfrm>
           <a:prstGeom prst="rect">
             <a:avLst/>
@@ -2032,7 +2028,7 @@
         <p:txBody>
           <a:bodyPr wrap="square" rtlCol="0"/>
           <a:lstStyle>
-            <a:lvl1pPr indent="0" marL="0">
+            <a:lvl1pPr algn="l" indent="0" marL="0">
               <a:buNone/>
               <a:defRPr lang="en-US" sz="1800" dirty="0">
                 <a:solidFill>
@@ -2042,7 +2038,7 @@
             </a:lvl1pPr>
           </a:lstStyle>
           <a:p>
-            <a:pPr indent="0" marL="0">
+            <a:pPr algn="l" indent="0" marL="0">
               <a:buNone/>
             </a:pPr>
             <a:endParaRPr lang="en-US" sz="1800" dirty="0"/>
@@ -2243,8 +2239,8 @@
         </p:nvSpPr>
         <p:spPr>
           <a:xfrm>
-            <a:off x="548640" y="1554480"/>
-            <a:ext cx="8046720" cy="914400"/>
+            <a:off x="548640" y="822960"/>
+            <a:ext cx="8046720" cy="822960"/>
           </a:xfrm>
           <a:prstGeom prst="rect">
             <a:avLst/>
@@ -2282,8 +2278,8 @@
         </p:nvSpPr>
         <p:spPr>
           <a:xfrm>
-            <a:off x="548640" y="2560320"/>
-            <a:ext cx="7315200" cy="1097280"/>
+            <a:off x="548640" y="1691640"/>
+            <a:ext cx="7498080" cy="731520"/>
           </a:xfrm>
           <a:prstGeom prst="rect">
             <a:avLst/>
@@ -2294,7 +2290,7 @@
         <p:txBody>
           <a:bodyPr wrap="square" rtlCol="0"/>
           <a:lstStyle>
-            <a:lvl1pPr indent="0" marL="0">
+            <a:lvl1pPr algn="l" indent="0" marL="0">
               <a:buNone/>
               <a:defRPr lang="en-US" sz="1800" dirty="0">
                 <a:solidFill>
@@ -2304,7 +2300,7 @@
             </a:lvl1pPr>
           </a:lstStyle>
           <a:p>
-            <a:pPr indent="0" marL="0">
+            <a:pPr algn="l" indent="0" marL="0">
               <a:buNone/>
             </a:pPr>
             <a:endParaRPr lang="en-US" sz="1800" dirty="0"/>
@@ -2663,7 +2659,43 @@
       </p:grpSpPr>
       <p:sp>
         <p:nvSpPr>
-          <p:cNvPr id="2" name="Text 0"/>
+          <p:cNvPr id="2" name="Cover tag"/>
+          <p:cNvSpPr txBox="1"/>
+          <p:nvPr/>
+        </p:nvSpPr>
+        <p:spPr>
+          <a:xfrm>
+            <a:off x="548640" y="457200"/>
+            <a:ext cx="8046720" cy="274320"/>
+          </a:xfrm>
+          <a:prstGeom prst="rect">
+            <a:avLst/>
+          </a:prstGeom>
+          <a:noFill/>
+          <a:ln/>
+        </p:spPr>
+        <p:txBody>
+          <a:bodyPr wrap="square" lIns="0" tIns="0" rIns="0" bIns="0" rtlCol="0" anchor="t"/>
+          <a:lstStyle/>
+          <a:p>
+            <a:pPr indent="0" marL="0">
+              <a:buNone/>
+            </a:pPr>
+            <a:r>
+              <a:rPr lang="en-US" sz="1200" b="1" spc="200" kern="0" dirty="0">
+                <a:solidFill>
+                  <a:schemeClr val="accent1"/>
+                </a:solidFill>
+              </a:rPr>
+              <a:t>CA-3  |  AGENTIC AI  |  DOMAIN-SPECIFIC PROOF OF CONCEPT</a:t>
+            </a:r>
+            <a:endParaRPr lang="en-US" sz="1200" dirty="0"/>
+          </a:p>
+        </p:txBody>
+      </p:sp>
+      <p:sp>
+        <p:nvSpPr>
+          <p:cNvPr id="3" name="Text 0"/>
           <p:cNvSpPr/>
           <p:nvPr>
             <p:ph idx="100" type="title" hasCustomPrompt="1"/>
@@ -2671,8 +2703,8 @@
         </p:nvSpPr>
         <p:spPr>
           <a:xfrm>
-            <a:off x="548640" y="1143000"/>
-            <a:ext cx="8046720" cy="1097280"/>
+            <a:off x="548640" y="868680"/>
+            <a:ext cx="8046720" cy="868680"/>
           </a:xfrm>
           <a:prstGeom prst="rect">
             <a:avLst/>
@@ -2701,7 +2733,7 @@
       </p:sp>
       <p:sp>
         <p:nvSpPr>
-          <p:cNvPr id="3" name="Text 0"/>
+          <p:cNvPr id="4" name="Text 0"/>
           <p:cNvSpPr/>
           <p:nvPr>
             <p:ph idx="101" type="body" hasCustomPrompt="1"/>
@@ -2709,8 +2741,8 @@
         </p:nvSpPr>
         <p:spPr>
           <a:xfrm>
-            <a:off x="548640" y="2331720"/>
-            <a:ext cx="7315200" cy="822960"/>
+            <a:off x="548640" y="1783080"/>
+            <a:ext cx="7498080" cy="777240"/>
           </a:xfrm>
           <a:prstGeom prst="rect">
             <a:avLst/>
@@ -2722,7 +2754,7 @@
           <a:bodyPr wrap="square" lIns="0" tIns="0" rIns="0" bIns="0" rtlCol="0" anchor="t"/>
           <a:lstStyle/>
           <a:p>
-            <a:pPr indent="0" marL="0">
+            <a:pPr algn="l" indent="0" marL="0">
               <a:buNone/>
             </a:pPr>
             <a:r>
@@ -2731,7 +2763,7 @@
                   <a:schemeClr val="bg2"/>
                 </a:solidFill>
               </a:rPr>
-              <a:t>A multi-agent system that adjudicates health-insurance claims, and knows when to ask a human</a:t>
+              <a:t>Five cooperating software agents decide whether to pay a health-insurance claim, and know when to ask a human</a:t>
             </a:r>
             <a:endParaRPr lang="en-US" sz="1800" dirty="0"/>
           </a:p>
@@ -2739,14 +2771,14 @@
       </p:sp>
       <p:sp>
         <p:nvSpPr>
-          <p:cNvPr id="4" name="Cover node 1"/>
+          <p:cNvPr id="5" name="Cover node 1"/>
           <p:cNvSpPr/>
           <p:nvPr/>
         </p:nvSpPr>
         <p:spPr>
           <a:xfrm>
-            <a:off x="548640" y="3611880"/>
-            <a:ext cx="457200" cy="457200"/>
+            <a:off x="548640" y="2926080"/>
+            <a:ext cx="420624" cy="420624"/>
           </a:xfrm>
           <a:prstGeom prst="ellipse">
             <a:avLst/>
@@ -2759,14 +2791,14 @@
       </p:sp>
       <p:sp>
         <p:nvSpPr>
-          <p:cNvPr id="5" name="Cover node 1 number"/>
-          <p:cNvSpPr txBox="1"/>
-          <p:nvPr/>
-        </p:nvSpPr>
-        <p:spPr>
-          <a:xfrm>
-            <a:off x="548640" y="3611880"/>
-            <a:ext cx="457200" cy="457200"/>
+          <p:cNvPr id="6" name="Cover node 1 number"/>
+          <p:cNvSpPr txBox="1"/>
+          <p:nvPr/>
+        </p:nvSpPr>
+        <p:spPr>
+          <a:xfrm>
+            <a:off x="548640" y="2926080"/>
+            <a:ext cx="420624" cy="420624"/>
           </a:xfrm>
           <a:prstGeom prst="rect">
             <a:avLst/>
@@ -2782,7 +2814,7 @@
               <a:buNone/>
             </a:pPr>
             <a:r>
-              <a:rPr lang="en-US" sz="1600" b="1" dirty="0">
+              <a:rPr lang="en-US" sz="1500" b="1" dirty="0">
                 <a:solidFill>
                   <a:schemeClr val="bg1"/>
                 </a:solidFill>
@@ -2792,19 +2824,19 @@
               </a:rPr>
               <a:t>1</a:t>
             </a:r>
-            <a:endParaRPr lang="en-US" sz="1600" dirty="0"/>
-          </a:p>
-        </p:txBody>
-      </p:sp>
-      <p:sp>
-        <p:nvSpPr>
-          <p:cNvPr id="6" name="Cover node 1 label"/>
-          <p:cNvSpPr txBox="1"/>
-          <p:nvPr/>
-        </p:nvSpPr>
-        <p:spPr>
-          <a:xfrm>
-            <a:off x="1097280" y="3703320"/>
+            <a:endParaRPr lang="en-US" sz="1500" dirty="0"/>
+          </a:p>
+        </p:txBody>
+      </p:sp>
+      <p:sp>
+        <p:nvSpPr>
+          <p:cNvPr id="7" name="Cover node 1 label"/>
+          <p:cNvSpPr txBox="1"/>
+          <p:nvPr/>
+        </p:nvSpPr>
+        <p:spPr>
+          <a:xfrm>
+            <a:off x="1060704" y="2999232"/>
             <a:ext cx="1005840" cy="274320"/>
           </a:xfrm>
           <a:prstGeom prst="rect">
@@ -2834,14 +2866,14 @@
       </p:sp>
       <p:sp>
         <p:nvSpPr>
-          <p:cNvPr id="7" name="Cover node 2"/>
+          <p:cNvPr id="8" name="Cover node 2"/>
           <p:cNvSpPr/>
           <p:nvPr/>
         </p:nvSpPr>
         <p:spPr>
           <a:xfrm>
-            <a:off x="2176272" y="3611880"/>
-            <a:ext cx="457200" cy="457200"/>
+            <a:off x="2176272" y="2926080"/>
+            <a:ext cx="420624" cy="420624"/>
           </a:xfrm>
           <a:prstGeom prst="ellipse">
             <a:avLst/>
@@ -2854,14 +2886,14 @@
       </p:sp>
       <p:sp>
         <p:nvSpPr>
-          <p:cNvPr id="8" name="Cover node 2 number"/>
-          <p:cNvSpPr txBox="1"/>
-          <p:nvPr/>
-        </p:nvSpPr>
-        <p:spPr>
-          <a:xfrm>
-            <a:off x="2176272" y="3611880"/>
-            <a:ext cx="457200" cy="457200"/>
+          <p:cNvPr id="9" name="Cover node 2 number"/>
+          <p:cNvSpPr txBox="1"/>
+          <p:nvPr/>
+        </p:nvSpPr>
+        <p:spPr>
+          <a:xfrm>
+            <a:off x="2176272" y="2926080"/>
+            <a:ext cx="420624" cy="420624"/>
           </a:xfrm>
           <a:prstGeom prst="rect">
             <a:avLst/>
@@ -2877,7 +2909,7 @@
               <a:buNone/>
             </a:pPr>
             <a:r>
-              <a:rPr lang="en-US" sz="1600" b="1" dirty="0">
+              <a:rPr lang="en-US" sz="1500" b="1" dirty="0">
                 <a:solidFill>
                   <a:schemeClr val="bg1"/>
                 </a:solidFill>
@@ -2887,19 +2919,19 @@
               </a:rPr>
               <a:t>2</a:t>
             </a:r>
-            <a:endParaRPr lang="en-US" sz="1600" dirty="0"/>
-          </a:p>
-        </p:txBody>
-      </p:sp>
-      <p:sp>
-        <p:nvSpPr>
-          <p:cNvPr id="9" name="Cover node 2 label"/>
-          <p:cNvSpPr txBox="1"/>
-          <p:nvPr/>
-        </p:nvSpPr>
-        <p:spPr>
-          <a:xfrm>
-            <a:off x="2724912" y="3703320"/>
+            <a:endParaRPr lang="en-US" sz="1500" dirty="0"/>
+          </a:p>
+        </p:txBody>
+      </p:sp>
+      <p:sp>
+        <p:nvSpPr>
+          <p:cNvPr id="10" name="Cover node 2 label"/>
+          <p:cNvSpPr txBox="1"/>
+          <p:nvPr/>
+        </p:nvSpPr>
+        <p:spPr>
+          <a:xfrm>
+            <a:off x="2688336" y="2999232"/>
             <a:ext cx="1005840" cy="274320"/>
           </a:xfrm>
           <a:prstGeom prst="rect">
@@ -2929,14 +2961,14 @@
       </p:sp>
       <p:sp>
         <p:nvSpPr>
-          <p:cNvPr id="10" name="Cover node 3"/>
+          <p:cNvPr id="11" name="Cover node 3"/>
           <p:cNvSpPr/>
           <p:nvPr/>
         </p:nvSpPr>
         <p:spPr>
           <a:xfrm>
-            <a:off x="3803904" y="3611880"/>
-            <a:ext cx="457200" cy="457200"/>
+            <a:off x="3803904" y="2926080"/>
+            <a:ext cx="420624" cy="420624"/>
           </a:xfrm>
           <a:prstGeom prst="ellipse">
             <a:avLst/>
@@ -2949,14 +2981,14 @@
       </p:sp>
       <p:sp>
         <p:nvSpPr>
-          <p:cNvPr id="11" name="Cover node 3 number"/>
-          <p:cNvSpPr txBox="1"/>
-          <p:nvPr/>
-        </p:nvSpPr>
-        <p:spPr>
-          <a:xfrm>
-            <a:off x="3803904" y="3611880"/>
-            <a:ext cx="457200" cy="457200"/>
+          <p:cNvPr id="12" name="Cover node 3 number"/>
+          <p:cNvSpPr txBox="1"/>
+          <p:nvPr/>
+        </p:nvSpPr>
+        <p:spPr>
+          <a:xfrm>
+            <a:off x="3803904" y="2926080"/>
+            <a:ext cx="420624" cy="420624"/>
           </a:xfrm>
           <a:prstGeom prst="rect">
             <a:avLst/>
@@ -2972,7 +3004,7 @@
               <a:buNone/>
             </a:pPr>
             <a:r>
-              <a:rPr lang="en-US" sz="1600" b="1" dirty="0">
+              <a:rPr lang="en-US" sz="1500" b="1" dirty="0">
                 <a:solidFill>
                   <a:schemeClr val="bg1"/>
                 </a:solidFill>
@@ -2982,19 +3014,19 @@
               </a:rPr>
               <a:t>3</a:t>
             </a:r>
-            <a:endParaRPr lang="en-US" sz="1600" dirty="0"/>
-          </a:p>
-        </p:txBody>
-      </p:sp>
-      <p:sp>
-        <p:nvSpPr>
-          <p:cNvPr id="12" name="Cover node 3 label"/>
-          <p:cNvSpPr txBox="1"/>
-          <p:nvPr/>
-        </p:nvSpPr>
-        <p:spPr>
-          <a:xfrm>
-            <a:off x="4352544" y="3703320"/>
+            <a:endParaRPr lang="en-US" sz="1500" dirty="0"/>
+          </a:p>
+        </p:txBody>
+      </p:sp>
+      <p:sp>
+        <p:nvSpPr>
+          <p:cNvPr id="13" name="Cover node 3 label"/>
+          <p:cNvSpPr txBox="1"/>
+          <p:nvPr/>
+        </p:nvSpPr>
+        <p:spPr>
+          <a:xfrm>
+            <a:off x="4315968" y="2999232"/>
             <a:ext cx="1005840" cy="274320"/>
           </a:xfrm>
           <a:prstGeom prst="rect">
@@ -3024,14 +3056,14 @@
       </p:sp>
       <p:sp>
         <p:nvSpPr>
-          <p:cNvPr id="13" name="Cover node 4"/>
+          <p:cNvPr id="14" name="Cover node 4"/>
           <p:cNvSpPr/>
           <p:nvPr/>
         </p:nvSpPr>
         <p:spPr>
           <a:xfrm>
-            <a:off x="5431536" y="3611880"/>
-            <a:ext cx="457200" cy="457200"/>
+            <a:off x="5431536" y="2926080"/>
+            <a:ext cx="420624" cy="420624"/>
           </a:xfrm>
           <a:prstGeom prst="ellipse">
             <a:avLst/>
@@ -3044,14 +3076,14 @@
       </p:sp>
       <p:sp>
         <p:nvSpPr>
-          <p:cNvPr id="14" name="Cover node 4 number"/>
-          <p:cNvSpPr txBox="1"/>
-          <p:nvPr/>
-        </p:nvSpPr>
-        <p:spPr>
-          <a:xfrm>
-            <a:off x="5431536" y="3611880"/>
-            <a:ext cx="457200" cy="457200"/>
+          <p:cNvPr id="15" name="Cover node 4 number"/>
+          <p:cNvSpPr txBox="1"/>
+          <p:nvPr/>
+        </p:nvSpPr>
+        <p:spPr>
+          <a:xfrm>
+            <a:off x="5431536" y="2926080"/>
+            <a:ext cx="420624" cy="420624"/>
           </a:xfrm>
           <a:prstGeom prst="rect">
             <a:avLst/>
@@ -3067,7 +3099,7 @@
               <a:buNone/>
             </a:pPr>
             <a:r>
-              <a:rPr lang="en-US" sz="1600" b="1" dirty="0">
+              <a:rPr lang="en-US" sz="1500" b="1" dirty="0">
                 <a:solidFill>
                   <a:schemeClr val="bg1"/>
                 </a:solidFill>
@@ -3077,19 +3109,19 @@
               </a:rPr>
               <a:t>4</a:t>
             </a:r>
-            <a:endParaRPr lang="en-US" sz="1600" dirty="0"/>
-          </a:p>
-        </p:txBody>
-      </p:sp>
-      <p:sp>
-        <p:nvSpPr>
-          <p:cNvPr id="15" name="Cover node 4 label"/>
-          <p:cNvSpPr txBox="1"/>
-          <p:nvPr/>
-        </p:nvSpPr>
-        <p:spPr>
-          <a:xfrm>
-            <a:off x="5980176" y="3703320"/>
+            <a:endParaRPr lang="en-US" sz="1500" dirty="0"/>
+          </a:p>
+        </p:txBody>
+      </p:sp>
+      <p:sp>
+        <p:nvSpPr>
+          <p:cNvPr id="16" name="Cover node 4 label"/>
+          <p:cNvSpPr txBox="1"/>
+          <p:nvPr/>
+        </p:nvSpPr>
+        <p:spPr>
+          <a:xfrm>
+            <a:off x="5943600" y="2999232"/>
             <a:ext cx="1005840" cy="274320"/>
           </a:xfrm>
           <a:prstGeom prst="rect">
@@ -3119,14 +3151,14 @@
       </p:sp>
       <p:sp>
         <p:nvSpPr>
-          <p:cNvPr id="16" name="Cover node 5"/>
+          <p:cNvPr id="17" name="Cover node 5"/>
           <p:cNvSpPr/>
           <p:nvPr/>
         </p:nvSpPr>
         <p:spPr>
           <a:xfrm>
-            <a:off x="7059168" y="3611880"/>
-            <a:ext cx="457200" cy="457200"/>
+            <a:off x="7059168" y="2926080"/>
+            <a:ext cx="420624" cy="420624"/>
           </a:xfrm>
           <a:prstGeom prst="ellipse">
             <a:avLst/>
@@ -3139,14 +3171,14 @@
       </p:sp>
       <p:sp>
         <p:nvSpPr>
-          <p:cNvPr id="17" name="Cover node 5 number"/>
-          <p:cNvSpPr txBox="1"/>
-          <p:nvPr/>
-        </p:nvSpPr>
-        <p:spPr>
-          <a:xfrm>
-            <a:off x="7059168" y="3611880"/>
-            <a:ext cx="457200" cy="457200"/>
+          <p:cNvPr id="18" name="Cover node 5 number"/>
+          <p:cNvSpPr txBox="1"/>
+          <p:nvPr/>
+        </p:nvSpPr>
+        <p:spPr>
+          <a:xfrm>
+            <a:off x="7059168" y="2926080"/>
+            <a:ext cx="420624" cy="420624"/>
           </a:xfrm>
           <a:prstGeom prst="rect">
             <a:avLst/>
@@ -3162,7 +3194,7 @@
               <a:buNone/>
             </a:pPr>
             <a:r>
-              <a:rPr lang="en-US" sz="1600" b="1" dirty="0">
+              <a:rPr lang="en-US" sz="1500" b="1" dirty="0">
                 <a:solidFill>
                   <a:schemeClr val="bg1"/>
                 </a:solidFill>
@@ -3172,19 +3204,19 @@
               </a:rPr>
               <a:t>5</a:t>
             </a:r>
-            <a:endParaRPr lang="en-US" sz="1600" dirty="0"/>
-          </a:p>
-        </p:txBody>
-      </p:sp>
-      <p:sp>
-        <p:nvSpPr>
-          <p:cNvPr id="18" name="Cover node 5 label"/>
-          <p:cNvSpPr txBox="1"/>
-          <p:nvPr/>
-        </p:nvSpPr>
-        <p:spPr>
-          <a:xfrm>
-            <a:off x="7607808" y="3703320"/>
+            <a:endParaRPr lang="en-US" sz="1500" dirty="0"/>
+          </a:p>
+        </p:txBody>
+      </p:sp>
+      <p:sp>
+        <p:nvSpPr>
+          <p:cNvPr id="19" name="Cover node 5 label"/>
+          <p:cNvSpPr txBox="1"/>
+          <p:nvPr/>
+        </p:nvSpPr>
+        <p:spPr>
+          <a:xfrm>
+            <a:off x="7571232" y="2999232"/>
             <a:ext cx="1005840" cy="274320"/>
           </a:xfrm>
           <a:prstGeom prst="rect">
@@ -3214,14 +3246,36 @@
       </p:sp>
       <p:sp>
         <p:nvSpPr>
-          <p:cNvPr id="19" name="Cover tag"/>
-          <p:cNvSpPr txBox="1"/>
-          <p:nvPr/>
-        </p:nvSpPr>
-        <p:spPr>
-          <a:xfrm>
-            <a:off x="548640" y="4526280"/>
-            <a:ext cx="8046720" cy="274320"/>
+          <p:cNvPr id="20" name="Members card"/>
+          <p:cNvSpPr/>
+          <p:nvPr/>
+        </p:nvSpPr>
+        <p:spPr>
+          <a:xfrm>
+            <a:off x="548640" y="3703320"/>
+            <a:ext cx="8046720" cy="1051560"/>
+          </a:xfrm>
+          <a:prstGeom prst="roundRect">
+            <a:avLst>
+              <a:gd name="adj" fmla="val 6957"/>
+            </a:avLst>
+          </a:prstGeom>
+          <a:solidFill>
+            <a:schemeClr val="tx2"/>
+          </a:solidFill>
+          <a:ln/>
+        </p:spPr>
+      </p:sp>
+      <p:sp>
+        <p:nvSpPr>
+          <p:cNvPr id="21" name="Cover label"/>
+          <p:cNvSpPr txBox="1"/>
+          <p:nvPr/>
+        </p:nvSpPr>
+        <p:spPr>
+          <a:xfrm>
+            <a:off x="822960" y="3794760"/>
+            <a:ext cx="2743200" cy="228600"/>
           </a:xfrm>
           <a:prstGeom prst="rect">
             <a:avLst/>
@@ -3237,14 +3291,164 @@
               <a:buNone/>
             </a:pPr>
             <a:r>
-              <a:rPr lang="en-US" sz="1200" dirty="0">
+              <a:rPr lang="en-US" sz="1100" b="1" spc="300" kern="0" dirty="0">
                 <a:solidFill>
                   <a:schemeClr val="bg2"/>
                 </a:solidFill>
               </a:rPr>
-              <a:t>CA-3  |  Agentic AI  |  Domain-specific proof of concept  |  Healthcare insurance</a:t>
-            </a:r>
-            <a:endParaRPr lang="en-US" sz="1200" dirty="0"/>
+              <a:t>GROUP MEMBERS</a:t>
+            </a:r>
+            <a:endParaRPr lang="en-US" sz="1100" dirty="0"/>
+          </a:p>
+        </p:txBody>
+      </p:sp>
+      <p:sp>
+        <p:nvSpPr>
+          <p:cNvPr id="22" name="Cover name 1"/>
+          <p:cNvSpPr txBox="1"/>
+          <p:nvPr/>
+        </p:nvSpPr>
+        <p:spPr>
+          <a:xfrm>
+            <a:off x="822960" y="4087368"/>
+            <a:ext cx="3017520" cy="365760"/>
+          </a:xfrm>
+          <a:prstGeom prst="rect">
+            <a:avLst/>
+          </a:prstGeom>
+          <a:noFill/>
+          <a:ln/>
+        </p:spPr>
+        <p:txBody>
+          <a:bodyPr wrap="square" lIns="0" tIns="0" rIns="0" bIns="0" rtlCol="0" anchor="t"/>
+          <a:lstStyle/>
+          <a:p>
+            <a:pPr indent="0" marL="0">
+              <a:buNone/>
+            </a:pPr>
+            <a:r>
+              <a:rPr lang="en-US" sz="2000" b="1" dirty="0">
+                <a:solidFill>
+                  <a:schemeClr val="bg1"/>
+                </a:solidFill>
+                <a:latin typeface="Cambria" pitchFamily="34" charset="0"/>
+                <a:ea typeface="Cambria" pitchFamily="34" charset="-122"/>
+                <a:cs typeface="Cambria" pitchFamily="34" charset="-120"/>
+              </a:rPr>
+              <a:t>Harsh Salunkhe</a:t>
+            </a:r>
+            <a:endParaRPr lang="en-US" sz="2000" dirty="0"/>
+          </a:p>
+        </p:txBody>
+      </p:sp>
+      <p:sp>
+        <p:nvSpPr>
+          <p:cNvPr id="23" name="Cover roll 1"/>
+          <p:cNvSpPr txBox="1"/>
+          <p:nvPr/>
+        </p:nvSpPr>
+        <p:spPr>
+          <a:xfrm>
+            <a:off x="822960" y="4471416"/>
+            <a:ext cx="3017520" cy="274320"/>
+          </a:xfrm>
+          <a:prstGeom prst="rect">
+            <a:avLst/>
+          </a:prstGeom>
+          <a:noFill/>
+          <a:ln/>
+        </p:spPr>
+        <p:txBody>
+          <a:bodyPr wrap="square" lIns="0" tIns="0" rIns="0" bIns="0" rtlCol="0" anchor="t"/>
+          <a:lstStyle/>
+          <a:p>
+            <a:pPr indent="0" marL="0">
+              <a:buNone/>
+            </a:pPr>
+            <a:r>
+              <a:rPr lang="en-US" sz="1400" dirty="0">
+                <a:solidFill>
+                  <a:schemeClr val="bg2"/>
+                </a:solidFill>
+              </a:rPr>
+              <a:t>24070126066</a:t>
+            </a:r>
+            <a:endParaRPr lang="en-US" sz="1400" dirty="0"/>
+          </a:p>
+        </p:txBody>
+      </p:sp>
+      <p:sp>
+        <p:nvSpPr>
+          <p:cNvPr id="24" name="Cover name 2"/>
+          <p:cNvSpPr txBox="1"/>
+          <p:nvPr/>
+        </p:nvSpPr>
+        <p:spPr>
+          <a:xfrm>
+            <a:off x="4023360" y="4087368"/>
+            <a:ext cx="3017520" cy="365760"/>
+          </a:xfrm>
+          <a:prstGeom prst="rect">
+            <a:avLst/>
+          </a:prstGeom>
+          <a:noFill/>
+          <a:ln/>
+        </p:spPr>
+        <p:txBody>
+          <a:bodyPr wrap="square" lIns="0" tIns="0" rIns="0" bIns="0" rtlCol="0" anchor="t"/>
+          <a:lstStyle/>
+          <a:p>
+            <a:pPr indent="0" marL="0">
+              <a:buNone/>
+            </a:pPr>
+            <a:r>
+              <a:rPr lang="en-US" sz="2000" b="1" dirty="0">
+                <a:solidFill>
+                  <a:schemeClr val="bg1"/>
+                </a:solidFill>
+                <a:latin typeface="Cambria" pitchFamily="34" charset="0"/>
+                <a:ea typeface="Cambria" pitchFamily="34" charset="-122"/>
+                <a:cs typeface="Cambria" pitchFamily="34" charset="-120"/>
+              </a:rPr>
+              <a:t>Dharna Sharma</a:t>
+            </a:r>
+            <a:endParaRPr lang="en-US" sz="2000" dirty="0"/>
+          </a:p>
+        </p:txBody>
+      </p:sp>
+      <p:sp>
+        <p:nvSpPr>
+          <p:cNvPr id="25" name="Cover roll 2"/>
+          <p:cNvSpPr txBox="1"/>
+          <p:nvPr/>
+        </p:nvSpPr>
+        <p:spPr>
+          <a:xfrm>
+            <a:off x="4023360" y="4471416"/>
+            <a:ext cx="3017520" cy="274320"/>
+          </a:xfrm>
+          <a:prstGeom prst="rect">
+            <a:avLst/>
+          </a:prstGeom>
+          <a:noFill/>
+          <a:ln/>
+        </p:spPr>
+        <p:txBody>
+          <a:bodyPr wrap="square" lIns="0" tIns="0" rIns="0" bIns="0" rtlCol="0" anchor="t"/>
+          <a:lstStyle/>
+          <a:p>
+            <a:pPr indent="0" marL="0">
+              <a:buNone/>
+            </a:pPr>
+            <a:r>
+              <a:rPr lang="en-US" sz="1400" dirty="0">
+                <a:solidFill>
+                  <a:schemeClr val="bg2"/>
+                </a:solidFill>
+              </a:rPr>
+              <a:t>24070126053</a:t>
+            </a:r>
+            <a:endParaRPr lang="en-US" sz="1400" dirty="0"/>
           </a:p>
         </p:txBody>
       </p:sp>
@@ -3283,8 +3487,8 @@
         </p:nvSpPr>
         <p:spPr>
           <a:xfrm>
-            <a:off x="548640" y="1554480"/>
-            <a:ext cx="8046720" cy="914400"/>
+            <a:off x="457200" y="292608"/>
+            <a:ext cx="8229600" cy="777240"/>
           </a:xfrm>
           <a:prstGeom prst="rect">
             <a:avLst/>
@@ -3300,52 +3504,811 @@
               <a:buNone/>
             </a:pPr>
             <a:r>
-              <a:rPr lang="en-US" sz="4000" b="1" dirty="0">
+              <a:rPr lang="en-US" sz="2800" b="1" dirty="0">
+                <a:solidFill>
+                  <a:schemeClr val="tx1"/>
+                </a:solidFill>
+              </a:rPr>
+              <a:t>Appendix: the four demo claims</a:t>
+            </a:r>
+            <a:endParaRPr lang="en-US" sz="2800" dirty="0"/>
+          </a:p>
+        </p:txBody>
+      </p:sp>
+      <p:sp>
+        <p:nvSpPr>
+          <p:cNvPr id="3" name="Demo card 1"/>
+          <p:cNvSpPr/>
+          <p:nvPr/>
+        </p:nvSpPr>
+        <p:spPr>
+          <a:xfrm>
+            <a:off x="457200" y="1234440"/>
+            <a:ext cx="4023360" cy="1463040"/>
+          </a:xfrm>
+          <a:prstGeom prst="roundRect">
+            <a:avLst>
+              <a:gd name="adj" fmla="val 5000"/>
+            </a:avLst>
+          </a:prstGeom>
+          <a:solidFill>
+            <a:schemeClr val="bg2"/>
+          </a:solidFill>
+          <a:ln/>
+        </p:spPr>
+      </p:sp>
+      <p:sp>
+        <p:nvSpPr>
+          <p:cNvPr id="4" name="Demo id 1"/>
+          <p:cNvSpPr txBox="1"/>
+          <p:nvPr/>
+        </p:nvSpPr>
+        <p:spPr>
+          <a:xfrm>
+            <a:off x="640080" y="1371600"/>
+            <a:ext cx="2377440" cy="274320"/>
+          </a:xfrm>
+          <a:prstGeom prst="rect">
+            <a:avLst/>
+          </a:prstGeom>
+          <a:noFill/>
+          <a:ln/>
+        </p:spPr>
+        <p:txBody>
+          <a:bodyPr wrap="square" lIns="0" tIns="0" rIns="0" bIns="0" rtlCol="0" anchor="t"/>
+          <a:lstStyle/>
+          <a:p>
+            <a:pPr indent="0" marL="0">
+              <a:buNone/>
+            </a:pPr>
+            <a:r>
+              <a:rPr lang="en-US" sz="1200" b="1" dirty="0">
+                <a:solidFill>
+                  <a:schemeClr val="tx2"/>
+                </a:solidFill>
+              </a:rPr>
+              <a:t>CLM-26-0001</a:t>
+            </a:r>
+            <a:endParaRPr lang="en-US" sz="1200" dirty="0"/>
+          </a:p>
+        </p:txBody>
+      </p:sp>
+      <p:sp>
+        <p:nvSpPr>
+          <p:cNvPr id="5" name="Demo outcome 1"/>
+          <p:cNvSpPr/>
+          <p:nvPr/>
+        </p:nvSpPr>
+        <p:spPr>
+          <a:xfrm>
+            <a:off x="3246120" y="1353312"/>
+            <a:ext cx="1051560" cy="292608"/>
+          </a:xfrm>
+          <a:prstGeom prst="roundRect">
+            <a:avLst>
+              <a:gd name="adj" fmla="val 50000"/>
+            </a:avLst>
+          </a:prstGeom>
+          <a:solidFill>
+            <a:schemeClr val="accent6"/>
+          </a:solidFill>
+          <a:ln/>
+        </p:spPr>
+      </p:sp>
+      <p:sp>
+        <p:nvSpPr>
+          <p:cNvPr id="6" name="Demo outcome label 1"/>
+          <p:cNvSpPr txBox="1"/>
+          <p:nvPr/>
+        </p:nvSpPr>
+        <p:spPr>
+          <a:xfrm>
+            <a:off x="3246120" y="1353312"/>
+            <a:ext cx="1051560" cy="292608"/>
+          </a:xfrm>
+          <a:prstGeom prst="rect">
+            <a:avLst/>
+          </a:prstGeom>
+          <a:noFill/>
+          <a:ln/>
+        </p:spPr>
+        <p:txBody>
+          <a:bodyPr wrap="square" lIns="0" tIns="0" rIns="0" bIns="0" rtlCol="0" anchor="ctr"/>
+          <a:lstStyle/>
+          <a:p>
+            <a:pPr algn="ctr" indent="0" marL="0">
+              <a:buNone/>
+            </a:pPr>
+            <a:r>
+              <a:rPr lang="en-US" sz="1100" b="1" dirty="0">
                 <a:solidFill>
                   <a:schemeClr val="bg1"/>
                 </a:solidFill>
               </a:rPr>
-              <a:t>Thank you</a:t>
-            </a:r>
-            <a:endParaRPr lang="en-US" sz="4000" dirty="0"/>
-          </a:p>
-        </p:txBody>
-      </p:sp>
-      <p:sp>
-        <p:nvSpPr>
-          <p:cNvPr id="3" name="Text 0"/>
+              <a:t>PARTIAL</a:t>
+            </a:r>
+            <a:endParaRPr lang="en-US" sz="1100" dirty="0"/>
+          </a:p>
+        </p:txBody>
+      </p:sp>
+      <p:sp>
+        <p:nvSpPr>
+          <p:cNvPr id="7" name="Demo headline 1"/>
+          <p:cNvSpPr txBox="1"/>
+          <p:nvPr/>
+        </p:nvSpPr>
+        <p:spPr>
+          <a:xfrm>
+            <a:off x="640080" y="1737360"/>
+            <a:ext cx="3657600" cy="502920"/>
+          </a:xfrm>
+          <a:prstGeom prst="rect">
+            <a:avLst/>
+          </a:prstGeom>
+          <a:noFill/>
+          <a:ln/>
+        </p:spPr>
+        <p:txBody>
+          <a:bodyPr wrap="square" lIns="0" tIns="0" rIns="0" bIns="0" rtlCol="0" anchor="t"/>
+          <a:lstStyle/>
+          <a:p>
+            <a:pPr indent="0" marL="0">
+              <a:buNone/>
+            </a:pPr>
+            <a:r>
+              <a:rPr lang="en-US" sz="1600" b="1" dirty="0">
+                <a:solidFill>
+                  <a:schemeClr val="tx1"/>
+                </a:solidFill>
+              </a:rPr>
+              <a:t>Room rent above the plan cap</a:t>
+            </a:r>
+            <a:endParaRPr lang="en-US" sz="1600" dirty="0"/>
+          </a:p>
+        </p:txBody>
+      </p:sp>
+      <p:sp>
+        <p:nvSpPr>
+          <p:cNvPr id="8" name="Demo detail 1"/>
+          <p:cNvSpPr txBox="1"/>
+          <p:nvPr/>
+        </p:nvSpPr>
+        <p:spPr>
+          <a:xfrm>
+            <a:off x="640080" y="2240280"/>
+            <a:ext cx="3657600" cy="365760"/>
+          </a:xfrm>
+          <a:prstGeom prst="rect">
+            <a:avLst/>
+          </a:prstGeom>
+          <a:noFill/>
+          <a:ln/>
+        </p:spPr>
+        <p:txBody>
+          <a:bodyPr wrap="square" lIns="0" tIns="0" rIns="0" bIns="0" rtlCol="0" anchor="t"/>
+          <a:lstStyle/>
+          <a:p>
+            <a:pPr indent="0" marL="0">
+              <a:buNone/>
+            </a:pPr>
+            <a:r>
+              <a:rPr lang="en-US" sz="1300" dirty="0">
+                <a:solidFill>
+                  <a:schemeClr val="tx2"/>
+                </a:solidFill>
+              </a:rPr>
+              <a:t>Proportionate deduction, clause C6</a:t>
+            </a:r>
+            <a:endParaRPr lang="en-US" sz="1300" dirty="0"/>
+          </a:p>
+        </p:txBody>
+      </p:sp>
+      <p:sp>
+        <p:nvSpPr>
+          <p:cNvPr id="9" name="Demo card 2"/>
           <p:cNvSpPr/>
+          <p:nvPr/>
+        </p:nvSpPr>
+        <p:spPr>
+          <a:xfrm>
+            <a:off x="4663440" y="1234440"/>
+            <a:ext cx="4023360" cy="1463040"/>
+          </a:xfrm>
+          <a:prstGeom prst="roundRect">
+            <a:avLst>
+              <a:gd name="adj" fmla="val 5000"/>
+            </a:avLst>
+          </a:prstGeom>
+          <a:solidFill>
+            <a:schemeClr val="bg2"/>
+          </a:solidFill>
+          <a:ln/>
+        </p:spPr>
+      </p:sp>
+      <p:sp>
+        <p:nvSpPr>
+          <p:cNvPr id="10" name="Demo id 2"/>
+          <p:cNvSpPr txBox="1"/>
+          <p:nvPr/>
+        </p:nvSpPr>
+        <p:spPr>
+          <a:xfrm>
+            <a:off x="4846320" y="1371600"/>
+            <a:ext cx="2377440" cy="274320"/>
+          </a:xfrm>
+          <a:prstGeom prst="rect">
+            <a:avLst/>
+          </a:prstGeom>
+          <a:noFill/>
+          <a:ln/>
+        </p:spPr>
+        <p:txBody>
+          <a:bodyPr wrap="square" lIns="0" tIns="0" rIns="0" bIns="0" rtlCol="0" anchor="t"/>
+          <a:lstStyle/>
+          <a:p>
+            <a:pPr indent="0" marL="0">
+              <a:buNone/>
+            </a:pPr>
+            <a:r>
+              <a:rPr lang="en-US" sz="1200" b="1" dirty="0">
+                <a:solidFill>
+                  <a:schemeClr val="tx2"/>
+                </a:solidFill>
+              </a:rPr>
+              <a:t>CLM-26-0007</a:t>
+            </a:r>
+            <a:endParaRPr lang="en-US" sz="1200" dirty="0"/>
+          </a:p>
+        </p:txBody>
+      </p:sp>
+      <p:sp>
+        <p:nvSpPr>
+          <p:cNvPr id="11" name="Demo outcome 2"/>
+          <p:cNvSpPr/>
+          <p:nvPr/>
+        </p:nvSpPr>
+        <p:spPr>
+          <a:xfrm>
+            <a:off x="7452360" y="1353312"/>
+            <a:ext cx="1051560" cy="292608"/>
+          </a:xfrm>
+          <a:prstGeom prst="roundRect">
+            <a:avLst>
+              <a:gd name="adj" fmla="val 50000"/>
+            </a:avLst>
+          </a:prstGeom>
+          <a:solidFill>
+            <a:schemeClr val="accent5"/>
+          </a:solidFill>
+          <a:ln/>
+        </p:spPr>
+      </p:sp>
+      <p:sp>
+        <p:nvSpPr>
+          <p:cNvPr id="12" name="Demo outcome label 2"/>
+          <p:cNvSpPr txBox="1"/>
+          <p:nvPr/>
+        </p:nvSpPr>
+        <p:spPr>
+          <a:xfrm>
+            <a:off x="7452360" y="1353312"/>
+            <a:ext cx="1051560" cy="292608"/>
+          </a:xfrm>
+          <a:prstGeom prst="rect">
+            <a:avLst/>
+          </a:prstGeom>
+          <a:noFill/>
+          <a:ln/>
+        </p:spPr>
+        <p:txBody>
+          <a:bodyPr wrap="square" lIns="0" tIns="0" rIns="0" bIns="0" rtlCol="0" anchor="ctr"/>
+          <a:lstStyle/>
+          <a:p>
+            <a:pPr algn="ctr" indent="0" marL="0">
+              <a:buNone/>
+            </a:pPr>
+            <a:r>
+              <a:rPr lang="en-US" sz="1100" b="1" dirty="0">
+                <a:solidFill>
+                  <a:schemeClr val="bg1"/>
+                </a:solidFill>
+              </a:rPr>
+              <a:t>REJECT</a:t>
+            </a:r>
+            <a:endParaRPr lang="en-US" sz="1100" dirty="0"/>
+          </a:p>
+        </p:txBody>
+      </p:sp>
+      <p:sp>
+        <p:nvSpPr>
+          <p:cNvPr id="13" name="Demo headline 2"/>
+          <p:cNvSpPr txBox="1"/>
+          <p:nvPr/>
+        </p:nvSpPr>
+        <p:spPr>
+          <a:xfrm>
+            <a:off x="4846320" y="1737360"/>
+            <a:ext cx="3657600" cy="502920"/>
+          </a:xfrm>
+          <a:prstGeom prst="rect">
+            <a:avLst/>
+          </a:prstGeom>
+          <a:noFill/>
+          <a:ln/>
+        </p:spPr>
+        <p:txBody>
+          <a:bodyPr wrap="square" lIns="0" tIns="0" rIns="0" bIns="0" rtlCol="0" anchor="t"/>
+          <a:lstStyle/>
+          <a:p>
+            <a:pPr indent="0" marL="0">
+              <a:buNone/>
+            </a:pPr>
+            <a:r>
+              <a:rPr lang="en-US" sz="1600" b="1" dirty="0">
+                <a:solidFill>
+                  <a:schemeClr val="tx1"/>
+                </a:solidFill>
+              </a:rPr>
+              <a:t>Pre-existing condition inside 24 months</a:t>
+            </a:r>
+            <a:endParaRPr lang="en-US" sz="1600" dirty="0"/>
+          </a:p>
+        </p:txBody>
+      </p:sp>
+      <p:sp>
+        <p:nvSpPr>
+          <p:cNvPr id="14" name="Demo detail 2"/>
+          <p:cNvSpPr txBox="1"/>
+          <p:nvPr/>
+        </p:nvSpPr>
+        <p:spPr>
+          <a:xfrm>
+            <a:off x="4846320" y="2240280"/>
+            <a:ext cx="3657600" cy="365760"/>
+          </a:xfrm>
+          <a:prstGeom prst="rect">
+            <a:avLst/>
+          </a:prstGeom>
+          <a:noFill/>
+          <a:ln/>
+        </p:spPr>
+        <p:txBody>
+          <a:bodyPr wrap="square" lIns="0" tIns="0" rIns="0" bIns="0" rtlCol="0" anchor="t"/>
+          <a:lstStyle/>
+          <a:p>
+            <a:pPr indent="0" marL="0">
+              <a:buNone/>
+            </a:pPr>
+            <a:r>
+              <a:rPr lang="en-US" sz="1300" dirty="0">
+                <a:solidFill>
+                  <a:schemeClr val="tx2"/>
+                </a:solidFill>
+              </a:rPr>
+              <a:t>Early exit, remaining checks skipped, clause C3</a:t>
+            </a:r>
+            <a:endParaRPr lang="en-US" sz="1300" dirty="0"/>
+          </a:p>
+        </p:txBody>
+      </p:sp>
+      <p:sp>
+        <p:nvSpPr>
+          <p:cNvPr id="15" name="Demo card 3"/>
+          <p:cNvSpPr/>
+          <p:nvPr/>
+        </p:nvSpPr>
+        <p:spPr>
+          <a:xfrm>
+            <a:off x="457200" y="2880360"/>
+            <a:ext cx="4023360" cy="1463040"/>
+          </a:xfrm>
+          <a:prstGeom prst="roundRect">
+            <a:avLst>
+              <a:gd name="adj" fmla="val 5000"/>
+            </a:avLst>
+          </a:prstGeom>
+          <a:solidFill>
+            <a:schemeClr val="bg2"/>
+          </a:solidFill>
+          <a:ln/>
+        </p:spPr>
+      </p:sp>
+      <p:sp>
+        <p:nvSpPr>
+          <p:cNvPr id="16" name="Demo id 3"/>
+          <p:cNvSpPr txBox="1"/>
+          <p:nvPr/>
+        </p:nvSpPr>
+        <p:spPr>
+          <a:xfrm>
+            <a:off x="640080" y="3017520"/>
+            <a:ext cx="2377440" cy="274320"/>
+          </a:xfrm>
+          <a:prstGeom prst="rect">
+            <a:avLst/>
+          </a:prstGeom>
+          <a:noFill/>
+          <a:ln/>
+        </p:spPr>
+        <p:txBody>
+          <a:bodyPr wrap="square" lIns="0" tIns="0" rIns="0" bIns="0" rtlCol="0" anchor="t"/>
+          <a:lstStyle/>
+          <a:p>
+            <a:pPr indent="0" marL="0">
+              <a:buNone/>
+            </a:pPr>
+            <a:r>
+              <a:rPr lang="en-US" sz="1200" b="1" dirty="0">
+                <a:solidFill>
+                  <a:schemeClr val="tx2"/>
+                </a:solidFill>
+              </a:rPr>
+              <a:t>CLM-26-0019</a:t>
+            </a:r>
+            <a:endParaRPr lang="en-US" sz="1200" dirty="0"/>
+          </a:p>
+        </p:txBody>
+      </p:sp>
+      <p:sp>
+        <p:nvSpPr>
+          <p:cNvPr id="17" name="Demo outcome 3"/>
+          <p:cNvSpPr/>
+          <p:nvPr/>
+        </p:nvSpPr>
+        <p:spPr>
+          <a:xfrm>
+            <a:off x="3246120" y="2999232"/>
+            <a:ext cx="1051560" cy="292608"/>
+          </a:xfrm>
+          <a:prstGeom prst="roundRect">
+            <a:avLst>
+              <a:gd name="adj" fmla="val 50000"/>
+            </a:avLst>
+          </a:prstGeom>
+          <a:solidFill>
+            <a:schemeClr val="accent2"/>
+          </a:solidFill>
+          <a:ln/>
+        </p:spPr>
+      </p:sp>
+      <p:sp>
+        <p:nvSpPr>
+          <p:cNvPr id="18" name="Demo outcome label 3"/>
+          <p:cNvSpPr txBox="1"/>
+          <p:nvPr/>
+        </p:nvSpPr>
+        <p:spPr>
+          <a:xfrm>
+            <a:off x="3246120" y="2999232"/>
+            <a:ext cx="1051560" cy="292608"/>
+          </a:xfrm>
+          <a:prstGeom prst="rect">
+            <a:avLst/>
+          </a:prstGeom>
+          <a:noFill/>
+          <a:ln/>
+        </p:spPr>
+        <p:txBody>
+          <a:bodyPr wrap="square" lIns="0" tIns="0" rIns="0" bIns="0" rtlCol="0" anchor="ctr"/>
+          <a:lstStyle/>
+          <a:p>
+            <a:pPr algn="ctr" indent="0" marL="0">
+              <a:buNone/>
+            </a:pPr>
+            <a:r>
+              <a:rPr lang="en-US" sz="1100" b="1" dirty="0">
+                <a:solidFill>
+                  <a:schemeClr val="bg1"/>
+                </a:solidFill>
+              </a:rPr>
+              <a:t>ESCALATE</a:t>
+            </a:r>
+            <a:endParaRPr lang="en-US" sz="1100" dirty="0"/>
+          </a:p>
+        </p:txBody>
+      </p:sp>
+      <p:sp>
+        <p:nvSpPr>
+          <p:cNvPr id="19" name="Demo headline 3"/>
+          <p:cNvSpPr txBox="1"/>
+          <p:nvPr/>
+        </p:nvSpPr>
+        <p:spPr>
+          <a:xfrm>
+            <a:off x="640080" y="3383280"/>
+            <a:ext cx="3657600" cy="502920"/>
+          </a:xfrm>
+          <a:prstGeom prst="rect">
+            <a:avLst/>
+          </a:prstGeom>
+          <a:noFill/>
+          <a:ln/>
+        </p:spPr>
+        <p:txBody>
+          <a:bodyPr wrap="square" lIns="0" tIns="0" rIns="0" bIns="0" rtlCol="0" anchor="t"/>
+          <a:lstStyle/>
+          <a:p>
+            <a:pPr indent="0" marL="0">
+              <a:buNone/>
+            </a:pPr>
+            <a:r>
+              <a:rPr lang="en-US" sz="1600" b="1" dirty="0">
+                <a:solidFill>
+                  <a:schemeClr val="tx1"/>
+                </a:solidFill>
+              </a:rPr>
+              <a:t>Quick plan misses an inflated bill</a:t>
+            </a:r>
+            <a:endParaRPr lang="en-US" sz="1600" dirty="0"/>
+          </a:p>
+        </p:txBody>
+      </p:sp>
+      <p:sp>
+        <p:nvSpPr>
+          <p:cNvPr id="20" name="Demo detail 3"/>
+          <p:cNvSpPr txBox="1"/>
+          <p:nvPr/>
+        </p:nvSpPr>
+        <p:spPr>
+          <a:xfrm>
+            <a:off x="640080" y="3886200"/>
+            <a:ext cx="3657600" cy="365760"/>
+          </a:xfrm>
+          <a:prstGeom prst="rect">
+            <a:avLst/>
+          </a:prstGeom>
+          <a:noFill/>
+          <a:ln/>
+        </p:spPr>
+        <p:txBody>
+          <a:bodyPr wrap="square" lIns="0" tIns="0" rIns="0" bIns="0" rtlCol="0" anchor="t"/>
+          <a:lstStyle/>
+          <a:p>
+            <a:pPr indent="0" marL="0">
+              <a:buNone/>
+            </a:pPr>
+            <a:r>
+              <a:rPr lang="en-US" sz="1300" dirty="0">
+                <a:solidFill>
+                  <a:schemeClr val="tx2"/>
+                </a:solidFill>
+              </a:rPr>
+              <a:t>Critic sends it back, fraud score, human review</a:t>
+            </a:r>
+            <a:endParaRPr lang="en-US" sz="1300" dirty="0"/>
+          </a:p>
+        </p:txBody>
+      </p:sp>
+      <p:sp>
+        <p:nvSpPr>
+          <p:cNvPr id="21" name="Demo card 4"/>
+          <p:cNvSpPr/>
+          <p:nvPr/>
+        </p:nvSpPr>
+        <p:spPr>
+          <a:xfrm>
+            <a:off x="4663440" y="2880360"/>
+            <a:ext cx="4023360" cy="1463040"/>
+          </a:xfrm>
+          <a:prstGeom prst="roundRect">
+            <a:avLst>
+              <a:gd name="adj" fmla="val 5000"/>
+            </a:avLst>
+          </a:prstGeom>
+          <a:solidFill>
+            <a:schemeClr val="bg2"/>
+          </a:solidFill>
+          <a:ln/>
+        </p:spPr>
+      </p:sp>
+      <p:sp>
+        <p:nvSpPr>
+          <p:cNvPr id="22" name="Demo id 4"/>
+          <p:cNvSpPr txBox="1"/>
+          <p:nvPr/>
+        </p:nvSpPr>
+        <p:spPr>
+          <a:xfrm>
+            <a:off x="4846320" y="3017520"/>
+            <a:ext cx="2377440" cy="274320"/>
+          </a:xfrm>
+          <a:prstGeom prst="rect">
+            <a:avLst/>
+          </a:prstGeom>
+          <a:noFill/>
+          <a:ln/>
+        </p:spPr>
+        <p:txBody>
+          <a:bodyPr wrap="square" lIns="0" tIns="0" rIns="0" bIns="0" rtlCol="0" anchor="t"/>
+          <a:lstStyle/>
+          <a:p>
+            <a:pPr indent="0" marL="0">
+              <a:buNone/>
+            </a:pPr>
+            <a:r>
+              <a:rPr lang="en-US" sz="1200" b="1" dirty="0">
+                <a:solidFill>
+                  <a:schemeClr val="tx2"/>
+                </a:solidFill>
+              </a:rPr>
+              <a:t>CLM-26-0003 + error</a:t>
+            </a:r>
+            <a:endParaRPr lang="en-US" sz="1200" dirty="0"/>
+          </a:p>
+        </p:txBody>
+      </p:sp>
+      <p:sp>
+        <p:nvSpPr>
+          <p:cNvPr id="23" name="Demo outcome 4"/>
+          <p:cNvSpPr/>
+          <p:nvPr/>
+        </p:nvSpPr>
+        <p:spPr>
+          <a:xfrm>
+            <a:off x="7452360" y="2999232"/>
+            <a:ext cx="1051560" cy="292608"/>
+          </a:xfrm>
+          <a:prstGeom prst="roundRect">
+            <a:avLst>
+              <a:gd name="adj" fmla="val 50000"/>
+            </a:avLst>
+          </a:prstGeom>
+          <a:solidFill>
+            <a:schemeClr val="accent4"/>
+          </a:solidFill>
+          <a:ln/>
+        </p:spPr>
+      </p:sp>
+      <p:sp>
+        <p:nvSpPr>
+          <p:cNvPr id="24" name="Demo outcome label 4"/>
+          <p:cNvSpPr txBox="1"/>
+          <p:nvPr/>
+        </p:nvSpPr>
+        <p:spPr>
+          <a:xfrm>
+            <a:off x="7452360" y="2999232"/>
+            <a:ext cx="1051560" cy="292608"/>
+          </a:xfrm>
+          <a:prstGeom prst="rect">
+            <a:avLst/>
+          </a:prstGeom>
+          <a:noFill/>
+          <a:ln/>
+        </p:spPr>
+        <p:txBody>
+          <a:bodyPr wrap="square" lIns="0" tIns="0" rIns="0" bIns="0" rtlCol="0" anchor="ctr"/>
+          <a:lstStyle/>
+          <a:p>
+            <a:pPr algn="ctr" indent="0" marL="0">
+              <a:buNone/>
+            </a:pPr>
+            <a:r>
+              <a:rPr lang="en-US" sz="1100" b="1" dirty="0">
+                <a:solidFill>
+                  <a:schemeClr val="bg1"/>
+                </a:solidFill>
+              </a:rPr>
+              <a:t>APPROVE</a:t>
+            </a:r>
+            <a:endParaRPr lang="en-US" sz="1100" dirty="0"/>
+          </a:p>
+        </p:txBody>
+      </p:sp>
+      <p:sp>
+        <p:nvSpPr>
+          <p:cNvPr id="25" name="Demo headline 4"/>
+          <p:cNvSpPr txBox="1"/>
+          <p:nvPr/>
+        </p:nvSpPr>
+        <p:spPr>
+          <a:xfrm>
+            <a:off x="4846320" y="3383280"/>
+            <a:ext cx="3657600" cy="502920"/>
+          </a:xfrm>
+          <a:prstGeom prst="rect">
+            <a:avLst/>
+          </a:prstGeom>
+          <a:noFill/>
+          <a:ln/>
+        </p:spPr>
+        <p:txBody>
+          <a:bodyPr wrap="square" lIns="0" tIns="0" rIns="0" bIns="0" rtlCol="0" anchor="t"/>
+          <a:lstStyle/>
+          <a:p>
+            <a:pPr indent="0" marL="0">
+              <a:buNone/>
+            </a:pPr>
+            <a:r>
+              <a:rPr lang="en-US" sz="1600" b="1" dirty="0">
+                <a:solidFill>
+                  <a:schemeClr val="tx1"/>
+                </a:solidFill>
+              </a:rPr>
+              <a:t>Executor overpays by 15% on purpose</a:t>
+            </a:r>
+            <a:endParaRPr lang="en-US" sz="1600" dirty="0"/>
+          </a:p>
+        </p:txBody>
+      </p:sp>
+      <p:sp>
+        <p:nvSpPr>
+          <p:cNvPr id="26" name="Demo detail 4"/>
+          <p:cNvSpPr txBox="1"/>
+          <p:nvPr/>
+        </p:nvSpPr>
+        <p:spPr>
+          <a:xfrm>
+            <a:off x="4846320" y="3886200"/>
+            <a:ext cx="3657600" cy="365760"/>
+          </a:xfrm>
+          <a:prstGeom prst="rect">
+            <a:avLst/>
+          </a:prstGeom>
+          <a:noFill/>
+          <a:ln/>
+        </p:spPr>
+        <p:txBody>
+          <a:bodyPr wrap="square" lIns="0" tIns="0" rIns="0" bIns="0" rtlCol="0" anchor="t"/>
+          <a:lstStyle/>
+          <a:p>
+            <a:pPr indent="0" marL="0">
+              <a:buNone/>
+            </a:pPr>
+            <a:r>
+              <a:rPr lang="en-US" sz="1300" dirty="0">
+                <a:solidFill>
+                  <a:schemeClr val="tx2"/>
+                </a:solidFill>
+              </a:rPr>
+              <a:t>Critic catches it, recomputes, passes</a:t>
+            </a:r>
+            <a:endParaRPr lang="en-US" sz="1300" dirty="0"/>
+          </a:p>
+        </p:txBody>
+      </p:sp>
+      <p:sp>
+        <p:nvSpPr>
+          <p:cNvPr id="25" name="Slide Number Placeholder 0"/>
+          <p:cNvSpPr>
+            <a:spLocks noGrp="1"/>
+          </p:cNvSpPr>
           <p:nvPr>
-            <p:ph idx="101" type="body" hasCustomPrompt="1"/>
+            <p:ph type="sldNum" sz="quarter" idx="4294967295"/>
           </p:nvPr>
         </p:nvSpPr>
         <p:spPr>
           <a:xfrm>
-            <a:off x="548640" y="2560320"/>
-            <a:ext cx="7315200" cy="1097280"/>
-          </a:xfrm>
-          <a:prstGeom prst="rect">
-            <a:avLst/>
-          </a:prstGeom>
-          <a:noFill/>
-          <a:ln/>
-        </p:spPr>
-        <p:txBody>
-          <a:bodyPr wrap="square" lIns="0" tIns="0" rIns="0" bIns="0" rtlCol="0" anchor="t"/>
-          <a:lstStyle/>
-          <a:p>
-            <a:pPr indent="0" marL="0">
-              <a:buNone/>
-            </a:pPr>
-            <a:r>
-              <a:rPr lang="en-US" sz="1800" dirty="0">
-                <a:solidFill>
-                  <a:schemeClr val="bg2"/>
-                </a:solidFill>
-              </a:rPr>
-              <a:t>Questions welcome. The Streamlit app, the architecture diagram and the robustness reports are all in the project folder.</a:t>
-            </a:r>
-            <a:endParaRPr lang="en-US" sz="1800" dirty="0"/>
+            <a:off x="8321040" y="4773168"/>
+            <a:ext cx="457200" cy="228600"/>
+          </a:xfrm>
+          <a:prstGeom prst="rect">
+            <a:avLst/>
+          </a:prstGeom>
+          <a:extLst>
+            <a:ext uri="{C572A759-6A51-4108-AA02-DFA0A04FC94B}">
+              <ma14:wrappingTextBoxFlag xmlns:ma14="http://schemas.microsoft.com/office/mac/drawingml/2011/main" val="0"/>
+            </a:ext>
+          </a:extLst>
+        </p:spPr>
+        <p:txBody>
+          <a:bodyPr/>
+          <a:lstStyle>
+            <a:lvl1pPr>
+              <a:defRPr sz="1000">
+                <a:solidFill>
+                  <a:schemeClr val="tx2"/>
+                </a:solidFill>
+              </a:defRPr>
+            </a:lvl1pPr>
+          </a:lstStyle>
+          <a:p>
+            <a:pPr algn="r"/>
+            <a:fld id="{F7021451-1387-4CA6-816F-3879F97B5CBC}" type="slidenum">
+              <a:rPr b="0" lang="en-US"/>
+              <a:t>10</a:t>
+            </a:fld>
+            <a:endParaRPr lang="en-US"/>
           </a:p>
         </p:txBody>
       </p:sp>
@@ -4448,7 +5411,7 @@
                   <a:schemeClr val="tx1"/>
                 </a:solidFill>
               </a:rPr>
-              <a:t>Same claim, two ways to process it</a:t>
+              <a:t>Five agents in a loop, not a pipe</a:t>
             </a:r>
             <a:endParaRPr lang="en-US" sz="2800" dirty="0"/>
           </a:p>
@@ -4456,18 +5419,18 @@
       </p:sp>
       <p:sp>
         <p:nvSpPr>
-          <p:cNvPr id="3" name="Manual card"/>
+          <p:cNvPr id="3" name="Agent card Planner"/>
           <p:cNvSpPr/>
           <p:nvPr/>
         </p:nvSpPr>
         <p:spPr>
           <a:xfrm>
-            <a:off x="457200" y="1234440"/>
-            <a:ext cx="3977640" cy="2331720"/>
+            <a:off x="457200" y="1280160"/>
+            <a:ext cx="1463040" cy="1600200"/>
           </a:xfrm>
           <a:prstGeom prst="roundRect">
             <a:avLst>
-              <a:gd name="adj" fmla="val 3137"/>
+              <a:gd name="adj" fmla="val 5000"/>
             </a:avLst>
           </a:prstGeom>
           <a:solidFill>
@@ -4478,53 +5441,136 @@
       </p:sp>
       <p:sp>
         <p:nvSpPr>
-          <p:cNvPr id="4" name="Manual heading"/>
-          <p:cNvSpPr txBox="1"/>
-          <p:nvPr/>
-        </p:nvSpPr>
-        <p:spPr>
-          <a:xfrm>
-            <a:off x="685800" y="1371600"/>
-            <a:ext cx="3566160" cy="365760"/>
-          </a:xfrm>
-          <a:prstGeom prst="rect">
-            <a:avLst/>
-          </a:prstGeom>
-          <a:noFill/>
-          <a:ln/>
-        </p:spPr>
-        <p:txBody>
-          <a:bodyPr wrap="square" lIns="0" tIns="0" rIns="0" bIns="0" rtlCol="0" anchor="t"/>
-          <a:lstStyle/>
-          <a:p>
-            <a:pPr indent="0" marL="0">
-              <a:buNone/>
-            </a:pPr>
-            <a:r>
-              <a:rPr lang="en-US" sz="2000" b="1" dirty="0">
-                <a:solidFill>
-                  <a:schemeClr val="tx2"/>
+          <p:cNvPr id="4" name="Agent outline Planner"/>
+          <p:cNvSpPr/>
+          <p:nvPr/>
+        </p:nvSpPr>
+        <p:spPr>
+          <a:xfrm>
+            <a:off x="457200" y="1280160"/>
+            <a:ext cx="1463040" cy="1600200"/>
+          </a:xfrm>
+          <a:prstGeom prst="roundRect">
+            <a:avLst>
+              <a:gd name="adj" fmla="val 5000"/>
+            </a:avLst>
+          </a:prstGeom>
+          <a:ln w="25400">
+            <a:solidFill>
+              <a:schemeClr val="accent1"/>
+            </a:solidFill>
+            <a:prstDash val="solid"/>
+          </a:ln>
+        </p:spPr>
+      </p:sp>
+      <p:sp>
+        <p:nvSpPr>
+          <p:cNvPr id="5" name="Badge 1"/>
+          <p:cNvSpPr/>
+          <p:nvPr/>
+        </p:nvSpPr>
+        <p:spPr>
+          <a:xfrm>
+            <a:off x="566928" y="1389888"/>
+            <a:ext cx="347472" cy="347472"/>
+          </a:xfrm>
+          <a:prstGeom prst="ellipse">
+            <a:avLst/>
+          </a:prstGeom>
+          <a:solidFill>
+            <a:schemeClr val="accent1"/>
+          </a:solidFill>
+          <a:ln/>
+        </p:spPr>
+      </p:sp>
+      <p:sp>
+        <p:nvSpPr>
+          <p:cNvPr id="6" name="Badge 1 label"/>
+          <p:cNvSpPr txBox="1"/>
+          <p:nvPr/>
+        </p:nvSpPr>
+        <p:spPr>
+          <a:xfrm>
+            <a:off x="566928" y="1389888"/>
+            <a:ext cx="347472" cy="347472"/>
+          </a:xfrm>
+          <a:prstGeom prst="rect">
+            <a:avLst/>
+          </a:prstGeom>
+          <a:noFill/>
+          <a:ln/>
+        </p:spPr>
+        <p:txBody>
+          <a:bodyPr wrap="square" lIns="0" tIns="0" rIns="0" bIns="0" rtlCol="0" anchor="ctr"/>
+          <a:lstStyle/>
+          <a:p>
+            <a:pPr algn="ctr" indent="0" marL="0">
+              <a:buNone/>
+            </a:pPr>
+            <a:r>
+              <a:rPr lang="en-US" sz="1500" b="1" dirty="0">
+                <a:solidFill>
+                  <a:schemeClr val="bg1"/>
                 </a:solidFill>
                 <a:latin typeface="Cambria" pitchFamily="34" charset="0"/>
                 <a:ea typeface="Cambria" pitchFamily="34" charset="-122"/>
                 <a:cs typeface="Cambria" pitchFamily="34" charset="-120"/>
               </a:rPr>
-              <a:t>Today: one officer</a:t>
-            </a:r>
-            <a:endParaRPr lang="en-US" sz="2000" dirty="0"/>
-          </a:p>
-        </p:txBody>
-      </p:sp>
-      <p:sp>
-        <p:nvSpPr>
-          <p:cNvPr id="5" name="Manual steps"/>
-          <p:cNvSpPr txBox="1"/>
-          <p:nvPr/>
-        </p:nvSpPr>
-        <p:spPr>
-          <a:xfrm>
-            <a:off x="685800" y="1828800"/>
-            <a:ext cx="3566160" cy="1645920"/>
+              <a:t>1</a:t>
+            </a:r>
+            <a:endParaRPr lang="en-US" sz="1500" dirty="0"/>
+          </a:p>
+        </p:txBody>
+      </p:sp>
+      <p:sp>
+        <p:nvSpPr>
+          <p:cNvPr id="7" name="Agent name Planner"/>
+          <p:cNvSpPr txBox="1"/>
+          <p:nvPr/>
+        </p:nvSpPr>
+        <p:spPr>
+          <a:xfrm>
+            <a:off x="969264" y="1389888"/>
+            <a:ext cx="914400" cy="347472"/>
+          </a:xfrm>
+          <a:prstGeom prst="rect">
+            <a:avLst/>
+          </a:prstGeom>
+          <a:noFill/>
+          <a:ln/>
+        </p:spPr>
+        <p:txBody>
+          <a:bodyPr wrap="square" lIns="0" tIns="0" rIns="0" bIns="0" rtlCol="0" anchor="ctr"/>
+          <a:lstStyle/>
+          <a:p>
+            <a:pPr indent="0" marL="0">
+              <a:buNone/>
+            </a:pPr>
+            <a:r>
+              <a:rPr lang="en-US" sz="1600" b="1" dirty="0">
+                <a:solidFill>
+                  <a:schemeClr val="tx1"/>
+                </a:solidFill>
+                <a:latin typeface="Cambria" pitchFamily="34" charset="0"/>
+                <a:ea typeface="Cambria" pitchFamily="34" charset="-122"/>
+                <a:cs typeface="Cambria" pitchFamily="34" charset="-120"/>
+              </a:rPr>
+              <a:t>Planner</a:t>
+            </a:r>
+            <a:endParaRPr lang="en-US" sz="1600" dirty="0"/>
+          </a:p>
+        </p:txBody>
+      </p:sp>
+      <p:sp>
+        <p:nvSpPr>
+          <p:cNvPr id="8" name="Agent role Planner"/>
+          <p:cNvSpPr txBox="1"/>
+          <p:nvPr/>
+        </p:nvSpPr>
+        <p:spPr>
+          <a:xfrm>
+            <a:off x="566928" y="1874520"/>
+            <a:ext cx="1261872" cy="914400"/>
           </a:xfrm>
           <a:prstGeom prst="rect">
             <a:avLst/>
@@ -4536,91 +5582,511 @@
           <a:bodyPr wrap="square" lIns="0" tIns="0" rIns="0" bIns="0" rtlCol="0" anchor="t"/>
           <a:lstStyle/>
           <a:p>
-            <a:pPr marL="342900" indent="-342900">
-              <a:spcAft>
-                <a:spcPts val="600"/>
-              </a:spcAft>
-              <a:buSzPct val="100000"/>
-              <a:buChar char="•"/>
-            </a:pPr>
-            <a:r>
-              <a:rPr lang="en-US" sz="1500" dirty="0">
+            <a:pPr indent="0" marL="0">
+              <a:buNone/>
+            </a:pPr>
+            <a:r>
+              <a:rPr lang="en-US" sz="1300" dirty="0">
                 <a:solidFill>
                   <a:schemeClr val="tx1"/>
                 </a:solidFill>
               </a:rPr>
-              <a:t>Reads the bill and discharge summary</a:t>
+              <a:t>Chooses a quick or thorough check from claim risk</a:t>
+            </a:r>
+            <a:endParaRPr lang="en-US" sz="1300" dirty="0"/>
+          </a:p>
+        </p:txBody>
+      </p:sp>
+      <p:sp>
+        <p:nvSpPr>
+          <p:cNvPr id="9" name="Flow 1"/>
+          <p:cNvSpPr/>
+          <p:nvPr/>
+        </p:nvSpPr>
+        <p:spPr>
+          <a:xfrm>
+            <a:off x="1920240" y="2075688"/>
+            <a:ext cx="219456" cy="0"/>
+          </a:xfrm>
+          <a:prstGeom prst="line">
+            <a:avLst/>
+          </a:prstGeom>
+          <a:noFill/>
+          <a:ln w="28575">
+            <a:solidFill>
+              <a:schemeClr val="accent1"/>
+            </a:solidFill>
+            <a:prstDash val="solid"/>
+            <a:tailEnd type="triangle"/>
+          </a:ln>
+        </p:spPr>
+      </p:sp>
+      <p:sp>
+        <p:nvSpPr>
+          <p:cNvPr id="10" name="Agent card Extractor"/>
+          <p:cNvSpPr/>
+          <p:nvPr/>
+        </p:nvSpPr>
+        <p:spPr>
+          <a:xfrm>
+            <a:off x="2139696" y="1280160"/>
+            <a:ext cx="1463040" cy="1600200"/>
+          </a:xfrm>
+          <a:prstGeom prst="roundRect">
+            <a:avLst>
+              <a:gd name="adj" fmla="val 5000"/>
+            </a:avLst>
+          </a:prstGeom>
+          <a:solidFill>
+            <a:schemeClr val="bg2"/>
+          </a:solidFill>
+          <a:ln/>
+        </p:spPr>
+      </p:sp>
+      <p:sp>
+        <p:nvSpPr>
+          <p:cNvPr id="11" name="Agent outline Extractor"/>
+          <p:cNvSpPr/>
+          <p:nvPr/>
+        </p:nvSpPr>
+        <p:spPr>
+          <a:xfrm>
+            <a:off x="2139696" y="1280160"/>
+            <a:ext cx="1463040" cy="1600200"/>
+          </a:xfrm>
+          <a:prstGeom prst="roundRect">
+            <a:avLst>
+              <a:gd name="adj" fmla="val 5000"/>
+            </a:avLst>
+          </a:prstGeom>
+          <a:ln w="25400">
+            <a:solidFill>
+              <a:schemeClr val="accent1"/>
+            </a:solidFill>
+            <a:prstDash val="solid"/>
+          </a:ln>
+        </p:spPr>
+      </p:sp>
+      <p:sp>
+        <p:nvSpPr>
+          <p:cNvPr id="12" name="Badge 2"/>
+          <p:cNvSpPr/>
+          <p:nvPr/>
+        </p:nvSpPr>
+        <p:spPr>
+          <a:xfrm>
+            <a:off x="2249424" y="1389888"/>
+            <a:ext cx="347472" cy="347472"/>
+          </a:xfrm>
+          <a:prstGeom prst="ellipse">
+            <a:avLst/>
+          </a:prstGeom>
+          <a:solidFill>
+            <a:schemeClr val="accent1"/>
+          </a:solidFill>
+          <a:ln/>
+        </p:spPr>
+      </p:sp>
+      <p:sp>
+        <p:nvSpPr>
+          <p:cNvPr id="13" name="Badge 2 label"/>
+          <p:cNvSpPr txBox="1"/>
+          <p:nvPr/>
+        </p:nvSpPr>
+        <p:spPr>
+          <a:xfrm>
+            <a:off x="2249424" y="1389888"/>
+            <a:ext cx="347472" cy="347472"/>
+          </a:xfrm>
+          <a:prstGeom prst="rect">
+            <a:avLst/>
+          </a:prstGeom>
+          <a:noFill/>
+          <a:ln/>
+        </p:spPr>
+        <p:txBody>
+          <a:bodyPr wrap="square" lIns="0" tIns="0" rIns="0" bIns="0" rtlCol="0" anchor="ctr"/>
+          <a:lstStyle/>
+          <a:p>
+            <a:pPr algn="ctr" indent="0" marL="0">
+              <a:buNone/>
+            </a:pPr>
+            <a:r>
+              <a:rPr lang="en-US" sz="1500" b="1" dirty="0">
+                <a:solidFill>
+                  <a:schemeClr val="bg1"/>
+                </a:solidFill>
+                <a:latin typeface="Cambria" pitchFamily="34" charset="0"/>
+                <a:ea typeface="Cambria" pitchFamily="34" charset="-122"/>
+                <a:cs typeface="Cambria" pitchFamily="34" charset="-120"/>
+              </a:rPr>
+              <a:t>2</a:t>
             </a:r>
             <a:endParaRPr lang="en-US" sz="1500" dirty="0"/>
           </a:p>
-          <a:p>
-            <a:pPr marL="342900" indent="-342900">
-              <a:spcAft>
-                <a:spcPts val="600"/>
-              </a:spcAft>
-              <a:buSzPct val="100000"/>
-              <a:buChar char="•"/>
-            </a:pPr>
-            <a:r>
-              <a:rPr lang="en-US" sz="1500" dirty="0">
+        </p:txBody>
+      </p:sp>
+      <p:sp>
+        <p:nvSpPr>
+          <p:cNvPr id="14" name="Agent name Extractor"/>
+          <p:cNvSpPr txBox="1"/>
+          <p:nvPr/>
+        </p:nvSpPr>
+        <p:spPr>
+          <a:xfrm>
+            <a:off x="2651760" y="1389888"/>
+            <a:ext cx="914400" cy="347472"/>
+          </a:xfrm>
+          <a:prstGeom prst="rect">
+            <a:avLst/>
+          </a:prstGeom>
+          <a:noFill/>
+          <a:ln/>
+        </p:spPr>
+        <p:txBody>
+          <a:bodyPr wrap="square" lIns="0" tIns="0" rIns="0" bIns="0" rtlCol="0" anchor="ctr"/>
+          <a:lstStyle/>
+          <a:p>
+            <a:pPr indent="0" marL="0">
+              <a:buNone/>
+            </a:pPr>
+            <a:r>
+              <a:rPr lang="en-US" sz="1600" b="1" dirty="0">
                 <a:solidFill>
                   <a:schemeClr val="tx1"/>
                 </a:solidFill>
-              </a:rPr>
-              <a:t>Looks up clauses by memory or manual</a:t>
+                <a:latin typeface="Cambria" pitchFamily="34" charset="0"/>
+                <a:ea typeface="Cambria" pitchFamily="34" charset="-122"/>
+                <a:cs typeface="Cambria" pitchFamily="34" charset="-120"/>
+              </a:rPr>
+              <a:t>Extractor</a:t>
+            </a:r>
+            <a:endParaRPr lang="en-US" sz="1600" dirty="0"/>
+          </a:p>
+        </p:txBody>
+      </p:sp>
+      <p:sp>
+        <p:nvSpPr>
+          <p:cNvPr id="15" name="Agent role Extractor"/>
+          <p:cNvSpPr txBox="1"/>
+          <p:nvPr/>
+        </p:nvSpPr>
+        <p:spPr>
+          <a:xfrm>
+            <a:off x="2249424" y="1874520"/>
+            <a:ext cx="1261872" cy="914400"/>
+          </a:xfrm>
+          <a:prstGeom prst="rect">
+            <a:avLst/>
+          </a:prstGeom>
+          <a:noFill/>
+          <a:ln/>
+        </p:spPr>
+        <p:txBody>
+          <a:bodyPr wrap="square" lIns="0" tIns="0" rIns="0" bIns="0" rtlCol="0" anchor="t"/>
+          <a:lstStyle/>
+          <a:p>
+            <a:pPr indent="0" marL="0">
+              <a:buNone/>
+            </a:pPr>
+            <a:r>
+              <a:rPr lang="en-US" sz="1300" dirty="0">
+                <a:solidFill>
+                  <a:schemeClr val="tx1"/>
+                </a:solidFill>
+              </a:rPr>
+              <a:t>Reads the discharge summary</a:t>
+            </a:r>
+            <a:endParaRPr lang="en-US" sz="1300" dirty="0"/>
+          </a:p>
+        </p:txBody>
+      </p:sp>
+      <p:sp>
+        <p:nvSpPr>
+          <p:cNvPr id="16" name="Flow 2"/>
+          <p:cNvSpPr/>
+          <p:nvPr/>
+        </p:nvSpPr>
+        <p:spPr>
+          <a:xfrm>
+            <a:off x="3602736" y="2075688"/>
+            <a:ext cx="219456" cy="0"/>
+          </a:xfrm>
+          <a:prstGeom prst="line">
+            <a:avLst/>
+          </a:prstGeom>
+          <a:noFill/>
+          <a:ln w="28575">
+            <a:solidFill>
+              <a:schemeClr val="accent1"/>
+            </a:solidFill>
+            <a:prstDash val="solid"/>
+            <a:tailEnd type="triangle"/>
+          </a:ln>
+        </p:spPr>
+      </p:sp>
+      <p:sp>
+        <p:nvSpPr>
+          <p:cNvPr id="17" name="Agent card Executor"/>
+          <p:cNvSpPr/>
+          <p:nvPr/>
+        </p:nvSpPr>
+        <p:spPr>
+          <a:xfrm>
+            <a:off x="3822192" y="1280160"/>
+            <a:ext cx="1463040" cy="1600200"/>
+          </a:xfrm>
+          <a:prstGeom prst="roundRect">
+            <a:avLst>
+              <a:gd name="adj" fmla="val 5000"/>
+            </a:avLst>
+          </a:prstGeom>
+          <a:solidFill>
+            <a:schemeClr val="bg2"/>
+          </a:solidFill>
+          <a:ln/>
+        </p:spPr>
+      </p:sp>
+      <p:sp>
+        <p:nvSpPr>
+          <p:cNvPr id="18" name="Agent outline Executor"/>
+          <p:cNvSpPr/>
+          <p:nvPr/>
+        </p:nvSpPr>
+        <p:spPr>
+          <a:xfrm>
+            <a:off x="3822192" y="1280160"/>
+            <a:ext cx="1463040" cy="1600200"/>
+          </a:xfrm>
+          <a:prstGeom prst="roundRect">
+            <a:avLst>
+              <a:gd name="adj" fmla="val 5000"/>
+            </a:avLst>
+          </a:prstGeom>
+          <a:ln w="25400">
+            <a:solidFill>
+              <a:schemeClr val="accent1"/>
+            </a:solidFill>
+            <a:prstDash val="solid"/>
+          </a:ln>
+        </p:spPr>
+      </p:sp>
+      <p:sp>
+        <p:nvSpPr>
+          <p:cNvPr id="19" name="Badge 3"/>
+          <p:cNvSpPr/>
+          <p:nvPr/>
+        </p:nvSpPr>
+        <p:spPr>
+          <a:xfrm>
+            <a:off x="3931920" y="1389888"/>
+            <a:ext cx="347472" cy="347472"/>
+          </a:xfrm>
+          <a:prstGeom prst="ellipse">
+            <a:avLst/>
+          </a:prstGeom>
+          <a:solidFill>
+            <a:schemeClr val="accent1"/>
+          </a:solidFill>
+          <a:ln/>
+        </p:spPr>
+      </p:sp>
+      <p:sp>
+        <p:nvSpPr>
+          <p:cNvPr id="20" name="Badge 3 label"/>
+          <p:cNvSpPr txBox="1"/>
+          <p:nvPr/>
+        </p:nvSpPr>
+        <p:spPr>
+          <a:xfrm>
+            <a:off x="3931920" y="1389888"/>
+            <a:ext cx="347472" cy="347472"/>
+          </a:xfrm>
+          <a:prstGeom prst="rect">
+            <a:avLst/>
+          </a:prstGeom>
+          <a:noFill/>
+          <a:ln/>
+        </p:spPr>
+        <p:txBody>
+          <a:bodyPr wrap="square" lIns="0" tIns="0" rIns="0" bIns="0" rtlCol="0" anchor="ctr"/>
+          <a:lstStyle/>
+          <a:p>
+            <a:pPr algn="ctr" indent="0" marL="0">
+              <a:buNone/>
+            </a:pPr>
+            <a:r>
+              <a:rPr lang="en-US" sz="1500" b="1" dirty="0">
+                <a:solidFill>
+                  <a:schemeClr val="bg1"/>
+                </a:solidFill>
+                <a:latin typeface="Cambria" pitchFamily="34" charset="0"/>
+                <a:ea typeface="Cambria" pitchFamily="34" charset="-122"/>
+                <a:cs typeface="Cambria" pitchFamily="34" charset="-120"/>
+              </a:rPr>
+              <a:t>3</a:t>
             </a:r>
             <a:endParaRPr lang="en-US" sz="1500" dirty="0"/>
           </a:p>
-          <a:p>
-            <a:pPr marL="342900" indent="-342900">
-              <a:spcAft>
-                <a:spcPts val="600"/>
-              </a:spcAft>
-              <a:buSzPct val="100000"/>
-              <a:buChar char="•"/>
-            </a:pPr>
-            <a:r>
-              <a:rPr lang="en-US" sz="1500" dirty="0">
+        </p:txBody>
+      </p:sp>
+      <p:sp>
+        <p:nvSpPr>
+          <p:cNvPr id="21" name="Agent name Executor"/>
+          <p:cNvSpPr txBox="1"/>
+          <p:nvPr/>
+        </p:nvSpPr>
+        <p:spPr>
+          <a:xfrm>
+            <a:off x="4334256" y="1389888"/>
+            <a:ext cx="914400" cy="347472"/>
+          </a:xfrm>
+          <a:prstGeom prst="rect">
+            <a:avLst/>
+          </a:prstGeom>
+          <a:noFill/>
+          <a:ln/>
+        </p:spPr>
+        <p:txBody>
+          <a:bodyPr wrap="square" lIns="0" tIns="0" rIns="0" bIns="0" rtlCol="0" anchor="ctr"/>
+          <a:lstStyle/>
+          <a:p>
+            <a:pPr indent="0" marL="0">
+              <a:buNone/>
+            </a:pPr>
+            <a:r>
+              <a:rPr lang="en-US" sz="1600" b="1" dirty="0">
                 <a:solidFill>
                   <a:schemeClr val="tx1"/>
                 </a:solidFill>
-              </a:rPr>
-              <a:t>Spots fraud by eye, if at all</a:t>
-            </a:r>
-            <a:endParaRPr lang="en-US" sz="1500" dirty="0"/>
-          </a:p>
-          <a:p>
-            <a:pPr marL="342900" indent="-342900">
-              <a:spcAft>
-                <a:spcPts val="600"/>
-              </a:spcAft>
-              <a:buSzPct val="100000"/>
-              <a:buChar char="•"/>
-            </a:pPr>
-            <a:r>
-              <a:rPr lang="en-US" sz="1500" dirty="0">
+                <a:latin typeface="Cambria" pitchFamily="34" charset="0"/>
+                <a:ea typeface="Cambria" pitchFamily="34" charset="-122"/>
+                <a:cs typeface="Cambria" pitchFamily="34" charset="-120"/>
+              </a:rPr>
+              <a:t>Executor</a:t>
+            </a:r>
+            <a:endParaRPr lang="en-US" sz="1600" dirty="0"/>
+          </a:p>
+        </p:txBody>
+      </p:sp>
+      <p:sp>
+        <p:nvSpPr>
+          <p:cNvPr id="22" name="Agent role Executor"/>
+          <p:cNvSpPr txBox="1"/>
+          <p:nvPr/>
+        </p:nvSpPr>
+        <p:spPr>
+          <a:xfrm>
+            <a:off x="3931920" y="1874520"/>
+            <a:ext cx="1261872" cy="914400"/>
+          </a:xfrm>
+          <a:prstGeom prst="rect">
+            <a:avLst/>
+          </a:prstGeom>
+          <a:noFill/>
+          <a:ln/>
+        </p:spPr>
+        <p:txBody>
+          <a:bodyPr wrap="square" lIns="0" tIns="0" rIns="0" bIns="0" rtlCol="0" anchor="t"/>
+          <a:lstStyle/>
+          <a:p>
+            <a:pPr indent="0" marL="0">
+              <a:buNone/>
+            </a:pPr>
+            <a:r>
+              <a:rPr lang="en-US" sz="1300" dirty="0">
                 <a:solidFill>
                   <a:schemeClr val="tx1"/>
                 </a:solidFill>
               </a:rPr>
-              <a:t>Decides after hours or days</a:t>
-            </a:r>
-            <a:endParaRPr lang="en-US" sz="1500" dirty="0"/>
-          </a:p>
-        </p:txBody>
-      </p:sp>
-      <p:sp>
-        <p:nvSpPr>
-          <p:cNvPr id="6" name="Before-after arrow"/>
+              <a:t>Runs checks with Python tools</a:t>
+            </a:r>
+            <a:endParaRPr lang="en-US" sz="1300" dirty="0"/>
+          </a:p>
+        </p:txBody>
+      </p:sp>
+      <p:sp>
+        <p:nvSpPr>
+          <p:cNvPr id="23" name="Flow 3"/>
           <p:cNvSpPr/>
           <p:nvPr/>
         </p:nvSpPr>
         <p:spPr>
           <a:xfrm>
-            <a:off x="4526280" y="2194560"/>
-            <a:ext cx="457200" cy="457200"/>
-          </a:xfrm>
-          <a:prstGeom prst="rightArrow">
+            <a:off x="5285232" y="2075688"/>
+            <a:ext cx="219456" cy="0"/>
+          </a:xfrm>
+          <a:prstGeom prst="line">
+            <a:avLst/>
+          </a:prstGeom>
+          <a:noFill/>
+          <a:ln w="28575">
+            <a:solidFill>
+              <a:schemeClr val="accent1"/>
+            </a:solidFill>
+            <a:prstDash val="solid"/>
+            <a:tailEnd type="triangle"/>
+          </a:ln>
+        </p:spPr>
+      </p:sp>
+      <p:sp>
+        <p:nvSpPr>
+          <p:cNvPr id="24" name="Agent card Critic"/>
+          <p:cNvSpPr/>
+          <p:nvPr/>
+        </p:nvSpPr>
+        <p:spPr>
+          <a:xfrm>
+            <a:off x="5504688" y="1280160"/>
+            <a:ext cx="1463040" cy="1600200"/>
+          </a:xfrm>
+          <a:prstGeom prst="roundRect">
+            <a:avLst>
+              <a:gd name="adj" fmla="val 5000"/>
+            </a:avLst>
+          </a:prstGeom>
+          <a:solidFill>
+            <a:schemeClr val="bg2"/>
+          </a:solidFill>
+          <a:ln/>
+        </p:spPr>
+      </p:sp>
+      <p:sp>
+        <p:nvSpPr>
+          <p:cNvPr id="25" name="Agent outline Critic"/>
+          <p:cNvSpPr/>
+          <p:nvPr/>
+        </p:nvSpPr>
+        <p:spPr>
+          <a:xfrm>
+            <a:off x="5504688" y="1280160"/>
+            <a:ext cx="1463040" cy="1600200"/>
+          </a:xfrm>
+          <a:prstGeom prst="roundRect">
+            <a:avLst>
+              <a:gd name="adj" fmla="val 5000"/>
+            </a:avLst>
+          </a:prstGeom>
+          <a:ln w="25400">
+            <a:solidFill>
+              <a:schemeClr val="accent2"/>
+            </a:solidFill>
+            <a:prstDash val="solid"/>
+          </a:ln>
+        </p:spPr>
+      </p:sp>
+      <p:sp>
+        <p:nvSpPr>
+          <p:cNvPr id="26" name="Badge 4"/>
+          <p:cNvSpPr/>
+          <p:nvPr/>
+        </p:nvSpPr>
+        <p:spPr>
+          <a:xfrm>
+            <a:off x="5614416" y="1389888"/>
+            <a:ext cx="347472" cy="347472"/>
+          </a:xfrm>
+          <a:prstGeom prst="ellipse">
             <a:avLst/>
           </a:prstGeom>
           <a:solidFill>
@@ -4631,18 +6097,156 @@
       </p:sp>
       <p:sp>
         <p:nvSpPr>
-          <p:cNvPr id="7" name="Agentic card"/>
+          <p:cNvPr id="27" name="Badge 4 label"/>
+          <p:cNvSpPr txBox="1"/>
+          <p:nvPr/>
+        </p:nvSpPr>
+        <p:spPr>
+          <a:xfrm>
+            <a:off x="5614416" y="1389888"/>
+            <a:ext cx="347472" cy="347472"/>
+          </a:xfrm>
+          <a:prstGeom prst="rect">
+            <a:avLst/>
+          </a:prstGeom>
+          <a:noFill/>
+          <a:ln/>
+        </p:spPr>
+        <p:txBody>
+          <a:bodyPr wrap="square" lIns="0" tIns="0" rIns="0" bIns="0" rtlCol="0" anchor="ctr"/>
+          <a:lstStyle/>
+          <a:p>
+            <a:pPr algn="ctr" indent="0" marL="0">
+              <a:buNone/>
+            </a:pPr>
+            <a:r>
+              <a:rPr lang="en-US" sz="1500" b="1" dirty="0">
+                <a:solidFill>
+                  <a:schemeClr val="bg1"/>
+                </a:solidFill>
+                <a:latin typeface="Cambria" pitchFamily="34" charset="0"/>
+                <a:ea typeface="Cambria" pitchFamily="34" charset="-122"/>
+                <a:cs typeface="Cambria" pitchFamily="34" charset="-120"/>
+              </a:rPr>
+              <a:t>4</a:t>
+            </a:r>
+            <a:endParaRPr lang="en-US" sz="1500" dirty="0"/>
+          </a:p>
+        </p:txBody>
+      </p:sp>
+      <p:sp>
+        <p:nvSpPr>
+          <p:cNvPr id="28" name="Agent name Critic"/>
+          <p:cNvSpPr txBox="1"/>
+          <p:nvPr/>
+        </p:nvSpPr>
+        <p:spPr>
+          <a:xfrm>
+            <a:off x="6016752" y="1389888"/>
+            <a:ext cx="914400" cy="347472"/>
+          </a:xfrm>
+          <a:prstGeom prst="rect">
+            <a:avLst/>
+          </a:prstGeom>
+          <a:noFill/>
+          <a:ln/>
+        </p:spPr>
+        <p:txBody>
+          <a:bodyPr wrap="square" lIns="0" tIns="0" rIns="0" bIns="0" rtlCol="0" anchor="ctr"/>
+          <a:lstStyle/>
+          <a:p>
+            <a:pPr indent="0" marL="0">
+              <a:buNone/>
+            </a:pPr>
+            <a:r>
+              <a:rPr lang="en-US" sz="1600" b="1" dirty="0">
+                <a:solidFill>
+                  <a:schemeClr val="tx1"/>
+                </a:solidFill>
+                <a:latin typeface="Cambria" pitchFamily="34" charset="0"/>
+                <a:ea typeface="Cambria" pitchFamily="34" charset="-122"/>
+                <a:cs typeface="Cambria" pitchFamily="34" charset="-120"/>
+              </a:rPr>
+              <a:t>Critic</a:t>
+            </a:r>
+            <a:endParaRPr lang="en-US" sz="1600" dirty="0"/>
+          </a:p>
+        </p:txBody>
+      </p:sp>
+      <p:sp>
+        <p:nvSpPr>
+          <p:cNvPr id="29" name="Agent role Critic"/>
+          <p:cNvSpPr txBox="1"/>
+          <p:nvPr/>
+        </p:nvSpPr>
+        <p:spPr>
+          <a:xfrm>
+            <a:off x="5614416" y="1874520"/>
+            <a:ext cx="1261872" cy="914400"/>
+          </a:xfrm>
+          <a:prstGeom prst="rect">
+            <a:avLst/>
+          </a:prstGeom>
+          <a:noFill/>
+          <a:ln/>
+        </p:spPr>
+        <p:txBody>
+          <a:bodyPr wrap="square" lIns="0" tIns="0" rIns="0" bIns="0" rtlCol="0" anchor="t"/>
+          <a:lstStyle/>
+          <a:p>
+            <a:pPr indent="0" marL="0">
+              <a:buNone/>
+            </a:pPr>
+            <a:r>
+              <a:rPr lang="en-US" sz="1300" dirty="0">
+                <a:solidFill>
+                  <a:schemeClr val="tx1"/>
+                </a:solidFill>
+              </a:rPr>
+              <a:t>Re-verifies maths, limits, fraud cover</a:t>
+            </a:r>
+            <a:endParaRPr lang="en-US" sz="1300" dirty="0"/>
+          </a:p>
+        </p:txBody>
+      </p:sp>
+      <p:sp>
+        <p:nvSpPr>
+          <p:cNvPr id="30" name="Flow 4"/>
           <p:cNvSpPr/>
           <p:nvPr/>
         </p:nvSpPr>
         <p:spPr>
           <a:xfrm>
-            <a:off x="5074920" y="1234440"/>
-            <a:ext cx="3611880" cy="2331720"/>
+            <a:off x="6967728" y="2075688"/>
+            <a:ext cx="219456" cy="0"/>
+          </a:xfrm>
+          <a:prstGeom prst="line">
+            <a:avLst/>
+          </a:prstGeom>
+          <a:noFill/>
+          <a:ln w="28575">
+            <a:solidFill>
+              <a:schemeClr val="accent1"/>
+            </a:solidFill>
+            <a:prstDash val="solid"/>
+            <a:tailEnd type="triangle"/>
+          </a:ln>
+        </p:spPr>
+      </p:sp>
+      <p:sp>
+        <p:nvSpPr>
+          <p:cNvPr id="31" name="Agent card Decision"/>
+          <p:cNvSpPr/>
+          <p:nvPr/>
+        </p:nvSpPr>
+        <p:spPr>
+          <a:xfrm>
+            <a:off x="7187184" y="1280160"/>
+            <a:ext cx="1463040" cy="1600200"/>
           </a:xfrm>
           <a:prstGeom prst="roundRect">
             <a:avLst>
-              <a:gd name="adj" fmla="val 3137"/>
+              <a:gd name="adj" fmla="val 5000"/>
             </a:avLst>
           </a:prstGeom>
           <a:solidFill>
@@ -4653,186 +6257,269 @@
       </p:sp>
       <p:sp>
         <p:nvSpPr>
-          <p:cNvPr id="8" name="Agentic heading"/>
-          <p:cNvSpPr txBox="1"/>
-          <p:nvPr/>
-        </p:nvSpPr>
-        <p:spPr>
-          <a:xfrm>
-            <a:off x="5303520" y="1371600"/>
-            <a:ext cx="3200400" cy="365760"/>
-          </a:xfrm>
-          <a:prstGeom prst="rect">
-            <a:avLst/>
-          </a:prstGeom>
-          <a:noFill/>
-          <a:ln/>
-        </p:spPr>
-        <p:txBody>
-          <a:bodyPr wrap="square" lIns="0" tIns="0" rIns="0" bIns="0" rtlCol="0" anchor="t"/>
-          <a:lstStyle/>
-          <a:p>
-            <a:pPr indent="0" marL="0">
-              <a:buNone/>
-            </a:pPr>
-            <a:r>
-              <a:rPr lang="en-US" sz="2000" b="1" dirty="0">
-                <a:solidFill>
-                  <a:schemeClr val="accent1"/>
+          <p:cNvPr id="32" name="Agent outline Decision"/>
+          <p:cNvSpPr/>
+          <p:nvPr/>
+        </p:nvSpPr>
+        <p:spPr>
+          <a:xfrm>
+            <a:off x="7187184" y="1280160"/>
+            <a:ext cx="1463040" cy="1600200"/>
+          </a:xfrm>
+          <a:prstGeom prst="roundRect">
+            <a:avLst>
+              <a:gd name="adj" fmla="val 5000"/>
+            </a:avLst>
+          </a:prstGeom>
+          <a:ln w="25400">
+            <a:solidFill>
+              <a:schemeClr val="accent1"/>
+            </a:solidFill>
+            <a:prstDash val="solid"/>
+          </a:ln>
+        </p:spPr>
+      </p:sp>
+      <p:sp>
+        <p:nvSpPr>
+          <p:cNvPr id="33" name="Badge 5"/>
+          <p:cNvSpPr/>
+          <p:nvPr/>
+        </p:nvSpPr>
+        <p:spPr>
+          <a:xfrm>
+            <a:off x="7296912" y="1389888"/>
+            <a:ext cx="347472" cy="347472"/>
+          </a:xfrm>
+          <a:prstGeom prst="ellipse">
+            <a:avLst/>
+          </a:prstGeom>
+          <a:solidFill>
+            <a:schemeClr val="accent1"/>
+          </a:solidFill>
+          <a:ln/>
+        </p:spPr>
+      </p:sp>
+      <p:sp>
+        <p:nvSpPr>
+          <p:cNvPr id="34" name="Badge 5 label"/>
+          <p:cNvSpPr txBox="1"/>
+          <p:nvPr/>
+        </p:nvSpPr>
+        <p:spPr>
+          <a:xfrm>
+            <a:off x="7296912" y="1389888"/>
+            <a:ext cx="347472" cy="347472"/>
+          </a:xfrm>
+          <a:prstGeom prst="rect">
+            <a:avLst/>
+          </a:prstGeom>
+          <a:noFill/>
+          <a:ln/>
+        </p:spPr>
+        <p:txBody>
+          <a:bodyPr wrap="square" lIns="0" tIns="0" rIns="0" bIns="0" rtlCol="0" anchor="ctr"/>
+          <a:lstStyle/>
+          <a:p>
+            <a:pPr algn="ctr" indent="0" marL="0">
+              <a:buNone/>
+            </a:pPr>
+            <a:r>
+              <a:rPr lang="en-US" sz="1500" b="1" dirty="0">
+                <a:solidFill>
+                  <a:schemeClr val="bg1"/>
                 </a:solidFill>
                 <a:latin typeface="Cambria" pitchFamily="34" charset="0"/>
                 <a:ea typeface="Cambria" pitchFamily="34" charset="-122"/>
                 <a:cs typeface="Cambria" pitchFamily="34" charset="-120"/>
               </a:rPr>
-              <a:t>Proposed: five agents</a:t>
-            </a:r>
-            <a:endParaRPr lang="en-US" sz="2000" dirty="0"/>
-          </a:p>
-        </p:txBody>
-      </p:sp>
-      <p:sp>
-        <p:nvSpPr>
-          <p:cNvPr id="9" name="Agentic steps"/>
-          <p:cNvSpPr txBox="1"/>
-          <p:nvPr/>
-        </p:nvSpPr>
-        <p:spPr>
-          <a:xfrm>
-            <a:off x="5303520" y="1828800"/>
-            <a:ext cx="3200400" cy="1645920"/>
-          </a:xfrm>
-          <a:prstGeom prst="rect">
-            <a:avLst/>
-          </a:prstGeom>
-          <a:noFill/>
-          <a:ln/>
-        </p:spPr>
-        <p:txBody>
-          <a:bodyPr wrap="square" lIns="0" tIns="0" rIns="0" bIns="0" rtlCol="0" anchor="t"/>
-          <a:lstStyle/>
-          <a:p>
-            <a:pPr marL="342900" indent="-342900">
-              <a:spcAft>
-                <a:spcPts val="600"/>
-              </a:spcAft>
-              <a:buSzPct val="100000"/>
-              <a:buChar char="•"/>
-            </a:pPr>
-            <a:r>
-              <a:rPr lang="en-US" sz="1500" dirty="0">
+              <a:t>5</a:t>
+            </a:r>
+            <a:endParaRPr lang="en-US" sz="1500" dirty="0"/>
+          </a:p>
+        </p:txBody>
+      </p:sp>
+      <p:sp>
+        <p:nvSpPr>
+          <p:cNvPr id="35" name="Agent name Decision"/>
+          <p:cNvSpPr txBox="1"/>
+          <p:nvPr/>
+        </p:nvSpPr>
+        <p:spPr>
+          <a:xfrm>
+            <a:off x="7699248" y="1389888"/>
+            <a:ext cx="914400" cy="347472"/>
+          </a:xfrm>
+          <a:prstGeom prst="rect">
+            <a:avLst/>
+          </a:prstGeom>
+          <a:noFill/>
+          <a:ln/>
+        </p:spPr>
+        <p:txBody>
+          <a:bodyPr wrap="square" lIns="0" tIns="0" rIns="0" bIns="0" rtlCol="0" anchor="ctr"/>
+          <a:lstStyle/>
+          <a:p>
+            <a:pPr indent="0" marL="0">
+              <a:buNone/>
+            </a:pPr>
+            <a:r>
+              <a:rPr lang="en-US" sz="1600" b="1" dirty="0">
                 <a:solidFill>
                   <a:schemeClr val="tx1"/>
-                </a:solidFill>
-              </a:rPr>
-              <a:t>Planner picks checks by risk</a:t>
-            </a:r>
-            <a:endParaRPr lang="en-US" sz="1500" dirty="0"/>
-          </a:p>
-          <a:p>
-            <a:pPr marL="342900" indent="-342900">
-              <a:spcAft>
-                <a:spcPts val="600"/>
-              </a:spcAft>
-              <a:buSzPct val="100000"/>
-              <a:buChar char="•"/>
-            </a:pPr>
-            <a:r>
-              <a:rPr lang="en-US" sz="1500" dirty="0">
-                <a:solidFill>
-                  <a:schemeClr val="tx1"/>
-                </a:solidFill>
-              </a:rPr>
-              <a:t>Executor runs tools, cites clauses</a:t>
-            </a:r>
-            <a:endParaRPr lang="en-US" sz="1500" dirty="0"/>
-          </a:p>
-          <a:p>
-            <a:pPr marL="342900" indent="-342900">
-              <a:spcAft>
-                <a:spcPts val="600"/>
-              </a:spcAft>
-              <a:buSzPct val="100000"/>
-              <a:buChar char="•"/>
-            </a:pPr>
-            <a:r>
-              <a:rPr lang="en-US" sz="1500" dirty="0">
-                <a:solidFill>
-                  <a:schemeClr val="tx1"/>
-                </a:solidFill>
-              </a:rPr>
-              <a:t>Critic re-verifies before payout</a:t>
-            </a:r>
-            <a:endParaRPr lang="en-US" sz="1500" dirty="0"/>
-          </a:p>
-          <a:p>
-            <a:pPr marL="342900" indent="-342900">
-              <a:spcAft>
-                <a:spcPts val="600"/>
-              </a:spcAft>
-              <a:buSzPct val="100000"/>
-              <a:buChar char="•"/>
-            </a:pPr>
-            <a:r>
-              <a:rPr lang="en-US" sz="1500" dirty="0">
-                <a:solidFill>
-                  <a:schemeClr val="tx1"/>
-                </a:solidFill>
-              </a:rPr>
-              <a:t>Humans see only the flagged claims</a:t>
-            </a:r>
-            <a:endParaRPr lang="en-US" sz="1500" dirty="0"/>
-          </a:p>
-        </p:txBody>
-      </p:sp>
-      <p:sp>
-        <p:nvSpPr>
-          <p:cNvPr id="10" name="Result value 1"/>
-          <p:cNvSpPr txBox="1"/>
-          <p:nvPr/>
-        </p:nvSpPr>
-        <p:spPr>
-          <a:xfrm>
-            <a:off x="457200" y="3749040"/>
-            <a:ext cx="1234440" cy="731520"/>
-          </a:xfrm>
-          <a:prstGeom prst="rect">
-            <a:avLst/>
-          </a:prstGeom>
-          <a:noFill/>
-          <a:ln/>
-        </p:spPr>
-        <p:txBody>
-          <a:bodyPr wrap="square" lIns="0" tIns="0" rIns="0" bIns="0" rtlCol="0" anchor="ctr"/>
-          <a:lstStyle/>
-          <a:p>
-            <a:pPr indent="0" marL="0">
-              <a:buNone/>
-            </a:pPr>
-            <a:r>
-              <a:rPr lang="en-US" sz="3000" b="1" dirty="0">
-                <a:solidFill>
-                  <a:schemeClr val="accent1"/>
                 </a:solidFill>
                 <a:latin typeface="Cambria" pitchFamily="34" charset="0"/>
                 <a:ea typeface="Cambria" pitchFamily="34" charset="-122"/>
                 <a:cs typeface="Cambria" pitchFamily="34" charset="-120"/>
               </a:rPr>
-              <a:t>74%</a:t>
-            </a:r>
-            <a:endParaRPr lang="en-US" sz="3000" dirty="0"/>
-          </a:p>
-        </p:txBody>
-      </p:sp>
-      <p:sp>
-        <p:nvSpPr>
-          <p:cNvPr id="11" name="Result label 1"/>
-          <p:cNvSpPr txBox="1"/>
-          <p:nvPr/>
-        </p:nvSpPr>
-        <p:spPr>
-          <a:xfrm>
-            <a:off x="1737360" y="3749040"/>
-            <a:ext cx="1463040" cy="731520"/>
+              <a:t>Decision</a:t>
+            </a:r>
+            <a:endParaRPr lang="en-US" sz="1600" dirty="0"/>
+          </a:p>
+        </p:txBody>
+      </p:sp>
+      <p:sp>
+        <p:nvSpPr>
+          <p:cNvPr id="36" name="Agent role Decision"/>
+          <p:cNvSpPr txBox="1"/>
+          <p:nvPr/>
+        </p:nvSpPr>
+        <p:spPr>
+          <a:xfrm>
+            <a:off x="7296912" y="1874520"/>
+            <a:ext cx="1261872" cy="914400"/>
+          </a:xfrm>
+          <a:prstGeom prst="rect">
+            <a:avLst/>
+          </a:prstGeom>
+          <a:noFill/>
+          <a:ln/>
+        </p:spPr>
+        <p:txBody>
+          <a:bodyPr wrap="square" lIns="0" tIns="0" rIns="0" bIns="0" rtlCol="0" anchor="t"/>
+          <a:lstStyle/>
+          <a:p>
+            <a:pPr indent="0" marL="0">
+              <a:buNone/>
+            </a:pPr>
+            <a:r>
+              <a:rPr lang="en-US" sz="1300" dirty="0">
+                <a:solidFill>
+                  <a:schemeClr val="tx1"/>
+                </a:solidFill>
+              </a:rPr>
+              <a:t>Applies precedence, cites clauses</a:t>
+            </a:r>
+            <a:endParaRPr lang="en-US" sz="1300" dirty="0"/>
+          </a:p>
+        </p:txBody>
+      </p:sp>
+      <p:sp>
+        <p:nvSpPr>
+          <p:cNvPr id="37" name="Loop down"/>
+          <p:cNvSpPr/>
+          <p:nvPr/>
+        </p:nvSpPr>
+        <p:spPr>
+          <a:xfrm>
+            <a:off x="6236208" y="2880360"/>
+            <a:ext cx="0" cy="365760"/>
+          </a:xfrm>
+          <a:prstGeom prst="line">
+            <a:avLst/>
+          </a:prstGeom>
+          <a:noFill/>
+          <a:ln w="28575">
+            <a:solidFill>
+              <a:schemeClr val="accent2"/>
+            </a:solidFill>
+            <a:prstDash val="dash"/>
+          </a:ln>
+        </p:spPr>
+      </p:sp>
+      <p:sp>
+        <p:nvSpPr>
+          <p:cNvPr id="38" name="Loop across"/>
+          <p:cNvSpPr/>
+          <p:nvPr/>
+        </p:nvSpPr>
+        <p:spPr>
+          <a:xfrm>
+            <a:off x="1188720" y="3246120"/>
+            <a:ext cx="5047488" cy="0"/>
+          </a:xfrm>
+          <a:prstGeom prst="line">
+            <a:avLst/>
+          </a:prstGeom>
+          <a:noFill/>
+          <a:ln w="28575">
+            <a:solidFill>
+              <a:schemeClr val="accent2"/>
+            </a:solidFill>
+            <a:prstDash val="dash"/>
+          </a:ln>
+        </p:spPr>
+      </p:sp>
+      <p:sp>
+        <p:nvSpPr>
+          <p:cNvPr id="39" name="Loop up"/>
+          <p:cNvSpPr/>
+          <p:nvPr/>
+        </p:nvSpPr>
+        <p:spPr>
+          <a:xfrm flipV="1">
+            <a:off x="1188720" y="2880360"/>
+            <a:ext cx="0" cy="365760"/>
+          </a:xfrm>
+          <a:prstGeom prst="line">
+            <a:avLst/>
+          </a:prstGeom>
+          <a:noFill/>
+          <a:ln w="28575">
+            <a:solidFill>
+              <a:schemeClr val="accent2"/>
+            </a:solidFill>
+            <a:prstDash val="dash"/>
+            <a:tailEnd type="triangle"/>
+          </a:ln>
+        </p:spPr>
+      </p:sp>
+      <p:sp>
+        <p:nvSpPr>
+          <p:cNvPr id="40" name="Replan pill"/>
+          <p:cNvSpPr/>
+          <p:nvPr/>
+        </p:nvSpPr>
+        <p:spPr>
+          <a:xfrm>
+            <a:off x="2148840" y="3063240"/>
+            <a:ext cx="3931920" cy="365760"/>
+          </a:xfrm>
+          <a:prstGeom prst="roundRect">
+            <a:avLst>
+              <a:gd name="adj" fmla="val 50000"/>
+            </a:avLst>
+          </a:prstGeom>
+          <a:solidFill>
+            <a:schemeClr val="bg1"/>
+          </a:solidFill>
+          <a:ln w="19050">
+            <a:solidFill>
+              <a:schemeClr val="accent2"/>
+            </a:solidFill>
+            <a:prstDash val="solid"/>
+          </a:ln>
+        </p:spPr>
+      </p:sp>
+      <p:sp>
+        <p:nvSpPr>
+          <p:cNvPr id="41" name="Replan label"/>
+          <p:cNvSpPr txBox="1"/>
+          <p:nvPr/>
+        </p:nvSpPr>
+        <p:spPr>
+          <a:xfrm>
+            <a:off x="2148840" y="3063240"/>
+            <a:ext cx="3931920" cy="365760"/>
           </a:xfrm>
           <a:prstGeom prst="rect">
             <a:avLst/>
@@ -4844,166 +6531,99 @@
           <a:bodyPr wrap="square" lIns="0" tIns="0" rIns="0" bIns="0" rtlCol="0" anchor="ctr"/>
           <a:lstStyle/>
           <a:p>
+            <a:pPr algn="ctr" indent="0" marL="0">
+              <a:buNone/>
+            </a:pPr>
+            <a:r>
+              <a:rPr lang="en-US" sz="1300" b="1" dirty="0">
+                <a:solidFill>
+                  <a:schemeClr val="accent2"/>
+                </a:solidFill>
+              </a:rPr>
+              <a:t>REPLAN: add checks or recompute, max 2 rounds</a:t>
+            </a:r>
+            <a:endParaRPr lang="en-US" sz="1300" dirty="0"/>
+          </a:p>
+        </p:txBody>
+      </p:sp>
+      <p:sp>
+        <p:nvSpPr>
+          <p:cNvPr id="42" name="Tool belt"/>
+          <p:cNvSpPr/>
+          <p:nvPr/>
+        </p:nvSpPr>
+        <p:spPr>
+          <a:xfrm>
+            <a:off x="457200" y="3657600"/>
+            <a:ext cx="8229600" cy="868680"/>
+          </a:xfrm>
+          <a:prstGeom prst="roundRect">
+            <a:avLst>
+              <a:gd name="adj" fmla="val 8421"/>
+            </a:avLst>
+          </a:prstGeom>
+          <a:solidFill>
+            <a:schemeClr val="bg2"/>
+          </a:solidFill>
+          <a:ln/>
+        </p:spPr>
+      </p:sp>
+      <p:sp>
+        <p:nvSpPr>
+          <p:cNvPr id="43" name="Tool belt text"/>
+          <p:cNvSpPr txBox="1"/>
+          <p:nvPr/>
+        </p:nvSpPr>
+        <p:spPr>
+          <a:xfrm>
+            <a:off x="640080" y="3749040"/>
+            <a:ext cx="7863840" cy="731520"/>
+          </a:xfrm>
+          <a:prstGeom prst="rect">
+            <a:avLst/>
+          </a:prstGeom>
+          <a:noFill/>
+          <a:ln/>
+        </p:spPr>
+        <p:txBody>
+          <a:bodyPr wrap="square" lIns="0" tIns="0" rIns="0" bIns="0" rtlCol="0" anchor="ctr"/>
+          <a:lstStyle/>
+          <a:p>
             <a:pPr indent="0" marL="0">
               <a:buNone/>
             </a:pPr>
             <a:r>
+              <a:rPr lang="en-US" sz="1200" b="1" dirty="0">
+                <a:solidFill>
+                  <a:schemeClr val="tx2"/>
+                </a:solidFill>
+              </a:rPr>
+              <a:t>Executor tools:  </a:t>
+            </a:r>
+            <a:pPr indent="0" marL="0">
+              <a:buNone/>
+            </a:pPr>
+            <a:r>
               <a:rPr lang="en-US" sz="1200" dirty="0">
                 <a:solidFill>
                   <a:schemeClr val="tx1"/>
                 </a:solidFill>
               </a:rPr>
-              <a:t>settled without a human (main set of 89 claims)</a:t>
+              <a:t>documents, policy status, waiting periods, exclusions, duplicates, filing window, procedure match, bill integrity, high value, tariff check, fraud score, payout</a:t>
             </a:r>
             <a:endParaRPr lang="en-US" sz="1200" dirty="0"/>
           </a:p>
-        </p:txBody>
-      </p:sp>
-      <p:sp>
-        <p:nvSpPr>
-          <p:cNvPr id="12" name="Result value 2"/>
-          <p:cNvSpPr txBox="1"/>
-          <p:nvPr/>
-        </p:nvSpPr>
-        <p:spPr>
-          <a:xfrm>
-            <a:off x="3291840" y="3749040"/>
-            <a:ext cx="1234440" cy="731520"/>
-          </a:xfrm>
-          <a:prstGeom prst="rect">
-            <a:avLst/>
-          </a:prstGeom>
-          <a:noFill/>
-          <a:ln/>
-        </p:spPr>
-        <p:txBody>
-          <a:bodyPr wrap="square" lIns="0" tIns="0" rIns="0" bIns="0" rtlCol="0" anchor="ctr"/>
-          <a:lstStyle/>
           <a:p>
             <a:pPr indent="0" marL="0">
               <a:buNone/>
             </a:pPr>
             <a:r>
-              <a:rPr lang="en-US" sz="3000" b="1" dirty="0">
-                <a:solidFill>
-                  <a:schemeClr val="accent1"/>
-                </a:solidFill>
-                <a:latin typeface="Cambria" pitchFamily="34" charset="0"/>
-                <a:ea typeface="Cambria" pitchFamily="34" charset="-122"/>
-                <a:cs typeface="Cambria" pitchFamily="34" charset="-120"/>
-              </a:rPr>
-              <a:t>&lt; 1 s</a:t>
-            </a:r>
-            <a:endParaRPr lang="en-US" sz="3000" dirty="0"/>
-          </a:p>
-        </p:txBody>
-      </p:sp>
-      <p:sp>
-        <p:nvSpPr>
-          <p:cNvPr id="13" name="Result label 2"/>
-          <p:cNvSpPr txBox="1"/>
-          <p:nvPr/>
-        </p:nvSpPr>
-        <p:spPr>
-          <a:xfrm>
-            <a:off x="4572000" y="3749040"/>
-            <a:ext cx="1463040" cy="731520"/>
-          </a:xfrm>
-          <a:prstGeom prst="rect">
-            <a:avLst/>
-          </a:prstGeom>
-          <a:noFill/>
-          <a:ln/>
-        </p:spPr>
-        <p:txBody>
-          <a:bodyPr wrap="square" lIns="0" tIns="0" rIns="0" bIns="0" rtlCol="0" anchor="ctr"/>
-          <a:lstStyle/>
-          <a:p>
-            <a:pPr indent="0" marL="0">
-              <a:buNone/>
-            </a:pPr>
-            <a:r>
               <a:rPr lang="en-US" sz="1200" dirty="0">
                 <a:solidFill>
-                  <a:schemeClr val="tx1"/>
-                </a:solidFill>
-              </a:rPr>
-              <a:t>per claim with the mock model</a:t>
-            </a:r>
-            <a:endParaRPr lang="en-US" sz="1200" dirty="0"/>
-          </a:p>
-        </p:txBody>
-      </p:sp>
-      <p:sp>
-        <p:nvSpPr>
-          <p:cNvPr id="14" name="Result value 3"/>
-          <p:cNvSpPr txBox="1"/>
-          <p:nvPr/>
-        </p:nvSpPr>
-        <p:spPr>
-          <a:xfrm>
-            <a:off x="6126480" y="3749040"/>
-            <a:ext cx="1234440" cy="731520"/>
-          </a:xfrm>
-          <a:prstGeom prst="rect">
-            <a:avLst/>
-          </a:prstGeom>
-          <a:noFill/>
-          <a:ln/>
-        </p:spPr>
-        <p:txBody>
-          <a:bodyPr wrap="square" lIns="0" tIns="0" rIns="0" bIns="0" rtlCol="0" anchor="ctr"/>
-          <a:lstStyle/>
-          <a:p>
-            <a:pPr indent="0" marL="0">
-              <a:buNone/>
-            </a:pPr>
-            <a:r>
-              <a:rPr lang="en-US" sz="3000" b="1" dirty="0">
-                <a:solidFill>
-                  <a:schemeClr val="accent1"/>
-                </a:solidFill>
-                <a:latin typeface="Cambria" pitchFamily="34" charset="0"/>
-                <a:ea typeface="Cambria" pitchFamily="34" charset="-122"/>
-                <a:cs typeface="Cambria" pitchFamily="34" charset="-120"/>
-              </a:rPr>
-              <a:t>5</a:t>
-            </a:r>
-            <a:endParaRPr lang="en-US" sz="3000" dirty="0"/>
-          </a:p>
-        </p:txBody>
-      </p:sp>
-      <p:sp>
-        <p:nvSpPr>
-          <p:cNvPr id="15" name="Result label 3"/>
-          <p:cNvSpPr txBox="1"/>
-          <p:nvPr/>
-        </p:nvSpPr>
-        <p:spPr>
-          <a:xfrm>
-            <a:off x="7406640" y="3749040"/>
-            <a:ext cx="1463040" cy="731520"/>
-          </a:xfrm>
-          <a:prstGeom prst="rect">
-            <a:avLst/>
-          </a:prstGeom>
-          <a:noFill/>
-          <a:ln/>
-        </p:spPr>
-        <p:txBody>
-          <a:bodyPr wrap="square" lIns="0" tIns="0" rIns="0" bIns="0" rtlCol="0" anchor="ctr"/>
-          <a:lstStyle/>
-          <a:p>
-            <a:pPr indent="0" marL="0">
-              <a:buNone/>
-            </a:pPr>
-            <a:r>
-              <a:rPr lang="en-US" sz="1200" dirty="0">
-                <a:solidFill>
-                  <a:schemeClr val="tx1"/>
-                </a:solidFill>
-              </a:rPr>
-              <a:t>outcomes, from approve to escalate</a:t>
+                  <a:schemeClr val="tx2"/>
+                </a:solidFill>
+              </a:rPr>
+              <a:t>Plus a pluggable model (mock or local Ollama) and synthetic policy, member and hospital stores.</a:t>
             </a:r>
             <a:endParaRPr lang="en-US" sz="1200" dirty="0"/>
           </a:p>
@@ -5111,67 +6731,45 @@
                   <a:schemeClr val="tx1"/>
                 </a:solidFill>
               </a:rPr>
-              <a:t>Five agents in a loop, not a pipe</a:t>
+              <a:t>Watch it run: the Critic sends a claim back</a:t>
             </a:r>
             <a:endParaRPr lang="en-US" sz="2800" dirty="0"/>
           </a:p>
         </p:txBody>
       </p:sp>
-      <p:sp>
-        <p:nvSpPr>
-          <p:cNvPr id="3" name="Agent card Planner"/>
+      <p:pic>
+        <p:nvPicPr>
+          <p:cNvPr id="3" name="App pipeline screenshot" descr="The live app showing five agents, with a dashed re-plan arrow from the Critic back to the Planner and a re-plan counter of 1">    </p:cNvPr>
+          <p:cNvPicPr>
+            <a:picLocks noChangeAspect="1"/>
+          </p:cNvPicPr>
+          <p:nvPr/>
+        </p:nvPicPr>
+        <p:blipFill>
+          <a:blip r:embed="rId1"/>
+          <a:stretch>
+            <a:fillRect/>
+          </a:stretch>
+        </p:blipFill>
+        <p:spPr>
+          <a:xfrm>
+            <a:off x="457200" y="1097280"/>
+            <a:ext cx="8229600" cy="2370779"/>
+          </a:xfrm>
+          <a:prstGeom prst="rect">
+            <a:avLst/>
+          </a:prstGeom>
+        </p:spPr>
+      </p:pic>
+      <p:sp>
+        <p:nvSpPr>
+          <p:cNvPr id="4" name="Badge 1"/>
           <p:cNvSpPr/>
           <p:nvPr/>
         </p:nvSpPr>
         <p:spPr>
           <a:xfrm>
-            <a:off x="457200" y="1280160"/>
-            <a:ext cx="1463040" cy="1600200"/>
-          </a:xfrm>
-          <a:prstGeom prst="roundRect">
-            <a:avLst>
-              <a:gd name="adj" fmla="val 5000"/>
-            </a:avLst>
-          </a:prstGeom>
-          <a:solidFill>
-            <a:schemeClr val="bg2"/>
-          </a:solidFill>
-          <a:ln/>
-        </p:spPr>
-      </p:sp>
-      <p:sp>
-        <p:nvSpPr>
-          <p:cNvPr id="4" name="Agent outline Planner"/>
-          <p:cNvSpPr/>
-          <p:nvPr/>
-        </p:nvSpPr>
-        <p:spPr>
-          <a:xfrm>
-            <a:off x="457200" y="1280160"/>
-            <a:ext cx="1463040" cy="1600200"/>
-          </a:xfrm>
-          <a:prstGeom prst="roundRect">
-            <a:avLst>
-              <a:gd name="adj" fmla="val 5000"/>
-            </a:avLst>
-          </a:prstGeom>
-          <a:ln w="25400">
-            <a:solidFill>
-              <a:schemeClr val="accent1"/>
-            </a:solidFill>
-            <a:prstDash val="solid"/>
-          </a:ln>
-        </p:spPr>
-      </p:sp>
-      <p:sp>
-        <p:nvSpPr>
-          <p:cNvPr id="5" name="Badge 1"/>
-          <p:cNvSpPr/>
-          <p:nvPr/>
-        </p:nvSpPr>
-        <p:spPr>
-          <a:xfrm>
-            <a:off x="566928" y="1389888"/>
+            <a:off x="457200" y="3657600"/>
             <a:ext cx="347472" cy="347472"/>
           </a:xfrm>
           <a:prstGeom prst="ellipse">
@@ -5185,13 +6783,13 @@
       </p:sp>
       <p:sp>
         <p:nvSpPr>
-          <p:cNvPr id="6" name="Badge 1 label"/>
-          <p:cNvSpPr txBox="1"/>
-          <p:nvPr/>
-        </p:nvSpPr>
-        <p:spPr>
-          <a:xfrm>
-            <a:off x="566928" y="1389888"/>
+          <p:cNvPr id="5" name="Badge 1 label"/>
+          <p:cNvSpPr txBox="1"/>
+          <p:nvPr/>
+        </p:nvSpPr>
+        <p:spPr>
+          <a:xfrm>
+            <a:off x="457200" y="3657600"/>
             <a:ext cx="347472" cy="347472"/>
           </a:xfrm>
           <a:prstGeom prst="rect">
@@ -5224,14 +6822,70 @@
       </p:sp>
       <p:sp>
         <p:nvSpPr>
-          <p:cNvPr id="7" name="Agent name Planner"/>
-          <p:cNvSpPr txBox="1"/>
-          <p:nvPr/>
-        </p:nvSpPr>
-        <p:spPr>
-          <a:xfrm>
-            <a:off x="969264" y="1389888"/>
-            <a:ext cx="914400" cy="347472"/>
+          <p:cNvPr id="6" name="Callout 1"/>
+          <p:cNvSpPr txBox="1"/>
+          <p:nvPr/>
+        </p:nvSpPr>
+        <p:spPr>
+          <a:xfrm>
+            <a:off x="896112" y="3639312"/>
+            <a:ext cx="2240280" cy="914400"/>
+          </a:xfrm>
+          <a:prstGeom prst="rect">
+            <a:avLst/>
+          </a:prstGeom>
+          <a:noFill/>
+          <a:ln/>
+        </p:spPr>
+        <p:txBody>
+          <a:bodyPr wrap="square" lIns="0" tIns="0" rIns="0" bIns="0" rtlCol="0" anchor="t"/>
+          <a:lstStyle/>
+          <a:p>
+            <a:pPr indent="0" marL="0">
+              <a:buNone/>
+            </a:pPr>
+            <a:r>
+              <a:rPr lang="en-US" sz="1300" dirty="0">
+                <a:solidFill>
+                  <a:schemeClr val="tx1"/>
+                </a:solidFill>
+              </a:rPr>
+              <a:t>A small claim at a normal hospital gets a quick plan, with no fraud check.</a:t>
+            </a:r>
+            <a:endParaRPr lang="en-US" sz="1300" dirty="0"/>
+          </a:p>
+        </p:txBody>
+      </p:sp>
+      <p:sp>
+        <p:nvSpPr>
+          <p:cNvPr id="7" name="Badge 2"/>
+          <p:cNvSpPr/>
+          <p:nvPr/>
+        </p:nvSpPr>
+        <p:spPr>
+          <a:xfrm>
+            <a:off x="3246120" y="3657600"/>
+            <a:ext cx="347472" cy="347472"/>
+          </a:xfrm>
+          <a:prstGeom prst="ellipse">
+            <a:avLst/>
+          </a:prstGeom>
+          <a:solidFill>
+            <a:schemeClr val="accent2"/>
+          </a:solidFill>
+          <a:ln/>
+        </p:spPr>
+      </p:sp>
+      <p:sp>
+        <p:nvSpPr>
+          <p:cNvPr id="8" name="Badge 2 label"/>
+          <p:cNvSpPr txBox="1"/>
+          <p:nvPr/>
+        </p:nvSpPr>
+        <p:spPr>
+          <a:xfrm>
+            <a:off x="3246120" y="3657600"/>
+            <a:ext cx="347472" cy="347472"/>
           </a:xfrm>
           <a:prstGeom prst="rect">
             <a:avLst/>
@@ -5243,34 +6897,34 @@
           <a:bodyPr wrap="square" lIns="0" tIns="0" rIns="0" bIns="0" rtlCol="0" anchor="ctr"/>
           <a:lstStyle/>
           <a:p>
-            <a:pPr indent="0" marL="0">
-              <a:buNone/>
-            </a:pPr>
-            <a:r>
-              <a:rPr lang="en-US" sz="1600" b="1" dirty="0">
-                <a:solidFill>
-                  <a:schemeClr val="tx1"/>
+            <a:pPr algn="ctr" indent="0" marL="0">
+              <a:buNone/>
+            </a:pPr>
+            <a:r>
+              <a:rPr lang="en-US" sz="1500" b="1" dirty="0">
+                <a:solidFill>
+                  <a:schemeClr val="bg1"/>
                 </a:solidFill>
                 <a:latin typeface="Cambria" pitchFamily="34" charset="0"/>
                 <a:ea typeface="Cambria" pitchFamily="34" charset="-122"/>
                 <a:cs typeface="Cambria" pitchFamily="34" charset="-120"/>
               </a:rPr>
-              <a:t>Planner</a:t>
-            </a:r>
-            <a:endParaRPr lang="en-US" sz="1600" dirty="0"/>
-          </a:p>
-        </p:txBody>
-      </p:sp>
-      <p:sp>
-        <p:nvSpPr>
-          <p:cNvPr id="8" name="Agent role Planner"/>
-          <p:cNvSpPr txBox="1"/>
-          <p:nvPr/>
-        </p:nvSpPr>
-        <p:spPr>
-          <a:xfrm>
-            <a:off x="566928" y="1874520"/>
-            <a:ext cx="1261872" cy="914400"/>
+              <a:t>2</a:t>
+            </a:r>
+            <a:endParaRPr lang="en-US" sz="1500" dirty="0"/>
+          </a:p>
+        </p:txBody>
+      </p:sp>
+      <p:sp>
+        <p:nvSpPr>
+          <p:cNvPr id="9" name="Callout 2"/>
+          <p:cNvSpPr txBox="1"/>
+          <p:nvPr/>
+        </p:nvSpPr>
+        <p:spPr>
+          <a:xfrm>
+            <a:off x="3685032" y="3639312"/>
+            <a:ext cx="2240280" cy="914400"/>
           </a:xfrm>
           <a:prstGeom prst="rect">
             <a:avLst/>
@@ -5291,7 +6945,7 @@
                   <a:schemeClr val="tx1"/>
                 </a:solidFill>
               </a:rPr>
-              <a:t>Chooses a lean or deep plan from claim risk</a:t>
+              <a:t>The Critic spots a bill 2.4 times the normal cost and sends it back (dashed arrow).</a:t>
             </a:r>
             <a:endParaRPr lang="en-US" sz="1300" dirty="0"/>
           </a:p>
@@ -5299,83 +6953,13 @@
       </p:sp>
       <p:sp>
         <p:nvSpPr>
-          <p:cNvPr id="9" name="Flow 1"/>
+          <p:cNvPr id="10" name="Badge 3"/>
           <p:cNvSpPr/>
           <p:nvPr/>
         </p:nvSpPr>
         <p:spPr>
           <a:xfrm>
-            <a:off x="1920240" y="2075688"/>
-            <a:ext cx="219456" cy="0"/>
-          </a:xfrm>
-          <a:prstGeom prst="line">
-            <a:avLst/>
-          </a:prstGeom>
-          <a:noFill/>
-          <a:ln w="28575">
-            <a:solidFill>
-              <a:schemeClr val="accent1"/>
-            </a:solidFill>
-            <a:prstDash val="solid"/>
-            <a:tailEnd type="triangle"/>
-          </a:ln>
-        </p:spPr>
-      </p:sp>
-      <p:sp>
-        <p:nvSpPr>
-          <p:cNvPr id="10" name="Agent card Extractor"/>
-          <p:cNvSpPr/>
-          <p:nvPr/>
-        </p:nvSpPr>
-        <p:spPr>
-          <a:xfrm>
-            <a:off x="2139696" y="1280160"/>
-            <a:ext cx="1463040" cy="1600200"/>
-          </a:xfrm>
-          <a:prstGeom prst="roundRect">
-            <a:avLst>
-              <a:gd name="adj" fmla="val 5000"/>
-            </a:avLst>
-          </a:prstGeom>
-          <a:solidFill>
-            <a:schemeClr val="bg2"/>
-          </a:solidFill>
-          <a:ln/>
-        </p:spPr>
-      </p:sp>
-      <p:sp>
-        <p:nvSpPr>
-          <p:cNvPr id="11" name="Agent outline Extractor"/>
-          <p:cNvSpPr/>
-          <p:nvPr/>
-        </p:nvSpPr>
-        <p:spPr>
-          <a:xfrm>
-            <a:off x="2139696" y="1280160"/>
-            <a:ext cx="1463040" cy="1600200"/>
-          </a:xfrm>
-          <a:prstGeom prst="roundRect">
-            <a:avLst>
-              <a:gd name="adj" fmla="val 5000"/>
-            </a:avLst>
-          </a:prstGeom>
-          <a:ln w="25400">
-            <a:solidFill>
-              <a:schemeClr val="accent1"/>
-            </a:solidFill>
-            <a:prstDash val="solid"/>
-          </a:ln>
-        </p:spPr>
-      </p:sp>
-      <p:sp>
-        <p:nvSpPr>
-          <p:cNvPr id="12" name="Badge 2"/>
-          <p:cNvSpPr/>
-          <p:nvPr/>
-        </p:nvSpPr>
-        <p:spPr>
-          <a:xfrm>
-            <a:off x="2249424" y="1389888"/>
+            <a:off x="6035040" y="3657600"/>
             <a:ext cx="347472" cy="347472"/>
           </a:xfrm>
           <a:prstGeom prst="ellipse">
@@ -5389,13 +6973,13 @@
       </p:sp>
       <p:sp>
         <p:nvSpPr>
-          <p:cNvPr id="13" name="Badge 2 label"/>
-          <p:cNvSpPr txBox="1"/>
-          <p:nvPr/>
-        </p:nvSpPr>
-        <p:spPr>
-          <a:xfrm>
-            <a:off x="2249424" y="1389888"/>
+          <p:cNvPr id="11" name="Badge 3 label"/>
+          <p:cNvSpPr txBox="1"/>
+          <p:nvPr/>
+        </p:nvSpPr>
+        <p:spPr>
+          <a:xfrm>
+            <a:off x="6035040" y="3657600"/>
             <a:ext cx="347472" cy="347472"/>
           </a:xfrm>
           <a:prstGeom prst="rect">
@@ -5420,7 +7004,7 @@
                 <a:ea typeface="Cambria" pitchFamily="34" charset="-122"/>
                 <a:cs typeface="Cambria" pitchFamily="34" charset="-120"/>
               </a:rPr>
-              <a:t>2</a:t>
+              <a:t>3</a:t>
             </a:r>
             <a:endParaRPr lang="en-US" sz="1500" dirty="0"/>
           </a:p>
@@ -5428,904 +7012,37 @@
       </p:sp>
       <p:sp>
         <p:nvSpPr>
-          <p:cNvPr id="14" name="Agent name Extractor"/>
-          <p:cNvSpPr txBox="1"/>
-          <p:nvPr/>
-        </p:nvSpPr>
-        <p:spPr>
-          <a:xfrm>
-            <a:off x="2651760" y="1389888"/>
-            <a:ext cx="914400" cy="347472"/>
-          </a:xfrm>
-          <a:prstGeom prst="rect">
-            <a:avLst/>
-          </a:prstGeom>
-          <a:noFill/>
-          <a:ln/>
-        </p:spPr>
-        <p:txBody>
-          <a:bodyPr wrap="square" lIns="0" tIns="0" rIns="0" bIns="0" rtlCol="0" anchor="ctr"/>
+          <p:cNvPr id="12" name="Callout 3"/>
+          <p:cNvSpPr txBox="1"/>
+          <p:nvPr/>
+        </p:nvSpPr>
+        <p:spPr>
+          <a:xfrm>
+            <a:off x="6473952" y="3639312"/>
+            <a:ext cx="2240280" cy="914400"/>
+          </a:xfrm>
+          <a:prstGeom prst="rect">
+            <a:avLst/>
+          </a:prstGeom>
+          <a:noFill/>
+          <a:ln/>
+        </p:spPr>
+        <p:txBody>
+          <a:bodyPr wrap="square" lIns="0" tIns="0" rIns="0" bIns="0" rtlCol="0" anchor="t"/>
           <a:lstStyle/>
           <a:p>
             <a:pPr indent="0" marL="0">
               <a:buNone/>
             </a:pPr>
             <a:r>
-              <a:rPr lang="en-US" sz="1600" b="1" dirty="0">
+              <a:rPr lang="en-US" sz="1300" dirty="0">
                 <a:solidFill>
                   <a:schemeClr val="tx1"/>
                 </a:solidFill>
-                <a:latin typeface="Cambria" pitchFamily="34" charset="0"/>
-                <a:ea typeface="Cambria" pitchFamily="34" charset="-122"/>
-                <a:cs typeface="Cambria" pitchFamily="34" charset="-120"/>
-              </a:rPr>
-              <a:t>Extractor</a:t>
-            </a:r>
-            <a:endParaRPr lang="en-US" sz="1600" dirty="0"/>
-          </a:p>
-        </p:txBody>
-      </p:sp>
-      <p:sp>
-        <p:nvSpPr>
-          <p:cNvPr id="15" name="Agent role Extractor"/>
-          <p:cNvSpPr txBox="1"/>
-          <p:nvPr/>
-        </p:nvSpPr>
-        <p:spPr>
-          <a:xfrm>
-            <a:off x="2249424" y="1874520"/>
-            <a:ext cx="1261872" cy="914400"/>
-          </a:xfrm>
-          <a:prstGeom prst="rect">
-            <a:avLst/>
-          </a:prstGeom>
-          <a:noFill/>
-          <a:ln/>
-        </p:spPr>
-        <p:txBody>
-          <a:bodyPr wrap="square" lIns="0" tIns="0" rIns="0" bIns="0" rtlCol="0" anchor="t"/>
-          <a:lstStyle/>
-          <a:p>
-            <a:pPr indent="0" marL="0">
-              <a:buNone/>
-            </a:pPr>
-            <a:r>
-              <a:rPr lang="en-US" sz="1300" dirty="0">
-                <a:solidFill>
-                  <a:schemeClr val="tx1"/>
-                </a:solidFill>
-              </a:rPr>
-              <a:t>Reads the discharge summary</a:t>
+              </a:rPr>
+              <a:t>Second round adds the fraud check. Score 60 out of 100, so a person decides.</a:t>
             </a:r>
             <a:endParaRPr lang="en-US" sz="1300" dirty="0"/>
-          </a:p>
-        </p:txBody>
-      </p:sp>
-      <p:sp>
-        <p:nvSpPr>
-          <p:cNvPr id="16" name="Flow 2"/>
-          <p:cNvSpPr/>
-          <p:nvPr/>
-        </p:nvSpPr>
-        <p:spPr>
-          <a:xfrm>
-            <a:off x="3602736" y="2075688"/>
-            <a:ext cx="219456" cy="0"/>
-          </a:xfrm>
-          <a:prstGeom prst="line">
-            <a:avLst/>
-          </a:prstGeom>
-          <a:noFill/>
-          <a:ln w="28575">
-            <a:solidFill>
-              <a:schemeClr val="accent1"/>
-            </a:solidFill>
-            <a:prstDash val="solid"/>
-            <a:tailEnd type="triangle"/>
-          </a:ln>
-        </p:spPr>
-      </p:sp>
-      <p:sp>
-        <p:nvSpPr>
-          <p:cNvPr id="17" name="Agent card Executor"/>
-          <p:cNvSpPr/>
-          <p:nvPr/>
-        </p:nvSpPr>
-        <p:spPr>
-          <a:xfrm>
-            <a:off x="3822192" y="1280160"/>
-            <a:ext cx="1463040" cy="1600200"/>
-          </a:xfrm>
-          <a:prstGeom prst="roundRect">
-            <a:avLst>
-              <a:gd name="adj" fmla="val 5000"/>
-            </a:avLst>
-          </a:prstGeom>
-          <a:solidFill>
-            <a:schemeClr val="bg2"/>
-          </a:solidFill>
-          <a:ln/>
-        </p:spPr>
-      </p:sp>
-      <p:sp>
-        <p:nvSpPr>
-          <p:cNvPr id="18" name="Agent outline Executor"/>
-          <p:cNvSpPr/>
-          <p:nvPr/>
-        </p:nvSpPr>
-        <p:spPr>
-          <a:xfrm>
-            <a:off x="3822192" y="1280160"/>
-            <a:ext cx="1463040" cy="1600200"/>
-          </a:xfrm>
-          <a:prstGeom prst="roundRect">
-            <a:avLst>
-              <a:gd name="adj" fmla="val 5000"/>
-            </a:avLst>
-          </a:prstGeom>
-          <a:ln w="25400">
-            <a:solidFill>
-              <a:schemeClr val="accent1"/>
-            </a:solidFill>
-            <a:prstDash val="solid"/>
-          </a:ln>
-        </p:spPr>
-      </p:sp>
-      <p:sp>
-        <p:nvSpPr>
-          <p:cNvPr id="19" name="Badge 3"/>
-          <p:cNvSpPr/>
-          <p:nvPr/>
-        </p:nvSpPr>
-        <p:spPr>
-          <a:xfrm>
-            <a:off x="3931920" y="1389888"/>
-            <a:ext cx="347472" cy="347472"/>
-          </a:xfrm>
-          <a:prstGeom prst="ellipse">
-            <a:avLst/>
-          </a:prstGeom>
-          <a:solidFill>
-            <a:schemeClr val="accent1"/>
-          </a:solidFill>
-          <a:ln/>
-        </p:spPr>
-      </p:sp>
-      <p:sp>
-        <p:nvSpPr>
-          <p:cNvPr id="20" name="Badge 3 label"/>
-          <p:cNvSpPr txBox="1"/>
-          <p:nvPr/>
-        </p:nvSpPr>
-        <p:spPr>
-          <a:xfrm>
-            <a:off x="3931920" y="1389888"/>
-            <a:ext cx="347472" cy="347472"/>
-          </a:xfrm>
-          <a:prstGeom prst="rect">
-            <a:avLst/>
-          </a:prstGeom>
-          <a:noFill/>
-          <a:ln/>
-        </p:spPr>
-        <p:txBody>
-          <a:bodyPr wrap="square" lIns="0" tIns="0" rIns="0" bIns="0" rtlCol="0" anchor="ctr"/>
-          <a:lstStyle/>
-          <a:p>
-            <a:pPr algn="ctr" indent="0" marL="0">
-              <a:buNone/>
-            </a:pPr>
-            <a:r>
-              <a:rPr lang="en-US" sz="1500" b="1" dirty="0">
-                <a:solidFill>
-                  <a:schemeClr val="bg1"/>
-                </a:solidFill>
-                <a:latin typeface="Cambria" pitchFamily="34" charset="0"/>
-                <a:ea typeface="Cambria" pitchFamily="34" charset="-122"/>
-                <a:cs typeface="Cambria" pitchFamily="34" charset="-120"/>
-              </a:rPr>
-              <a:t>3</a:t>
-            </a:r>
-            <a:endParaRPr lang="en-US" sz="1500" dirty="0"/>
-          </a:p>
-        </p:txBody>
-      </p:sp>
-      <p:sp>
-        <p:nvSpPr>
-          <p:cNvPr id="21" name="Agent name Executor"/>
-          <p:cNvSpPr txBox="1"/>
-          <p:nvPr/>
-        </p:nvSpPr>
-        <p:spPr>
-          <a:xfrm>
-            <a:off x="4334256" y="1389888"/>
-            <a:ext cx="914400" cy="347472"/>
-          </a:xfrm>
-          <a:prstGeom prst="rect">
-            <a:avLst/>
-          </a:prstGeom>
-          <a:noFill/>
-          <a:ln/>
-        </p:spPr>
-        <p:txBody>
-          <a:bodyPr wrap="square" lIns="0" tIns="0" rIns="0" bIns="0" rtlCol="0" anchor="ctr"/>
-          <a:lstStyle/>
-          <a:p>
-            <a:pPr indent="0" marL="0">
-              <a:buNone/>
-            </a:pPr>
-            <a:r>
-              <a:rPr lang="en-US" sz="1600" b="1" dirty="0">
-                <a:solidFill>
-                  <a:schemeClr val="tx1"/>
-                </a:solidFill>
-                <a:latin typeface="Cambria" pitchFamily="34" charset="0"/>
-                <a:ea typeface="Cambria" pitchFamily="34" charset="-122"/>
-                <a:cs typeface="Cambria" pitchFamily="34" charset="-120"/>
-              </a:rPr>
-              <a:t>Executor</a:t>
-            </a:r>
-            <a:endParaRPr lang="en-US" sz="1600" dirty="0"/>
-          </a:p>
-        </p:txBody>
-      </p:sp>
-      <p:sp>
-        <p:nvSpPr>
-          <p:cNvPr id="22" name="Agent role Executor"/>
-          <p:cNvSpPr txBox="1"/>
-          <p:nvPr/>
-        </p:nvSpPr>
-        <p:spPr>
-          <a:xfrm>
-            <a:off x="3931920" y="1874520"/>
-            <a:ext cx="1261872" cy="914400"/>
-          </a:xfrm>
-          <a:prstGeom prst="rect">
-            <a:avLst/>
-          </a:prstGeom>
-          <a:noFill/>
-          <a:ln/>
-        </p:spPr>
-        <p:txBody>
-          <a:bodyPr wrap="square" lIns="0" tIns="0" rIns="0" bIns="0" rtlCol="0" anchor="t"/>
-          <a:lstStyle/>
-          <a:p>
-            <a:pPr indent="0" marL="0">
-              <a:buNone/>
-            </a:pPr>
-            <a:r>
-              <a:rPr lang="en-US" sz="1300" dirty="0">
-                <a:solidFill>
-                  <a:schemeClr val="tx1"/>
-                </a:solidFill>
-              </a:rPr>
-              <a:t>Runs checks with Python tools</a:t>
-            </a:r>
-            <a:endParaRPr lang="en-US" sz="1300" dirty="0"/>
-          </a:p>
-        </p:txBody>
-      </p:sp>
-      <p:sp>
-        <p:nvSpPr>
-          <p:cNvPr id="23" name="Flow 3"/>
-          <p:cNvSpPr/>
-          <p:nvPr/>
-        </p:nvSpPr>
-        <p:spPr>
-          <a:xfrm>
-            <a:off x="5285232" y="2075688"/>
-            <a:ext cx="219456" cy="0"/>
-          </a:xfrm>
-          <a:prstGeom prst="line">
-            <a:avLst/>
-          </a:prstGeom>
-          <a:noFill/>
-          <a:ln w="28575">
-            <a:solidFill>
-              <a:schemeClr val="accent1"/>
-            </a:solidFill>
-            <a:prstDash val="solid"/>
-            <a:tailEnd type="triangle"/>
-          </a:ln>
-        </p:spPr>
-      </p:sp>
-      <p:sp>
-        <p:nvSpPr>
-          <p:cNvPr id="24" name="Agent card Critic"/>
-          <p:cNvSpPr/>
-          <p:nvPr/>
-        </p:nvSpPr>
-        <p:spPr>
-          <a:xfrm>
-            <a:off x="5504688" y="1280160"/>
-            <a:ext cx="1463040" cy="1600200"/>
-          </a:xfrm>
-          <a:prstGeom prst="roundRect">
-            <a:avLst>
-              <a:gd name="adj" fmla="val 5000"/>
-            </a:avLst>
-          </a:prstGeom>
-          <a:solidFill>
-            <a:schemeClr val="bg2"/>
-          </a:solidFill>
-          <a:ln/>
-        </p:spPr>
-      </p:sp>
-      <p:sp>
-        <p:nvSpPr>
-          <p:cNvPr id="25" name="Agent outline Critic"/>
-          <p:cNvSpPr/>
-          <p:nvPr/>
-        </p:nvSpPr>
-        <p:spPr>
-          <a:xfrm>
-            <a:off x="5504688" y="1280160"/>
-            <a:ext cx="1463040" cy="1600200"/>
-          </a:xfrm>
-          <a:prstGeom prst="roundRect">
-            <a:avLst>
-              <a:gd name="adj" fmla="val 5000"/>
-            </a:avLst>
-          </a:prstGeom>
-          <a:ln w="25400">
-            <a:solidFill>
-              <a:schemeClr val="accent2"/>
-            </a:solidFill>
-            <a:prstDash val="solid"/>
-          </a:ln>
-        </p:spPr>
-      </p:sp>
-      <p:sp>
-        <p:nvSpPr>
-          <p:cNvPr id="26" name="Badge 4"/>
-          <p:cNvSpPr/>
-          <p:nvPr/>
-        </p:nvSpPr>
-        <p:spPr>
-          <a:xfrm>
-            <a:off x="5614416" y="1389888"/>
-            <a:ext cx="347472" cy="347472"/>
-          </a:xfrm>
-          <a:prstGeom prst="ellipse">
-            <a:avLst/>
-          </a:prstGeom>
-          <a:solidFill>
-            <a:schemeClr val="accent2"/>
-          </a:solidFill>
-          <a:ln/>
-        </p:spPr>
-      </p:sp>
-      <p:sp>
-        <p:nvSpPr>
-          <p:cNvPr id="27" name="Badge 4 label"/>
-          <p:cNvSpPr txBox="1"/>
-          <p:nvPr/>
-        </p:nvSpPr>
-        <p:spPr>
-          <a:xfrm>
-            <a:off x="5614416" y="1389888"/>
-            <a:ext cx="347472" cy="347472"/>
-          </a:xfrm>
-          <a:prstGeom prst="rect">
-            <a:avLst/>
-          </a:prstGeom>
-          <a:noFill/>
-          <a:ln/>
-        </p:spPr>
-        <p:txBody>
-          <a:bodyPr wrap="square" lIns="0" tIns="0" rIns="0" bIns="0" rtlCol="0" anchor="ctr"/>
-          <a:lstStyle/>
-          <a:p>
-            <a:pPr algn="ctr" indent="0" marL="0">
-              <a:buNone/>
-            </a:pPr>
-            <a:r>
-              <a:rPr lang="en-US" sz="1500" b="1" dirty="0">
-                <a:solidFill>
-                  <a:schemeClr val="bg1"/>
-                </a:solidFill>
-                <a:latin typeface="Cambria" pitchFamily="34" charset="0"/>
-                <a:ea typeface="Cambria" pitchFamily="34" charset="-122"/>
-                <a:cs typeface="Cambria" pitchFamily="34" charset="-120"/>
-              </a:rPr>
-              <a:t>4</a:t>
-            </a:r>
-            <a:endParaRPr lang="en-US" sz="1500" dirty="0"/>
-          </a:p>
-        </p:txBody>
-      </p:sp>
-      <p:sp>
-        <p:nvSpPr>
-          <p:cNvPr id="28" name="Agent name Critic"/>
-          <p:cNvSpPr txBox="1"/>
-          <p:nvPr/>
-        </p:nvSpPr>
-        <p:spPr>
-          <a:xfrm>
-            <a:off x="6016752" y="1389888"/>
-            <a:ext cx="914400" cy="347472"/>
-          </a:xfrm>
-          <a:prstGeom prst="rect">
-            <a:avLst/>
-          </a:prstGeom>
-          <a:noFill/>
-          <a:ln/>
-        </p:spPr>
-        <p:txBody>
-          <a:bodyPr wrap="square" lIns="0" tIns="0" rIns="0" bIns="0" rtlCol="0" anchor="ctr"/>
-          <a:lstStyle/>
-          <a:p>
-            <a:pPr indent="0" marL="0">
-              <a:buNone/>
-            </a:pPr>
-            <a:r>
-              <a:rPr lang="en-US" sz="1600" b="1" dirty="0">
-                <a:solidFill>
-                  <a:schemeClr val="tx1"/>
-                </a:solidFill>
-                <a:latin typeface="Cambria" pitchFamily="34" charset="0"/>
-                <a:ea typeface="Cambria" pitchFamily="34" charset="-122"/>
-                <a:cs typeface="Cambria" pitchFamily="34" charset="-120"/>
-              </a:rPr>
-              <a:t>Critic</a:t>
-            </a:r>
-            <a:endParaRPr lang="en-US" sz="1600" dirty="0"/>
-          </a:p>
-        </p:txBody>
-      </p:sp>
-      <p:sp>
-        <p:nvSpPr>
-          <p:cNvPr id="29" name="Agent role Critic"/>
-          <p:cNvSpPr txBox="1"/>
-          <p:nvPr/>
-        </p:nvSpPr>
-        <p:spPr>
-          <a:xfrm>
-            <a:off x="5614416" y="1874520"/>
-            <a:ext cx="1261872" cy="914400"/>
-          </a:xfrm>
-          <a:prstGeom prst="rect">
-            <a:avLst/>
-          </a:prstGeom>
-          <a:noFill/>
-          <a:ln/>
-        </p:spPr>
-        <p:txBody>
-          <a:bodyPr wrap="square" lIns="0" tIns="0" rIns="0" bIns="0" rtlCol="0" anchor="t"/>
-          <a:lstStyle/>
-          <a:p>
-            <a:pPr indent="0" marL="0">
-              <a:buNone/>
-            </a:pPr>
-            <a:r>
-              <a:rPr lang="en-US" sz="1300" dirty="0">
-                <a:solidFill>
-                  <a:schemeClr val="tx1"/>
-                </a:solidFill>
-              </a:rPr>
-              <a:t>Re-verifies maths, limits, fraud cover</a:t>
-            </a:r>
-            <a:endParaRPr lang="en-US" sz="1300" dirty="0"/>
-          </a:p>
-        </p:txBody>
-      </p:sp>
-      <p:sp>
-        <p:nvSpPr>
-          <p:cNvPr id="30" name="Flow 4"/>
-          <p:cNvSpPr/>
-          <p:nvPr/>
-        </p:nvSpPr>
-        <p:spPr>
-          <a:xfrm>
-            <a:off x="6967728" y="2075688"/>
-            <a:ext cx="219456" cy="0"/>
-          </a:xfrm>
-          <a:prstGeom prst="line">
-            <a:avLst/>
-          </a:prstGeom>
-          <a:noFill/>
-          <a:ln w="28575">
-            <a:solidFill>
-              <a:schemeClr val="accent1"/>
-            </a:solidFill>
-            <a:prstDash val="solid"/>
-            <a:tailEnd type="triangle"/>
-          </a:ln>
-        </p:spPr>
-      </p:sp>
-      <p:sp>
-        <p:nvSpPr>
-          <p:cNvPr id="31" name="Agent card Decision"/>
-          <p:cNvSpPr/>
-          <p:nvPr/>
-        </p:nvSpPr>
-        <p:spPr>
-          <a:xfrm>
-            <a:off x="7187184" y="1280160"/>
-            <a:ext cx="1463040" cy="1600200"/>
-          </a:xfrm>
-          <a:prstGeom prst="roundRect">
-            <a:avLst>
-              <a:gd name="adj" fmla="val 5000"/>
-            </a:avLst>
-          </a:prstGeom>
-          <a:solidFill>
-            <a:schemeClr val="bg2"/>
-          </a:solidFill>
-          <a:ln/>
-        </p:spPr>
-      </p:sp>
-      <p:sp>
-        <p:nvSpPr>
-          <p:cNvPr id="32" name="Agent outline Decision"/>
-          <p:cNvSpPr/>
-          <p:nvPr/>
-        </p:nvSpPr>
-        <p:spPr>
-          <a:xfrm>
-            <a:off x="7187184" y="1280160"/>
-            <a:ext cx="1463040" cy="1600200"/>
-          </a:xfrm>
-          <a:prstGeom prst="roundRect">
-            <a:avLst>
-              <a:gd name="adj" fmla="val 5000"/>
-            </a:avLst>
-          </a:prstGeom>
-          <a:ln w="25400">
-            <a:solidFill>
-              <a:schemeClr val="accent1"/>
-            </a:solidFill>
-            <a:prstDash val="solid"/>
-          </a:ln>
-        </p:spPr>
-      </p:sp>
-      <p:sp>
-        <p:nvSpPr>
-          <p:cNvPr id="33" name="Badge 5"/>
-          <p:cNvSpPr/>
-          <p:nvPr/>
-        </p:nvSpPr>
-        <p:spPr>
-          <a:xfrm>
-            <a:off x="7296912" y="1389888"/>
-            <a:ext cx="347472" cy="347472"/>
-          </a:xfrm>
-          <a:prstGeom prst="ellipse">
-            <a:avLst/>
-          </a:prstGeom>
-          <a:solidFill>
-            <a:schemeClr val="accent1"/>
-          </a:solidFill>
-          <a:ln/>
-        </p:spPr>
-      </p:sp>
-      <p:sp>
-        <p:nvSpPr>
-          <p:cNvPr id="34" name="Badge 5 label"/>
-          <p:cNvSpPr txBox="1"/>
-          <p:nvPr/>
-        </p:nvSpPr>
-        <p:spPr>
-          <a:xfrm>
-            <a:off x="7296912" y="1389888"/>
-            <a:ext cx="347472" cy="347472"/>
-          </a:xfrm>
-          <a:prstGeom prst="rect">
-            <a:avLst/>
-          </a:prstGeom>
-          <a:noFill/>
-          <a:ln/>
-        </p:spPr>
-        <p:txBody>
-          <a:bodyPr wrap="square" lIns="0" tIns="0" rIns="0" bIns="0" rtlCol="0" anchor="ctr"/>
-          <a:lstStyle/>
-          <a:p>
-            <a:pPr algn="ctr" indent="0" marL="0">
-              <a:buNone/>
-            </a:pPr>
-            <a:r>
-              <a:rPr lang="en-US" sz="1500" b="1" dirty="0">
-                <a:solidFill>
-                  <a:schemeClr val="bg1"/>
-                </a:solidFill>
-                <a:latin typeface="Cambria" pitchFamily="34" charset="0"/>
-                <a:ea typeface="Cambria" pitchFamily="34" charset="-122"/>
-                <a:cs typeface="Cambria" pitchFamily="34" charset="-120"/>
-              </a:rPr>
-              <a:t>5</a:t>
-            </a:r>
-            <a:endParaRPr lang="en-US" sz="1500" dirty="0"/>
-          </a:p>
-        </p:txBody>
-      </p:sp>
-      <p:sp>
-        <p:nvSpPr>
-          <p:cNvPr id="35" name="Agent name Decision"/>
-          <p:cNvSpPr txBox="1"/>
-          <p:nvPr/>
-        </p:nvSpPr>
-        <p:spPr>
-          <a:xfrm>
-            <a:off x="7699248" y="1389888"/>
-            <a:ext cx="914400" cy="347472"/>
-          </a:xfrm>
-          <a:prstGeom prst="rect">
-            <a:avLst/>
-          </a:prstGeom>
-          <a:noFill/>
-          <a:ln/>
-        </p:spPr>
-        <p:txBody>
-          <a:bodyPr wrap="square" lIns="0" tIns="0" rIns="0" bIns="0" rtlCol="0" anchor="ctr"/>
-          <a:lstStyle/>
-          <a:p>
-            <a:pPr indent="0" marL="0">
-              <a:buNone/>
-            </a:pPr>
-            <a:r>
-              <a:rPr lang="en-US" sz="1600" b="1" dirty="0">
-                <a:solidFill>
-                  <a:schemeClr val="tx1"/>
-                </a:solidFill>
-                <a:latin typeface="Cambria" pitchFamily="34" charset="0"/>
-                <a:ea typeface="Cambria" pitchFamily="34" charset="-122"/>
-                <a:cs typeface="Cambria" pitchFamily="34" charset="-120"/>
-              </a:rPr>
-              <a:t>Decision</a:t>
-            </a:r>
-            <a:endParaRPr lang="en-US" sz="1600" dirty="0"/>
-          </a:p>
-        </p:txBody>
-      </p:sp>
-      <p:sp>
-        <p:nvSpPr>
-          <p:cNvPr id="36" name="Agent role Decision"/>
-          <p:cNvSpPr txBox="1"/>
-          <p:nvPr/>
-        </p:nvSpPr>
-        <p:spPr>
-          <a:xfrm>
-            <a:off x="7296912" y="1874520"/>
-            <a:ext cx="1261872" cy="914400"/>
-          </a:xfrm>
-          <a:prstGeom prst="rect">
-            <a:avLst/>
-          </a:prstGeom>
-          <a:noFill/>
-          <a:ln/>
-        </p:spPr>
-        <p:txBody>
-          <a:bodyPr wrap="square" lIns="0" tIns="0" rIns="0" bIns="0" rtlCol="0" anchor="t"/>
-          <a:lstStyle/>
-          <a:p>
-            <a:pPr indent="0" marL="0">
-              <a:buNone/>
-            </a:pPr>
-            <a:r>
-              <a:rPr lang="en-US" sz="1300" dirty="0">
-                <a:solidFill>
-                  <a:schemeClr val="tx1"/>
-                </a:solidFill>
-              </a:rPr>
-              <a:t>Applies precedence, cites clauses</a:t>
-            </a:r>
-            <a:endParaRPr lang="en-US" sz="1300" dirty="0"/>
-          </a:p>
-        </p:txBody>
-      </p:sp>
-      <p:sp>
-        <p:nvSpPr>
-          <p:cNvPr id="37" name="Loop down"/>
-          <p:cNvSpPr/>
-          <p:nvPr/>
-        </p:nvSpPr>
-        <p:spPr>
-          <a:xfrm>
-            <a:off x="6236208" y="2880360"/>
-            <a:ext cx="0" cy="365760"/>
-          </a:xfrm>
-          <a:prstGeom prst="line">
-            <a:avLst/>
-          </a:prstGeom>
-          <a:noFill/>
-          <a:ln w="28575">
-            <a:solidFill>
-              <a:schemeClr val="accent2"/>
-            </a:solidFill>
-            <a:prstDash val="dash"/>
-          </a:ln>
-        </p:spPr>
-      </p:sp>
-      <p:sp>
-        <p:nvSpPr>
-          <p:cNvPr id="38" name="Loop across"/>
-          <p:cNvSpPr/>
-          <p:nvPr/>
-        </p:nvSpPr>
-        <p:spPr>
-          <a:xfrm>
-            <a:off x="1188720" y="3246120"/>
-            <a:ext cx="5047488" cy="0"/>
-          </a:xfrm>
-          <a:prstGeom prst="line">
-            <a:avLst/>
-          </a:prstGeom>
-          <a:noFill/>
-          <a:ln w="28575">
-            <a:solidFill>
-              <a:schemeClr val="accent2"/>
-            </a:solidFill>
-            <a:prstDash val="dash"/>
-          </a:ln>
-        </p:spPr>
-      </p:sp>
-      <p:sp>
-        <p:nvSpPr>
-          <p:cNvPr id="39" name="Loop up"/>
-          <p:cNvSpPr/>
-          <p:nvPr/>
-        </p:nvSpPr>
-        <p:spPr>
-          <a:xfrm flipV="1">
-            <a:off x="1188720" y="2880360"/>
-            <a:ext cx="0" cy="365760"/>
-          </a:xfrm>
-          <a:prstGeom prst="line">
-            <a:avLst/>
-          </a:prstGeom>
-          <a:noFill/>
-          <a:ln w="28575">
-            <a:solidFill>
-              <a:schemeClr val="accent2"/>
-            </a:solidFill>
-            <a:prstDash val="dash"/>
-            <a:tailEnd type="triangle"/>
-          </a:ln>
-        </p:spPr>
-      </p:sp>
-      <p:sp>
-        <p:nvSpPr>
-          <p:cNvPr id="40" name="Replan pill"/>
-          <p:cNvSpPr/>
-          <p:nvPr/>
-        </p:nvSpPr>
-        <p:spPr>
-          <a:xfrm>
-            <a:off x="2148840" y="3063240"/>
-            <a:ext cx="3931920" cy="365760"/>
-          </a:xfrm>
-          <a:prstGeom prst="roundRect">
-            <a:avLst>
-              <a:gd name="adj" fmla="val 50000"/>
-            </a:avLst>
-          </a:prstGeom>
-          <a:solidFill>
-            <a:schemeClr val="bg1"/>
-          </a:solidFill>
-          <a:ln w="19050">
-            <a:solidFill>
-              <a:schemeClr val="accent2"/>
-            </a:solidFill>
-            <a:prstDash val="solid"/>
-          </a:ln>
-        </p:spPr>
-      </p:sp>
-      <p:sp>
-        <p:nvSpPr>
-          <p:cNvPr id="41" name="Replan label"/>
-          <p:cNvSpPr txBox="1"/>
-          <p:nvPr/>
-        </p:nvSpPr>
-        <p:spPr>
-          <a:xfrm>
-            <a:off x="2148840" y="3063240"/>
-            <a:ext cx="3931920" cy="365760"/>
-          </a:xfrm>
-          <a:prstGeom prst="rect">
-            <a:avLst/>
-          </a:prstGeom>
-          <a:noFill/>
-          <a:ln/>
-        </p:spPr>
-        <p:txBody>
-          <a:bodyPr wrap="square" lIns="0" tIns="0" rIns="0" bIns="0" rtlCol="0" anchor="ctr"/>
-          <a:lstStyle/>
-          <a:p>
-            <a:pPr algn="ctr" indent="0" marL="0">
-              <a:buNone/>
-            </a:pPr>
-            <a:r>
-              <a:rPr lang="en-US" sz="1300" b="1" dirty="0">
-                <a:solidFill>
-                  <a:schemeClr val="accent2"/>
-                </a:solidFill>
-              </a:rPr>
-              <a:t>REPLAN: add checks or recompute, max 2 rounds</a:t>
-            </a:r>
-            <a:endParaRPr lang="en-US" sz="1300" dirty="0"/>
-          </a:p>
-        </p:txBody>
-      </p:sp>
-      <p:sp>
-        <p:nvSpPr>
-          <p:cNvPr id="42" name="Tool belt"/>
-          <p:cNvSpPr/>
-          <p:nvPr/>
-        </p:nvSpPr>
-        <p:spPr>
-          <a:xfrm>
-            <a:off x="457200" y="3657600"/>
-            <a:ext cx="8229600" cy="868680"/>
-          </a:xfrm>
-          <a:prstGeom prst="roundRect">
-            <a:avLst>
-              <a:gd name="adj" fmla="val 8421"/>
-            </a:avLst>
-          </a:prstGeom>
-          <a:solidFill>
-            <a:schemeClr val="bg2"/>
-          </a:solidFill>
-          <a:ln/>
-        </p:spPr>
-      </p:sp>
-      <p:sp>
-        <p:nvSpPr>
-          <p:cNvPr id="43" name="Tool belt text"/>
-          <p:cNvSpPr txBox="1"/>
-          <p:nvPr/>
-        </p:nvSpPr>
-        <p:spPr>
-          <a:xfrm>
-            <a:off x="640080" y="3749040"/>
-            <a:ext cx="7863840" cy="731520"/>
-          </a:xfrm>
-          <a:prstGeom prst="rect">
-            <a:avLst/>
-          </a:prstGeom>
-          <a:noFill/>
-          <a:ln/>
-        </p:spPr>
-        <p:txBody>
-          <a:bodyPr wrap="square" lIns="0" tIns="0" rIns="0" bIns="0" rtlCol="0" anchor="ctr"/>
-          <a:lstStyle/>
-          <a:p>
-            <a:pPr indent="0" marL="0">
-              <a:buNone/>
-            </a:pPr>
-            <a:r>
-              <a:rPr lang="en-US" sz="1200" b="1" dirty="0">
-                <a:solidFill>
-                  <a:schemeClr val="tx2"/>
-                </a:solidFill>
-              </a:rPr>
-              <a:t>Executor tools:  </a:t>
-            </a:r>
-            <a:pPr indent="0" marL="0">
-              <a:buNone/>
-            </a:pPr>
-            <a:r>
-              <a:rPr lang="en-US" sz="1200" dirty="0">
-                <a:solidFill>
-                  <a:schemeClr val="tx1"/>
-                </a:solidFill>
-              </a:rPr>
-              <a:t>documents, policy status, waiting periods, exclusions, duplicates, filing window, procedure match, bill integrity, high value, tariff check, fraud score, payout</a:t>
-            </a:r>
-            <a:endParaRPr lang="en-US" sz="1200" dirty="0"/>
-          </a:p>
-          <a:p>
-            <a:pPr indent="0" marL="0">
-              <a:buNone/>
-            </a:pPr>
-            <a:r>
-              <a:rPr lang="en-US" sz="1200" dirty="0">
-                <a:solidFill>
-                  <a:schemeClr val="tx2"/>
-                </a:solidFill>
-              </a:rPr>
-              <a:t>Plus a pluggable model (mock or local Ollama) and synthetic policy, member and hospital stores.</a:t>
-            </a:r>
-            <a:endParaRPr lang="en-US" sz="1200" dirty="0"/>
           </a:p>
         </p:txBody>
       </p:sp>
@@ -6431,920 +7148,67 @@
                   <a:schemeClr val="tx1"/>
                 </a:solidFill>
               </a:rPr>
-              <a:t>One claim, followed in plain English</a:t>
+              <a:t>The app explains every decision in plain English</a:t>
             </a:r>
             <a:endParaRPr lang="en-US" sz="2800" dirty="0"/>
           </a:p>
         </p:txBody>
       </p:sp>
-      <p:sp>
-        <p:nvSpPr>
-          <p:cNvPr id="3" name="Walk row 1"/>
-          <p:cNvSpPr/>
-          <p:nvPr/>
-        </p:nvSpPr>
-        <p:spPr>
-          <a:xfrm>
-            <a:off x="457200" y="1188720"/>
-            <a:ext cx="6035040" cy="530352"/>
-          </a:xfrm>
-          <a:prstGeom prst="roundRect">
-            <a:avLst>
-              <a:gd name="adj" fmla="val 13793"/>
-            </a:avLst>
-          </a:prstGeom>
-          <a:solidFill>
-            <a:schemeClr val="bg2"/>
-          </a:solidFill>
-          <a:ln/>
-        </p:spPr>
-      </p:sp>
-      <p:sp>
-        <p:nvSpPr>
-          <p:cNvPr id="4" name="Badge 1"/>
-          <p:cNvSpPr/>
-          <p:nvPr/>
-        </p:nvSpPr>
-        <p:spPr>
-          <a:xfrm>
-            <a:off x="566928" y="1261872"/>
-            <a:ext cx="384048" cy="384048"/>
-          </a:xfrm>
-          <a:prstGeom prst="ellipse">
-            <a:avLst/>
-          </a:prstGeom>
-          <a:solidFill>
-            <a:schemeClr val="accent1"/>
-          </a:solidFill>
-          <a:ln/>
-        </p:spPr>
-      </p:sp>
-      <p:sp>
-        <p:nvSpPr>
-          <p:cNvPr id="5" name="Badge 1 label"/>
-          <p:cNvSpPr txBox="1"/>
-          <p:nvPr/>
-        </p:nvSpPr>
-        <p:spPr>
-          <a:xfrm>
-            <a:off x="566928" y="1261872"/>
-            <a:ext cx="384048" cy="384048"/>
-          </a:xfrm>
-          <a:prstGeom prst="rect">
-            <a:avLst/>
-          </a:prstGeom>
-          <a:noFill/>
-          <a:ln/>
-        </p:spPr>
-        <p:txBody>
-          <a:bodyPr wrap="square" lIns="0" tIns="0" rIns="0" bIns="0" rtlCol="0" anchor="ctr"/>
-          <a:lstStyle/>
-          <a:p>
-            <a:pPr algn="ctr" indent="0" marL="0">
-              <a:buNone/>
-            </a:pPr>
-            <a:r>
-              <a:rPr lang="en-US" sz="1500" b="1" dirty="0">
-                <a:solidFill>
-                  <a:schemeClr val="bg1"/>
-                </a:solidFill>
-                <a:latin typeface="Cambria" pitchFamily="34" charset="0"/>
-                <a:ea typeface="Cambria" pitchFamily="34" charset="-122"/>
-                <a:cs typeface="Cambria" pitchFamily="34" charset="-120"/>
-              </a:rPr>
-              <a:t>1</a:t>
-            </a:r>
-            <a:endParaRPr lang="en-US" sz="1500" dirty="0"/>
-          </a:p>
-        </p:txBody>
-      </p:sp>
-      <p:sp>
-        <p:nvSpPr>
-          <p:cNvPr id="6" name="Walk agent 1"/>
-          <p:cNvSpPr txBox="1"/>
-          <p:nvPr/>
-        </p:nvSpPr>
-        <p:spPr>
-          <a:xfrm>
-            <a:off x="1097280" y="1188720"/>
-            <a:ext cx="1143000" cy="530352"/>
-          </a:xfrm>
-          <a:prstGeom prst="rect">
-            <a:avLst/>
-          </a:prstGeom>
-          <a:noFill/>
-          <a:ln/>
-        </p:spPr>
-        <p:txBody>
-          <a:bodyPr wrap="square" lIns="0" tIns="0" rIns="0" bIns="0" rtlCol="0" anchor="ctr"/>
+      <p:pic>
+        <p:nvPicPr>
+          <p:cNvPr id="3" name="App story screenshot" descr="The live app's plain-English account of what the Executor, Critic and Decision agents did for claim CLM-26-0019">    </p:cNvPr>
+          <p:cNvPicPr>
+            <a:picLocks noChangeAspect="1"/>
+          </p:cNvPicPr>
+          <p:nvPr/>
+        </p:nvPicPr>
+        <p:blipFill>
+          <a:blip r:embed="rId1"/>
+          <a:stretch>
+            <a:fillRect/>
+          </a:stretch>
+        </p:blipFill>
+        <p:spPr>
+          <a:xfrm>
+            <a:off x="640080" y="1097280"/>
+            <a:ext cx="7863840" cy="3267370"/>
+          </a:xfrm>
+          <a:prstGeom prst="rect">
+            <a:avLst/>
+          </a:prstGeom>
+        </p:spPr>
+      </p:pic>
+      <p:sp>
+        <p:nvSpPr>
+          <p:cNvPr id="4" name="Story caption"/>
+          <p:cNvSpPr txBox="1"/>
+          <p:nvPr/>
+        </p:nvSpPr>
+        <p:spPr>
+          <a:xfrm>
+            <a:off x="640080" y="4480560"/>
+            <a:ext cx="7863840" cy="256032"/>
+          </a:xfrm>
+          <a:prstGeom prst="rect">
+            <a:avLst/>
+          </a:prstGeom>
+          <a:noFill/>
+          <a:ln/>
+        </p:spPr>
+        <p:txBody>
+          <a:bodyPr wrap="square" lIns="0" tIns="0" rIns="0" bIns="0" rtlCol="0" anchor="t"/>
           <a:lstStyle/>
           <a:p>
             <a:pPr indent="0" marL="0">
               <a:buNone/>
             </a:pPr>
             <a:r>
-              <a:rPr lang="en-US" sz="1500" b="1" dirty="0">
-                <a:solidFill>
-                  <a:schemeClr val="tx1"/>
-                </a:solidFill>
-                <a:latin typeface="Cambria" pitchFamily="34" charset="0"/>
-                <a:ea typeface="Cambria" pitchFamily="34" charset="-122"/>
-                <a:cs typeface="Cambria" pitchFamily="34" charset="-120"/>
-              </a:rPr>
-              <a:t>Planner</a:t>
-            </a:r>
-            <a:endParaRPr lang="en-US" sz="1500" dirty="0"/>
-          </a:p>
-        </p:txBody>
-      </p:sp>
-      <p:sp>
-        <p:nvSpPr>
-          <p:cNvPr id="7" name="Walk text 1"/>
-          <p:cNvSpPr txBox="1"/>
-          <p:nvPr/>
-        </p:nvSpPr>
-        <p:spPr>
-          <a:xfrm>
-            <a:off x="2286000" y="1188720"/>
-            <a:ext cx="4114800" cy="530352"/>
-          </a:xfrm>
-          <a:prstGeom prst="rect">
-            <a:avLst/>
-          </a:prstGeom>
-          <a:noFill/>
-          <a:ln/>
-        </p:spPr>
-        <p:txBody>
-          <a:bodyPr wrap="square" lIns="0" tIns="0" rIns="0" bIns="0" rtlCol="0" anchor="ctr"/>
-          <a:lstStyle/>
-          <a:p>
-            <a:pPr indent="0" marL="0">
-              <a:buNone/>
-            </a:pPr>
-            <a:r>
-              <a:rPr lang="en-US" sz="1300" dirty="0">
-                <a:solidFill>
-                  <a:schemeClr val="tx1"/>
-                </a:solidFill>
-              </a:rPr>
-              <a:t>Small claim at a normal hospital, so it picks a quick check.</a:t>
-            </a:r>
-            <a:endParaRPr lang="en-US" sz="1300" dirty="0"/>
-          </a:p>
-        </p:txBody>
-      </p:sp>
-      <p:sp>
-        <p:nvSpPr>
-          <p:cNvPr id="8" name="Walk row 2"/>
-          <p:cNvSpPr/>
-          <p:nvPr/>
-        </p:nvSpPr>
-        <p:spPr>
-          <a:xfrm>
-            <a:off x="457200" y="1828800"/>
-            <a:ext cx="6035040" cy="530352"/>
-          </a:xfrm>
-          <a:prstGeom prst="roundRect">
-            <a:avLst>
-              <a:gd name="adj" fmla="val 13793"/>
-            </a:avLst>
-          </a:prstGeom>
-          <a:solidFill>
-            <a:schemeClr val="bg2"/>
-          </a:solidFill>
-          <a:ln/>
-        </p:spPr>
-      </p:sp>
-      <p:sp>
-        <p:nvSpPr>
-          <p:cNvPr id="9" name="Badge 2"/>
-          <p:cNvSpPr/>
-          <p:nvPr/>
-        </p:nvSpPr>
-        <p:spPr>
-          <a:xfrm>
-            <a:off x="566928" y="1901952"/>
-            <a:ext cx="384048" cy="384048"/>
-          </a:xfrm>
-          <a:prstGeom prst="ellipse">
-            <a:avLst/>
-          </a:prstGeom>
-          <a:solidFill>
-            <a:schemeClr val="accent1"/>
-          </a:solidFill>
-          <a:ln/>
-        </p:spPr>
-      </p:sp>
-      <p:sp>
-        <p:nvSpPr>
-          <p:cNvPr id="10" name="Badge 2 label"/>
-          <p:cNvSpPr txBox="1"/>
-          <p:nvPr/>
-        </p:nvSpPr>
-        <p:spPr>
-          <a:xfrm>
-            <a:off x="566928" y="1901952"/>
-            <a:ext cx="384048" cy="384048"/>
-          </a:xfrm>
-          <a:prstGeom prst="rect">
-            <a:avLst/>
-          </a:prstGeom>
-          <a:noFill/>
-          <a:ln/>
-        </p:spPr>
-        <p:txBody>
-          <a:bodyPr wrap="square" lIns="0" tIns="0" rIns="0" bIns="0" rtlCol="0" anchor="ctr"/>
-          <a:lstStyle/>
-          <a:p>
-            <a:pPr algn="ctr" indent="0" marL="0">
-              <a:buNone/>
-            </a:pPr>
-            <a:r>
-              <a:rPr lang="en-US" sz="1500" b="1" dirty="0">
-                <a:solidFill>
-                  <a:schemeClr val="bg1"/>
-                </a:solidFill>
-                <a:latin typeface="Cambria" pitchFamily="34" charset="0"/>
-                <a:ea typeface="Cambria" pitchFamily="34" charset="-122"/>
-                <a:cs typeface="Cambria" pitchFamily="34" charset="-120"/>
-              </a:rPr>
-              <a:t>2</a:t>
-            </a:r>
-            <a:endParaRPr lang="en-US" sz="1500" dirty="0"/>
-          </a:p>
-        </p:txBody>
-      </p:sp>
-      <p:sp>
-        <p:nvSpPr>
-          <p:cNvPr id="11" name="Walk agent 2"/>
-          <p:cNvSpPr txBox="1"/>
-          <p:nvPr/>
-        </p:nvSpPr>
-        <p:spPr>
-          <a:xfrm>
-            <a:off x="1097280" y="1828800"/>
-            <a:ext cx="1143000" cy="530352"/>
-          </a:xfrm>
-          <a:prstGeom prst="rect">
-            <a:avLst/>
-          </a:prstGeom>
-          <a:noFill/>
-          <a:ln/>
-        </p:spPr>
-        <p:txBody>
-          <a:bodyPr wrap="square" lIns="0" tIns="0" rIns="0" bIns="0" rtlCol="0" anchor="ctr"/>
-          <a:lstStyle/>
-          <a:p>
-            <a:pPr indent="0" marL="0">
-              <a:buNone/>
-            </a:pPr>
-            <a:r>
-              <a:rPr lang="en-US" sz="1500" b="1" dirty="0">
-                <a:solidFill>
-                  <a:schemeClr val="tx1"/>
-                </a:solidFill>
-                <a:latin typeface="Cambria" pitchFamily="34" charset="0"/>
-                <a:ea typeface="Cambria" pitchFamily="34" charset="-122"/>
-                <a:cs typeface="Cambria" pitchFamily="34" charset="-120"/>
-              </a:rPr>
-              <a:t>Extractor</a:t>
-            </a:r>
-            <a:endParaRPr lang="en-US" sz="1500" dirty="0"/>
-          </a:p>
-        </p:txBody>
-      </p:sp>
-      <p:sp>
-        <p:nvSpPr>
-          <p:cNvPr id="12" name="Walk text 2"/>
-          <p:cNvSpPr txBox="1"/>
-          <p:nvPr/>
-        </p:nvSpPr>
-        <p:spPr>
-          <a:xfrm>
-            <a:off x="2286000" y="1828800"/>
-            <a:ext cx="4114800" cy="530352"/>
-          </a:xfrm>
-          <a:prstGeom prst="rect">
-            <a:avLst/>
-          </a:prstGeom>
-          <a:noFill/>
-          <a:ln/>
-        </p:spPr>
-        <p:txBody>
-          <a:bodyPr wrap="square" lIns="0" tIns="0" rIns="0" bIns="0" rtlCol="0" anchor="ctr"/>
-          <a:lstStyle/>
-          <a:p>
-            <a:pPr indent="0" marL="0">
-              <a:buNone/>
-            </a:pPr>
-            <a:r>
-              <a:rPr lang="en-US" sz="1300" dirty="0">
-                <a:solidFill>
-                  <a:schemeClr val="tx1"/>
-                </a:solidFill>
-              </a:rPr>
-              <a:t>Reads the discharge summary: cataract surgery.</a:t>
-            </a:r>
-            <a:endParaRPr lang="en-US" sz="1300" dirty="0"/>
-          </a:p>
-        </p:txBody>
-      </p:sp>
-      <p:sp>
-        <p:nvSpPr>
-          <p:cNvPr id="13" name="Walk row 3"/>
-          <p:cNvSpPr/>
-          <p:nvPr/>
-        </p:nvSpPr>
-        <p:spPr>
-          <a:xfrm>
-            <a:off x="457200" y="2468880"/>
-            <a:ext cx="6035040" cy="530352"/>
-          </a:xfrm>
-          <a:prstGeom prst="roundRect">
-            <a:avLst>
-              <a:gd name="adj" fmla="val 13793"/>
-            </a:avLst>
-          </a:prstGeom>
-          <a:solidFill>
-            <a:schemeClr val="bg2"/>
-          </a:solidFill>
-          <a:ln/>
-        </p:spPr>
-      </p:sp>
-      <p:sp>
-        <p:nvSpPr>
-          <p:cNvPr id="14" name="Badge 3"/>
-          <p:cNvSpPr/>
-          <p:nvPr/>
-        </p:nvSpPr>
-        <p:spPr>
-          <a:xfrm>
-            <a:off x="566928" y="2542032"/>
-            <a:ext cx="384048" cy="384048"/>
-          </a:xfrm>
-          <a:prstGeom prst="ellipse">
-            <a:avLst/>
-          </a:prstGeom>
-          <a:solidFill>
-            <a:schemeClr val="accent1"/>
-          </a:solidFill>
-          <a:ln/>
-        </p:spPr>
-      </p:sp>
-      <p:sp>
-        <p:nvSpPr>
-          <p:cNvPr id="15" name="Badge 3 label"/>
-          <p:cNvSpPr txBox="1"/>
-          <p:nvPr/>
-        </p:nvSpPr>
-        <p:spPr>
-          <a:xfrm>
-            <a:off x="566928" y="2542032"/>
-            <a:ext cx="384048" cy="384048"/>
-          </a:xfrm>
-          <a:prstGeom prst="rect">
-            <a:avLst/>
-          </a:prstGeom>
-          <a:noFill/>
-          <a:ln/>
-        </p:spPr>
-        <p:txBody>
-          <a:bodyPr wrap="square" lIns="0" tIns="0" rIns="0" bIns="0" rtlCol="0" anchor="ctr"/>
-          <a:lstStyle/>
-          <a:p>
-            <a:pPr algn="ctr" indent="0" marL="0">
-              <a:buNone/>
-            </a:pPr>
-            <a:r>
-              <a:rPr lang="en-US" sz="1500" b="1" dirty="0">
-                <a:solidFill>
-                  <a:schemeClr val="bg1"/>
-                </a:solidFill>
-                <a:latin typeface="Cambria" pitchFamily="34" charset="0"/>
-                <a:ea typeface="Cambria" pitchFamily="34" charset="-122"/>
-                <a:cs typeface="Cambria" pitchFamily="34" charset="-120"/>
-              </a:rPr>
-              <a:t>3</a:t>
-            </a:r>
-            <a:endParaRPr lang="en-US" sz="1500" dirty="0"/>
-          </a:p>
-        </p:txBody>
-      </p:sp>
-      <p:sp>
-        <p:nvSpPr>
-          <p:cNvPr id="16" name="Walk agent 3"/>
-          <p:cNvSpPr txBox="1"/>
-          <p:nvPr/>
-        </p:nvSpPr>
-        <p:spPr>
-          <a:xfrm>
-            <a:off x="1097280" y="2468880"/>
-            <a:ext cx="1143000" cy="530352"/>
-          </a:xfrm>
-          <a:prstGeom prst="rect">
-            <a:avLst/>
-          </a:prstGeom>
-          <a:noFill/>
-          <a:ln/>
-        </p:spPr>
-        <p:txBody>
-          <a:bodyPr wrap="square" lIns="0" tIns="0" rIns="0" bIns="0" rtlCol="0" anchor="ctr"/>
-          <a:lstStyle/>
-          <a:p>
-            <a:pPr indent="0" marL="0">
-              <a:buNone/>
-            </a:pPr>
-            <a:r>
-              <a:rPr lang="en-US" sz="1500" b="1" dirty="0">
-                <a:solidFill>
-                  <a:schemeClr val="tx1"/>
-                </a:solidFill>
-                <a:latin typeface="Cambria" pitchFamily="34" charset="0"/>
-                <a:ea typeface="Cambria" pitchFamily="34" charset="-122"/>
-                <a:cs typeface="Cambria" pitchFamily="34" charset="-120"/>
-              </a:rPr>
-              <a:t>Executor</a:t>
-            </a:r>
-            <a:endParaRPr lang="en-US" sz="1500" dirty="0"/>
-          </a:p>
-        </p:txBody>
-      </p:sp>
-      <p:sp>
-        <p:nvSpPr>
-          <p:cNvPr id="17" name="Walk text 3"/>
-          <p:cNvSpPr txBox="1"/>
-          <p:nvPr/>
-        </p:nvSpPr>
-        <p:spPr>
-          <a:xfrm>
-            <a:off x="2286000" y="2468880"/>
-            <a:ext cx="4114800" cy="530352"/>
-          </a:xfrm>
-          <a:prstGeom prst="rect">
-            <a:avLst/>
-          </a:prstGeom>
-          <a:noFill/>
-          <a:ln/>
-        </p:spPr>
-        <p:txBody>
-          <a:bodyPr wrap="square" lIns="0" tIns="0" rIns="0" bIns="0" rtlCol="0" anchor="ctr"/>
-          <a:lstStyle/>
-          <a:p>
-            <a:pPr indent="0" marL="0">
-              <a:buNone/>
-            </a:pPr>
-            <a:r>
-              <a:rPr lang="en-US" sz="1300" dirty="0">
-                <a:solidFill>
-                  <a:schemeClr val="tx1"/>
-                </a:solidFill>
-              </a:rPr>
-              <a:t>Runs the checks. The price is 2.4 times the normal cost.</a:t>
-            </a:r>
-            <a:endParaRPr lang="en-US" sz="1300" dirty="0"/>
-          </a:p>
-        </p:txBody>
-      </p:sp>
-      <p:sp>
-        <p:nvSpPr>
-          <p:cNvPr id="18" name="Walk row 4"/>
-          <p:cNvSpPr/>
-          <p:nvPr/>
-        </p:nvSpPr>
-        <p:spPr>
-          <a:xfrm>
-            <a:off x="457200" y="3108960"/>
-            <a:ext cx="6035040" cy="530352"/>
-          </a:xfrm>
-          <a:prstGeom prst="roundRect">
-            <a:avLst>
-              <a:gd name="adj" fmla="val 13793"/>
-            </a:avLst>
-          </a:prstGeom>
-          <a:solidFill>
-            <a:schemeClr val="bg2"/>
-          </a:solidFill>
-          <a:ln/>
-        </p:spPr>
-      </p:sp>
-      <p:sp>
-        <p:nvSpPr>
-          <p:cNvPr id="19" name="Badge 4"/>
-          <p:cNvSpPr/>
-          <p:nvPr/>
-        </p:nvSpPr>
-        <p:spPr>
-          <a:xfrm>
-            <a:off x="566928" y="3182112"/>
-            <a:ext cx="384048" cy="384048"/>
-          </a:xfrm>
-          <a:prstGeom prst="ellipse">
-            <a:avLst/>
-          </a:prstGeom>
-          <a:solidFill>
-            <a:schemeClr val="accent2"/>
-          </a:solidFill>
-          <a:ln/>
-        </p:spPr>
-      </p:sp>
-      <p:sp>
-        <p:nvSpPr>
-          <p:cNvPr id="20" name="Badge 4 label"/>
-          <p:cNvSpPr txBox="1"/>
-          <p:nvPr/>
-        </p:nvSpPr>
-        <p:spPr>
-          <a:xfrm>
-            <a:off x="566928" y="3182112"/>
-            <a:ext cx="384048" cy="384048"/>
-          </a:xfrm>
-          <a:prstGeom prst="rect">
-            <a:avLst/>
-          </a:prstGeom>
-          <a:noFill/>
-          <a:ln/>
-        </p:spPr>
-        <p:txBody>
-          <a:bodyPr wrap="square" lIns="0" tIns="0" rIns="0" bIns="0" rtlCol="0" anchor="ctr"/>
-          <a:lstStyle/>
-          <a:p>
-            <a:pPr algn="ctr" indent="0" marL="0">
-              <a:buNone/>
-            </a:pPr>
-            <a:r>
-              <a:rPr lang="en-US" sz="1500" b="1" dirty="0">
-                <a:solidFill>
-                  <a:schemeClr val="bg1"/>
-                </a:solidFill>
-                <a:latin typeface="Cambria" pitchFamily="34" charset="0"/>
-                <a:ea typeface="Cambria" pitchFamily="34" charset="-122"/>
-                <a:cs typeface="Cambria" pitchFamily="34" charset="-120"/>
-              </a:rPr>
-              <a:t>4</a:t>
-            </a:r>
-            <a:endParaRPr lang="en-US" sz="1500" dirty="0"/>
-          </a:p>
-        </p:txBody>
-      </p:sp>
-      <p:sp>
-        <p:nvSpPr>
-          <p:cNvPr id="21" name="Walk agent 4"/>
-          <p:cNvSpPr txBox="1"/>
-          <p:nvPr/>
-        </p:nvSpPr>
-        <p:spPr>
-          <a:xfrm>
-            <a:off x="1097280" y="3108960"/>
-            <a:ext cx="1143000" cy="530352"/>
-          </a:xfrm>
-          <a:prstGeom prst="rect">
-            <a:avLst/>
-          </a:prstGeom>
-          <a:noFill/>
-          <a:ln/>
-        </p:spPr>
-        <p:txBody>
-          <a:bodyPr wrap="square" lIns="0" tIns="0" rIns="0" bIns="0" rtlCol="0" anchor="ctr"/>
-          <a:lstStyle/>
-          <a:p>
-            <a:pPr indent="0" marL="0">
-              <a:buNone/>
-            </a:pPr>
-            <a:r>
-              <a:rPr lang="en-US" sz="1500" b="1" dirty="0">
-                <a:solidFill>
-                  <a:schemeClr val="accent2"/>
-                </a:solidFill>
-                <a:latin typeface="Cambria" pitchFamily="34" charset="0"/>
-                <a:ea typeface="Cambria" pitchFamily="34" charset="-122"/>
-                <a:cs typeface="Cambria" pitchFamily="34" charset="-120"/>
-              </a:rPr>
-              <a:t>Critic</a:t>
-            </a:r>
-            <a:endParaRPr lang="en-US" sz="1500" dirty="0"/>
-          </a:p>
-        </p:txBody>
-      </p:sp>
-      <p:sp>
-        <p:nvSpPr>
-          <p:cNvPr id="22" name="Walk text 4"/>
-          <p:cNvSpPr txBox="1"/>
-          <p:nvPr/>
-        </p:nvSpPr>
-        <p:spPr>
-          <a:xfrm>
-            <a:off x="2286000" y="3108960"/>
-            <a:ext cx="4114800" cy="530352"/>
-          </a:xfrm>
-          <a:prstGeom prst="rect">
-            <a:avLst/>
-          </a:prstGeom>
-          <a:noFill/>
-          <a:ln/>
-        </p:spPr>
-        <p:txBody>
-          <a:bodyPr wrap="square" lIns="0" tIns="0" rIns="0" bIns="0" rtlCol="0" anchor="ctr"/>
-          <a:lstStyle/>
-          <a:p>
-            <a:pPr indent="0" marL="0">
-              <a:buNone/>
-            </a:pPr>
-            <a:r>
-              <a:rPr lang="en-US" sz="1300" dirty="0">
-                <a:solidFill>
-                  <a:schemeClr val="tx1"/>
-                </a:solidFill>
-              </a:rPr>
-              <a:t>A price that high needed a fraud check the quick plan skipped. Sends it back.</a:t>
-            </a:r>
-            <a:endParaRPr lang="en-US" sz="1300" dirty="0"/>
-          </a:p>
-        </p:txBody>
-      </p:sp>
-      <p:sp>
-        <p:nvSpPr>
-          <p:cNvPr id="23" name="Walk row 5"/>
-          <p:cNvSpPr/>
-          <p:nvPr/>
-        </p:nvSpPr>
-        <p:spPr>
-          <a:xfrm>
-            <a:off x="457200" y="3749040"/>
-            <a:ext cx="6035040" cy="530352"/>
-          </a:xfrm>
-          <a:prstGeom prst="roundRect">
-            <a:avLst>
-              <a:gd name="adj" fmla="val 13793"/>
-            </a:avLst>
-          </a:prstGeom>
-          <a:solidFill>
-            <a:schemeClr val="bg2"/>
-          </a:solidFill>
-          <a:ln/>
-        </p:spPr>
-      </p:sp>
-      <p:sp>
-        <p:nvSpPr>
-          <p:cNvPr id="24" name="Badge 5"/>
-          <p:cNvSpPr/>
-          <p:nvPr/>
-        </p:nvSpPr>
-        <p:spPr>
-          <a:xfrm>
-            <a:off x="566928" y="3822192"/>
-            <a:ext cx="384048" cy="384048"/>
-          </a:xfrm>
-          <a:prstGeom prst="ellipse">
-            <a:avLst/>
-          </a:prstGeom>
-          <a:solidFill>
-            <a:schemeClr val="accent1"/>
-          </a:solidFill>
-          <a:ln/>
-        </p:spPr>
-      </p:sp>
-      <p:sp>
-        <p:nvSpPr>
-          <p:cNvPr id="25" name="Badge 5 label"/>
-          <p:cNvSpPr txBox="1"/>
-          <p:nvPr/>
-        </p:nvSpPr>
-        <p:spPr>
-          <a:xfrm>
-            <a:off x="566928" y="3822192"/>
-            <a:ext cx="384048" cy="384048"/>
-          </a:xfrm>
-          <a:prstGeom prst="rect">
-            <a:avLst/>
-          </a:prstGeom>
-          <a:noFill/>
-          <a:ln/>
-        </p:spPr>
-        <p:txBody>
-          <a:bodyPr wrap="square" lIns="0" tIns="0" rIns="0" bIns="0" rtlCol="0" anchor="ctr"/>
-          <a:lstStyle/>
-          <a:p>
-            <a:pPr algn="ctr" indent="0" marL="0">
-              <a:buNone/>
-            </a:pPr>
-            <a:r>
-              <a:rPr lang="en-US" sz="1500" b="1" dirty="0">
-                <a:solidFill>
-                  <a:schemeClr val="bg1"/>
-                </a:solidFill>
-                <a:latin typeface="Cambria" pitchFamily="34" charset="0"/>
-                <a:ea typeface="Cambria" pitchFamily="34" charset="-122"/>
-                <a:cs typeface="Cambria" pitchFamily="34" charset="-120"/>
-              </a:rPr>
-              <a:t>5</a:t>
-            </a:r>
-            <a:endParaRPr lang="en-US" sz="1500" dirty="0"/>
-          </a:p>
-        </p:txBody>
-      </p:sp>
-      <p:sp>
-        <p:nvSpPr>
-          <p:cNvPr id="26" name="Walk agent 5"/>
-          <p:cNvSpPr txBox="1"/>
-          <p:nvPr/>
-        </p:nvSpPr>
-        <p:spPr>
-          <a:xfrm>
-            <a:off x="1097280" y="3749040"/>
-            <a:ext cx="1143000" cy="530352"/>
-          </a:xfrm>
-          <a:prstGeom prst="rect">
-            <a:avLst/>
-          </a:prstGeom>
-          <a:noFill/>
-          <a:ln/>
-        </p:spPr>
-        <p:txBody>
-          <a:bodyPr wrap="square" lIns="0" tIns="0" rIns="0" bIns="0" rtlCol="0" anchor="ctr"/>
-          <a:lstStyle/>
-          <a:p>
-            <a:pPr indent="0" marL="0">
-              <a:buNone/>
-            </a:pPr>
-            <a:r>
-              <a:rPr lang="en-US" sz="1500" b="1" dirty="0">
-                <a:solidFill>
-                  <a:schemeClr val="tx1"/>
-                </a:solidFill>
-                <a:latin typeface="Cambria" pitchFamily="34" charset="0"/>
-                <a:ea typeface="Cambria" pitchFamily="34" charset="-122"/>
-                <a:cs typeface="Cambria" pitchFamily="34" charset="-120"/>
-              </a:rPr>
-              <a:t>Decision</a:t>
-            </a:r>
-            <a:endParaRPr lang="en-US" sz="1500" dirty="0"/>
-          </a:p>
-        </p:txBody>
-      </p:sp>
-      <p:sp>
-        <p:nvSpPr>
-          <p:cNvPr id="27" name="Walk text 5"/>
-          <p:cNvSpPr txBox="1"/>
-          <p:nvPr/>
-        </p:nvSpPr>
-        <p:spPr>
-          <a:xfrm>
-            <a:off x="2286000" y="3749040"/>
-            <a:ext cx="4114800" cy="530352"/>
-          </a:xfrm>
-          <a:prstGeom prst="rect">
-            <a:avLst/>
-          </a:prstGeom>
-          <a:noFill/>
-          <a:ln/>
-        </p:spPr>
-        <p:txBody>
-          <a:bodyPr wrap="square" lIns="0" tIns="0" rIns="0" bIns="0" rtlCol="0" anchor="ctr"/>
-          <a:lstStyle/>
-          <a:p>
-            <a:pPr indent="0" marL="0">
-              <a:buNone/>
-            </a:pPr>
-            <a:r>
-              <a:rPr lang="en-US" sz="1300" dirty="0">
-                <a:solidFill>
-                  <a:schemeClr val="tx1"/>
-                </a:solidFill>
-              </a:rPr>
-              <a:t>Fraud check scores 60 out of 100, so a human officer decides.</a:t>
-            </a:r>
-            <a:endParaRPr lang="en-US" sz="1300" dirty="0"/>
-          </a:p>
-        </p:txBody>
-      </p:sp>
-      <p:sp>
-        <p:nvSpPr>
-          <p:cNvPr id="28" name="Walk callout"/>
-          <p:cNvSpPr/>
-          <p:nvPr/>
-        </p:nvSpPr>
-        <p:spPr>
-          <a:xfrm>
-            <a:off x="6766560" y="1188720"/>
-            <a:ext cx="1920240" cy="3090672"/>
-          </a:xfrm>
-          <a:prstGeom prst="roundRect">
-            <a:avLst>
-              <a:gd name="adj" fmla="val 3810"/>
-            </a:avLst>
-          </a:prstGeom>
-          <a:solidFill>
-            <a:schemeClr val="tx1"/>
-          </a:solidFill>
-          <a:ln/>
-        </p:spPr>
-      </p:sp>
-      <p:sp>
-        <p:nvSpPr>
-          <p:cNvPr id="29" name="Walk callout title"/>
-          <p:cNvSpPr txBox="1"/>
-          <p:nvPr/>
-        </p:nvSpPr>
-        <p:spPr>
-          <a:xfrm>
-            <a:off x="6949440" y="1325880"/>
-            <a:ext cx="1600200" cy="365760"/>
-          </a:xfrm>
-          <a:prstGeom prst="rect">
-            <a:avLst/>
-          </a:prstGeom>
-          <a:noFill/>
-          <a:ln/>
-        </p:spPr>
-        <p:txBody>
-          <a:bodyPr wrap="square" lIns="0" tIns="0" rIns="0" bIns="0" rtlCol="0" anchor="t"/>
-          <a:lstStyle/>
-          <a:p>
-            <a:pPr indent="0" marL="0">
-              <a:buNone/>
-            </a:pPr>
-            <a:r>
-              <a:rPr lang="en-US" sz="1600" b="1" dirty="0">
-                <a:solidFill>
-                  <a:schemeClr val="bg1"/>
-                </a:solidFill>
-                <a:latin typeface="Cambria" pitchFamily="34" charset="0"/>
-                <a:ea typeface="Cambria" pitchFamily="34" charset="-122"/>
-                <a:cs typeface="Cambria" pitchFamily="34" charset="-120"/>
-              </a:rPr>
-              <a:t>Why it matters</a:t>
-            </a:r>
-            <a:endParaRPr lang="en-US" sz="1600" dirty="0"/>
-          </a:p>
-        </p:txBody>
-      </p:sp>
-      <p:sp>
-        <p:nvSpPr>
-          <p:cNvPr id="30" name="Walk callout text"/>
-          <p:cNvSpPr txBox="1"/>
-          <p:nvPr/>
-        </p:nvSpPr>
-        <p:spPr>
-          <a:xfrm>
-            <a:off x="6949440" y="1783080"/>
-            <a:ext cx="1600200" cy="2377440"/>
-          </a:xfrm>
-          <a:prstGeom prst="rect">
-            <a:avLst/>
-          </a:prstGeom>
-          <a:noFill/>
-          <a:ln/>
-        </p:spPr>
-        <p:txBody>
-          <a:bodyPr wrap="square" lIns="0" tIns="0" rIns="0" bIns="0" rtlCol="0" anchor="t"/>
-          <a:lstStyle/>
-          <a:p>
-            <a:pPr indent="0" marL="0">
-              <a:buNone/>
-            </a:pPr>
-            <a:r>
-              <a:rPr lang="en-US" sz="1400" dirty="0">
-                <a:solidFill>
-                  <a:schemeClr val="bg2"/>
-                </a:solidFill>
-              </a:rPr>
-              <a:t>A single pass would have paid this claim. The Critic caught the gap, so a bad bill went to a person instead of out the door.</a:t>
-            </a:r>
-            <a:endParaRPr lang="en-US" sz="1400" dirty="0"/>
-          </a:p>
-        </p:txBody>
-      </p:sp>
-      <p:sp>
-        <p:nvSpPr>
-          <p:cNvPr id="31" name="Walk claim id"/>
-          <p:cNvSpPr txBox="1"/>
-          <p:nvPr/>
-        </p:nvSpPr>
-        <p:spPr>
-          <a:xfrm>
-            <a:off x="457200" y="4434840"/>
-            <a:ext cx="6035040" cy="274320"/>
-          </a:xfrm>
-          <a:prstGeom prst="rect">
-            <a:avLst/>
-          </a:prstGeom>
-          <a:noFill/>
-          <a:ln/>
-        </p:spPr>
-        <p:txBody>
-          <a:bodyPr wrap="square" lIns="0" tIns="0" rIns="0" bIns="0" rtlCol="0" anchor="t"/>
-          <a:lstStyle/>
-          <a:p>
-            <a:pPr indent="0" marL="0">
-              <a:buNone/>
-            </a:pPr>
-            <a:r>
               <a:rPr lang="en-US" sz="1200" i="1" dirty="0">
                 <a:solidFill>
                   <a:schemeClr val="tx2"/>
                 </a:solidFill>
               </a:rPr>
-              <a:t>Claim CLM-26-0019, in the demo</a:t>
+              <a:t>Live app, claim CLM-26-0019. Each outcome comes with its reason and the policy rule behind it.</a:t>
             </a:r>
             <a:endParaRPr lang="en-US" sz="1200" dirty="0"/>
           </a:p>
@@ -8298,26 +8162,78 @@
                   <a:schemeClr val="tx1"/>
                 </a:solidFill>
               </a:rPr>
-              <a:t>Live demo: four claims, four behaviours</a:t>
+              <a:t>Tested on held-out claims with added noise</a:t>
             </a:r>
             <a:endParaRPr lang="en-US" sz="2800" dirty="0"/>
           </a:p>
         </p:txBody>
       </p:sp>
-      <p:sp>
-        <p:nvSpPr>
-          <p:cNvPr id="3" name="Demo card 1"/>
+      <p:graphicFrame>
+        <p:nvGraphicFramePr>
+          <p:cNvPr id="3" name="Chart 0" descr=""/>
+          <p:cNvGraphicFramePr/>
+          <p:nvPr/>
+        </p:nvGraphicFramePr>
+        <p:xfrm>
+          <a:off x="365760" y="1097280"/>
+          <a:ext cx="5394960" cy="3246120"/>
+        </p:xfrm>
+        <a:graphic xmlns:a="http://schemas.openxmlformats.org/drawingml/2006/main">
+          <a:graphicData uri="http://schemas.openxmlformats.org/drawingml/2006/chart">
+            <c:chart xmlns:c="http://schemas.openxmlformats.org/drawingml/2006/chart" r:id="rId1"/>
+          </a:graphicData>
+        </a:graphic>
+      </p:graphicFrame>
+      <p:sp>
+        <p:nvSpPr>
+          <p:cNvPr id="4" name="Chart note"/>
+          <p:cNvSpPr txBox="1"/>
+          <p:nvPr/>
+        </p:nvSpPr>
+        <p:spPr>
+          <a:xfrm>
+            <a:off x="457200" y="4434840"/>
+            <a:ext cx="5303520" cy="228600"/>
+          </a:xfrm>
+          <a:prstGeom prst="rect">
+            <a:avLst/>
+          </a:prstGeom>
+          <a:noFill/>
+          <a:ln/>
+        </p:spPr>
+        <p:txBody>
+          <a:bodyPr wrap="square" lIns="0" tIns="0" rIns="0" bIns="0" rtlCol="0" anchor="t"/>
+          <a:lstStyle/>
+          <a:p>
+            <a:pPr indent="0" marL="0">
+              <a:buNone/>
+            </a:pPr>
+            <a:r>
+              <a:rPr lang="en-US" sz="1100" i="1" dirty="0">
+                <a:solidFill>
+                  <a:schemeClr val="tx2"/>
+                </a:solidFill>
+              </a:rPr>
+              <a:t>UNSEEN rows were added after the fixes, so they have no first-run bar.</a:t>
+            </a:r>
+            <a:endParaRPr lang="en-US" sz="1100" dirty="0"/>
+          </a:p>
+        </p:txBody>
+      </p:sp>
+      <p:sp>
+        <p:nvSpPr>
+          <p:cNvPr id="5" name="Result card 1"/>
           <p:cNvSpPr/>
           <p:nvPr/>
         </p:nvSpPr>
         <p:spPr>
           <a:xfrm>
-            <a:off x="457200" y="1234440"/>
-            <a:ext cx="4023360" cy="1463040"/>
+            <a:off x="5989320" y="1188720"/>
+            <a:ext cx="2697480" cy="1024128"/>
           </a:xfrm>
           <a:prstGeom prst="roundRect">
             <a:avLst>
-              <a:gd name="adj" fmla="val 5000"/>
+              <a:gd name="adj" fmla="val 7143"/>
             </a:avLst>
           </a:prstGeom>
           <a:solidFill>
@@ -8328,184 +8244,93 @@
       </p:sp>
       <p:sp>
         <p:nvSpPr>
-          <p:cNvPr id="4" name="Demo id 1"/>
-          <p:cNvSpPr txBox="1"/>
-          <p:nvPr/>
-        </p:nvSpPr>
-        <p:spPr>
-          <a:xfrm>
-            <a:off x="640080" y="1371600"/>
-            <a:ext cx="2377440" cy="274320"/>
-          </a:xfrm>
-          <a:prstGeom prst="rect">
-            <a:avLst/>
-          </a:prstGeom>
-          <a:noFill/>
-          <a:ln/>
-        </p:spPr>
-        <p:txBody>
-          <a:bodyPr wrap="square" lIns="0" tIns="0" rIns="0" bIns="0" rtlCol="0" anchor="t"/>
+          <p:cNvPr id="6" name="Result number 1"/>
+          <p:cNvSpPr txBox="1"/>
+          <p:nvPr/>
+        </p:nvSpPr>
+        <p:spPr>
+          <a:xfrm>
+            <a:off x="6126480" y="1261872"/>
+            <a:ext cx="1188720" cy="877824"/>
+          </a:xfrm>
+          <a:prstGeom prst="rect">
+            <a:avLst/>
+          </a:prstGeom>
+          <a:noFill/>
+          <a:ln/>
+        </p:spPr>
+        <p:txBody>
+          <a:bodyPr wrap="square" lIns="0" tIns="0" rIns="0" bIns="0" rtlCol="0" anchor="ctr"/>
           <a:lstStyle/>
           <a:p>
             <a:pPr indent="0" marL="0">
               <a:buNone/>
             </a:pPr>
             <a:r>
-              <a:rPr lang="en-US" sz="1200" b="1" dirty="0">
-                <a:solidFill>
-                  <a:schemeClr val="tx2"/>
-                </a:solidFill>
-              </a:rPr>
-              <a:t>CLM-26-0001</a:t>
-            </a:r>
-            <a:endParaRPr lang="en-US" sz="1200" dirty="0"/>
-          </a:p>
-        </p:txBody>
-      </p:sp>
-      <p:sp>
-        <p:nvSpPr>
-          <p:cNvPr id="5" name="Demo outcome 1"/>
+              <a:rPr lang="en-US" sz="2600" b="1" dirty="0">
+                <a:solidFill>
+                  <a:schemeClr val="accent1"/>
+                </a:solidFill>
+                <a:latin typeface="Cambria" pitchFamily="34" charset="0"/>
+                <a:ea typeface="Cambria" pitchFamily="34" charset="-122"/>
+                <a:cs typeface="Cambria" pitchFamily="34" charset="-120"/>
+              </a:rPr>
+              <a:t>89/89</a:t>
+            </a:r>
+            <a:endParaRPr lang="en-US" sz="2600" dirty="0"/>
+          </a:p>
+        </p:txBody>
+      </p:sp>
+      <p:sp>
+        <p:nvSpPr>
+          <p:cNvPr id="7" name="Result caption 1"/>
+          <p:cNvSpPr txBox="1"/>
+          <p:nvPr/>
+        </p:nvSpPr>
+        <p:spPr>
+          <a:xfrm>
+            <a:off x="7315200" y="1261872"/>
+            <a:ext cx="1280160" cy="877824"/>
+          </a:xfrm>
+          <a:prstGeom prst="rect">
+            <a:avLst/>
+          </a:prstGeom>
+          <a:noFill/>
+          <a:ln/>
+        </p:spPr>
+        <p:txBody>
+          <a:bodyPr wrap="square" lIns="0" tIns="0" rIns="0" bIns="0" rtlCol="0" anchor="ctr"/>
+          <a:lstStyle/>
+          <a:p>
+            <a:pPr indent="0" marL="0">
+              <a:buNone/>
+            </a:pPr>
+            <a:r>
+              <a:rPr lang="en-US" sz="1100" dirty="0">
+                <a:solidFill>
+                  <a:schemeClr val="tx1"/>
+                </a:solidFill>
+              </a:rPr>
+              <a:t>main labelled set</a:t>
+            </a:r>
+            <a:endParaRPr lang="en-US" sz="1100" dirty="0"/>
+          </a:p>
+        </p:txBody>
+      </p:sp>
+      <p:sp>
+        <p:nvSpPr>
+          <p:cNvPr id="8" name="Result card 2"/>
           <p:cNvSpPr/>
           <p:nvPr/>
         </p:nvSpPr>
         <p:spPr>
           <a:xfrm>
-            <a:off x="3246120" y="1353312"/>
-            <a:ext cx="1051560" cy="292608"/>
+            <a:off x="5989320" y="2359152"/>
+            <a:ext cx="2697480" cy="1024128"/>
           </a:xfrm>
           <a:prstGeom prst="roundRect">
             <a:avLst>
-              <a:gd name="adj" fmla="val 50000"/>
-            </a:avLst>
-          </a:prstGeom>
-          <a:solidFill>
-            <a:schemeClr val="accent6"/>
-          </a:solidFill>
-          <a:ln/>
-        </p:spPr>
-      </p:sp>
-      <p:sp>
-        <p:nvSpPr>
-          <p:cNvPr id="6" name="Demo outcome label 1"/>
-          <p:cNvSpPr txBox="1"/>
-          <p:nvPr/>
-        </p:nvSpPr>
-        <p:spPr>
-          <a:xfrm>
-            <a:off x="3246120" y="1353312"/>
-            <a:ext cx="1051560" cy="292608"/>
-          </a:xfrm>
-          <a:prstGeom prst="rect">
-            <a:avLst/>
-          </a:prstGeom>
-          <a:noFill/>
-          <a:ln/>
-        </p:spPr>
-        <p:txBody>
-          <a:bodyPr wrap="square" lIns="0" tIns="0" rIns="0" bIns="0" rtlCol="0" anchor="ctr"/>
-          <a:lstStyle/>
-          <a:p>
-            <a:pPr algn="ctr" indent="0" marL="0">
-              <a:buNone/>
-            </a:pPr>
-            <a:r>
-              <a:rPr lang="en-US" sz="1100" b="1" dirty="0">
-                <a:solidFill>
-                  <a:schemeClr val="bg1"/>
-                </a:solidFill>
-              </a:rPr>
-              <a:t>PARTIAL</a:t>
-            </a:r>
-            <a:endParaRPr lang="en-US" sz="1100" dirty="0"/>
-          </a:p>
-        </p:txBody>
-      </p:sp>
-      <p:sp>
-        <p:nvSpPr>
-          <p:cNvPr id="7" name="Demo headline 1"/>
-          <p:cNvSpPr txBox="1"/>
-          <p:nvPr/>
-        </p:nvSpPr>
-        <p:spPr>
-          <a:xfrm>
-            <a:off x="640080" y="1737360"/>
-            <a:ext cx="3657600" cy="502920"/>
-          </a:xfrm>
-          <a:prstGeom prst="rect">
-            <a:avLst/>
-          </a:prstGeom>
-          <a:noFill/>
-          <a:ln/>
-        </p:spPr>
-        <p:txBody>
-          <a:bodyPr wrap="square" lIns="0" tIns="0" rIns="0" bIns="0" rtlCol="0" anchor="t"/>
-          <a:lstStyle/>
-          <a:p>
-            <a:pPr indent="0" marL="0">
-              <a:buNone/>
-            </a:pPr>
-            <a:r>
-              <a:rPr lang="en-US" sz="1600" b="1" dirty="0">
-                <a:solidFill>
-                  <a:schemeClr val="tx1"/>
-                </a:solidFill>
-              </a:rPr>
-              <a:t>Room rent above the plan cap</a:t>
-            </a:r>
-            <a:endParaRPr lang="en-US" sz="1600" dirty="0"/>
-          </a:p>
-        </p:txBody>
-      </p:sp>
-      <p:sp>
-        <p:nvSpPr>
-          <p:cNvPr id="8" name="Demo detail 1"/>
-          <p:cNvSpPr txBox="1"/>
-          <p:nvPr/>
-        </p:nvSpPr>
-        <p:spPr>
-          <a:xfrm>
-            <a:off x="640080" y="2240280"/>
-            <a:ext cx="3657600" cy="365760"/>
-          </a:xfrm>
-          <a:prstGeom prst="rect">
-            <a:avLst/>
-          </a:prstGeom>
-          <a:noFill/>
-          <a:ln/>
-        </p:spPr>
-        <p:txBody>
-          <a:bodyPr wrap="square" lIns="0" tIns="0" rIns="0" bIns="0" rtlCol="0" anchor="t"/>
-          <a:lstStyle/>
-          <a:p>
-            <a:pPr indent="0" marL="0">
-              <a:buNone/>
-            </a:pPr>
-            <a:r>
-              <a:rPr lang="en-US" sz="1300" dirty="0">
-                <a:solidFill>
-                  <a:schemeClr val="tx2"/>
-                </a:solidFill>
-              </a:rPr>
-              <a:t>Proportionate deduction, clause C6</a:t>
-            </a:r>
-            <a:endParaRPr lang="en-US" sz="1300" dirty="0"/>
-          </a:p>
-        </p:txBody>
-      </p:sp>
-      <p:sp>
-        <p:nvSpPr>
-          <p:cNvPr id="9" name="Demo card 2"/>
-          <p:cNvSpPr/>
-          <p:nvPr/>
-        </p:nvSpPr>
-        <p:spPr>
-          <a:xfrm>
-            <a:off x="4663440" y="1234440"/>
-            <a:ext cx="4023360" cy="1463040"/>
-          </a:xfrm>
-          <a:prstGeom prst="roundRect">
-            <a:avLst>
-              <a:gd name="adj" fmla="val 5000"/>
+              <a:gd name="adj" fmla="val 7143"/>
             </a:avLst>
           </a:prstGeom>
           <a:solidFill>
@@ -8516,184 +8341,93 @@
       </p:sp>
       <p:sp>
         <p:nvSpPr>
-          <p:cNvPr id="10" name="Demo id 2"/>
-          <p:cNvSpPr txBox="1"/>
-          <p:nvPr/>
-        </p:nvSpPr>
-        <p:spPr>
-          <a:xfrm>
-            <a:off x="4846320" y="1371600"/>
-            <a:ext cx="2377440" cy="274320"/>
-          </a:xfrm>
-          <a:prstGeom prst="rect">
-            <a:avLst/>
-          </a:prstGeom>
-          <a:noFill/>
-          <a:ln/>
-        </p:spPr>
-        <p:txBody>
-          <a:bodyPr wrap="square" lIns="0" tIns="0" rIns="0" bIns="0" rtlCol="0" anchor="t"/>
+          <p:cNvPr id="9" name="Result number 2"/>
+          <p:cNvSpPr txBox="1"/>
+          <p:nvPr/>
+        </p:nvSpPr>
+        <p:spPr>
+          <a:xfrm>
+            <a:off x="6126480" y="2432304"/>
+            <a:ext cx="1188720" cy="877824"/>
+          </a:xfrm>
+          <a:prstGeom prst="rect">
+            <a:avLst/>
+          </a:prstGeom>
+          <a:noFill/>
+          <a:ln/>
+        </p:spPr>
+        <p:txBody>
+          <a:bodyPr wrap="square" lIns="0" tIns="0" rIns="0" bIns="0" rtlCol="0" anchor="ctr"/>
           <a:lstStyle/>
           <a:p>
             <a:pPr indent="0" marL="0">
               <a:buNone/>
             </a:pPr>
             <a:r>
-              <a:rPr lang="en-US" sz="1200" b="1" dirty="0">
-                <a:solidFill>
-                  <a:schemeClr val="tx2"/>
-                </a:solidFill>
-              </a:rPr>
-              <a:t>CLM-26-0007</a:t>
-            </a:r>
-            <a:endParaRPr lang="en-US" sz="1200" dirty="0"/>
-          </a:p>
-        </p:txBody>
-      </p:sp>
-      <p:sp>
-        <p:nvSpPr>
-          <p:cNvPr id="11" name="Demo outcome 2"/>
+              <a:rPr lang="en-US" sz="2600" b="1" dirty="0">
+                <a:solidFill>
+                  <a:schemeClr val="accent1"/>
+                </a:solidFill>
+                <a:latin typeface="Cambria" pitchFamily="34" charset="0"/>
+                <a:ea typeface="Cambria" pitchFamily="34" charset="-122"/>
+                <a:cs typeface="Cambria" pitchFamily="34" charset="-120"/>
+              </a:rPr>
+              <a:t>23/23</a:t>
+            </a:r>
+            <a:endParaRPr lang="en-US" sz="2600" dirty="0"/>
+          </a:p>
+        </p:txBody>
+      </p:sp>
+      <p:sp>
+        <p:nvSpPr>
+          <p:cNvPr id="10" name="Result caption 2"/>
+          <p:cNvSpPr txBox="1"/>
+          <p:nvPr/>
+        </p:nvSpPr>
+        <p:spPr>
+          <a:xfrm>
+            <a:off x="7315200" y="2432304"/>
+            <a:ext cx="1280160" cy="877824"/>
+          </a:xfrm>
+          <a:prstGeom prst="rect">
+            <a:avLst/>
+          </a:prstGeom>
+          <a:noFill/>
+          <a:ln/>
+        </p:spPr>
+        <p:txBody>
+          <a:bodyPr wrap="square" lIns="0" tIns="0" rIns="0" bIns="0" rtlCol="0" anchor="ctr"/>
+          <a:lstStyle/>
+          <a:p>
+            <a:pPr indent="0" marL="0">
+              <a:buNone/>
+            </a:pPr>
+            <a:r>
+              <a:rPr lang="en-US" sz="1100" dirty="0">
+                <a:solidFill>
+                  <a:schemeClr val="tx1"/>
+                </a:solidFill>
+              </a:rPr>
+              <a:t>boundary cases, e.g. 29 vs 30 days</a:t>
+            </a:r>
+            <a:endParaRPr lang="en-US" sz="1100" dirty="0"/>
+          </a:p>
+        </p:txBody>
+      </p:sp>
+      <p:sp>
+        <p:nvSpPr>
+          <p:cNvPr id="11" name="Result card 3"/>
           <p:cNvSpPr/>
           <p:nvPr/>
         </p:nvSpPr>
         <p:spPr>
           <a:xfrm>
-            <a:off x="7452360" y="1353312"/>
-            <a:ext cx="1051560" cy="292608"/>
+            <a:off x="5989320" y="3529584"/>
+            <a:ext cx="2697480" cy="1024128"/>
           </a:xfrm>
           <a:prstGeom prst="roundRect">
             <a:avLst>
-              <a:gd name="adj" fmla="val 50000"/>
-            </a:avLst>
-          </a:prstGeom>
-          <a:solidFill>
-            <a:schemeClr val="accent5"/>
-          </a:solidFill>
-          <a:ln/>
-        </p:spPr>
-      </p:sp>
-      <p:sp>
-        <p:nvSpPr>
-          <p:cNvPr id="12" name="Demo outcome label 2"/>
-          <p:cNvSpPr txBox="1"/>
-          <p:nvPr/>
-        </p:nvSpPr>
-        <p:spPr>
-          <a:xfrm>
-            <a:off x="7452360" y="1353312"/>
-            <a:ext cx="1051560" cy="292608"/>
-          </a:xfrm>
-          <a:prstGeom prst="rect">
-            <a:avLst/>
-          </a:prstGeom>
-          <a:noFill/>
-          <a:ln/>
-        </p:spPr>
-        <p:txBody>
-          <a:bodyPr wrap="square" lIns="0" tIns="0" rIns="0" bIns="0" rtlCol="0" anchor="ctr"/>
-          <a:lstStyle/>
-          <a:p>
-            <a:pPr algn="ctr" indent="0" marL="0">
-              <a:buNone/>
-            </a:pPr>
-            <a:r>
-              <a:rPr lang="en-US" sz="1100" b="1" dirty="0">
-                <a:solidFill>
-                  <a:schemeClr val="bg1"/>
-                </a:solidFill>
-              </a:rPr>
-              <a:t>REJECT</a:t>
-            </a:r>
-            <a:endParaRPr lang="en-US" sz="1100" dirty="0"/>
-          </a:p>
-        </p:txBody>
-      </p:sp>
-      <p:sp>
-        <p:nvSpPr>
-          <p:cNvPr id="13" name="Demo headline 2"/>
-          <p:cNvSpPr txBox="1"/>
-          <p:nvPr/>
-        </p:nvSpPr>
-        <p:spPr>
-          <a:xfrm>
-            <a:off x="4846320" y="1737360"/>
-            <a:ext cx="3657600" cy="502920"/>
-          </a:xfrm>
-          <a:prstGeom prst="rect">
-            <a:avLst/>
-          </a:prstGeom>
-          <a:noFill/>
-          <a:ln/>
-        </p:spPr>
-        <p:txBody>
-          <a:bodyPr wrap="square" lIns="0" tIns="0" rIns="0" bIns="0" rtlCol="0" anchor="t"/>
-          <a:lstStyle/>
-          <a:p>
-            <a:pPr indent="0" marL="0">
-              <a:buNone/>
-            </a:pPr>
-            <a:r>
-              <a:rPr lang="en-US" sz="1600" b="1" dirty="0">
-                <a:solidFill>
-                  <a:schemeClr val="tx1"/>
-                </a:solidFill>
-              </a:rPr>
-              <a:t>Pre-existing condition inside 24 months</a:t>
-            </a:r>
-            <a:endParaRPr lang="en-US" sz="1600" dirty="0"/>
-          </a:p>
-        </p:txBody>
-      </p:sp>
-      <p:sp>
-        <p:nvSpPr>
-          <p:cNvPr id="14" name="Demo detail 2"/>
-          <p:cNvSpPr txBox="1"/>
-          <p:nvPr/>
-        </p:nvSpPr>
-        <p:spPr>
-          <a:xfrm>
-            <a:off x="4846320" y="2240280"/>
-            <a:ext cx="3657600" cy="365760"/>
-          </a:xfrm>
-          <a:prstGeom prst="rect">
-            <a:avLst/>
-          </a:prstGeom>
-          <a:noFill/>
-          <a:ln/>
-        </p:spPr>
-        <p:txBody>
-          <a:bodyPr wrap="square" lIns="0" tIns="0" rIns="0" bIns="0" rtlCol="0" anchor="t"/>
-          <a:lstStyle/>
-          <a:p>
-            <a:pPr indent="0" marL="0">
-              <a:buNone/>
-            </a:pPr>
-            <a:r>
-              <a:rPr lang="en-US" sz="1300" dirty="0">
-                <a:solidFill>
-                  <a:schemeClr val="tx2"/>
-                </a:solidFill>
-              </a:rPr>
-              <a:t>Early exit, remaining checks skipped, clause C3</a:t>
-            </a:r>
-            <a:endParaRPr lang="en-US" sz="1300" dirty="0"/>
-          </a:p>
-        </p:txBody>
-      </p:sp>
-      <p:sp>
-        <p:nvSpPr>
-          <p:cNvPr id="15" name="Demo card 3"/>
-          <p:cNvSpPr/>
-          <p:nvPr/>
-        </p:nvSpPr>
-        <p:spPr>
-          <a:xfrm>
-            <a:off x="457200" y="2880360"/>
-            <a:ext cx="4023360" cy="1463040"/>
-          </a:xfrm>
-          <a:prstGeom prst="roundRect">
-            <a:avLst>
-              <a:gd name="adj" fmla="val 5000"/>
+              <a:gd name="adj" fmla="val 7143"/>
             </a:avLst>
           </a:prstGeom>
           <a:solidFill>
@@ -8704,72 +8438,53 @@
       </p:sp>
       <p:sp>
         <p:nvSpPr>
-          <p:cNvPr id="16" name="Demo id 3"/>
-          <p:cNvSpPr txBox="1"/>
-          <p:nvPr/>
-        </p:nvSpPr>
-        <p:spPr>
-          <a:xfrm>
-            <a:off x="640080" y="3017520"/>
-            <a:ext cx="2377440" cy="274320"/>
-          </a:xfrm>
-          <a:prstGeom prst="rect">
-            <a:avLst/>
-          </a:prstGeom>
-          <a:noFill/>
-          <a:ln/>
-        </p:spPr>
-        <p:txBody>
-          <a:bodyPr wrap="square" lIns="0" tIns="0" rIns="0" bIns="0" rtlCol="0" anchor="t"/>
+          <p:cNvPr id="12" name="Result number 3"/>
+          <p:cNvSpPr txBox="1"/>
+          <p:nvPr/>
+        </p:nvSpPr>
+        <p:spPr>
+          <a:xfrm>
+            <a:off x="6126480" y="3602736"/>
+            <a:ext cx="1188720" cy="877824"/>
+          </a:xfrm>
+          <a:prstGeom prst="rect">
+            <a:avLst/>
+          </a:prstGeom>
+          <a:noFill/>
+          <a:ln/>
+        </p:spPr>
+        <p:txBody>
+          <a:bodyPr wrap="square" lIns="0" tIns="0" rIns="0" bIns="0" rtlCol="0" anchor="ctr"/>
           <a:lstStyle/>
           <a:p>
             <a:pPr indent="0" marL="0">
               <a:buNone/>
             </a:pPr>
             <a:r>
-              <a:rPr lang="en-US" sz="1200" b="1" dirty="0">
-                <a:solidFill>
-                  <a:schemeClr val="tx2"/>
-                </a:solidFill>
-              </a:rPr>
-              <a:t>CLM-26-0019</a:t>
-            </a:r>
-            <a:endParaRPr lang="en-US" sz="1200" dirty="0"/>
-          </a:p>
-        </p:txBody>
-      </p:sp>
-      <p:sp>
-        <p:nvSpPr>
-          <p:cNvPr id="17" name="Demo outcome 3"/>
-          <p:cNvSpPr/>
-          <p:nvPr/>
-        </p:nvSpPr>
-        <p:spPr>
-          <a:xfrm>
-            <a:off x="3246120" y="2999232"/>
-            <a:ext cx="1051560" cy="292608"/>
-          </a:xfrm>
-          <a:prstGeom prst="roundRect">
-            <a:avLst>
-              <a:gd name="adj" fmla="val 50000"/>
-            </a:avLst>
-          </a:prstGeom>
-          <a:solidFill>
-            <a:schemeClr val="accent2"/>
-          </a:solidFill>
-          <a:ln/>
-        </p:spPr>
-      </p:sp>
-      <p:sp>
-        <p:nvSpPr>
-          <p:cNvPr id="18" name="Demo outcome label 3"/>
-          <p:cNvSpPr txBox="1"/>
-          <p:nvPr/>
-        </p:nvSpPr>
-        <p:spPr>
-          <a:xfrm>
-            <a:off x="3246120" y="2999232"/>
-            <a:ext cx="1051560" cy="292608"/>
+              <a:rPr lang="en-US" sz="2600" b="1" dirty="0">
+                <a:solidFill>
+                  <a:schemeClr val="accent2"/>
+                </a:solidFill>
+                <a:latin typeface="Cambria" pitchFamily="34" charset="0"/>
+                <a:ea typeface="Cambria" pitchFamily="34" charset="-122"/>
+                <a:cs typeface="Cambria" pitchFamily="34" charset="-120"/>
+              </a:rPr>
+              <a:t>94.8%</a:t>
+            </a:r>
+            <a:endParaRPr lang="en-US" sz="2600" dirty="0"/>
+          </a:p>
+        </p:txBody>
+      </p:sp>
+      <p:sp>
+        <p:nvSpPr>
+          <p:cNvPr id="13" name="Result caption 3"/>
+          <p:cNvSpPr txBox="1"/>
+          <p:nvPr/>
+        </p:nvSpPr>
+        <p:spPr>
+          <a:xfrm>
+            <a:off x="7315200" y="3602736"/>
+            <a:ext cx="1280160" cy="877824"/>
           </a:xfrm>
           <a:prstGeom prst="rect">
             <a:avLst/>
@@ -8781,278 +8496,18 @@
           <a:bodyPr wrap="square" lIns="0" tIns="0" rIns="0" bIns="0" rtlCol="0" anchor="ctr"/>
           <a:lstStyle/>
           <a:p>
-            <a:pPr algn="ctr" indent="0" marL="0">
-              <a:buNone/>
-            </a:pPr>
-            <a:r>
-              <a:rPr lang="en-US" sz="1100" b="1" dirty="0">
-                <a:solidFill>
-                  <a:schemeClr val="bg1"/>
-                </a:solidFill>
-              </a:rPr>
-              <a:t>ESCALATE</a:t>
+            <a:pPr indent="0" marL="0">
+              <a:buNone/>
+            </a:pPr>
+            <a:r>
+              <a:rPr lang="en-US" sz="1100" dirty="0">
+                <a:solidFill>
+                  <a:schemeClr val="tx1"/>
+                </a:solidFill>
+              </a:rPr>
+              <a:t>on unseen abbreviations, 23 of 240 risky claims wrongly paid</a:t>
             </a:r>
             <a:endParaRPr lang="en-US" sz="1100" dirty="0"/>
-          </a:p>
-        </p:txBody>
-      </p:sp>
-      <p:sp>
-        <p:nvSpPr>
-          <p:cNvPr id="19" name="Demo headline 3"/>
-          <p:cNvSpPr txBox="1"/>
-          <p:nvPr/>
-        </p:nvSpPr>
-        <p:spPr>
-          <a:xfrm>
-            <a:off x="640080" y="3383280"/>
-            <a:ext cx="3657600" cy="502920"/>
-          </a:xfrm>
-          <a:prstGeom prst="rect">
-            <a:avLst/>
-          </a:prstGeom>
-          <a:noFill/>
-          <a:ln/>
-        </p:spPr>
-        <p:txBody>
-          <a:bodyPr wrap="square" lIns="0" tIns="0" rIns="0" bIns="0" rtlCol="0" anchor="t"/>
-          <a:lstStyle/>
-          <a:p>
-            <a:pPr indent="0" marL="0">
-              <a:buNone/>
-            </a:pPr>
-            <a:r>
-              <a:rPr lang="en-US" sz="1600" b="1" dirty="0">
-                <a:solidFill>
-                  <a:schemeClr val="tx1"/>
-                </a:solidFill>
-              </a:rPr>
-              <a:t>Lean plan misses an inflated bill</a:t>
-            </a:r>
-            <a:endParaRPr lang="en-US" sz="1600" dirty="0"/>
-          </a:p>
-        </p:txBody>
-      </p:sp>
-      <p:sp>
-        <p:nvSpPr>
-          <p:cNvPr id="20" name="Demo detail 3"/>
-          <p:cNvSpPr txBox="1"/>
-          <p:nvPr/>
-        </p:nvSpPr>
-        <p:spPr>
-          <a:xfrm>
-            <a:off x="640080" y="3886200"/>
-            <a:ext cx="3657600" cy="365760"/>
-          </a:xfrm>
-          <a:prstGeom prst="rect">
-            <a:avLst/>
-          </a:prstGeom>
-          <a:noFill/>
-          <a:ln/>
-        </p:spPr>
-        <p:txBody>
-          <a:bodyPr wrap="square" lIns="0" tIns="0" rIns="0" bIns="0" rtlCol="0" anchor="t"/>
-          <a:lstStyle/>
-          <a:p>
-            <a:pPr indent="0" marL="0">
-              <a:buNone/>
-            </a:pPr>
-            <a:r>
-              <a:rPr lang="en-US" sz="1300" dirty="0">
-                <a:solidFill>
-                  <a:schemeClr val="tx2"/>
-                </a:solidFill>
-              </a:rPr>
-              <a:t>Critic sends it back, fraud score, human review</a:t>
-            </a:r>
-            <a:endParaRPr lang="en-US" sz="1300" dirty="0"/>
-          </a:p>
-        </p:txBody>
-      </p:sp>
-      <p:sp>
-        <p:nvSpPr>
-          <p:cNvPr id="21" name="Demo card 4"/>
-          <p:cNvSpPr/>
-          <p:nvPr/>
-        </p:nvSpPr>
-        <p:spPr>
-          <a:xfrm>
-            <a:off x="4663440" y="2880360"/>
-            <a:ext cx="4023360" cy="1463040"/>
-          </a:xfrm>
-          <a:prstGeom prst="roundRect">
-            <a:avLst>
-              <a:gd name="adj" fmla="val 5000"/>
-            </a:avLst>
-          </a:prstGeom>
-          <a:solidFill>
-            <a:schemeClr val="bg2"/>
-          </a:solidFill>
-          <a:ln/>
-        </p:spPr>
-      </p:sp>
-      <p:sp>
-        <p:nvSpPr>
-          <p:cNvPr id="22" name="Demo id 4"/>
-          <p:cNvSpPr txBox="1"/>
-          <p:nvPr/>
-        </p:nvSpPr>
-        <p:spPr>
-          <a:xfrm>
-            <a:off x="4846320" y="3017520"/>
-            <a:ext cx="2377440" cy="274320"/>
-          </a:xfrm>
-          <a:prstGeom prst="rect">
-            <a:avLst/>
-          </a:prstGeom>
-          <a:noFill/>
-          <a:ln/>
-        </p:spPr>
-        <p:txBody>
-          <a:bodyPr wrap="square" lIns="0" tIns="0" rIns="0" bIns="0" rtlCol="0" anchor="t"/>
-          <a:lstStyle/>
-          <a:p>
-            <a:pPr indent="0" marL="0">
-              <a:buNone/>
-            </a:pPr>
-            <a:r>
-              <a:rPr lang="en-US" sz="1200" b="1" dirty="0">
-                <a:solidFill>
-                  <a:schemeClr val="tx2"/>
-                </a:solidFill>
-              </a:rPr>
-              <a:t>CLM-26-0003 + fault</a:t>
-            </a:r>
-            <a:endParaRPr lang="en-US" sz="1200" dirty="0"/>
-          </a:p>
-        </p:txBody>
-      </p:sp>
-      <p:sp>
-        <p:nvSpPr>
-          <p:cNvPr id="23" name="Demo outcome 4"/>
-          <p:cNvSpPr/>
-          <p:nvPr/>
-        </p:nvSpPr>
-        <p:spPr>
-          <a:xfrm>
-            <a:off x="7452360" y="2999232"/>
-            <a:ext cx="1051560" cy="292608"/>
-          </a:xfrm>
-          <a:prstGeom prst="roundRect">
-            <a:avLst>
-              <a:gd name="adj" fmla="val 50000"/>
-            </a:avLst>
-          </a:prstGeom>
-          <a:solidFill>
-            <a:schemeClr val="accent4"/>
-          </a:solidFill>
-          <a:ln/>
-        </p:spPr>
-      </p:sp>
-      <p:sp>
-        <p:nvSpPr>
-          <p:cNvPr id="24" name="Demo outcome label 4"/>
-          <p:cNvSpPr txBox="1"/>
-          <p:nvPr/>
-        </p:nvSpPr>
-        <p:spPr>
-          <a:xfrm>
-            <a:off x="7452360" y="2999232"/>
-            <a:ext cx="1051560" cy="292608"/>
-          </a:xfrm>
-          <a:prstGeom prst="rect">
-            <a:avLst/>
-          </a:prstGeom>
-          <a:noFill/>
-          <a:ln/>
-        </p:spPr>
-        <p:txBody>
-          <a:bodyPr wrap="square" lIns="0" tIns="0" rIns="0" bIns="0" rtlCol="0" anchor="ctr"/>
-          <a:lstStyle/>
-          <a:p>
-            <a:pPr algn="ctr" indent="0" marL="0">
-              <a:buNone/>
-            </a:pPr>
-            <a:r>
-              <a:rPr lang="en-US" sz="1100" b="1" dirty="0">
-                <a:solidFill>
-                  <a:schemeClr val="bg1"/>
-                </a:solidFill>
-              </a:rPr>
-              <a:t>APPROVE</a:t>
-            </a:r>
-            <a:endParaRPr lang="en-US" sz="1100" dirty="0"/>
-          </a:p>
-        </p:txBody>
-      </p:sp>
-      <p:sp>
-        <p:nvSpPr>
-          <p:cNvPr id="25" name="Demo headline 4"/>
-          <p:cNvSpPr txBox="1"/>
-          <p:nvPr/>
-        </p:nvSpPr>
-        <p:spPr>
-          <a:xfrm>
-            <a:off x="4846320" y="3383280"/>
-            <a:ext cx="3657600" cy="502920"/>
-          </a:xfrm>
-          <a:prstGeom prst="rect">
-            <a:avLst/>
-          </a:prstGeom>
-          <a:noFill/>
-          <a:ln/>
-        </p:spPr>
-        <p:txBody>
-          <a:bodyPr wrap="square" lIns="0" tIns="0" rIns="0" bIns="0" rtlCol="0" anchor="t"/>
-          <a:lstStyle/>
-          <a:p>
-            <a:pPr indent="0" marL="0">
-              <a:buNone/>
-            </a:pPr>
-            <a:r>
-              <a:rPr lang="en-US" sz="1600" b="1" dirty="0">
-                <a:solidFill>
-                  <a:schemeClr val="tx1"/>
-                </a:solidFill>
-              </a:rPr>
-              <a:t>Executor overpays by 15% on purpose</a:t>
-            </a:r>
-            <a:endParaRPr lang="en-US" sz="1600" dirty="0"/>
-          </a:p>
-        </p:txBody>
-      </p:sp>
-      <p:sp>
-        <p:nvSpPr>
-          <p:cNvPr id="26" name="Demo detail 4"/>
-          <p:cNvSpPr txBox="1"/>
-          <p:nvPr/>
-        </p:nvSpPr>
-        <p:spPr>
-          <a:xfrm>
-            <a:off x="4846320" y="3886200"/>
-            <a:ext cx="3657600" cy="365760"/>
-          </a:xfrm>
-          <a:prstGeom prst="rect">
-            <a:avLst/>
-          </a:prstGeom>
-          <a:noFill/>
-          <a:ln/>
-        </p:spPr>
-        <p:txBody>
-          <a:bodyPr wrap="square" lIns="0" tIns="0" rIns="0" bIns="0" rtlCol="0" anchor="t"/>
-          <a:lstStyle/>
-          <a:p>
-            <a:pPr indent="0" marL="0">
-              <a:buNone/>
-            </a:pPr>
-            <a:r>
-              <a:rPr lang="en-US" sz="1300" dirty="0">
-                <a:solidFill>
-                  <a:schemeClr val="tx2"/>
-                </a:solidFill>
-              </a:rPr>
-              <a:t>Critic catches it, recomputes, passes</a:t>
-            </a:r>
-            <a:endParaRPr lang="en-US" sz="1300" dirty="0"/>
           </a:p>
         </p:txBody>
       </p:sp>
@@ -9158,78 +8613,26 @@
                   <a:schemeClr val="tx1"/>
                 </a:solidFill>
               </a:rPr>
-              <a:t>Tested on held-out claims with added noise</a:t>
+              <a:t>Limitations and what comes next</a:t>
             </a:r>
             <a:endParaRPr lang="en-US" sz="2800" dirty="0"/>
           </a:p>
         </p:txBody>
       </p:sp>
-      <p:graphicFrame>
-        <p:nvGraphicFramePr>
-          <p:cNvPr id="3" name="Chart 0" descr=""/>
-          <p:cNvGraphicFramePr/>
-          <p:nvPr/>
-        </p:nvGraphicFramePr>
-        <p:xfrm>
-          <a:off x="365760" y="1097280"/>
-          <a:ext cx="5394960" cy="3246120"/>
-        </p:xfrm>
-        <a:graphic xmlns:a="http://schemas.openxmlformats.org/drawingml/2006/main">
-          <a:graphicData uri="http://schemas.openxmlformats.org/drawingml/2006/chart">
-            <c:chart xmlns:c="http://schemas.openxmlformats.org/drawingml/2006/chart" r:id="rId1"/>
-          </a:graphicData>
-        </a:graphic>
-      </p:graphicFrame>
-      <p:sp>
-        <p:nvSpPr>
-          <p:cNvPr id="4" name="Chart note"/>
-          <p:cNvSpPr txBox="1"/>
-          <p:nvPr/>
-        </p:nvSpPr>
-        <p:spPr>
-          <a:xfrm>
-            <a:off x="457200" y="4434840"/>
-            <a:ext cx="5303520" cy="228600"/>
-          </a:xfrm>
-          <a:prstGeom prst="rect">
-            <a:avLst/>
-          </a:prstGeom>
-          <a:noFill/>
-          <a:ln/>
-        </p:spPr>
-        <p:txBody>
-          <a:bodyPr wrap="square" lIns="0" tIns="0" rIns="0" bIns="0" rtlCol="0" anchor="t"/>
-          <a:lstStyle/>
-          <a:p>
-            <a:pPr indent="0" marL="0">
-              <a:buNone/>
-            </a:pPr>
-            <a:r>
-              <a:rPr lang="en-US" sz="1100" i="1" dirty="0">
-                <a:solidFill>
-                  <a:schemeClr val="tx2"/>
-                </a:solidFill>
-              </a:rPr>
-              <a:t>UNSEEN rows were added after the fixes, so they have no first-run bar.</a:t>
-            </a:r>
-            <a:endParaRPr lang="en-US" sz="1100" dirty="0"/>
-          </a:p>
-        </p:txBody>
-      </p:sp>
-      <p:sp>
-        <p:nvSpPr>
-          <p:cNvPr id="5" name="Result card 1"/>
+      <p:sp>
+        <p:nvSpPr>
+          <p:cNvPr id="3" name="Limits card"/>
           <p:cNvSpPr/>
           <p:nvPr/>
         </p:nvSpPr>
         <p:spPr>
           <a:xfrm>
-            <a:off x="5989320" y="1188720"/>
-            <a:ext cx="2697480" cy="1024128"/>
+            <a:off x="457200" y="1234440"/>
+            <a:ext cx="3977640" cy="3246120"/>
           </a:xfrm>
           <a:prstGeom prst="roundRect">
             <a:avLst>
-              <a:gd name="adj" fmla="val 7143"/>
+              <a:gd name="adj" fmla="val 2254"/>
             </a:avLst>
           </a:prstGeom>
           <a:solidFill>
@@ -9240,93 +8643,151 @@
       </p:sp>
       <p:sp>
         <p:nvSpPr>
-          <p:cNvPr id="6" name="Result number 1"/>
-          <p:cNvSpPr txBox="1"/>
-          <p:nvPr/>
-        </p:nvSpPr>
-        <p:spPr>
-          <a:xfrm>
-            <a:off x="6126480" y="1261872"/>
-            <a:ext cx="1188720" cy="877824"/>
-          </a:xfrm>
-          <a:prstGeom prst="rect">
-            <a:avLst/>
-          </a:prstGeom>
-          <a:noFill/>
-          <a:ln/>
-        </p:spPr>
-        <p:txBody>
-          <a:bodyPr wrap="square" lIns="0" tIns="0" rIns="0" bIns="0" rtlCol="0" anchor="ctr"/>
+          <p:cNvPr id="4" name="Limits heading"/>
+          <p:cNvSpPr txBox="1"/>
+          <p:nvPr/>
+        </p:nvSpPr>
+        <p:spPr>
+          <a:xfrm>
+            <a:off x="685800" y="1371600"/>
+            <a:ext cx="3566160" cy="365760"/>
+          </a:xfrm>
+          <a:prstGeom prst="rect">
+            <a:avLst/>
+          </a:prstGeom>
+          <a:noFill/>
+          <a:ln/>
+        </p:spPr>
+        <p:txBody>
+          <a:bodyPr wrap="square" lIns="0" tIns="0" rIns="0" bIns="0" rtlCol="0" anchor="t"/>
           <a:lstStyle/>
           <a:p>
             <a:pPr indent="0" marL="0">
               <a:buNone/>
             </a:pPr>
             <a:r>
-              <a:rPr lang="en-US" sz="2600" b="1" dirty="0">
-                <a:solidFill>
-                  <a:schemeClr val="accent1"/>
+              <a:rPr lang="en-US" sz="2000" b="1" dirty="0">
+                <a:solidFill>
+                  <a:schemeClr val="accent2"/>
                 </a:solidFill>
                 <a:latin typeface="Cambria" pitchFamily="34" charset="0"/>
                 <a:ea typeface="Cambria" pitchFamily="34" charset="-122"/>
                 <a:cs typeface="Cambria" pitchFamily="34" charset="-120"/>
               </a:rPr>
-              <a:t>89/89</a:t>
-            </a:r>
-            <a:endParaRPr lang="en-US" sz="2600" dirty="0"/>
-          </a:p>
-        </p:txBody>
-      </p:sp>
-      <p:sp>
-        <p:nvSpPr>
-          <p:cNvPr id="7" name="Result caption 1"/>
-          <p:cNvSpPr txBox="1"/>
-          <p:nvPr/>
-        </p:nvSpPr>
-        <p:spPr>
-          <a:xfrm>
-            <a:off x="7315200" y="1261872"/>
-            <a:ext cx="1280160" cy="877824"/>
-          </a:xfrm>
-          <a:prstGeom prst="rect">
-            <a:avLst/>
-          </a:prstGeom>
-          <a:noFill/>
-          <a:ln/>
-        </p:spPr>
-        <p:txBody>
-          <a:bodyPr wrap="square" lIns="0" tIns="0" rIns="0" bIns="0" rtlCol="0" anchor="ctr"/>
-          <a:lstStyle/>
-          <a:p>
-            <a:pPr indent="0" marL="0">
-              <a:buNone/>
-            </a:pPr>
-            <a:r>
-              <a:rPr lang="en-US" sz="1100" dirty="0">
+              <a:t>Limitations</a:t>
+            </a:r>
+            <a:endParaRPr lang="en-US" sz="2000" dirty="0"/>
+          </a:p>
+        </p:txBody>
+      </p:sp>
+      <p:sp>
+        <p:nvSpPr>
+          <p:cNvPr id="5" name="Limits list"/>
+          <p:cNvSpPr txBox="1"/>
+          <p:nvPr/>
+        </p:nvSpPr>
+        <p:spPr>
+          <a:xfrm>
+            <a:off x="685800" y="1828800"/>
+            <a:ext cx="3566160" cy="2560320"/>
+          </a:xfrm>
+          <a:prstGeom prst="rect">
+            <a:avLst/>
+          </a:prstGeom>
+          <a:noFill/>
+          <a:ln/>
+        </p:spPr>
+        <p:txBody>
+          <a:bodyPr wrap="square" lIns="0" tIns="0" rIns="0" bIns="0" rtlCol="0" anchor="t"/>
+          <a:lstStyle/>
+          <a:p>
+            <a:pPr marL="342900" indent="-342900">
+              <a:spcAft>
+                <a:spcPts val="700"/>
+              </a:spcAft>
+              <a:buSzPct val="100000"/>
+              <a:buChar char="•"/>
+            </a:pPr>
+            <a:r>
+              <a:rPr lang="en-US" sz="1400" dirty="0">
                 <a:solidFill>
                   <a:schemeClr val="tx1"/>
                 </a:solidFill>
               </a:rPr>
-              <a:t>main labelled set</a:t>
-            </a:r>
-            <a:endParaRPr lang="en-US" sz="1100" dirty="0"/>
-          </a:p>
-        </p:txBody>
-      </p:sp>
-      <p:sp>
-        <p:nvSpPr>
-          <p:cNvPr id="8" name="Result card 2"/>
+              <a:t>All data is synthetic and the summaries are templated</a:t>
+            </a:r>
+            <a:endParaRPr lang="en-US" sz="1400" dirty="0"/>
+          </a:p>
+          <a:p>
+            <a:pPr marL="342900" indent="-342900">
+              <a:spcAft>
+                <a:spcPts val="700"/>
+              </a:spcAft>
+              <a:buSzPct val="100000"/>
+              <a:buChar char="•"/>
+            </a:pPr>
+            <a:r>
+              <a:rPr lang="en-US" sz="1400" dirty="0">
+                <a:solidFill>
+                  <a:schemeClr val="tx1"/>
+                </a:solidFill>
+              </a:rPr>
+              <a:t>Clinical abbreviations can hide a pre-existing condition</a:t>
+            </a:r>
+            <a:endParaRPr lang="en-US" sz="1400" dirty="0"/>
+          </a:p>
+          <a:p>
+            <a:pPr marL="342900" indent="-342900">
+              <a:spcAft>
+                <a:spcPts val="700"/>
+              </a:spcAft>
+              <a:buSzPct val="100000"/>
+              <a:buChar char="•"/>
+            </a:pPr>
+            <a:r>
+              <a:rPr lang="en-US" sz="1400" dirty="0">
+                <a:solidFill>
+                  <a:schemeClr val="tx1"/>
+                </a:solidFill>
+              </a:rPr>
+              <a:t>Fraud weights and tariffs are hand-set, not learned</a:t>
+            </a:r>
+            <a:endParaRPr lang="en-US" sz="1400" dirty="0"/>
+          </a:p>
+          <a:p>
+            <a:pPr marL="342900" indent="-342900">
+              <a:spcAft>
+                <a:spcPts val="700"/>
+              </a:spcAft>
+              <a:buSzPct val="100000"/>
+              <a:buChar char="•"/>
+            </a:pPr>
+            <a:r>
+              <a:rPr lang="en-US" sz="1400" dirty="0">
+                <a:solidFill>
+                  <a:schemeClr val="tx1"/>
+                </a:solidFill>
+              </a:rPr>
+              <a:t>The 25-minute manual baseline is an assumption</a:t>
+            </a:r>
+            <a:endParaRPr lang="en-US" sz="1400" dirty="0"/>
+          </a:p>
+        </p:txBody>
+      </p:sp>
+      <p:sp>
+        <p:nvSpPr>
+          <p:cNvPr id="6" name="Future card"/>
           <p:cNvSpPr/>
           <p:nvPr/>
         </p:nvSpPr>
         <p:spPr>
           <a:xfrm>
-            <a:off x="5989320" y="2359152"/>
-            <a:ext cx="2697480" cy="1024128"/>
+            <a:off x="4709160" y="1234440"/>
+            <a:ext cx="3977640" cy="3246120"/>
           </a:xfrm>
           <a:prstGeom prst="roundRect">
             <a:avLst>
-              <a:gd name="adj" fmla="val 7143"/>
+              <a:gd name="adj" fmla="val 2254"/>
             </a:avLst>
           </a:prstGeom>
           <a:solidFill>
@@ -9337,30 +8798,30 @@
       </p:sp>
       <p:sp>
         <p:nvSpPr>
-          <p:cNvPr id="9" name="Result number 2"/>
-          <p:cNvSpPr txBox="1"/>
-          <p:nvPr/>
-        </p:nvSpPr>
-        <p:spPr>
-          <a:xfrm>
-            <a:off x="6126480" y="2432304"/>
-            <a:ext cx="1188720" cy="877824"/>
-          </a:xfrm>
-          <a:prstGeom prst="rect">
-            <a:avLst/>
-          </a:prstGeom>
-          <a:noFill/>
-          <a:ln/>
-        </p:spPr>
-        <p:txBody>
-          <a:bodyPr wrap="square" lIns="0" tIns="0" rIns="0" bIns="0" rtlCol="0" anchor="ctr"/>
+          <p:cNvPr id="7" name="Future heading"/>
+          <p:cNvSpPr txBox="1"/>
+          <p:nvPr/>
+        </p:nvSpPr>
+        <p:spPr>
+          <a:xfrm>
+            <a:off x="4937760" y="1371600"/>
+            <a:ext cx="3566160" cy="365760"/>
+          </a:xfrm>
+          <a:prstGeom prst="rect">
+            <a:avLst/>
+          </a:prstGeom>
+          <a:noFill/>
+          <a:ln/>
+        </p:spPr>
+        <p:txBody>
+          <a:bodyPr wrap="square" lIns="0" tIns="0" rIns="0" bIns="0" rtlCol="0" anchor="t"/>
           <a:lstStyle/>
           <a:p>
             <a:pPr indent="0" marL="0">
               <a:buNone/>
             </a:pPr>
             <a:r>
-              <a:rPr lang="en-US" sz="2600" b="1" dirty="0">
+              <a:rPr lang="en-US" sz="2000" b="1" dirty="0">
                 <a:solidFill>
                   <a:schemeClr val="accent1"/>
                 </a:solidFill>
@@ -9368,142 +8829,103 @@
                 <a:ea typeface="Cambria" pitchFamily="34" charset="-122"/>
                 <a:cs typeface="Cambria" pitchFamily="34" charset="-120"/>
               </a:rPr>
-              <a:t>23/23</a:t>
-            </a:r>
-            <a:endParaRPr lang="en-US" sz="2600" dirty="0"/>
-          </a:p>
-        </p:txBody>
-      </p:sp>
-      <p:sp>
-        <p:nvSpPr>
-          <p:cNvPr id="10" name="Result caption 2"/>
-          <p:cNvSpPr txBox="1"/>
-          <p:nvPr/>
-        </p:nvSpPr>
-        <p:spPr>
-          <a:xfrm>
-            <a:off x="7315200" y="2432304"/>
-            <a:ext cx="1280160" cy="877824"/>
-          </a:xfrm>
-          <a:prstGeom prst="rect">
-            <a:avLst/>
-          </a:prstGeom>
-          <a:noFill/>
-          <a:ln/>
-        </p:spPr>
-        <p:txBody>
-          <a:bodyPr wrap="square" lIns="0" tIns="0" rIns="0" bIns="0" rtlCol="0" anchor="ctr"/>
-          <a:lstStyle/>
-          <a:p>
-            <a:pPr indent="0" marL="0">
-              <a:buNone/>
-            </a:pPr>
-            <a:r>
-              <a:rPr lang="en-US" sz="1100" dirty="0">
+              <a:t>Future scope</a:t>
+            </a:r>
+            <a:endParaRPr lang="en-US" sz="2000" dirty="0"/>
+          </a:p>
+        </p:txBody>
+      </p:sp>
+      <p:sp>
+        <p:nvSpPr>
+          <p:cNvPr id="8" name="Future list"/>
+          <p:cNvSpPr txBox="1"/>
+          <p:nvPr/>
+        </p:nvSpPr>
+        <p:spPr>
+          <a:xfrm>
+            <a:off x="4937760" y="1828800"/>
+            <a:ext cx="3566160" cy="2560320"/>
+          </a:xfrm>
+          <a:prstGeom prst="rect">
+            <a:avLst/>
+          </a:prstGeom>
+          <a:noFill/>
+          <a:ln/>
+        </p:spPr>
+        <p:txBody>
+          <a:bodyPr wrap="square" lIns="0" tIns="0" rIns="0" bIns="0" rtlCol="0" anchor="t"/>
+          <a:lstStyle/>
+          <a:p>
+            <a:pPr marL="342900" indent="-342900">
+              <a:spcAft>
+                <a:spcPts val="700"/>
+              </a:spcAft>
+              <a:buSzPct val="100000"/>
+              <a:buChar char="•"/>
+            </a:pPr>
+            <a:r>
+              <a:rPr lang="en-US" sz="1400" dirty="0">
                 <a:solidFill>
                   <a:schemeClr val="tx1"/>
                 </a:solidFill>
               </a:rPr>
-              <a:t>boundary cases, e.g. 29 vs 30 days</a:t>
-            </a:r>
-            <a:endParaRPr lang="en-US" sz="1100" dirty="0"/>
-          </a:p>
-        </p:txBody>
-      </p:sp>
-      <p:sp>
-        <p:nvSpPr>
-          <p:cNvPr id="11" name="Result card 3"/>
-          <p:cNvSpPr/>
-          <p:nvPr/>
-        </p:nvSpPr>
-        <p:spPr>
-          <a:xfrm>
-            <a:off x="5989320" y="3529584"/>
-            <a:ext cx="2697480" cy="1024128"/>
-          </a:xfrm>
-          <a:prstGeom prst="roundRect">
-            <a:avLst>
-              <a:gd name="adj" fmla="val 7143"/>
-            </a:avLst>
-          </a:prstGeom>
-          <a:solidFill>
-            <a:schemeClr val="bg2"/>
-          </a:solidFill>
-          <a:ln/>
-        </p:spPr>
-      </p:sp>
-      <p:sp>
-        <p:nvSpPr>
-          <p:cNvPr id="12" name="Result number 3"/>
-          <p:cNvSpPr txBox="1"/>
-          <p:nvPr/>
-        </p:nvSpPr>
-        <p:spPr>
-          <a:xfrm>
-            <a:off x="6126480" y="3602736"/>
-            <a:ext cx="1188720" cy="877824"/>
-          </a:xfrm>
-          <a:prstGeom prst="rect">
-            <a:avLst/>
-          </a:prstGeom>
-          <a:noFill/>
-          <a:ln/>
-        </p:spPr>
-        <p:txBody>
-          <a:bodyPr wrap="square" lIns="0" tIns="0" rIns="0" bIns="0" rtlCol="0" anchor="ctr"/>
-          <a:lstStyle/>
-          <a:p>
-            <a:pPr indent="0" marL="0">
-              <a:buNone/>
-            </a:pPr>
-            <a:r>
-              <a:rPr lang="en-US" sz="2600" b="1" dirty="0">
-                <a:solidFill>
-                  <a:schemeClr val="accent2"/>
-                </a:solidFill>
-                <a:latin typeface="Cambria" pitchFamily="34" charset="0"/>
-                <a:ea typeface="Cambria" pitchFamily="34" charset="-122"/>
-                <a:cs typeface="Cambria" pitchFamily="34" charset="-120"/>
-              </a:rPr>
-              <a:t>94.8%</a:t>
-            </a:r>
-            <a:endParaRPr lang="en-US" sz="2600" dirty="0"/>
-          </a:p>
-        </p:txBody>
-      </p:sp>
-      <p:sp>
-        <p:nvSpPr>
-          <p:cNvPr id="13" name="Result caption 3"/>
-          <p:cNvSpPr txBox="1"/>
-          <p:nvPr/>
-        </p:nvSpPr>
-        <p:spPr>
-          <a:xfrm>
-            <a:off x="7315200" y="3602736"/>
-            <a:ext cx="1280160" cy="877824"/>
-          </a:xfrm>
-          <a:prstGeom prst="rect">
-            <a:avLst/>
-          </a:prstGeom>
-          <a:noFill/>
-          <a:ln/>
-        </p:spPr>
-        <p:txBody>
-          <a:bodyPr wrap="square" lIns="0" tIns="0" rIns="0" bIns="0" rtlCol="0" anchor="ctr"/>
-          <a:lstStyle/>
-          <a:p>
-            <a:pPr indent="0" marL="0">
-              <a:buNone/>
-            </a:pPr>
-            <a:r>
-              <a:rPr lang="en-US" sz="1100" dirty="0">
+              <a:t>Language-model extractor for real, messy documents</a:t>
+            </a:r>
+            <a:endParaRPr lang="en-US" sz="1400" dirty="0"/>
+          </a:p>
+          <a:p>
+            <a:pPr marL="342900" indent="-342900">
+              <a:spcAft>
+                <a:spcPts val="700"/>
+              </a:spcAft>
+              <a:buSzPct val="100000"/>
+              <a:buChar char="•"/>
+            </a:pPr>
+            <a:r>
+              <a:rPr lang="en-US" sz="1400" dirty="0">
                 <a:solidFill>
                   <a:schemeClr val="tx1"/>
                 </a:solidFill>
               </a:rPr>
-              <a:t>on unseen abbreviations, 23 of 240 risky claims wrongly paid</a:t>
-            </a:r>
-            <a:endParaRPr lang="en-US" sz="1100" dirty="0"/>
+              <a:t>OCR for scanned bills and summaries</a:t>
+            </a:r>
+            <a:endParaRPr lang="en-US" sz="1400" dirty="0"/>
+          </a:p>
+          <a:p>
+            <a:pPr marL="342900" indent="-342900">
+              <a:spcAft>
+                <a:spcPts val="700"/>
+              </a:spcAft>
+              <a:buSzPct val="100000"/>
+              <a:buChar char="•"/>
+            </a:pPr>
+            <a:r>
+              <a:rPr lang="en-US" sz="1400" dirty="0">
+                <a:solidFill>
+                  <a:schemeClr val="tx1"/>
+                </a:solidFill>
+              </a:rPr>
+              <a:t>Strict mode: hold any claim whose history cannot be verified</a:t>
+            </a:r>
+            <a:endParaRPr lang="en-US" sz="1400" dirty="0"/>
+          </a:p>
+          <a:p>
+            <a:pPr marL="342900" indent="-342900">
+              <a:spcAft>
+                <a:spcPts val="700"/>
+              </a:spcAft>
+              <a:buSzPct val="100000"/>
+              <a:buChar char="•"/>
+            </a:pPr>
+            <a:r>
+              <a:rPr lang="en-US" sz="1400" dirty="0">
+                <a:solidFill>
+                  <a:schemeClr val="tx1"/>
+                </a:solidFill>
+              </a:rPr>
+              <a:t>Learn fraud weights from real outcomes, with human review feedback</a:t>
+            </a:r>
+            <a:endParaRPr lang="en-US" sz="1400" dirty="0"/>
           </a:p>
         </p:txBody>
       </p:sp>
@@ -9587,8 +9009,8 @@
         </p:nvSpPr>
         <p:spPr>
           <a:xfrm>
-            <a:off x="457200" y="292608"/>
-            <a:ext cx="8229600" cy="777240"/>
+            <a:off x="548640" y="822960"/>
+            <a:ext cx="8046720" cy="822960"/>
           </a:xfrm>
           <a:prstGeom prst="rect">
             <a:avLst/>
@@ -9604,49 +9026,87 @@
               <a:buNone/>
             </a:pPr>
             <a:r>
-              <a:rPr lang="en-US" sz="2800" b="1" dirty="0">
-                <a:solidFill>
-                  <a:schemeClr val="tx1"/>
-                </a:solidFill>
-              </a:rPr>
-              <a:t>Limitations and what comes next</a:t>
-            </a:r>
-            <a:endParaRPr lang="en-US" sz="2800" dirty="0"/>
-          </a:p>
-        </p:txBody>
-      </p:sp>
-      <p:sp>
-        <p:nvSpPr>
-          <p:cNvPr id="3" name="Limits card"/>
+              <a:rPr lang="en-US" sz="4000" b="1" dirty="0">
+                <a:solidFill>
+                  <a:schemeClr val="bg1"/>
+                </a:solidFill>
+              </a:rPr>
+              <a:t>Thank you</a:t>
+            </a:r>
+            <a:endParaRPr lang="en-US" sz="4000" dirty="0"/>
+          </a:p>
+        </p:txBody>
+      </p:sp>
+      <p:sp>
+        <p:nvSpPr>
+          <p:cNvPr id="3" name="Text 0"/>
           <p:cNvSpPr/>
-          <p:nvPr/>
-        </p:nvSpPr>
-        <p:spPr>
-          <a:xfrm>
-            <a:off x="457200" y="1234440"/>
-            <a:ext cx="3977640" cy="3246120"/>
+          <p:nvPr>
+            <p:ph idx="101" type="body" hasCustomPrompt="1"/>
+          </p:nvPr>
+        </p:nvSpPr>
+        <p:spPr>
+          <a:xfrm>
+            <a:off x="548640" y="1691640"/>
+            <a:ext cx="7498080" cy="731520"/>
+          </a:xfrm>
+          <a:prstGeom prst="rect">
+            <a:avLst/>
+          </a:prstGeom>
+          <a:noFill/>
+          <a:ln/>
+        </p:spPr>
+        <p:txBody>
+          <a:bodyPr wrap="square" lIns="0" tIns="0" rIns="0" bIns="0" rtlCol="0" anchor="t"/>
+          <a:lstStyle/>
+          <a:p>
+            <a:pPr algn="l" indent="0" marL="0">
+              <a:buNone/>
+            </a:pPr>
+            <a:r>
+              <a:rPr lang="en-US" sz="1800" dirty="0">
+                <a:solidFill>
+                  <a:schemeClr val="bg2"/>
+                </a:solidFill>
+              </a:rPr>
+              <a:t>Questions welcome</a:t>
+            </a:r>
+            <a:endParaRPr lang="en-US" sz="1800" dirty="0"/>
+          </a:p>
+        </p:txBody>
+      </p:sp>
+      <p:sp>
+        <p:nvSpPr>
+          <p:cNvPr id="4" name="Closing members card"/>
+          <p:cNvSpPr/>
+          <p:nvPr/>
+        </p:nvSpPr>
+        <p:spPr>
+          <a:xfrm>
+            <a:off x="548640" y="2651760"/>
+            <a:ext cx="8046720" cy="1051560"/>
           </a:xfrm>
           <a:prstGeom prst="roundRect">
             <a:avLst>
-              <a:gd name="adj" fmla="val 2254"/>
+              <a:gd name="adj" fmla="val 6957"/>
             </a:avLst>
           </a:prstGeom>
           <a:solidFill>
-            <a:schemeClr val="bg2"/>
+            <a:schemeClr val="tx2"/>
           </a:solidFill>
           <a:ln/>
         </p:spPr>
       </p:sp>
       <p:sp>
         <p:nvSpPr>
-          <p:cNvPr id="4" name="Limits heading"/>
-          <p:cNvSpPr txBox="1"/>
-          <p:nvPr/>
-        </p:nvSpPr>
-        <p:spPr>
-          <a:xfrm>
-            <a:off x="685800" y="1371600"/>
-            <a:ext cx="3566160" cy="365760"/>
+          <p:cNvPr id="5" name="Closing label"/>
+          <p:cNvSpPr txBox="1"/>
+          <p:nvPr/>
+        </p:nvSpPr>
+        <p:spPr>
+          <a:xfrm>
+            <a:off x="822960" y="2743200"/>
+            <a:ext cx="2743200" cy="228600"/>
           </a:xfrm>
           <a:prstGeom prst="rect">
             <a:avLst/>
@@ -9662,15 +9122,51 @@
               <a:buNone/>
             </a:pPr>
             <a:r>
+              <a:rPr lang="en-US" sz="1100" b="1" spc="300" kern="0" dirty="0">
+                <a:solidFill>
+                  <a:schemeClr val="bg2"/>
+                </a:solidFill>
+              </a:rPr>
+              <a:t>GROUP MEMBERS</a:t>
+            </a:r>
+            <a:endParaRPr lang="en-US" sz="1100" dirty="0"/>
+          </a:p>
+        </p:txBody>
+      </p:sp>
+      <p:sp>
+        <p:nvSpPr>
+          <p:cNvPr id="6" name="Closing name 1"/>
+          <p:cNvSpPr txBox="1"/>
+          <p:nvPr/>
+        </p:nvSpPr>
+        <p:spPr>
+          <a:xfrm>
+            <a:off x="822960" y="3035808"/>
+            <a:ext cx="3017520" cy="365760"/>
+          </a:xfrm>
+          <a:prstGeom prst="rect">
+            <a:avLst/>
+          </a:prstGeom>
+          <a:noFill/>
+          <a:ln/>
+        </p:spPr>
+        <p:txBody>
+          <a:bodyPr wrap="square" lIns="0" tIns="0" rIns="0" bIns="0" rtlCol="0" anchor="t"/>
+          <a:lstStyle/>
+          <a:p>
+            <a:pPr indent="0" marL="0">
+              <a:buNone/>
+            </a:pPr>
+            <a:r>
               <a:rPr lang="en-US" sz="2000" b="1" dirty="0">
                 <a:solidFill>
-                  <a:schemeClr val="accent2"/>
+                  <a:schemeClr val="bg1"/>
                 </a:solidFill>
                 <a:latin typeface="Cambria" pitchFamily="34" charset="0"/>
                 <a:ea typeface="Cambria" pitchFamily="34" charset="-122"/>
                 <a:cs typeface="Cambria" pitchFamily="34" charset="-120"/>
               </a:rPr>
-              <a:t>Limitations</a:t>
+              <a:t>Harsh Salunkhe</a:t>
             </a:r>
             <a:endParaRPr lang="en-US" sz="2000" dirty="0"/>
           </a:p>
@@ -9678,14 +9174,14 @@
       </p:sp>
       <p:sp>
         <p:nvSpPr>
-          <p:cNvPr id="5" name="Limits list"/>
-          <p:cNvSpPr txBox="1"/>
-          <p:nvPr/>
-        </p:nvSpPr>
-        <p:spPr>
-          <a:xfrm>
-            <a:off x="685800" y="1828800"/>
-            <a:ext cx="3566160" cy="2560320"/>
+          <p:cNvPr id="7" name="Closing roll 1"/>
+          <p:cNvSpPr txBox="1"/>
+          <p:nvPr/>
+        </p:nvSpPr>
+        <p:spPr>
+          <a:xfrm>
+            <a:off x="822960" y="3419856"/>
+            <a:ext cx="3017520" cy="274320"/>
           </a:xfrm>
           <a:prstGeom prst="rect">
             <a:avLst/>
@@ -9697,111 +9193,31 @@
           <a:bodyPr wrap="square" lIns="0" tIns="0" rIns="0" bIns="0" rtlCol="0" anchor="t"/>
           <a:lstStyle/>
           <a:p>
-            <a:pPr marL="342900" indent="-342900">
-              <a:spcAft>
-                <a:spcPts val="700"/>
-              </a:spcAft>
-              <a:buSzPct val="100000"/>
-              <a:buChar char="•"/>
+            <a:pPr indent="0" marL="0">
+              <a:buNone/>
             </a:pPr>
             <a:r>
               <a:rPr lang="en-US" sz="1400" dirty="0">
                 <a:solidFill>
-                  <a:schemeClr val="tx1"/>
-                </a:solidFill>
-              </a:rPr>
-              <a:t>All data is synthetic and the summaries are templated</a:t>
+                  <a:schemeClr val="bg2"/>
+                </a:solidFill>
+              </a:rPr>
+              <a:t>24070126066</a:t>
             </a:r>
             <a:endParaRPr lang="en-US" sz="1400" dirty="0"/>
           </a:p>
-          <a:p>
-            <a:pPr marL="342900" indent="-342900">
-              <a:spcAft>
-                <a:spcPts val="700"/>
-              </a:spcAft>
-              <a:buSzPct val="100000"/>
-              <a:buChar char="•"/>
-            </a:pPr>
-            <a:r>
-              <a:rPr lang="en-US" sz="1400" dirty="0">
-                <a:solidFill>
-                  <a:schemeClr val="tx1"/>
-                </a:solidFill>
-              </a:rPr>
-              <a:t>Clinical abbreviations can hide a pre-existing condition</a:t>
-            </a:r>
-            <a:endParaRPr lang="en-US" sz="1400" dirty="0"/>
-          </a:p>
-          <a:p>
-            <a:pPr marL="342900" indent="-342900">
-              <a:spcAft>
-                <a:spcPts val="700"/>
-              </a:spcAft>
-              <a:buSzPct val="100000"/>
-              <a:buChar char="•"/>
-            </a:pPr>
-            <a:r>
-              <a:rPr lang="en-US" sz="1400" dirty="0">
-                <a:solidFill>
-                  <a:schemeClr val="tx1"/>
-                </a:solidFill>
-              </a:rPr>
-              <a:t>Fraud weights and tariffs are hand-set, not learned</a:t>
-            </a:r>
-            <a:endParaRPr lang="en-US" sz="1400" dirty="0"/>
-          </a:p>
-          <a:p>
-            <a:pPr marL="342900" indent="-342900">
-              <a:spcAft>
-                <a:spcPts val="700"/>
-              </a:spcAft>
-              <a:buSzPct val="100000"/>
-              <a:buChar char="•"/>
-            </a:pPr>
-            <a:r>
-              <a:rPr lang="en-US" sz="1400" dirty="0">
-                <a:solidFill>
-                  <a:schemeClr val="tx1"/>
-                </a:solidFill>
-              </a:rPr>
-              <a:t>The 25-minute manual baseline is an assumption</a:t>
-            </a:r>
-            <a:endParaRPr lang="en-US" sz="1400" dirty="0"/>
-          </a:p>
-        </p:txBody>
-      </p:sp>
-      <p:sp>
-        <p:nvSpPr>
-          <p:cNvPr id="6" name="Future card"/>
-          <p:cNvSpPr/>
-          <p:nvPr/>
-        </p:nvSpPr>
-        <p:spPr>
-          <a:xfrm>
-            <a:off x="4709160" y="1234440"/>
-            <a:ext cx="3977640" cy="3246120"/>
-          </a:xfrm>
-          <a:prstGeom prst="roundRect">
-            <a:avLst>
-              <a:gd name="adj" fmla="val 2254"/>
-            </a:avLst>
-          </a:prstGeom>
-          <a:solidFill>
-            <a:schemeClr val="bg2"/>
-          </a:solidFill>
-          <a:ln/>
-        </p:spPr>
-      </p:sp>
-      <p:sp>
-        <p:nvSpPr>
-          <p:cNvPr id="7" name="Future heading"/>
-          <p:cNvSpPr txBox="1"/>
-          <p:nvPr/>
-        </p:nvSpPr>
-        <p:spPr>
-          <a:xfrm>
-            <a:off x="4937760" y="1371600"/>
-            <a:ext cx="3566160" cy="365760"/>
+        </p:txBody>
+      </p:sp>
+      <p:sp>
+        <p:nvSpPr>
+          <p:cNvPr id="8" name="Closing name 2"/>
+          <p:cNvSpPr txBox="1"/>
+          <p:nvPr/>
+        </p:nvSpPr>
+        <p:spPr>
+          <a:xfrm>
+            <a:off x="4023360" y="3035808"/>
+            <a:ext cx="3017520" cy="365760"/>
           </a:xfrm>
           <a:prstGeom prst="rect">
             <a:avLst/>
@@ -9819,13 +9235,13 @@
             <a:r>
               <a:rPr lang="en-US" sz="2000" b="1" dirty="0">
                 <a:solidFill>
-                  <a:schemeClr val="accent1"/>
+                  <a:schemeClr val="bg1"/>
                 </a:solidFill>
                 <a:latin typeface="Cambria" pitchFamily="34" charset="0"/>
                 <a:ea typeface="Cambria" pitchFamily="34" charset="-122"/>
                 <a:cs typeface="Cambria" pitchFamily="34" charset="-120"/>
               </a:rPr>
-              <a:t>Future scope</a:t>
+              <a:t>Dharna Sharma</a:t>
             </a:r>
             <a:endParaRPr lang="en-US" sz="2000" dirty="0"/>
           </a:p>
@@ -9833,14 +9249,14 @@
       </p:sp>
       <p:sp>
         <p:nvSpPr>
-          <p:cNvPr id="8" name="Future list"/>
-          <p:cNvSpPr txBox="1"/>
-          <p:nvPr/>
-        </p:nvSpPr>
-        <p:spPr>
-          <a:xfrm>
-            <a:off x="4937760" y="1828800"/>
-            <a:ext cx="3566160" cy="2560320"/>
+          <p:cNvPr id="9" name="Closing roll 2"/>
+          <p:cNvSpPr txBox="1"/>
+          <p:nvPr/>
+        </p:nvSpPr>
+        <p:spPr>
+          <a:xfrm>
+            <a:off x="4023360" y="3419856"/>
+            <a:ext cx="3017520" cy="274320"/>
           </a:xfrm>
           <a:prstGeom prst="rect">
             <a:avLst/>
@@ -9852,121 +9268,54 @@
           <a:bodyPr wrap="square" lIns="0" tIns="0" rIns="0" bIns="0" rtlCol="0" anchor="t"/>
           <a:lstStyle/>
           <a:p>
-            <a:pPr marL="342900" indent="-342900">
-              <a:spcAft>
-                <a:spcPts val="700"/>
-              </a:spcAft>
-              <a:buSzPct val="100000"/>
-              <a:buChar char="•"/>
+            <a:pPr indent="0" marL="0">
+              <a:buNone/>
             </a:pPr>
             <a:r>
               <a:rPr lang="en-US" sz="1400" dirty="0">
                 <a:solidFill>
-                  <a:schemeClr val="tx1"/>
-                </a:solidFill>
-              </a:rPr>
-              <a:t>Language-model extractor for real, messy documents</a:t>
+                  <a:schemeClr val="bg2"/>
+                </a:solidFill>
+              </a:rPr>
+              <a:t>24070126053</a:t>
             </a:r>
             <a:endParaRPr lang="en-US" sz="1400" dirty="0"/>
           </a:p>
-          <a:p>
-            <a:pPr marL="342900" indent="-342900">
-              <a:spcAft>
-                <a:spcPts val="700"/>
-              </a:spcAft>
-              <a:buSzPct val="100000"/>
-              <a:buChar char="•"/>
+        </p:txBody>
+      </p:sp>
+      <p:sp>
+        <p:nvSpPr>
+          <p:cNvPr id="10" name="Live app"/>
+          <p:cNvSpPr txBox="1"/>
+          <p:nvPr/>
+        </p:nvSpPr>
+        <p:spPr>
+          <a:xfrm>
+            <a:off x="548640" y="4114800"/>
+            <a:ext cx="8046720" cy="274320"/>
+          </a:xfrm>
+          <a:prstGeom prst="rect">
+            <a:avLst/>
+          </a:prstGeom>
+          <a:noFill/>
+          <a:ln/>
+        </p:spPr>
+        <p:txBody>
+          <a:bodyPr wrap="square" lIns="0" tIns="0" rIns="0" bIns="0" rtlCol="0" anchor="t"/>
+          <a:lstStyle/>
+          <a:p>
+            <a:pPr indent="0" marL="0">
+              <a:buNone/>
             </a:pPr>
             <a:r>
               <a:rPr lang="en-US" sz="1400" dirty="0">
                 <a:solidFill>
-                  <a:schemeClr val="tx1"/>
-                </a:solidFill>
-              </a:rPr>
-              <a:t>OCR for scanned bills and summaries</a:t>
+                  <a:schemeClr val="bg2"/>
+                </a:solidFill>
+              </a:rPr>
+              <a:t>Live app: claims-adjudication-agent.onrender.com</a:t>
             </a:r>
             <a:endParaRPr lang="en-US" sz="1400" dirty="0"/>
-          </a:p>
-          <a:p>
-            <a:pPr marL="342900" indent="-342900">
-              <a:spcAft>
-                <a:spcPts val="700"/>
-              </a:spcAft>
-              <a:buSzPct val="100000"/>
-              <a:buChar char="•"/>
-            </a:pPr>
-            <a:r>
-              <a:rPr lang="en-US" sz="1400" dirty="0">
-                <a:solidFill>
-                  <a:schemeClr val="tx1"/>
-                </a:solidFill>
-              </a:rPr>
-              <a:t>Strict mode: hold any claim whose history cannot be verified</a:t>
-            </a:r>
-            <a:endParaRPr lang="en-US" sz="1400" dirty="0"/>
-          </a:p>
-          <a:p>
-            <a:pPr marL="342900" indent="-342900">
-              <a:spcAft>
-                <a:spcPts val="700"/>
-              </a:spcAft>
-              <a:buSzPct val="100000"/>
-              <a:buChar char="•"/>
-            </a:pPr>
-            <a:r>
-              <a:rPr lang="en-US" sz="1400" dirty="0">
-                <a:solidFill>
-                  <a:schemeClr val="tx1"/>
-                </a:solidFill>
-              </a:rPr>
-              <a:t>Learn fraud weights from real outcomes, with human review feedback</a:t>
-            </a:r>
-            <a:endParaRPr lang="en-US" sz="1400" dirty="0"/>
-          </a:p>
-        </p:txBody>
-      </p:sp>
-      <p:sp>
-        <p:nvSpPr>
-          <p:cNvPr id="25" name="Slide Number Placeholder 0"/>
-          <p:cNvSpPr>
-            <a:spLocks noGrp="1"/>
-          </p:cNvSpPr>
-          <p:nvPr>
-            <p:ph type="sldNum" sz="quarter" idx="4294967295"/>
-          </p:nvPr>
-        </p:nvSpPr>
-        <p:spPr>
-          <a:xfrm>
-            <a:off x="8321040" y="4773168"/>
-            <a:ext cx="457200" cy="228600"/>
-          </a:xfrm>
-          <a:prstGeom prst="rect">
-            <a:avLst/>
-          </a:prstGeom>
-          <a:extLst>
-            <a:ext uri="{C572A759-6A51-4108-AA02-DFA0A04FC94B}">
-              <ma14:wrappingTextBoxFlag xmlns:ma14="http://schemas.microsoft.com/office/mac/drawingml/2011/main" val="0"/>
-            </a:ext>
-          </a:extLst>
-        </p:spPr>
-        <p:txBody>
-          <a:bodyPr/>
-          <a:lstStyle>
-            <a:lvl1pPr>
-              <a:defRPr sz="1000">
-                <a:solidFill>
-                  <a:schemeClr val="tx2"/>
-                </a:solidFill>
-              </a:defRPr>
-            </a:lvl1pPr>
-          </a:lstStyle>
-          <a:p>
-            <a:pPr algn="r"/>
-            <a:fld id="{F7021451-1387-4CA6-816F-3879F97B5CBC}" type="slidenum">
-              <a:rPr b="0" lang="en-US"/>
-              <a:t>9</a:t>
-            </a:fld>
-            <a:endParaRPr lang="en-US"/>
           </a:p>
         </p:txBody>
       </p:sp>

--- a/docs/ClaimsAgent_CA3.pptx
+++ b/docs/ClaimsAgent_CA3.pptx
@@ -16,9 +16,10 @@
     <p:sldId id="264" r:id="rId10"/>
     <p:sldId id="265" r:id="rId11"/>
     <p:sldId id="266" r:id="rId12"/>
+    <p:sldId id="267" r:id="rId13"/>
   </p:sldIdLst>
   <p:notesMasterIdLst>
-    <p:notesMasterId r:id="rId13"/>
+    <p:notesMasterId r:id="rId14"/>
   </p:notesMasterIdLst>
   <p:sldSz cx="9144000" cy="5143500"/>
   <p:notesSz cx="5143500" cy="9144000"/>
@@ -117,17 +118,17 @@
   <p:extLst>
     <p:ext uri="{521415D9-36F7-43E2-AB2F-B90AF26B5E84}">
       <p14:sectionLst xmlns:p14="http://schemas.microsoft.com/office/powerpoint/2010/main">
-        <p14:section name="Opening" id="{bccf1a17-b97d-96d0-2fcb-007820aa0fcd}">
+        <p14:section name="Opening" id="{432cef51-519c-6b96-d779-631be63cadc9}">
           <p14:sldIdLst>
             <p14:sldId id="256"/>
           </p14:sldIdLst>
         </p14:section>
-        <p14:section name="Problem" id="{95cc6792-ae7c-35ba-5b43-b9f80f38ec70}">
+        <p14:section name="Problem" id="{56043ce9-db0e-a8f4-ecb0-a0ddc66aac87}">
           <p14:sldIdLst>
             <p14:sldId id="257"/>
           </p14:sldIdLst>
         </p14:section>
-        <p14:section name="Solution" id="{a9ffcb44-236f-0eb1-bcf9-e85fc3430c5e}">
+        <p14:section name="Solution" id="{3823349e-6645-23ae-5b21-8c724c3a8660}">
           <p14:sldIdLst>
             <p14:sldId id="258"/>
             <p14:sldId id="259"/>
@@ -135,21 +136,22 @@
             <p14:sldId id="261"/>
           </p14:sldIdLst>
         </p14:section>
-        <p14:section name="Validation" id="{75084c3f-ea0a-3200-d7d3-bc0275a89d99}">
+        <p14:section name="Validation" id="{22e0d75f-5f60-aa38-ad0b-0f726732c3a9}">
           <p14:sldIdLst>
             <p14:sldId id="262"/>
+            <p14:sldId id="263"/>
           </p14:sldIdLst>
         </p14:section>
-        <p14:section name="Close" id="{c47f1182-5003-f5ca-b168-020bf0a950a1}">
+        <p14:section name="Close" id="{ce7b2eb3-75bf-bcd0-615f-ebd7c5bd7c2c}">
           <p14:sldIdLst>
-            <p14:sldId id="263"/>
             <p14:sldId id="264"/>
+            <p14:sldId id="265"/>
           </p14:sldIdLst>
         </p14:section>
-        <p14:section name="Appendix" id="{3da590cd-270c-3947-a1cf-f6d30844c375}">
+        <p14:section name="Appendix" id="{6e395425-b760-3db8-add8-95d6f7a1d792}">
           <p14:sldIdLst>
-            <p14:sldId id="265"/>
             <p14:sldId id="266"/>
+            <p14:sldId id="267"/>
           </p14:sldIdLst>
         </p14:section>
       </p14:sectionLst>
@@ -249,9 +251,9 @@
           </c:dLbls>
           <c:cat>
             <c:multiLvlStrRef>
-              <c:f>Sheet1!$A$2:$A$10</c:f>
+              <c:f>Sheet1!$A$2:$A$11</c:f>
               <c:multiLvlStrCache>
-                <c:ptCount val="9"/>
+                <c:ptCount val="10"/>
                 <c:lvl>
                   <c:pt idx="0">
                     <c:v>Clean, held-out</c:v>
@@ -280,16 +282,19 @@
                   <c:pt idx="8">
                     <c:v>UNSEEN: abbreviations</c:v>
                   </c:pt>
+                  <c:pt idx="9">
+                    <c:v>UNSEEN: telegraphic notes</c:v>
+                  </c:pt>
                 </c:lvl>
               </c:multiLvlStrCache>
             </c:multiLvlStrRef>
           </c:cat>
           <c:val>
             <c:numRef>
-              <c:f>Sheet1!$B$2:$B$10</c:f>
+              <c:f>Sheet1!$B$2:$B$11</c:f>
               <c:numCache>
                 <c:formatCode>General</c:formatCode>
-                <c:ptCount val="9"/>
+                <c:ptCount val="10"/>
                 <c:pt idx="0">
                   <c:v>99.1</c:v>
                 </c:pt>
@@ -315,6 +320,9 @@
                   <c:v>0</c:v>
                 </c:pt>
                 <c:pt idx="8">
+                  <c:v>0</c:v>
+                </c:pt>
+                <c:pt idx="9">
                   <c:v>0</c:v>
                 </c:pt>
               </c:numCache>
@@ -368,9 +376,9 @@
           </c:dLbls>
           <c:cat>
             <c:multiLvlStrRef>
-              <c:f>Sheet1!$A$2:$A$10</c:f>
+              <c:f>Sheet1!$A$2:$A$11</c:f>
               <c:multiLvlStrCache>
-                <c:ptCount val="9"/>
+                <c:ptCount val="10"/>
                 <c:lvl>
                   <c:pt idx="0">
                     <c:v>Clean, held-out</c:v>
@@ -399,16 +407,19 @@
                   <c:pt idx="8">
                     <c:v>UNSEEN: abbreviations</c:v>
                   </c:pt>
+                  <c:pt idx="9">
+                    <c:v>UNSEEN: telegraphic notes</c:v>
+                  </c:pt>
                 </c:lvl>
               </c:multiLvlStrCache>
             </c:multiLvlStrRef>
           </c:cat>
           <c:val>
             <c:numRef>
-              <c:f>Sheet1!$C$2:$C$10</c:f>
+              <c:f>Sheet1!$C$2:$C$11</c:f>
               <c:numCache>
                 <c:formatCode>General</c:formatCode>
-                <c:ptCount val="9"/>
+                <c:ptCount val="10"/>
                 <c:pt idx="0">
                   <c:v>100</c:v>
                 </c:pt>
@@ -435,6 +446,9 @@
                 </c:pt>
                 <c:pt idx="8">
                   <c:v>94.8</c:v>
+                </c:pt>
+                <c:pt idx="9">
+                  <c:v>92.6</c:v>
                 </c:pt>
               </c:numCache>
             </c:numRef>
@@ -543,6 +557,381 @@
                   <a:srgbClr val="0B4F5C"/>
                 </a:solidFill>
                 <a:latin typeface="+mn-lt"/>
+              </a:defRPr>
+            </a:pPr>
+            <a:endParaRPr lang="en-US"/>
+          </a:p>
+        </c:txPr>
+        <c:crossAx val="2094734554"/>
+        <c:crosses val="autoZero"/>
+        <c:crossBetween val="between"/>
+      </c:valAx>
+      <c:spPr>
+        <a:noFill/>
+        <a:ln>
+          <a:noFill/>
+        </a:ln>
+        <a:effectLst/>
+      </c:spPr>
+    </c:plotArea>
+    <c:legend>
+      <c:legendPos val="b"/>
+      <c:overlay val="0"/>
+      <c:txPr>
+        <a:bodyPr/>
+        <a:lstStyle/>
+        <a:p>
+          <a:pPr>
+            <a:defRPr sz="1100">
+              <a:solidFill>
+                <a:srgbClr val="12263A"/>
+              </a:solidFill>
+              <a:latin typeface="+mn-lt"/>
+              <a:cs typeface="+mn-lt"/>
+            </a:defRPr>
+          </a:pPr>
+          <a:endParaRPr lang="en-US"/>
+        </a:p>
+      </c:txPr>
+    </c:legend>
+    <c:plotVisOnly val="1"/>
+    <c:dispBlanksAs val="span"/>
+  </c:chart>
+  <c:spPr>
+    <a:noFill/>
+    <a:ln>
+      <a:noFill/>
+    </a:ln>
+    <a:effectLst/>
+  </c:spPr>
+  <c:externalData r:id="rId1">
+    <c:autoUpdate val="0"/>
+  </c:externalData>
+</c:chartSpace>
+</file>
+
+<file path=ppt/charts/chart2.xml><?xml version="1.0" encoding="utf-8"?>
+<c:chartSpace xmlns:c="http://schemas.openxmlformats.org/drawingml/2006/chart" xmlns:a="http://schemas.openxmlformats.org/drawingml/2006/main" xmlns:r="http://schemas.openxmlformats.org/officeDocument/2006/relationships">
+  <c:date1904 val="0"/>
+  <c:roundedCorners val="1"/>
+  <c:chart>
+    <c:title>
+      <c:tx>
+        <c:rich>
+          <a:bodyPr/>
+          <a:lstStyle/>
+          <a:p>
+            <a:pPr>
+              <a:defRPr sz="1300" b="0" i="0" u="none" strike="noStrike">
+                <a:solidFill>
+                  <a:srgbClr val="12263A"/>
+                </a:solidFill>
+                <a:latin typeface="+mn-lt"/>
+              </a:defRPr>
+            </a:pPr>
+            <a:r>
+              <a:rPr sz="1300" b="0" i="0" u="none" strike="noStrike">
+                <a:solidFill>
+                  <a:srgbClr val="12263A"/>
+                </a:solidFill>
+                <a:latin typeface="+mn-lt"/>
+              </a:rPr>
+              <a:t>Accuracy on unseen noise (%)</a:t>
+            </a:r>
+          </a:p>
+        </c:rich>
+      </c:tx>
+      <c:layout/>
+      <c:overlay val="0"/>
+    </c:title>
+    <c:autoTitleDeleted val="0"/>
+    <c:plotArea>
+      <c:layout/>
+      <c:barChart>
+        <c:barDir val="bar"/>
+        <c:grouping val="clustered"/>
+        <c:varyColors val="0"/>
+        <c:ser>
+          <c:idx val="0"/>
+          <c:order val="0"/>
+          <c:tx>
+            <c:strRef>
+              <c:f>Sheet1!$B$1</c:f>
+              <c:strCache>
+                <c:ptCount val="1"/>
+                <c:pt idx="0">
+                  <c:v>Rules only</c:v>
+                </c:pt>
+              </c:strCache>
+            </c:strRef>
+          </c:tx>
+          <c:spPr>
+            <a:solidFill>
+              <a:srgbClr val="A9B8C2"/>
+            </a:solidFill>
+            <a:effectLst/>
+          </c:spPr>
+          <c:invertIfNegative val="0"/>
+          <c:dLbls>
+            <c:numFmt formatCode="0.0" sourceLinked="0"/>
+            <c:txPr>
+              <a:bodyPr/>
+              <a:lstStyle/>
+              <a:p>
+                <a:pPr>
+                  <a:defRPr b="0" i="0" strike="noStrike" sz="1100" u="none">
+                    <a:solidFill>
+                      <a:srgbClr val="12263A"/>
+                    </a:solidFill>
+                    <a:latin typeface="+mn-lt"/>
+                  </a:defRPr>
+                </a:pPr>
+              </a:p>
+            </c:txPr>
+            <c:showLegendKey val="0"/>
+            <c:showVal val="1"/>
+            <c:showCatName val="0"/>
+            <c:showSerName val="0"/>
+            <c:showPercent val="0"/>
+            <c:showBubbleSize val="0"/>
+            <c:showLeaderLines val="0"/>
+          </c:dLbls>
+          <c:cat>
+            <c:multiLvlStrRef>
+              <c:f>Sheet1!$A$2:$A$5</c:f>
+              <c:multiLvlStrCache>
+                <c:ptCount val="4"/>
+                <c:lvl>
+                  <c:pt idx="0">
+                    <c:v>Clean</c:v>
+                  </c:pt>
+                  <c:pt idx="1">
+                    <c:v>Character noise</c:v>
+                  </c:pt>
+                  <c:pt idx="2">
+                    <c:v>Abbreviations</c:v>
+                  </c:pt>
+                  <c:pt idx="3">
+                    <c:v>Telegraphic notes</c:v>
+                  </c:pt>
+                </c:lvl>
+              </c:multiLvlStrCache>
+            </c:multiLvlStrRef>
+          </c:cat>
+          <c:val>
+            <c:numRef>
+              <c:f>Sheet1!$B$2:$B$5</c:f>
+              <c:numCache>
+                <c:formatCode>General</c:formatCode>
+                <c:ptCount val="4"/>
+                <c:pt idx="0">
+                  <c:v>100</c:v>
+                </c:pt>
+                <c:pt idx="1">
+                  <c:v>96.6</c:v>
+                </c:pt>
+                <c:pt idx="2">
+                  <c:v>94.4</c:v>
+                </c:pt>
+                <c:pt idx="3">
+                  <c:v>91</c:v>
+                </c:pt>
+              </c:numCache>
+            </c:numRef>
+          </c:val>
+        </c:ser>
+        <c:ser>
+          <c:idx val="1"/>
+          <c:order val="1"/>
+          <c:tx>
+            <c:strRef>
+              <c:f>Sheet1!$C$1</c:f>
+              <c:strCache>
+                <c:ptCount val="1"/>
+                <c:pt idx="0">
+                  <c:v>With llama3.2:3b</c:v>
+                </c:pt>
+              </c:strCache>
+            </c:strRef>
+          </c:tx>
+          <c:spPr>
+            <a:solidFill>
+              <a:srgbClr val="0F766E"/>
+            </a:solidFill>
+            <a:effectLst/>
+          </c:spPr>
+          <c:invertIfNegative val="0"/>
+          <c:dLbls>
+            <c:numFmt formatCode="0.0" sourceLinked="0"/>
+            <c:txPr>
+              <a:bodyPr/>
+              <a:lstStyle/>
+              <a:p>
+                <a:pPr>
+                  <a:defRPr b="0" i="0" strike="noStrike" sz="1100" u="none">
+                    <a:solidFill>
+                      <a:srgbClr val="12263A"/>
+                    </a:solidFill>
+                    <a:latin typeface="+mn-lt"/>
+                  </a:defRPr>
+                </a:pPr>
+              </a:p>
+            </c:txPr>
+            <c:showLegendKey val="0"/>
+            <c:showVal val="1"/>
+            <c:showCatName val="0"/>
+            <c:showSerName val="0"/>
+            <c:showPercent val="0"/>
+            <c:showBubbleSize val="0"/>
+            <c:showLeaderLines val="0"/>
+          </c:dLbls>
+          <c:cat>
+            <c:multiLvlStrRef>
+              <c:f>Sheet1!$A$2:$A$5</c:f>
+              <c:multiLvlStrCache>
+                <c:ptCount val="4"/>
+                <c:lvl>
+                  <c:pt idx="0">
+                    <c:v>Clean</c:v>
+                  </c:pt>
+                  <c:pt idx="1">
+                    <c:v>Character noise</c:v>
+                  </c:pt>
+                  <c:pt idx="2">
+                    <c:v>Abbreviations</c:v>
+                  </c:pt>
+                  <c:pt idx="3">
+                    <c:v>Telegraphic notes</c:v>
+                  </c:pt>
+                </c:lvl>
+              </c:multiLvlStrCache>
+            </c:multiLvlStrRef>
+          </c:cat>
+          <c:val>
+            <c:numRef>
+              <c:f>Sheet1!$C$2:$C$5</c:f>
+              <c:numCache>
+                <c:formatCode>General</c:formatCode>
+                <c:ptCount val="4"/>
+                <c:pt idx="0">
+                  <c:v>100</c:v>
+                </c:pt>
+                <c:pt idx="1">
+                  <c:v>100</c:v>
+                </c:pt>
+                <c:pt idx="2">
+                  <c:v>100</c:v>
+                </c:pt>
+                <c:pt idx="3">
+                  <c:v>100</c:v>
+                </c:pt>
+              </c:numCache>
+            </c:numRef>
+          </c:val>
+        </c:ser>
+        <c:dLbls>
+          <c:numFmt formatCode="0.0" sourceLinked="0"/>
+          <c:txPr>
+            <a:bodyPr/>
+            <a:lstStyle/>
+            <a:p>
+              <a:pPr>
+                <a:defRPr b="0" i="0" strike="noStrike" sz="1100" u="none">
+                  <a:solidFill>
+                    <a:srgbClr val="12263A"/>
+                  </a:solidFill>
+                  <a:latin typeface="+mn-lt"/>
+                </a:defRPr>
+              </a:pPr>
+            </a:p>
+          </c:txPr>
+          <c:showLegendKey val="0"/>
+          <c:showVal val="1"/>
+          <c:showCatName val="0"/>
+          <c:showSerName val="0"/>
+          <c:showPercent val="0"/>
+          <c:showBubbleSize val="0"/>
+          <c:showLeaderLines val="0"/>
+        </c:dLbls>
+        <c:gapWidth val="55"/>
+        <c:overlap val="0"/>
+        <c:axId val="2094734554"/>
+        <c:axId val="2094734552"/>
+        <c:axId val="2094734556"/>
+      </c:barChart>
+      <c:catAx>
+        <c:axId val="2094734554"/>
+        <c:scaling>
+          <c:orientation val="maxMin"/>
+        </c:scaling>
+        <c:delete val="0"/>
+        <c:axPos val="l"/>
+        <c:numFmt formatCode="General" sourceLinked="1"/>
+        <c:majorTickMark val="out"/>
+        <c:minorTickMark val="none"/>
+        <c:tickLblPos val="nextTo"/>
+        <c:spPr>
+          <a:ln w="12700" cap="flat">
+            <a:solidFill>
+              <a:srgbClr val="888888"/>
+            </a:solidFill>
+            <a:prstDash val="solid"/>
+            <a:round/>
+          </a:ln>
+        </c:spPr>
+        <c:txPr>
+          <a:bodyPr/>
+          <a:lstStyle/>
+          <a:p>
+            <a:pPr>
+              <a:defRPr sz="1200" b="0" i="0" u="none" strike="noStrike">
+                <a:solidFill>
+                  <a:srgbClr val="12263A"/>
+                </a:solidFill>
+                <a:latin typeface="+mn-lt"/>
+              </a:defRPr>
+            </a:pPr>
+            <a:endParaRPr lang="en-US"/>
+          </a:p>
+        </c:txPr>
+        <c:crossAx val="2094734552"/>
+        <c:crosses val="autoZero"/>
+        <c:auto val="1"/>
+        <c:lblAlgn val="ctr"/>
+        <c:noMultiLvlLbl val="1"/>
+      </c:catAx>
+      <c:valAx>
+        <c:axId val="2094734552"/>
+        <c:scaling>
+          <c:orientation val="minMax"/>
+          <c:max val="104"/>
+          <c:min val="80"/>
+        </c:scaling>
+        <c:delete val="1"/>
+        <c:axPos val="b"/>
+        <c:numFmt formatCode="General" sourceLinked="0"/>
+        <c:majorTickMark val="out"/>
+        <c:minorTickMark val="none"/>
+        <c:tickLblPos val="low"/>
+        <c:spPr>
+          <a:ln w="12700" cap="flat">
+            <a:solidFill>
+              <a:srgbClr val="888888"/>
+            </a:solidFill>
+            <a:prstDash val="solid"/>
+            <a:round/>
+          </a:ln>
+        </c:spPr>
+        <c:txPr>
+          <a:bodyPr/>
+          <a:lstStyle/>
+          <a:p>
+            <a:pPr>
+              <a:defRPr sz="1200" b="0" i="0" u="none" strike="noStrike">
+                <a:solidFill>
+                  <a:srgbClr val="000000"/>
+                </a:solidFill>
+                <a:latin typeface="Arial"/>
               </a:defRPr>
             </a:pPr>
             <a:endParaRPr lang="en-US"/>
@@ -1079,7 +1468,7 @@
           <a:p>
             <a:r>
               <a:rPr lang="en-US" dirty="0"/>
-              <a:t>Backup slide. In the live app these are the demo buttons: part payment, rejection, the second-look loop, and the simulated calculation error.</a:t>
+              <a:t>Close, then take questions. Both members should be ready to answer on any slide.</a:t>
             </a:r>
             <a:endParaRPr lang="en-US" dirty="0"/>
           </a:p>
@@ -1167,7 +1556,7 @@
           <a:p>
             <a:r>
               <a:rPr lang="en-US" dirty="0"/>
-              <a:t>Backup slide with the complete architecture: agents, tool belt, data stores, model layer and the feedback loop.</a:t>
+              <a:t>Backup slide. In the live app these are the demo buttons: part payment, rejection, the second-look loop, and the simulated calculation error.</a:t>
             </a:r>
             <a:endParaRPr lang="en-US" dirty="0"/>
           </a:p>
@@ -1191,6 +1580,94 @@
             <a:fld id="{F7021451-1387-4CA6-816F-3879F97B5CBC}" type="slidenum">
               <a:rPr lang="en-US"/>
               <a:t>11</a:t>
+            </a:fld>
+            <a:endParaRPr lang="en-US"/>
+          </a:p>
+        </p:txBody>
+      </p:sp>
+    </p:spTree>
+    <p:extLst>
+      <p:ext uri="{BB962C8B-B14F-4D97-AF65-F5344CB8AC3E}">
+        <p14:creationId xmlns:p14="http://schemas.microsoft.com/office/powerpoint/2010/main" val="1024086991"/>
+      </p:ext>
+    </p:extLst>
+  </p:cSld>
+  <p:clrMapOvr>
+    <a:masterClrMapping/>
+  </p:clrMapOvr>
+</p:notes>
+</file>
+
+<file path=ppt/notesSlides/notesSlide12.xml><?xml version="1.0" encoding="utf-8"?>
+<p:notes xmlns:a="http://schemas.openxmlformats.org/drawingml/2006/main" xmlns:r="http://schemas.openxmlformats.org/officeDocument/2006/relationships" xmlns:p="http://schemas.openxmlformats.org/presentationml/2006/main">
+  <p:cSld>
+    <p:spTree>
+      <p:nvGrpSpPr>
+        <p:cNvPr id="1" name=""/>
+        <p:cNvGrpSpPr/>
+        <p:nvPr/>
+      </p:nvGrpSpPr>
+      <p:grpSpPr>
+        <a:xfrm>
+          <a:off x="0" y="0"/>
+          <a:ext cx="0" cy="0"/>
+          <a:chOff x="0" y="0"/>
+          <a:chExt cx="0" cy="0"/>
+        </a:xfrm>
+      </p:grpSpPr>
+      <p:sp>
+        <p:nvSpPr>
+          <p:cNvPr id="2" name="Slide Image Placeholder 1"/>
+          <p:cNvSpPr>
+            <a:spLocks noGrp="1" noRot="1" noChangeAspect="1"/>
+          </p:cNvSpPr>
+          <p:nvPr>
+            <p:ph type="sldImg"/>
+          </p:nvPr>
+        </p:nvSpPr>
+        <p:spPr/>
+      </p:sp>
+      <p:sp>
+        <p:nvSpPr>
+          <p:cNvPr id="3" name="Notes Placeholder 2"/>
+          <p:cNvSpPr>
+            <a:spLocks noGrp="1"/>
+          </p:cNvSpPr>
+          <p:nvPr>
+            <p:ph type="body" idx="1"/>
+          </p:nvPr>
+        </p:nvSpPr>
+        <p:spPr/>
+        <p:txBody>
+          <a:bodyPr/>
+          <a:lstStyle/>
+          <a:p>
+            <a:r>
+              <a:rPr lang="en-US" dirty="0"/>
+              <a:t>Backup slide with the complete architecture: agents, tool belt, data stores, model layer and the feedback loop.</a:t>
+            </a:r>
+            <a:endParaRPr lang="en-US" dirty="0"/>
+          </a:p>
+        </p:txBody>
+      </p:sp>
+      <p:sp>
+        <p:nvSpPr>
+          <p:cNvPr id="4" name="Slide Number Placeholder 3"/>
+          <p:cNvSpPr>
+            <a:spLocks noGrp="1"/>
+          </p:cNvSpPr>
+          <p:nvPr>
+            <p:ph type="sldNum" sz="quarter" idx="10"/>
+          </p:nvPr>
+        </p:nvSpPr>
+        <p:spPr/>
+        <p:txBody>
+          <a:bodyPr/>
+          <a:lstStyle/>
+          <a:p>
+            <a:fld id="{F7021451-1387-4CA6-816F-3879F97B5CBC}" type="slidenum">
+              <a:rPr lang="en-US"/>
+              <a:t>12</a:t>
             </a:fld>
             <a:endParaRPr lang="en-US"/>
           </a:p>
@@ -1783,7 +2260,7 @@
           <a:p>
             <a:r>
               <a:rPr lang="en-US" dirty="0"/>
-              <a:t>About 30 seconds. Limitations first, because the evaluators will ask. The abbreviation gap is the one we know about and measured. The next step is a language-model extractor, which our pluggable model layer already supports, plus a strict mode that trades more manual reviews for fewer missed pre-existing conditions.</a:t>
+              <a:t>About 50 seconds. Same claims, same rules, two ways of reading the discharge summary. The grey bars are the rules-only parser; the green bars add the local language model. On shorthand like abbreviations and telegraphic notes, the model reads what the parser cannot, and the number of risky claims wrongly paid falls. The third card is the safety check: a model can also invent a condition that is not there and cause a wrongful hold, so we count those too. The model must quote the summary, and we verify the quote, which is what keeps that number low.</a:t>
             </a:r>
             <a:endParaRPr lang="en-US" dirty="0"/>
           </a:p>
@@ -1871,7 +2348,7 @@
           <a:p>
             <a:r>
               <a:rPr lang="en-US" dirty="0"/>
-              <a:t>Close, then take questions. Both members should be ready to answer on any slide.</a:t>
+              <a:t>About 30 seconds. Limitations first, because the evaluators will ask. The abbreviation gap is the one we know about and measured. The next step is a language-model extractor, which our pluggable model layer already supports, plus a strict mode that trades more manual reviews for fewer missed pre-existing conditions.</a:t>
             </a:r>
             <a:endParaRPr lang="en-US" dirty="0"/>
           </a:p>
@@ -3487,8 +3964,8 @@
         </p:nvSpPr>
         <p:spPr>
           <a:xfrm>
-            <a:off x="457200" y="292608"/>
-            <a:ext cx="8229600" cy="777240"/>
+            <a:off x="548640" y="822960"/>
+            <a:ext cx="8046720" cy="822960"/>
           </a:xfrm>
           <a:prstGeom prst="rect">
             <a:avLst/>
@@ -3504,49 +3981,87 @@
               <a:buNone/>
             </a:pPr>
             <a:r>
-              <a:rPr lang="en-US" sz="2800" b="1" dirty="0">
-                <a:solidFill>
-                  <a:schemeClr val="tx1"/>
-                </a:solidFill>
-              </a:rPr>
-              <a:t>Appendix: the four demo claims</a:t>
-            </a:r>
-            <a:endParaRPr lang="en-US" sz="2800" dirty="0"/>
-          </a:p>
-        </p:txBody>
-      </p:sp>
-      <p:sp>
-        <p:nvSpPr>
-          <p:cNvPr id="3" name="Demo card 1"/>
+              <a:rPr lang="en-US" sz="4000" b="1" dirty="0">
+                <a:solidFill>
+                  <a:schemeClr val="bg1"/>
+                </a:solidFill>
+              </a:rPr>
+              <a:t>Thank you</a:t>
+            </a:r>
+            <a:endParaRPr lang="en-US" sz="4000" dirty="0"/>
+          </a:p>
+        </p:txBody>
+      </p:sp>
+      <p:sp>
+        <p:nvSpPr>
+          <p:cNvPr id="3" name="Text 0"/>
           <p:cNvSpPr/>
-          <p:nvPr/>
-        </p:nvSpPr>
-        <p:spPr>
-          <a:xfrm>
-            <a:off x="457200" y="1234440"/>
-            <a:ext cx="4023360" cy="1463040"/>
+          <p:nvPr>
+            <p:ph idx="101" type="body" hasCustomPrompt="1"/>
+          </p:nvPr>
+        </p:nvSpPr>
+        <p:spPr>
+          <a:xfrm>
+            <a:off x="548640" y="1691640"/>
+            <a:ext cx="7498080" cy="731520"/>
+          </a:xfrm>
+          <a:prstGeom prst="rect">
+            <a:avLst/>
+          </a:prstGeom>
+          <a:noFill/>
+          <a:ln/>
+        </p:spPr>
+        <p:txBody>
+          <a:bodyPr wrap="square" lIns="0" tIns="0" rIns="0" bIns="0" rtlCol="0" anchor="t"/>
+          <a:lstStyle/>
+          <a:p>
+            <a:pPr algn="l" indent="0" marL="0">
+              <a:buNone/>
+            </a:pPr>
+            <a:r>
+              <a:rPr lang="en-US" sz="1800" dirty="0">
+                <a:solidFill>
+                  <a:schemeClr val="bg2"/>
+                </a:solidFill>
+              </a:rPr>
+              <a:t>Questions welcome</a:t>
+            </a:r>
+            <a:endParaRPr lang="en-US" sz="1800" dirty="0"/>
+          </a:p>
+        </p:txBody>
+      </p:sp>
+      <p:sp>
+        <p:nvSpPr>
+          <p:cNvPr id="4" name="Closing members card"/>
+          <p:cNvSpPr/>
+          <p:nvPr/>
+        </p:nvSpPr>
+        <p:spPr>
+          <a:xfrm>
+            <a:off x="548640" y="2651760"/>
+            <a:ext cx="8046720" cy="1051560"/>
           </a:xfrm>
           <a:prstGeom prst="roundRect">
             <a:avLst>
-              <a:gd name="adj" fmla="val 5000"/>
+              <a:gd name="adj" fmla="val 6957"/>
             </a:avLst>
           </a:prstGeom>
           <a:solidFill>
-            <a:schemeClr val="bg2"/>
+            <a:schemeClr val="tx2"/>
           </a:solidFill>
           <a:ln/>
         </p:spPr>
       </p:sp>
       <p:sp>
         <p:nvSpPr>
-          <p:cNvPr id="4" name="Demo id 1"/>
-          <p:cNvSpPr txBox="1"/>
-          <p:nvPr/>
-        </p:nvSpPr>
-        <p:spPr>
-          <a:xfrm>
-            <a:off x="640080" y="1371600"/>
-            <a:ext cx="2377440" cy="274320"/>
+          <p:cNvPr id="5" name="Closing label"/>
+          <p:cNvSpPr txBox="1"/>
+          <p:nvPr/>
+        </p:nvSpPr>
+        <p:spPr>
+          <a:xfrm>
+            <a:off x="822960" y="2743200"/>
+            <a:ext cx="2743200" cy="228600"/>
           </a:xfrm>
           <a:prstGeom prst="rect">
             <a:avLst/>
@@ -3562,85 +4077,66 @@
               <a:buNone/>
             </a:pPr>
             <a:r>
-              <a:rPr lang="en-US" sz="1200" b="1" dirty="0">
-                <a:solidFill>
-                  <a:schemeClr val="tx2"/>
-                </a:solidFill>
-              </a:rPr>
-              <a:t>CLM-26-0001</a:t>
-            </a:r>
-            <a:endParaRPr lang="en-US" sz="1200" dirty="0"/>
-          </a:p>
-        </p:txBody>
-      </p:sp>
-      <p:sp>
-        <p:nvSpPr>
-          <p:cNvPr id="5" name="Demo outcome 1"/>
-          <p:cNvSpPr/>
-          <p:nvPr/>
-        </p:nvSpPr>
-        <p:spPr>
-          <a:xfrm>
-            <a:off x="3246120" y="1353312"/>
-            <a:ext cx="1051560" cy="292608"/>
-          </a:xfrm>
-          <a:prstGeom prst="roundRect">
-            <a:avLst>
-              <a:gd name="adj" fmla="val 50000"/>
-            </a:avLst>
-          </a:prstGeom>
-          <a:solidFill>
-            <a:schemeClr val="accent6"/>
-          </a:solidFill>
-          <a:ln/>
-        </p:spPr>
-      </p:sp>
-      <p:sp>
-        <p:nvSpPr>
-          <p:cNvPr id="6" name="Demo outcome label 1"/>
-          <p:cNvSpPr txBox="1"/>
-          <p:nvPr/>
-        </p:nvSpPr>
-        <p:spPr>
-          <a:xfrm>
-            <a:off x="3246120" y="1353312"/>
-            <a:ext cx="1051560" cy="292608"/>
-          </a:xfrm>
-          <a:prstGeom prst="rect">
-            <a:avLst/>
-          </a:prstGeom>
-          <a:noFill/>
-          <a:ln/>
-        </p:spPr>
-        <p:txBody>
-          <a:bodyPr wrap="square" lIns="0" tIns="0" rIns="0" bIns="0" rtlCol="0" anchor="ctr"/>
-          <a:lstStyle/>
-          <a:p>
-            <a:pPr algn="ctr" indent="0" marL="0">
-              <a:buNone/>
-            </a:pPr>
-            <a:r>
-              <a:rPr lang="en-US" sz="1100" b="1" dirty="0">
+              <a:rPr lang="en-US" sz="1100" b="1" spc="300" kern="0" dirty="0">
+                <a:solidFill>
+                  <a:schemeClr val="bg2"/>
+                </a:solidFill>
+              </a:rPr>
+              <a:t>GROUP MEMBERS</a:t>
+            </a:r>
+            <a:endParaRPr lang="en-US" sz="1100" dirty="0"/>
+          </a:p>
+        </p:txBody>
+      </p:sp>
+      <p:sp>
+        <p:nvSpPr>
+          <p:cNvPr id="6" name="Closing name 1"/>
+          <p:cNvSpPr txBox="1"/>
+          <p:nvPr/>
+        </p:nvSpPr>
+        <p:spPr>
+          <a:xfrm>
+            <a:off x="822960" y="3035808"/>
+            <a:ext cx="3017520" cy="365760"/>
+          </a:xfrm>
+          <a:prstGeom prst="rect">
+            <a:avLst/>
+          </a:prstGeom>
+          <a:noFill/>
+          <a:ln/>
+        </p:spPr>
+        <p:txBody>
+          <a:bodyPr wrap="square" lIns="0" tIns="0" rIns="0" bIns="0" rtlCol="0" anchor="t"/>
+          <a:lstStyle/>
+          <a:p>
+            <a:pPr indent="0" marL="0">
+              <a:buNone/>
+            </a:pPr>
+            <a:r>
+              <a:rPr lang="en-US" sz="2000" b="1" dirty="0">
                 <a:solidFill>
                   <a:schemeClr val="bg1"/>
                 </a:solidFill>
-              </a:rPr>
-              <a:t>PARTIAL</a:t>
-            </a:r>
-            <a:endParaRPr lang="en-US" sz="1100" dirty="0"/>
-          </a:p>
-        </p:txBody>
-      </p:sp>
-      <p:sp>
-        <p:nvSpPr>
-          <p:cNvPr id="7" name="Demo headline 1"/>
-          <p:cNvSpPr txBox="1"/>
-          <p:nvPr/>
-        </p:nvSpPr>
-        <p:spPr>
-          <a:xfrm>
-            <a:off x="640080" y="1737360"/>
-            <a:ext cx="3657600" cy="502920"/>
+                <a:latin typeface="Cambria" pitchFamily="34" charset="0"/>
+                <a:ea typeface="Cambria" pitchFamily="34" charset="-122"/>
+                <a:cs typeface="Cambria" pitchFamily="34" charset="-120"/>
+              </a:rPr>
+              <a:t>Harsh Salunkhe</a:t>
+            </a:r>
+            <a:endParaRPr lang="en-US" sz="2000" dirty="0"/>
+          </a:p>
+        </p:txBody>
+      </p:sp>
+      <p:sp>
+        <p:nvSpPr>
+          <p:cNvPr id="7" name="Closing roll 1"/>
+          <p:cNvSpPr txBox="1"/>
+          <p:nvPr/>
+        </p:nvSpPr>
+        <p:spPr>
+          <a:xfrm>
+            <a:off x="822960" y="3419856"/>
+            <a:ext cx="3017520" cy="274320"/>
           </a:xfrm>
           <a:prstGeom prst="rect">
             <a:avLst/>
@@ -3656,27 +4152,27 @@
               <a:buNone/>
             </a:pPr>
             <a:r>
-              <a:rPr lang="en-US" sz="1600" b="1" dirty="0">
-                <a:solidFill>
-                  <a:schemeClr val="tx1"/>
-                </a:solidFill>
-              </a:rPr>
-              <a:t>Room rent above the plan cap</a:t>
-            </a:r>
-            <a:endParaRPr lang="en-US" sz="1600" dirty="0"/>
-          </a:p>
-        </p:txBody>
-      </p:sp>
-      <p:sp>
-        <p:nvSpPr>
-          <p:cNvPr id="8" name="Demo detail 1"/>
-          <p:cNvSpPr txBox="1"/>
-          <p:nvPr/>
-        </p:nvSpPr>
-        <p:spPr>
-          <a:xfrm>
-            <a:off x="640080" y="2240280"/>
-            <a:ext cx="3657600" cy="365760"/>
+              <a:rPr lang="en-US" sz="1400" dirty="0">
+                <a:solidFill>
+                  <a:schemeClr val="bg2"/>
+                </a:solidFill>
+              </a:rPr>
+              <a:t>24070126066</a:t>
+            </a:r>
+            <a:endParaRPr lang="en-US" sz="1400" dirty="0"/>
+          </a:p>
+        </p:txBody>
+      </p:sp>
+      <p:sp>
+        <p:nvSpPr>
+          <p:cNvPr id="8" name="Closing name 2"/>
+          <p:cNvSpPr txBox="1"/>
+          <p:nvPr/>
+        </p:nvSpPr>
+        <p:spPr>
+          <a:xfrm>
+            <a:off x="4023360" y="3035808"/>
+            <a:ext cx="3017520" cy="365760"/>
           </a:xfrm>
           <a:prstGeom prst="rect">
             <a:avLst/>
@@ -3692,49 +4188,30 @@
               <a:buNone/>
             </a:pPr>
             <a:r>
-              <a:rPr lang="en-US" sz="1300" dirty="0">
-                <a:solidFill>
-                  <a:schemeClr val="tx2"/>
-                </a:solidFill>
-              </a:rPr>
-              <a:t>Proportionate deduction, clause C6</a:t>
-            </a:r>
-            <a:endParaRPr lang="en-US" sz="1300" dirty="0"/>
-          </a:p>
-        </p:txBody>
-      </p:sp>
-      <p:sp>
-        <p:nvSpPr>
-          <p:cNvPr id="9" name="Demo card 2"/>
-          <p:cNvSpPr/>
-          <p:nvPr/>
-        </p:nvSpPr>
-        <p:spPr>
-          <a:xfrm>
-            <a:off x="4663440" y="1234440"/>
-            <a:ext cx="4023360" cy="1463040"/>
-          </a:xfrm>
-          <a:prstGeom prst="roundRect">
-            <a:avLst>
-              <a:gd name="adj" fmla="val 5000"/>
-            </a:avLst>
-          </a:prstGeom>
-          <a:solidFill>
-            <a:schemeClr val="bg2"/>
-          </a:solidFill>
-          <a:ln/>
-        </p:spPr>
-      </p:sp>
-      <p:sp>
-        <p:nvSpPr>
-          <p:cNvPr id="10" name="Demo id 2"/>
-          <p:cNvSpPr txBox="1"/>
-          <p:nvPr/>
-        </p:nvSpPr>
-        <p:spPr>
-          <a:xfrm>
-            <a:off x="4846320" y="1371600"/>
-            <a:ext cx="2377440" cy="274320"/>
+              <a:rPr lang="en-US" sz="2000" b="1" dirty="0">
+                <a:solidFill>
+                  <a:schemeClr val="bg1"/>
+                </a:solidFill>
+                <a:latin typeface="Cambria" pitchFamily="34" charset="0"/>
+                <a:ea typeface="Cambria" pitchFamily="34" charset="-122"/>
+                <a:cs typeface="Cambria" pitchFamily="34" charset="-120"/>
+              </a:rPr>
+              <a:t>Dharna Sharma</a:t>
+            </a:r>
+            <a:endParaRPr lang="en-US" sz="2000" dirty="0"/>
+          </a:p>
+        </p:txBody>
+      </p:sp>
+      <p:sp>
+        <p:nvSpPr>
+          <p:cNvPr id="9" name="Closing roll 2"/>
+          <p:cNvSpPr txBox="1"/>
+          <p:nvPr/>
+        </p:nvSpPr>
+        <p:spPr>
+          <a:xfrm>
+            <a:off x="4023360" y="3419856"/>
+            <a:ext cx="3017520" cy="274320"/>
           </a:xfrm>
           <a:prstGeom prst="rect">
             <a:avLst/>
@@ -3750,85 +4227,27 @@
               <a:buNone/>
             </a:pPr>
             <a:r>
-              <a:rPr lang="en-US" sz="1200" b="1" dirty="0">
-                <a:solidFill>
-                  <a:schemeClr val="tx2"/>
-                </a:solidFill>
-              </a:rPr>
-              <a:t>CLM-26-0007</a:t>
-            </a:r>
-            <a:endParaRPr lang="en-US" sz="1200" dirty="0"/>
-          </a:p>
-        </p:txBody>
-      </p:sp>
-      <p:sp>
-        <p:nvSpPr>
-          <p:cNvPr id="11" name="Demo outcome 2"/>
-          <p:cNvSpPr/>
-          <p:nvPr/>
-        </p:nvSpPr>
-        <p:spPr>
-          <a:xfrm>
-            <a:off x="7452360" y="1353312"/>
-            <a:ext cx="1051560" cy="292608"/>
-          </a:xfrm>
-          <a:prstGeom prst="roundRect">
-            <a:avLst>
-              <a:gd name="adj" fmla="val 50000"/>
-            </a:avLst>
-          </a:prstGeom>
-          <a:solidFill>
-            <a:schemeClr val="accent5"/>
-          </a:solidFill>
-          <a:ln/>
-        </p:spPr>
-      </p:sp>
-      <p:sp>
-        <p:nvSpPr>
-          <p:cNvPr id="12" name="Demo outcome label 2"/>
-          <p:cNvSpPr txBox="1"/>
-          <p:nvPr/>
-        </p:nvSpPr>
-        <p:spPr>
-          <a:xfrm>
-            <a:off x="7452360" y="1353312"/>
-            <a:ext cx="1051560" cy="292608"/>
-          </a:xfrm>
-          <a:prstGeom prst="rect">
-            <a:avLst/>
-          </a:prstGeom>
-          <a:noFill/>
-          <a:ln/>
-        </p:spPr>
-        <p:txBody>
-          <a:bodyPr wrap="square" lIns="0" tIns="0" rIns="0" bIns="0" rtlCol="0" anchor="ctr"/>
-          <a:lstStyle/>
-          <a:p>
-            <a:pPr algn="ctr" indent="0" marL="0">
-              <a:buNone/>
-            </a:pPr>
-            <a:r>
-              <a:rPr lang="en-US" sz="1100" b="1" dirty="0">
-                <a:solidFill>
-                  <a:schemeClr val="bg1"/>
-                </a:solidFill>
-              </a:rPr>
-              <a:t>REJECT</a:t>
-            </a:r>
-            <a:endParaRPr lang="en-US" sz="1100" dirty="0"/>
-          </a:p>
-        </p:txBody>
-      </p:sp>
-      <p:sp>
-        <p:nvSpPr>
-          <p:cNvPr id="13" name="Demo headline 2"/>
-          <p:cNvSpPr txBox="1"/>
-          <p:nvPr/>
-        </p:nvSpPr>
-        <p:spPr>
-          <a:xfrm>
-            <a:off x="4846320" y="1737360"/>
-            <a:ext cx="3657600" cy="502920"/>
+              <a:rPr lang="en-US" sz="1400" dirty="0">
+                <a:solidFill>
+                  <a:schemeClr val="bg2"/>
+                </a:solidFill>
+              </a:rPr>
+              <a:t>24070126053</a:t>
+            </a:r>
+            <a:endParaRPr lang="en-US" sz="1400" dirty="0"/>
+          </a:p>
+        </p:txBody>
+      </p:sp>
+      <p:sp>
+        <p:nvSpPr>
+          <p:cNvPr id="10" name="Repo link"/>
+          <p:cNvSpPr txBox="1"/>
+          <p:nvPr/>
+        </p:nvSpPr>
+        <p:spPr>
+          <a:xfrm>
+            <a:off x="548640" y="3977640"/>
+            <a:ext cx="8046720" cy="274320"/>
           </a:xfrm>
           <a:prstGeom prst="rect">
             <a:avLst/>
@@ -3844,27 +4263,27 @@
               <a:buNone/>
             </a:pPr>
             <a:r>
-              <a:rPr lang="en-US" sz="1600" b="1" dirty="0">
-                <a:solidFill>
-                  <a:schemeClr val="tx1"/>
-                </a:solidFill>
-              </a:rPr>
-              <a:t>Pre-existing condition inside 24 months</a:t>
-            </a:r>
-            <a:endParaRPr lang="en-US" sz="1600" dirty="0"/>
-          </a:p>
-        </p:txBody>
-      </p:sp>
-      <p:sp>
-        <p:nvSpPr>
-          <p:cNvPr id="14" name="Demo detail 2"/>
-          <p:cNvSpPr txBox="1"/>
-          <p:nvPr/>
-        </p:nvSpPr>
-        <p:spPr>
-          <a:xfrm>
-            <a:off x="4846320" y="2240280"/>
-            <a:ext cx="3657600" cy="365760"/>
+              <a:rPr lang="en-US" sz="1400" dirty="0">
+                <a:solidFill>
+                  <a:schemeClr val="bg2"/>
+                </a:solidFill>
+              </a:rPr>
+              <a:t>Code: github.com/HarshSalunkhe2005/claims-adjudication-agent  (full code also submitted as a zip)</a:t>
+            </a:r>
+            <a:endParaRPr lang="en-US" sz="1400" dirty="0"/>
+          </a:p>
+        </p:txBody>
+      </p:sp>
+      <p:sp>
+        <p:nvSpPr>
+          <p:cNvPr id="11" name="Local note"/>
+          <p:cNvSpPr txBox="1"/>
+          <p:nvPr/>
+        </p:nvSpPr>
+        <p:spPr>
+          <a:xfrm>
+            <a:off x="548640" y="4343400"/>
+            <a:ext cx="8046720" cy="274320"/>
           </a:xfrm>
           <a:prstGeom prst="rect">
             <a:avLst/>
@@ -3880,435 +4299,14 @@
               <a:buNone/>
             </a:pPr>
             <a:r>
-              <a:rPr lang="en-US" sz="1300" dirty="0">
-                <a:solidFill>
-                  <a:schemeClr val="tx2"/>
-                </a:solidFill>
-              </a:rPr>
-              <a:t>Early exit, remaining checks skipped, clause C3</a:t>
-            </a:r>
-            <a:endParaRPr lang="en-US" sz="1300" dirty="0"/>
-          </a:p>
-        </p:txBody>
-      </p:sp>
-      <p:sp>
-        <p:nvSpPr>
-          <p:cNvPr id="15" name="Demo card 3"/>
-          <p:cNvSpPr/>
-          <p:nvPr/>
-        </p:nvSpPr>
-        <p:spPr>
-          <a:xfrm>
-            <a:off x="457200" y="2880360"/>
-            <a:ext cx="4023360" cy="1463040"/>
-          </a:xfrm>
-          <a:prstGeom prst="roundRect">
-            <a:avLst>
-              <a:gd name="adj" fmla="val 5000"/>
-            </a:avLst>
-          </a:prstGeom>
-          <a:solidFill>
-            <a:schemeClr val="bg2"/>
-          </a:solidFill>
-          <a:ln/>
-        </p:spPr>
-      </p:sp>
-      <p:sp>
-        <p:nvSpPr>
-          <p:cNvPr id="16" name="Demo id 3"/>
-          <p:cNvSpPr txBox="1"/>
-          <p:nvPr/>
-        </p:nvSpPr>
-        <p:spPr>
-          <a:xfrm>
-            <a:off x="640080" y="3017520"/>
-            <a:ext cx="2377440" cy="274320"/>
-          </a:xfrm>
-          <a:prstGeom prst="rect">
-            <a:avLst/>
-          </a:prstGeom>
-          <a:noFill/>
-          <a:ln/>
-        </p:spPr>
-        <p:txBody>
-          <a:bodyPr wrap="square" lIns="0" tIns="0" rIns="0" bIns="0" rtlCol="0" anchor="t"/>
-          <a:lstStyle/>
-          <a:p>
-            <a:pPr indent="0" marL="0">
-              <a:buNone/>
-            </a:pPr>
-            <a:r>
-              <a:rPr lang="en-US" sz="1200" b="1" dirty="0">
-                <a:solidFill>
-                  <a:schemeClr val="tx2"/>
-                </a:solidFill>
-              </a:rPr>
-              <a:t>CLM-26-0019</a:t>
-            </a:r>
-            <a:endParaRPr lang="en-US" sz="1200" dirty="0"/>
-          </a:p>
-        </p:txBody>
-      </p:sp>
-      <p:sp>
-        <p:nvSpPr>
-          <p:cNvPr id="17" name="Demo outcome 3"/>
-          <p:cNvSpPr/>
-          <p:nvPr/>
-        </p:nvSpPr>
-        <p:spPr>
-          <a:xfrm>
-            <a:off x="3246120" y="2999232"/>
-            <a:ext cx="1051560" cy="292608"/>
-          </a:xfrm>
-          <a:prstGeom prst="roundRect">
-            <a:avLst>
-              <a:gd name="adj" fmla="val 50000"/>
-            </a:avLst>
-          </a:prstGeom>
-          <a:solidFill>
-            <a:schemeClr val="accent2"/>
-          </a:solidFill>
-          <a:ln/>
-        </p:spPr>
-      </p:sp>
-      <p:sp>
-        <p:nvSpPr>
-          <p:cNvPr id="18" name="Demo outcome label 3"/>
-          <p:cNvSpPr txBox="1"/>
-          <p:nvPr/>
-        </p:nvSpPr>
-        <p:spPr>
-          <a:xfrm>
-            <a:off x="3246120" y="2999232"/>
-            <a:ext cx="1051560" cy="292608"/>
-          </a:xfrm>
-          <a:prstGeom prst="rect">
-            <a:avLst/>
-          </a:prstGeom>
-          <a:noFill/>
-          <a:ln/>
-        </p:spPr>
-        <p:txBody>
-          <a:bodyPr wrap="square" lIns="0" tIns="0" rIns="0" bIns="0" rtlCol="0" anchor="ctr"/>
-          <a:lstStyle/>
-          <a:p>
-            <a:pPr algn="ctr" indent="0" marL="0">
-              <a:buNone/>
-            </a:pPr>
-            <a:r>
-              <a:rPr lang="en-US" sz="1100" b="1" dirty="0">
-                <a:solidFill>
-                  <a:schemeClr val="bg1"/>
-                </a:solidFill>
-              </a:rPr>
-              <a:t>ESCALATE</a:t>
-            </a:r>
-            <a:endParaRPr lang="en-US" sz="1100" dirty="0"/>
-          </a:p>
-        </p:txBody>
-      </p:sp>
-      <p:sp>
-        <p:nvSpPr>
-          <p:cNvPr id="19" name="Demo headline 3"/>
-          <p:cNvSpPr txBox="1"/>
-          <p:nvPr/>
-        </p:nvSpPr>
-        <p:spPr>
-          <a:xfrm>
-            <a:off x="640080" y="3383280"/>
-            <a:ext cx="3657600" cy="502920"/>
-          </a:xfrm>
-          <a:prstGeom prst="rect">
-            <a:avLst/>
-          </a:prstGeom>
-          <a:noFill/>
-          <a:ln/>
-        </p:spPr>
-        <p:txBody>
-          <a:bodyPr wrap="square" lIns="0" tIns="0" rIns="0" bIns="0" rtlCol="0" anchor="t"/>
-          <a:lstStyle/>
-          <a:p>
-            <a:pPr indent="0" marL="0">
-              <a:buNone/>
-            </a:pPr>
-            <a:r>
-              <a:rPr lang="en-US" sz="1600" b="1" dirty="0">
-                <a:solidFill>
-                  <a:schemeClr val="tx1"/>
-                </a:solidFill>
-              </a:rPr>
-              <a:t>Quick plan misses an inflated bill</a:t>
-            </a:r>
-            <a:endParaRPr lang="en-US" sz="1600" dirty="0"/>
-          </a:p>
-        </p:txBody>
-      </p:sp>
-      <p:sp>
-        <p:nvSpPr>
-          <p:cNvPr id="20" name="Demo detail 3"/>
-          <p:cNvSpPr txBox="1"/>
-          <p:nvPr/>
-        </p:nvSpPr>
-        <p:spPr>
-          <a:xfrm>
-            <a:off x="640080" y="3886200"/>
-            <a:ext cx="3657600" cy="365760"/>
-          </a:xfrm>
-          <a:prstGeom prst="rect">
-            <a:avLst/>
-          </a:prstGeom>
-          <a:noFill/>
-          <a:ln/>
-        </p:spPr>
-        <p:txBody>
-          <a:bodyPr wrap="square" lIns="0" tIns="0" rIns="0" bIns="0" rtlCol="0" anchor="t"/>
-          <a:lstStyle/>
-          <a:p>
-            <a:pPr indent="0" marL="0">
-              <a:buNone/>
-            </a:pPr>
-            <a:r>
-              <a:rPr lang="en-US" sz="1300" dirty="0">
-                <a:solidFill>
-                  <a:schemeClr val="tx2"/>
-                </a:solidFill>
-              </a:rPr>
-              <a:t>Critic sends it back, fraud score, human review</a:t>
-            </a:r>
-            <a:endParaRPr lang="en-US" sz="1300" dirty="0"/>
-          </a:p>
-        </p:txBody>
-      </p:sp>
-      <p:sp>
-        <p:nvSpPr>
-          <p:cNvPr id="21" name="Demo card 4"/>
-          <p:cNvSpPr/>
-          <p:nvPr/>
-        </p:nvSpPr>
-        <p:spPr>
-          <a:xfrm>
-            <a:off x="4663440" y="2880360"/>
-            <a:ext cx="4023360" cy="1463040"/>
-          </a:xfrm>
-          <a:prstGeom prst="roundRect">
-            <a:avLst>
-              <a:gd name="adj" fmla="val 5000"/>
-            </a:avLst>
-          </a:prstGeom>
-          <a:solidFill>
-            <a:schemeClr val="bg2"/>
-          </a:solidFill>
-          <a:ln/>
-        </p:spPr>
-      </p:sp>
-      <p:sp>
-        <p:nvSpPr>
-          <p:cNvPr id="22" name="Demo id 4"/>
-          <p:cNvSpPr txBox="1"/>
-          <p:nvPr/>
-        </p:nvSpPr>
-        <p:spPr>
-          <a:xfrm>
-            <a:off x="4846320" y="3017520"/>
-            <a:ext cx="2377440" cy="274320"/>
-          </a:xfrm>
-          <a:prstGeom prst="rect">
-            <a:avLst/>
-          </a:prstGeom>
-          <a:noFill/>
-          <a:ln/>
-        </p:spPr>
-        <p:txBody>
-          <a:bodyPr wrap="square" lIns="0" tIns="0" rIns="0" bIns="0" rtlCol="0" anchor="t"/>
-          <a:lstStyle/>
-          <a:p>
-            <a:pPr indent="0" marL="0">
-              <a:buNone/>
-            </a:pPr>
-            <a:r>
-              <a:rPr lang="en-US" sz="1200" b="1" dirty="0">
-                <a:solidFill>
-                  <a:schemeClr val="tx2"/>
-                </a:solidFill>
-              </a:rPr>
-              <a:t>CLM-26-0003 + error</a:t>
-            </a:r>
-            <a:endParaRPr lang="en-US" sz="1200" dirty="0"/>
-          </a:p>
-        </p:txBody>
-      </p:sp>
-      <p:sp>
-        <p:nvSpPr>
-          <p:cNvPr id="23" name="Demo outcome 4"/>
-          <p:cNvSpPr/>
-          <p:nvPr/>
-        </p:nvSpPr>
-        <p:spPr>
-          <a:xfrm>
-            <a:off x="7452360" y="2999232"/>
-            <a:ext cx="1051560" cy="292608"/>
-          </a:xfrm>
-          <a:prstGeom prst="roundRect">
-            <a:avLst>
-              <a:gd name="adj" fmla="val 50000"/>
-            </a:avLst>
-          </a:prstGeom>
-          <a:solidFill>
-            <a:schemeClr val="accent4"/>
-          </a:solidFill>
-          <a:ln/>
-        </p:spPr>
-      </p:sp>
-      <p:sp>
-        <p:nvSpPr>
-          <p:cNvPr id="24" name="Demo outcome label 4"/>
-          <p:cNvSpPr txBox="1"/>
-          <p:nvPr/>
-        </p:nvSpPr>
-        <p:spPr>
-          <a:xfrm>
-            <a:off x="7452360" y="2999232"/>
-            <a:ext cx="1051560" cy="292608"/>
-          </a:xfrm>
-          <a:prstGeom prst="rect">
-            <a:avLst/>
-          </a:prstGeom>
-          <a:noFill/>
-          <a:ln/>
-        </p:spPr>
-        <p:txBody>
-          <a:bodyPr wrap="square" lIns="0" tIns="0" rIns="0" bIns="0" rtlCol="0" anchor="ctr"/>
-          <a:lstStyle/>
-          <a:p>
-            <a:pPr algn="ctr" indent="0" marL="0">
-              <a:buNone/>
-            </a:pPr>
-            <a:r>
-              <a:rPr lang="en-US" sz="1100" b="1" dirty="0">
-                <a:solidFill>
-                  <a:schemeClr val="bg1"/>
-                </a:solidFill>
-              </a:rPr>
-              <a:t>APPROVE</a:t>
-            </a:r>
-            <a:endParaRPr lang="en-US" sz="1100" dirty="0"/>
-          </a:p>
-        </p:txBody>
-      </p:sp>
-      <p:sp>
-        <p:nvSpPr>
-          <p:cNvPr id="25" name="Demo headline 4"/>
-          <p:cNvSpPr txBox="1"/>
-          <p:nvPr/>
-        </p:nvSpPr>
-        <p:spPr>
-          <a:xfrm>
-            <a:off x="4846320" y="3383280"/>
-            <a:ext cx="3657600" cy="502920"/>
-          </a:xfrm>
-          <a:prstGeom prst="rect">
-            <a:avLst/>
-          </a:prstGeom>
-          <a:noFill/>
-          <a:ln/>
-        </p:spPr>
-        <p:txBody>
-          <a:bodyPr wrap="square" lIns="0" tIns="0" rIns="0" bIns="0" rtlCol="0" anchor="t"/>
-          <a:lstStyle/>
-          <a:p>
-            <a:pPr indent="0" marL="0">
-              <a:buNone/>
-            </a:pPr>
-            <a:r>
-              <a:rPr lang="en-US" sz="1600" b="1" dirty="0">
-                <a:solidFill>
-                  <a:schemeClr val="tx1"/>
-                </a:solidFill>
-              </a:rPr>
-              <a:t>Executor overpays by 15% on purpose</a:t>
-            </a:r>
-            <a:endParaRPr lang="en-US" sz="1600" dirty="0"/>
-          </a:p>
-        </p:txBody>
-      </p:sp>
-      <p:sp>
-        <p:nvSpPr>
-          <p:cNvPr id="26" name="Demo detail 4"/>
-          <p:cNvSpPr txBox="1"/>
-          <p:nvPr/>
-        </p:nvSpPr>
-        <p:spPr>
-          <a:xfrm>
-            <a:off x="4846320" y="3886200"/>
-            <a:ext cx="3657600" cy="365760"/>
-          </a:xfrm>
-          <a:prstGeom prst="rect">
-            <a:avLst/>
-          </a:prstGeom>
-          <a:noFill/>
-          <a:ln/>
-        </p:spPr>
-        <p:txBody>
-          <a:bodyPr wrap="square" lIns="0" tIns="0" rIns="0" bIns="0" rtlCol="0" anchor="t"/>
-          <a:lstStyle/>
-          <a:p>
-            <a:pPr indent="0" marL="0">
-              <a:buNone/>
-            </a:pPr>
-            <a:r>
-              <a:rPr lang="en-US" sz="1300" dirty="0">
-                <a:solidFill>
-                  <a:schemeClr val="tx2"/>
-                </a:solidFill>
-              </a:rPr>
-              <a:t>Critic catches it, recomputes, passes</a:t>
-            </a:r>
-            <a:endParaRPr lang="en-US" sz="1300" dirty="0"/>
-          </a:p>
-        </p:txBody>
-      </p:sp>
-      <p:sp>
-        <p:nvSpPr>
-          <p:cNvPr id="25" name="Slide Number Placeholder 0"/>
-          <p:cNvSpPr>
-            <a:spLocks noGrp="1"/>
-          </p:cNvSpPr>
-          <p:nvPr>
-            <p:ph type="sldNum" sz="quarter" idx="4294967295"/>
-          </p:nvPr>
-        </p:nvSpPr>
-        <p:spPr>
-          <a:xfrm>
-            <a:off x="8321040" y="4773168"/>
-            <a:ext cx="457200" cy="228600"/>
-          </a:xfrm>
-          <a:prstGeom prst="rect">
-            <a:avLst/>
-          </a:prstGeom>
-          <a:extLst>
-            <a:ext uri="{C572A759-6A51-4108-AA02-DFA0A04FC94B}">
-              <ma14:wrappingTextBoxFlag xmlns:ma14="http://schemas.microsoft.com/office/mac/drawingml/2011/main" val="0"/>
-            </a:ext>
-          </a:extLst>
-        </p:spPr>
-        <p:txBody>
-          <a:bodyPr/>
-          <a:lstStyle>
-            <a:lvl1pPr>
-              <a:defRPr sz="1000">
-                <a:solidFill>
-                  <a:schemeClr val="tx2"/>
-                </a:solidFill>
-              </a:defRPr>
-            </a:lvl1pPr>
-          </a:lstStyle>
-          <a:p>
-            <a:pPr algn="r"/>
-            <a:fld id="{F7021451-1387-4CA6-816F-3879F97B5CBC}" type="slidenum">
-              <a:rPr b="0" lang="en-US"/>
-              <a:t>10</a:t>
-            </a:fld>
-            <a:endParaRPr lang="en-US"/>
+              <a:rPr lang="en-US" sz="1400" dirty="0">
+                <a:solidFill>
+                  <a:schemeClr val="bg2"/>
+                </a:solidFill>
+              </a:rPr>
+              <a:t>Runs on a laptop: local language model through Ollama, no cloud services</a:t>
+            </a:r>
+            <a:endParaRPr lang="en-US" sz="1400" dirty="0"/>
           </a:p>
         </p:txBody>
       </p:sp>
@@ -4369,6 +4367,866 @@
                   <a:schemeClr val="tx1"/>
                 </a:solidFill>
               </a:rPr>
+              <a:t>Appendix: the four demo claims</a:t>
+            </a:r>
+            <a:endParaRPr lang="en-US" sz="2800" dirty="0"/>
+          </a:p>
+        </p:txBody>
+      </p:sp>
+      <p:sp>
+        <p:nvSpPr>
+          <p:cNvPr id="3" name="Demo card 1"/>
+          <p:cNvSpPr/>
+          <p:nvPr/>
+        </p:nvSpPr>
+        <p:spPr>
+          <a:xfrm>
+            <a:off x="457200" y="1234440"/>
+            <a:ext cx="4023360" cy="1463040"/>
+          </a:xfrm>
+          <a:prstGeom prst="roundRect">
+            <a:avLst>
+              <a:gd name="adj" fmla="val 5000"/>
+            </a:avLst>
+          </a:prstGeom>
+          <a:solidFill>
+            <a:schemeClr val="bg2"/>
+          </a:solidFill>
+          <a:ln/>
+        </p:spPr>
+      </p:sp>
+      <p:sp>
+        <p:nvSpPr>
+          <p:cNvPr id="4" name="Demo id 1"/>
+          <p:cNvSpPr txBox="1"/>
+          <p:nvPr/>
+        </p:nvSpPr>
+        <p:spPr>
+          <a:xfrm>
+            <a:off x="640080" y="1371600"/>
+            <a:ext cx="2377440" cy="274320"/>
+          </a:xfrm>
+          <a:prstGeom prst="rect">
+            <a:avLst/>
+          </a:prstGeom>
+          <a:noFill/>
+          <a:ln/>
+        </p:spPr>
+        <p:txBody>
+          <a:bodyPr wrap="square" lIns="0" tIns="0" rIns="0" bIns="0" rtlCol="0" anchor="t"/>
+          <a:lstStyle/>
+          <a:p>
+            <a:pPr indent="0" marL="0">
+              <a:buNone/>
+            </a:pPr>
+            <a:r>
+              <a:rPr lang="en-US" sz="1200" b="1" dirty="0">
+                <a:solidFill>
+                  <a:schemeClr val="tx2"/>
+                </a:solidFill>
+              </a:rPr>
+              <a:t>CLM-26-0001</a:t>
+            </a:r>
+            <a:endParaRPr lang="en-US" sz="1200" dirty="0"/>
+          </a:p>
+        </p:txBody>
+      </p:sp>
+      <p:sp>
+        <p:nvSpPr>
+          <p:cNvPr id="5" name="Demo outcome 1"/>
+          <p:cNvSpPr/>
+          <p:nvPr/>
+        </p:nvSpPr>
+        <p:spPr>
+          <a:xfrm>
+            <a:off x="3246120" y="1353312"/>
+            <a:ext cx="1051560" cy="292608"/>
+          </a:xfrm>
+          <a:prstGeom prst="roundRect">
+            <a:avLst>
+              <a:gd name="adj" fmla="val 50000"/>
+            </a:avLst>
+          </a:prstGeom>
+          <a:solidFill>
+            <a:schemeClr val="accent6"/>
+          </a:solidFill>
+          <a:ln/>
+        </p:spPr>
+      </p:sp>
+      <p:sp>
+        <p:nvSpPr>
+          <p:cNvPr id="6" name="Demo outcome label 1"/>
+          <p:cNvSpPr txBox="1"/>
+          <p:nvPr/>
+        </p:nvSpPr>
+        <p:spPr>
+          <a:xfrm>
+            <a:off x="3246120" y="1353312"/>
+            <a:ext cx="1051560" cy="292608"/>
+          </a:xfrm>
+          <a:prstGeom prst="rect">
+            <a:avLst/>
+          </a:prstGeom>
+          <a:noFill/>
+          <a:ln/>
+        </p:spPr>
+        <p:txBody>
+          <a:bodyPr wrap="square" lIns="0" tIns="0" rIns="0" bIns="0" rtlCol="0" anchor="ctr"/>
+          <a:lstStyle/>
+          <a:p>
+            <a:pPr algn="ctr" indent="0" marL="0">
+              <a:buNone/>
+            </a:pPr>
+            <a:r>
+              <a:rPr lang="en-US" sz="1100" b="1" dirty="0">
+                <a:solidFill>
+                  <a:schemeClr val="bg1"/>
+                </a:solidFill>
+              </a:rPr>
+              <a:t>PARTIAL</a:t>
+            </a:r>
+            <a:endParaRPr lang="en-US" sz="1100" dirty="0"/>
+          </a:p>
+        </p:txBody>
+      </p:sp>
+      <p:sp>
+        <p:nvSpPr>
+          <p:cNvPr id="7" name="Demo headline 1"/>
+          <p:cNvSpPr txBox="1"/>
+          <p:nvPr/>
+        </p:nvSpPr>
+        <p:spPr>
+          <a:xfrm>
+            <a:off x="640080" y="1737360"/>
+            <a:ext cx="3657600" cy="502920"/>
+          </a:xfrm>
+          <a:prstGeom prst="rect">
+            <a:avLst/>
+          </a:prstGeom>
+          <a:noFill/>
+          <a:ln/>
+        </p:spPr>
+        <p:txBody>
+          <a:bodyPr wrap="square" lIns="0" tIns="0" rIns="0" bIns="0" rtlCol="0" anchor="t"/>
+          <a:lstStyle/>
+          <a:p>
+            <a:pPr indent="0" marL="0">
+              <a:buNone/>
+            </a:pPr>
+            <a:r>
+              <a:rPr lang="en-US" sz="1600" b="1" dirty="0">
+                <a:solidFill>
+                  <a:schemeClr val="tx1"/>
+                </a:solidFill>
+              </a:rPr>
+              <a:t>Room rent above the plan cap</a:t>
+            </a:r>
+            <a:endParaRPr lang="en-US" sz="1600" dirty="0"/>
+          </a:p>
+        </p:txBody>
+      </p:sp>
+      <p:sp>
+        <p:nvSpPr>
+          <p:cNvPr id="8" name="Demo detail 1"/>
+          <p:cNvSpPr txBox="1"/>
+          <p:nvPr/>
+        </p:nvSpPr>
+        <p:spPr>
+          <a:xfrm>
+            <a:off x="640080" y="2240280"/>
+            <a:ext cx="3657600" cy="365760"/>
+          </a:xfrm>
+          <a:prstGeom prst="rect">
+            <a:avLst/>
+          </a:prstGeom>
+          <a:noFill/>
+          <a:ln/>
+        </p:spPr>
+        <p:txBody>
+          <a:bodyPr wrap="square" lIns="0" tIns="0" rIns="0" bIns="0" rtlCol="0" anchor="t"/>
+          <a:lstStyle/>
+          <a:p>
+            <a:pPr indent="0" marL="0">
+              <a:buNone/>
+            </a:pPr>
+            <a:r>
+              <a:rPr lang="en-US" sz="1300" dirty="0">
+                <a:solidFill>
+                  <a:schemeClr val="tx2"/>
+                </a:solidFill>
+              </a:rPr>
+              <a:t>Proportionate deduction, clause C6</a:t>
+            </a:r>
+            <a:endParaRPr lang="en-US" sz="1300" dirty="0"/>
+          </a:p>
+        </p:txBody>
+      </p:sp>
+      <p:sp>
+        <p:nvSpPr>
+          <p:cNvPr id="9" name="Demo card 2"/>
+          <p:cNvSpPr/>
+          <p:nvPr/>
+        </p:nvSpPr>
+        <p:spPr>
+          <a:xfrm>
+            <a:off x="4663440" y="1234440"/>
+            <a:ext cx="4023360" cy="1463040"/>
+          </a:xfrm>
+          <a:prstGeom prst="roundRect">
+            <a:avLst>
+              <a:gd name="adj" fmla="val 5000"/>
+            </a:avLst>
+          </a:prstGeom>
+          <a:solidFill>
+            <a:schemeClr val="bg2"/>
+          </a:solidFill>
+          <a:ln/>
+        </p:spPr>
+      </p:sp>
+      <p:sp>
+        <p:nvSpPr>
+          <p:cNvPr id="10" name="Demo id 2"/>
+          <p:cNvSpPr txBox="1"/>
+          <p:nvPr/>
+        </p:nvSpPr>
+        <p:spPr>
+          <a:xfrm>
+            <a:off x="4846320" y="1371600"/>
+            <a:ext cx="2377440" cy="274320"/>
+          </a:xfrm>
+          <a:prstGeom prst="rect">
+            <a:avLst/>
+          </a:prstGeom>
+          <a:noFill/>
+          <a:ln/>
+        </p:spPr>
+        <p:txBody>
+          <a:bodyPr wrap="square" lIns="0" tIns="0" rIns="0" bIns="0" rtlCol="0" anchor="t"/>
+          <a:lstStyle/>
+          <a:p>
+            <a:pPr indent="0" marL="0">
+              <a:buNone/>
+            </a:pPr>
+            <a:r>
+              <a:rPr lang="en-US" sz="1200" b="1" dirty="0">
+                <a:solidFill>
+                  <a:schemeClr val="tx2"/>
+                </a:solidFill>
+              </a:rPr>
+              <a:t>CLM-26-0007</a:t>
+            </a:r>
+            <a:endParaRPr lang="en-US" sz="1200" dirty="0"/>
+          </a:p>
+        </p:txBody>
+      </p:sp>
+      <p:sp>
+        <p:nvSpPr>
+          <p:cNvPr id="11" name="Demo outcome 2"/>
+          <p:cNvSpPr/>
+          <p:nvPr/>
+        </p:nvSpPr>
+        <p:spPr>
+          <a:xfrm>
+            <a:off x="7452360" y="1353312"/>
+            <a:ext cx="1051560" cy="292608"/>
+          </a:xfrm>
+          <a:prstGeom prst="roundRect">
+            <a:avLst>
+              <a:gd name="adj" fmla="val 50000"/>
+            </a:avLst>
+          </a:prstGeom>
+          <a:solidFill>
+            <a:schemeClr val="accent5"/>
+          </a:solidFill>
+          <a:ln/>
+        </p:spPr>
+      </p:sp>
+      <p:sp>
+        <p:nvSpPr>
+          <p:cNvPr id="12" name="Demo outcome label 2"/>
+          <p:cNvSpPr txBox="1"/>
+          <p:nvPr/>
+        </p:nvSpPr>
+        <p:spPr>
+          <a:xfrm>
+            <a:off x="7452360" y="1353312"/>
+            <a:ext cx="1051560" cy="292608"/>
+          </a:xfrm>
+          <a:prstGeom prst="rect">
+            <a:avLst/>
+          </a:prstGeom>
+          <a:noFill/>
+          <a:ln/>
+        </p:spPr>
+        <p:txBody>
+          <a:bodyPr wrap="square" lIns="0" tIns="0" rIns="0" bIns="0" rtlCol="0" anchor="ctr"/>
+          <a:lstStyle/>
+          <a:p>
+            <a:pPr algn="ctr" indent="0" marL="0">
+              <a:buNone/>
+            </a:pPr>
+            <a:r>
+              <a:rPr lang="en-US" sz="1100" b="1" dirty="0">
+                <a:solidFill>
+                  <a:schemeClr val="bg1"/>
+                </a:solidFill>
+              </a:rPr>
+              <a:t>REJECT</a:t>
+            </a:r>
+            <a:endParaRPr lang="en-US" sz="1100" dirty="0"/>
+          </a:p>
+        </p:txBody>
+      </p:sp>
+      <p:sp>
+        <p:nvSpPr>
+          <p:cNvPr id="13" name="Demo headline 2"/>
+          <p:cNvSpPr txBox="1"/>
+          <p:nvPr/>
+        </p:nvSpPr>
+        <p:spPr>
+          <a:xfrm>
+            <a:off x="4846320" y="1737360"/>
+            <a:ext cx="3657600" cy="502920"/>
+          </a:xfrm>
+          <a:prstGeom prst="rect">
+            <a:avLst/>
+          </a:prstGeom>
+          <a:noFill/>
+          <a:ln/>
+        </p:spPr>
+        <p:txBody>
+          <a:bodyPr wrap="square" lIns="0" tIns="0" rIns="0" bIns="0" rtlCol="0" anchor="t"/>
+          <a:lstStyle/>
+          <a:p>
+            <a:pPr indent="0" marL="0">
+              <a:buNone/>
+            </a:pPr>
+            <a:r>
+              <a:rPr lang="en-US" sz="1600" b="1" dirty="0">
+                <a:solidFill>
+                  <a:schemeClr val="tx1"/>
+                </a:solidFill>
+              </a:rPr>
+              <a:t>Pre-existing condition inside 24 months</a:t>
+            </a:r>
+            <a:endParaRPr lang="en-US" sz="1600" dirty="0"/>
+          </a:p>
+        </p:txBody>
+      </p:sp>
+      <p:sp>
+        <p:nvSpPr>
+          <p:cNvPr id="14" name="Demo detail 2"/>
+          <p:cNvSpPr txBox="1"/>
+          <p:nvPr/>
+        </p:nvSpPr>
+        <p:spPr>
+          <a:xfrm>
+            <a:off x="4846320" y="2240280"/>
+            <a:ext cx="3657600" cy="365760"/>
+          </a:xfrm>
+          <a:prstGeom prst="rect">
+            <a:avLst/>
+          </a:prstGeom>
+          <a:noFill/>
+          <a:ln/>
+        </p:spPr>
+        <p:txBody>
+          <a:bodyPr wrap="square" lIns="0" tIns="0" rIns="0" bIns="0" rtlCol="0" anchor="t"/>
+          <a:lstStyle/>
+          <a:p>
+            <a:pPr indent="0" marL="0">
+              <a:buNone/>
+            </a:pPr>
+            <a:r>
+              <a:rPr lang="en-US" sz="1300" dirty="0">
+                <a:solidFill>
+                  <a:schemeClr val="tx2"/>
+                </a:solidFill>
+              </a:rPr>
+              <a:t>Early exit, remaining checks skipped, clause C3</a:t>
+            </a:r>
+            <a:endParaRPr lang="en-US" sz="1300" dirty="0"/>
+          </a:p>
+        </p:txBody>
+      </p:sp>
+      <p:sp>
+        <p:nvSpPr>
+          <p:cNvPr id="15" name="Demo card 3"/>
+          <p:cNvSpPr/>
+          <p:nvPr/>
+        </p:nvSpPr>
+        <p:spPr>
+          <a:xfrm>
+            <a:off x="457200" y="2880360"/>
+            <a:ext cx="4023360" cy="1463040"/>
+          </a:xfrm>
+          <a:prstGeom prst="roundRect">
+            <a:avLst>
+              <a:gd name="adj" fmla="val 5000"/>
+            </a:avLst>
+          </a:prstGeom>
+          <a:solidFill>
+            <a:schemeClr val="bg2"/>
+          </a:solidFill>
+          <a:ln/>
+        </p:spPr>
+      </p:sp>
+      <p:sp>
+        <p:nvSpPr>
+          <p:cNvPr id="16" name="Demo id 3"/>
+          <p:cNvSpPr txBox="1"/>
+          <p:nvPr/>
+        </p:nvSpPr>
+        <p:spPr>
+          <a:xfrm>
+            <a:off x="640080" y="3017520"/>
+            <a:ext cx="2377440" cy="274320"/>
+          </a:xfrm>
+          <a:prstGeom prst="rect">
+            <a:avLst/>
+          </a:prstGeom>
+          <a:noFill/>
+          <a:ln/>
+        </p:spPr>
+        <p:txBody>
+          <a:bodyPr wrap="square" lIns="0" tIns="0" rIns="0" bIns="0" rtlCol="0" anchor="t"/>
+          <a:lstStyle/>
+          <a:p>
+            <a:pPr indent="0" marL="0">
+              <a:buNone/>
+            </a:pPr>
+            <a:r>
+              <a:rPr lang="en-US" sz="1200" b="1" dirty="0">
+                <a:solidFill>
+                  <a:schemeClr val="tx2"/>
+                </a:solidFill>
+              </a:rPr>
+              <a:t>CLM-26-0019</a:t>
+            </a:r>
+            <a:endParaRPr lang="en-US" sz="1200" dirty="0"/>
+          </a:p>
+        </p:txBody>
+      </p:sp>
+      <p:sp>
+        <p:nvSpPr>
+          <p:cNvPr id="17" name="Demo outcome 3"/>
+          <p:cNvSpPr/>
+          <p:nvPr/>
+        </p:nvSpPr>
+        <p:spPr>
+          <a:xfrm>
+            <a:off x="3246120" y="2999232"/>
+            <a:ext cx="1051560" cy="292608"/>
+          </a:xfrm>
+          <a:prstGeom prst="roundRect">
+            <a:avLst>
+              <a:gd name="adj" fmla="val 50000"/>
+            </a:avLst>
+          </a:prstGeom>
+          <a:solidFill>
+            <a:schemeClr val="accent2"/>
+          </a:solidFill>
+          <a:ln/>
+        </p:spPr>
+      </p:sp>
+      <p:sp>
+        <p:nvSpPr>
+          <p:cNvPr id="18" name="Demo outcome label 3"/>
+          <p:cNvSpPr txBox="1"/>
+          <p:nvPr/>
+        </p:nvSpPr>
+        <p:spPr>
+          <a:xfrm>
+            <a:off x="3246120" y="2999232"/>
+            <a:ext cx="1051560" cy="292608"/>
+          </a:xfrm>
+          <a:prstGeom prst="rect">
+            <a:avLst/>
+          </a:prstGeom>
+          <a:noFill/>
+          <a:ln/>
+        </p:spPr>
+        <p:txBody>
+          <a:bodyPr wrap="square" lIns="0" tIns="0" rIns="0" bIns="0" rtlCol="0" anchor="ctr"/>
+          <a:lstStyle/>
+          <a:p>
+            <a:pPr algn="ctr" indent="0" marL="0">
+              <a:buNone/>
+            </a:pPr>
+            <a:r>
+              <a:rPr lang="en-US" sz="1100" b="1" dirty="0">
+                <a:solidFill>
+                  <a:schemeClr val="bg1"/>
+                </a:solidFill>
+              </a:rPr>
+              <a:t>ESCALATE</a:t>
+            </a:r>
+            <a:endParaRPr lang="en-US" sz="1100" dirty="0"/>
+          </a:p>
+        </p:txBody>
+      </p:sp>
+      <p:sp>
+        <p:nvSpPr>
+          <p:cNvPr id="19" name="Demo headline 3"/>
+          <p:cNvSpPr txBox="1"/>
+          <p:nvPr/>
+        </p:nvSpPr>
+        <p:spPr>
+          <a:xfrm>
+            <a:off x="640080" y="3383280"/>
+            <a:ext cx="3657600" cy="502920"/>
+          </a:xfrm>
+          <a:prstGeom prst="rect">
+            <a:avLst/>
+          </a:prstGeom>
+          <a:noFill/>
+          <a:ln/>
+        </p:spPr>
+        <p:txBody>
+          <a:bodyPr wrap="square" lIns="0" tIns="0" rIns="0" bIns="0" rtlCol="0" anchor="t"/>
+          <a:lstStyle/>
+          <a:p>
+            <a:pPr indent="0" marL="0">
+              <a:buNone/>
+            </a:pPr>
+            <a:r>
+              <a:rPr lang="en-US" sz="1600" b="1" dirty="0">
+                <a:solidFill>
+                  <a:schemeClr val="tx1"/>
+                </a:solidFill>
+              </a:rPr>
+              <a:t>Quick plan misses an inflated bill</a:t>
+            </a:r>
+            <a:endParaRPr lang="en-US" sz="1600" dirty="0"/>
+          </a:p>
+        </p:txBody>
+      </p:sp>
+      <p:sp>
+        <p:nvSpPr>
+          <p:cNvPr id="20" name="Demo detail 3"/>
+          <p:cNvSpPr txBox="1"/>
+          <p:nvPr/>
+        </p:nvSpPr>
+        <p:spPr>
+          <a:xfrm>
+            <a:off x="640080" y="3886200"/>
+            <a:ext cx="3657600" cy="365760"/>
+          </a:xfrm>
+          <a:prstGeom prst="rect">
+            <a:avLst/>
+          </a:prstGeom>
+          <a:noFill/>
+          <a:ln/>
+        </p:spPr>
+        <p:txBody>
+          <a:bodyPr wrap="square" lIns="0" tIns="0" rIns="0" bIns="0" rtlCol="0" anchor="t"/>
+          <a:lstStyle/>
+          <a:p>
+            <a:pPr indent="0" marL="0">
+              <a:buNone/>
+            </a:pPr>
+            <a:r>
+              <a:rPr lang="en-US" sz="1300" dirty="0">
+                <a:solidFill>
+                  <a:schemeClr val="tx2"/>
+                </a:solidFill>
+              </a:rPr>
+              <a:t>Critic sends it back, fraud score, human review</a:t>
+            </a:r>
+            <a:endParaRPr lang="en-US" sz="1300" dirty="0"/>
+          </a:p>
+        </p:txBody>
+      </p:sp>
+      <p:sp>
+        <p:nvSpPr>
+          <p:cNvPr id="21" name="Demo card 4"/>
+          <p:cNvSpPr/>
+          <p:nvPr/>
+        </p:nvSpPr>
+        <p:spPr>
+          <a:xfrm>
+            <a:off x="4663440" y="2880360"/>
+            <a:ext cx="4023360" cy="1463040"/>
+          </a:xfrm>
+          <a:prstGeom prst="roundRect">
+            <a:avLst>
+              <a:gd name="adj" fmla="val 5000"/>
+            </a:avLst>
+          </a:prstGeom>
+          <a:solidFill>
+            <a:schemeClr val="bg2"/>
+          </a:solidFill>
+          <a:ln/>
+        </p:spPr>
+      </p:sp>
+      <p:sp>
+        <p:nvSpPr>
+          <p:cNvPr id="22" name="Demo id 4"/>
+          <p:cNvSpPr txBox="1"/>
+          <p:nvPr/>
+        </p:nvSpPr>
+        <p:spPr>
+          <a:xfrm>
+            <a:off x="4846320" y="3017520"/>
+            <a:ext cx="2377440" cy="274320"/>
+          </a:xfrm>
+          <a:prstGeom prst="rect">
+            <a:avLst/>
+          </a:prstGeom>
+          <a:noFill/>
+          <a:ln/>
+        </p:spPr>
+        <p:txBody>
+          <a:bodyPr wrap="square" lIns="0" tIns="0" rIns="0" bIns="0" rtlCol="0" anchor="t"/>
+          <a:lstStyle/>
+          <a:p>
+            <a:pPr indent="0" marL="0">
+              <a:buNone/>
+            </a:pPr>
+            <a:r>
+              <a:rPr lang="en-US" sz="1200" b="1" dirty="0">
+                <a:solidFill>
+                  <a:schemeClr val="tx2"/>
+                </a:solidFill>
+              </a:rPr>
+              <a:t>CLM-26-0003 + error</a:t>
+            </a:r>
+            <a:endParaRPr lang="en-US" sz="1200" dirty="0"/>
+          </a:p>
+        </p:txBody>
+      </p:sp>
+      <p:sp>
+        <p:nvSpPr>
+          <p:cNvPr id="23" name="Demo outcome 4"/>
+          <p:cNvSpPr/>
+          <p:nvPr/>
+        </p:nvSpPr>
+        <p:spPr>
+          <a:xfrm>
+            <a:off x="7452360" y="2999232"/>
+            <a:ext cx="1051560" cy="292608"/>
+          </a:xfrm>
+          <a:prstGeom prst="roundRect">
+            <a:avLst>
+              <a:gd name="adj" fmla="val 50000"/>
+            </a:avLst>
+          </a:prstGeom>
+          <a:solidFill>
+            <a:schemeClr val="accent4"/>
+          </a:solidFill>
+          <a:ln/>
+        </p:spPr>
+      </p:sp>
+      <p:sp>
+        <p:nvSpPr>
+          <p:cNvPr id="24" name="Demo outcome label 4"/>
+          <p:cNvSpPr txBox="1"/>
+          <p:nvPr/>
+        </p:nvSpPr>
+        <p:spPr>
+          <a:xfrm>
+            <a:off x="7452360" y="2999232"/>
+            <a:ext cx="1051560" cy="292608"/>
+          </a:xfrm>
+          <a:prstGeom prst="rect">
+            <a:avLst/>
+          </a:prstGeom>
+          <a:noFill/>
+          <a:ln/>
+        </p:spPr>
+        <p:txBody>
+          <a:bodyPr wrap="square" lIns="0" tIns="0" rIns="0" bIns="0" rtlCol="0" anchor="ctr"/>
+          <a:lstStyle/>
+          <a:p>
+            <a:pPr algn="ctr" indent="0" marL="0">
+              <a:buNone/>
+            </a:pPr>
+            <a:r>
+              <a:rPr lang="en-US" sz="1100" b="1" dirty="0">
+                <a:solidFill>
+                  <a:schemeClr val="bg1"/>
+                </a:solidFill>
+              </a:rPr>
+              <a:t>APPROVE</a:t>
+            </a:r>
+            <a:endParaRPr lang="en-US" sz="1100" dirty="0"/>
+          </a:p>
+        </p:txBody>
+      </p:sp>
+      <p:sp>
+        <p:nvSpPr>
+          <p:cNvPr id="25" name="Demo headline 4"/>
+          <p:cNvSpPr txBox="1"/>
+          <p:nvPr/>
+        </p:nvSpPr>
+        <p:spPr>
+          <a:xfrm>
+            <a:off x="4846320" y="3383280"/>
+            <a:ext cx="3657600" cy="502920"/>
+          </a:xfrm>
+          <a:prstGeom prst="rect">
+            <a:avLst/>
+          </a:prstGeom>
+          <a:noFill/>
+          <a:ln/>
+        </p:spPr>
+        <p:txBody>
+          <a:bodyPr wrap="square" lIns="0" tIns="0" rIns="0" bIns="0" rtlCol="0" anchor="t"/>
+          <a:lstStyle/>
+          <a:p>
+            <a:pPr indent="0" marL="0">
+              <a:buNone/>
+            </a:pPr>
+            <a:r>
+              <a:rPr lang="en-US" sz="1600" b="1" dirty="0">
+                <a:solidFill>
+                  <a:schemeClr val="tx1"/>
+                </a:solidFill>
+              </a:rPr>
+              <a:t>Executor overpays by 15% on purpose</a:t>
+            </a:r>
+            <a:endParaRPr lang="en-US" sz="1600" dirty="0"/>
+          </a:p>
+        </p:txBody>
+      </p:sp>
+      <p:sp>
+        <p:nvSpPr>
+          <p:cNvPr id="26" name="Demo detail 4"/>
+          <p:cNvSpPr txBox="1"/>
+          <p:nvPr/>
+        </p:nvSpPr>
+        <p:spPr>
+          <a:xfrm>
+            <a:off x="4846320" y="3886200"/>
+            <a:ext cx="3657600" cy="365760"/>
+          </a:xfrm>
+          <a:prstGeom prst="rect">
+            <a:avLst/>
+          </a:prstGeom>
+          <a:noFill/>
+          <a:ln/>
+        </p:spPr>
+        <p:txBody>
+          <a:bodyPr wrap="square" lIns="0" tIns="0" rIns="0" bIns="0" rtlCol="0" anchor="t"/>
+          <a:lstStyle/>
+          <a:p>
+            <a:pPr indent="0" marL="0">
+              <a:buNone/>
+            </a:pPr>
+            <a:r>
+              <a:rPr lang="en-US" sz="1300" dirty="0">
+                <a:solidFill>
+                  <a:schemeClr val="tx2"/>
+                </a:solidFill>
+              </a:rPr>
+              <a:t>Critic catches it, recomputes, passes</a:t>
+            </a:r>
+            <a:endParaRPr lang="en-US" sz="1300" dirty="0"/>
+          </a:p>
+        </p:txBody>
+      </p:sp>
+      <p:sp>
+        <p:nvSpPr>
+          <p:cNvPr id="25" name="Slide Number Placeholder 0"/>
+          <p:cNvSpPr>
+            <a:spLocks noGrp="1"/>
+          </p:cNvSpPr>
+          <p:nvPr>
+            <p:ph type="sldNum" sz="quarter" idx="4294967295"/>
+          </p:nvPr>
+        </p:nvSpPr>
+        <p:spPr>
+          <a:xfrm>
+            <a:off x="8321040" y="4773168"/>
+            <a:ext cx="457200" cy="228600"/>
+          </a:xfrm>
+          <a:prstGeom prst="rect">
+            <a:avLst/>
+          </a:prstGeom>
+          <a:extLst>
+            <a:ext uri="{C572A759-6A51-4108-AA02-DFA0A04FC94B}">
+              <ma14:wrappingTextBoxFlag xmlns:ma14="http://schemas.microsoft.com/office/mac/drawingml/2011/main" val="0"/>
+            </a:ext>
+          </a:extLst>
+        </p:spPr>
+        <p:txBody>
+          <a:bodyPr/>
+          <a:lstStyle>
+            <a:lvl1pPr>
+              <a:defRPr sz="1000">
+                <a:solidFill>
+                  <a:schemeClr val="tx2"/>
+                </a:solidFill>
+              </a:defRPr>
+            </a:lvl1pPr>
+          </a:lstStyle>
+          <a:p>
+            <a:pPr algn="r"/>
+            <a:fld id="{F7021451-1387-4CA6-816F-3879F97B5CBC}" type="slidenum">
+              <a:rPr b="0" lang="en-US"/>
+              <a:t>11</a:t>
+            </a:fld>
+            <a:endParaRPr lang="en-US"/>
+          </a:p>
+        </p:txBody>
+      </p:sp>
+    </p:spTree>
+  </p:cSld>
+  <p:clrMapOvr>
+    <a:masterClrMapping/>
+  </p:clrMapOvr>
+</p:sld>
+</file>
+
+<file path=ppt/slides/slide12.xml><?xml version="1.0" encoding="utf-8"?>
+<p:sld xmlns:a="http://schemas.openxmlformats.org/drawingml/2006/main" xmlns:r="http://schemas.openxmlformats.org/officeDocument/2006/relationships" xmlns:p="http://schemas.openxmlformats.org/presentationml/2006/main">
+  <p:cSld name="Slide 12">
+    <p:spTree>
+      <p:nvGrpSpPr>
+        <p:cNvPr id="1" name=""/>
+        <p:cNvGrpSpPr/>
+        <p:nvPr/>
+      </p:nvGrpSpPr>
+      <p:grpSpPr>
+        <a:xfrm>
+          <a:off x="0" y="0"/>
+          <a:ext cx="0" cy="0"/>
+          <a:chOff x="0" y="0"/>
+          <a:chExt cx="0" cy="0"/>
+        </a:xfrm>
+      </p:grpSpPr>
+      <p:sp>
+        <p:nvSpPr>
+          <p:cNvPr id="2" name="Text 0"/>
+          <p:cNvSpPr/>
+          <p:nvPr>
+            <p:ph idx="100" type="title" hasCustomPrompt="1"/>
+          </p:nvPr>
+        </p:nvSpPr>
+        <p:spPr>
+          <a:xfrm>
+            <a:off x="457200" y="292608"/>
+            <a:ext cx="8229600" cy="777240"/>
+          </a:xfrm>
+          <a:prstGeom prst="rect">
+            <a:avLst/>
+          </a:prstGeom>
+          <a:noFill/>
+          <a:ln/>
+        </p:spPr>
+        <p:txBody>
+          <a:bodyPr wrap="square" lIns="0" tIns="0" rIns="0" bIns="0" rtlCol="0" anchor="t"/>
+          <a:lstStyle/>
+          <a:p>
+            <a:pPr algn="l" indent="0" marL="0">
+              <a:buNone/>
+            </a:pPr>
+            <a:r>
+              <a:rPr lang="en-US" sz="2800" b="1" dirty="0">
+                <a:solidFill>
+                  <a:schemeClr val="tx1"/>
+                </a:solidFill>
+              </a:rPr>
               <a:t>Appendix: full architecture diagram</a:t>
             </a:r>
             <a:endParaRPr lang="en-US" sz="2800" dirty="0"/>
@@ -4438,7 +5296,7 @@
             <a:pPr algn="r"/>
             <a:fld id="{F7021451-1387-4CA6-816F-3879F97B5CBC}" type="slidenum">
               <a:rPr b="0" lang="en-US"/>
-              <a:t>11</a:t>
+              <a:t>12</a:t>
             </a:fld>
             <a:endParaRPr lang="en-US"/>
           </a:p>
@@ -5795,7 +6653,7 @@
                   <a:schemeClr val="tx1"/>
                 </a:solidFill>
               </a:rPr>
-              <a:t>Reads the discharge summary</a:t>
+              <a:t>Reads the summary, with a local language model</a:t>
             </a:r>
             <a:endParaRPr lang="en-US" sz="1300" dirty="0"/>
           </a:p>
@@ -6623,7 +7481,7 @@
                   <a:schemeClr val="tx2"/>
                 </a:solidFill>
               </a:rPr>
-              <a:t>Plus a pluggable model (mock or local Ollama) and synthetic policy, member and hospital stores.</a:t>
+              <a:t>Plus a local language model (Ollama, llama3.2:3b) and synthetic policy, member and hospital stores.</a:t>
             </a:r>
             <a:endParaRPr lang="en-US" sz="1200" dirty="0"/>
           </a:p>
@@ -8162,7 +9020,7 @@
                   <a:schemeClr val="tx1"/>
                 </a:solidFill>
               </a:rPr>
-              <a:t>Tested on held-out claims with added noise</a:t>
+              <a:t>First, hardening the rules with noisy claims</a:t>
             </a:r>
             <a:endParaRPr lang="en-US" sz="2800" dirty="0"/>
           </a:p>
@@ -8613,26 +9471,42 @@
                   <a:schemeClr val="tx1"/>
                 </a:solidFill>
               </a:rPr>
-              <a:t>Limitations and what comes next</a:t>
+              <a:t>Then a real language model closes the gap</a:t>
             </a:r>
             <a:endParaRPr lang="en-US" sz="2800" dirty="0"/>
           </a:p>
         </p:txBody>
       </p:sp>
-      <p:sp>
-        <p:nvSpPr>
-          <p:cNvPr id="3" name="Limits card"/>
+      <p:graphicFrame>
+        <p:nvGraphicFramePr>
+          <p:cNvPr id="3" name="Chart 0" descr=""/>
+          <p:cNvGraphicFramePr/>
+          <p:nvPr/>
+        </p:nvGraphicFramePr>
+        <p:xfrm>
+          <a:off x="365760" y="1097280"/>
+          <a:ext cx="5394960" cy="3154680"/>
+        </p:xfrm>
+        <a:graphic xmlns:a="http://schemas.openxmlformats.org/drawingml/2006/main">
+          <a:graphicData uri="http://schemas.openxmlformats.org/drawingml/2006/chart">
+            <c:chart xmlns:c="http://schemas.openxmlformats.org/drawingml/2006/chart" r:id="rId1"/>
+          </a:graphicData>
+        </a:graphic>
+      </p:graphicFrame>
+      <p:sp>
+        <p:nvSpPr>
+          <p:cNvPr id="4" name="LLM card 1"/>
           <p:cNvSpPr/>
           <p:nvPr/>
         </p:nvSpPr>
         <p:spPr>
           <a:xfrm>
-            <a:off x="457200" y="1234440"/>
-            <a:ext cx="3977640" cy="3246120"/>
+            <a:off x="5989320" y="1188720"/>
+            <a:ext cx="2697480" cy="950976"/>
           </a:xfrm>
           <a:prstGeom prst="roundRect">
             <a:avLst>
-              <a:gd name="adj" fmla="val 2254"/>
+              <a:gd name="adj" fmla="val 7692"/>
             </a:avLst>
           </a:prstGeom>
           <a:solidFill>
@@ -8643,14 +9517,14 @@
       </p:sp>
       <p:sp>
         <p:nvSpPr>
-          <p:cNvPr id="4" name="Limits heading"/>
-          <p:cNvSpPr txBox="1"/>
-          <p:nvPr/>
-        </p:nvSpPr>
-        <p:spPr>
-          <a:xfrm>
-            <a:off x="685800" y="1371600"/>
-            <a:ext cx="3566160" cy="365760"/>
+          <p:cNvPr id="5" name="LLM card head 1"/>
+          <p:cNvSpPr txBox="1"/>
+          <p:nvPr/>
+        </p:nvSpPr>
+        <p:spPr>
+          <a:xfrm>
+            <a:off x="6126480" y="1252728"/>
+            <a:ext cx="2468880" cy="228600"/>
           </a:xfrm>
           <a:prstGeom prst="rect">
             <a:avLst/>
@@ -8666,128 +9540,106 @@
               <a:buNone/>
             </a:pPr>
             <a:r>
-              <a:rPr lang="en-US" sz="2000" b="1" dirty="0">
-                <a:solidFill>
-                  <a:schemeClr val="accent2"/>
+              <a:rPr lang="en-US" sz="1100" b="1" spc="100" kern="0" dirty="0">
+                <a:solidFill>
+                  <a:schemeClr val="tx2"/>
+                </a:solidFill>
+              </a:rPr>
+              <a:t>Abbreviations</a:t>
+            </a:r>
+            <a:endParaRPr lang="en-US" sz="1100" dirty="0"/>
+          </a:p>
+        </p:txBody>
+      </p:sp>
+      <p:sp>
+        <p:nvSpPr>
+          <p:cNvPr id="6" name="LLM card value 1"/>
+          <p:cNvSpPr txBox="1"/>
+          <p:nvPr/>
+        </p:nvSpPr>
+        <p:spPr>
+          <a:xfrm>
+            <a:off x="6126480" y="1463040"/>
+            <a:ext cx="1325880" cy="585216"/>
+          </a:xfrm>
+          <a:prstGeom prst="rect">
+            <a:avLst/>
+          </a:prstGeom>
+          <a:noFill/>
+          <a:ln/>
+        </p:spPr>
+        <p:txBody>
+          <a:bodyPr wrap="square" lIns="0" tIns="0" rIns="0" bIns="0" rtlCol="0" anchor="ctr"/>
+          <a:lstStyle/>
+          <a:p>
+            <a:pPr indent="0" marL="0">
+              <a:buNone/>
+            </a:pPr>
+            <a:r>
+              <a:rPr lang="en-US" sz="2400" b="1" dirty="0">
+                <a:solidFill>
+                  <a:schemeClr val="accent1"/>
                 </a:solidFill>
                 <a:latin typeface="Cambria" pitchFamily="34" charset="0"/>
                 <a:ea typeface="Cambria" pitchFamily="34" charset="-122"/>
                 <a:cs typeface="Cambria" pitchFamily="34" charset="-120"/>
               </a:rPr>
-              <a:t>Limitations</a:t>
-            </a:r>
-            <a:endParaRPr lang="en-US" sz="2000" dirty="0"/>
-          </a:p>
-        </p:txBody>
-      </p:sp>
-      <p:sp>
-        <p:nvSpPr>
-          <p:cNvPr id="5" name="Limits list"/>
-          <p:cNvSpPr txBox="1"/>
-          <p:nvPr/>
-        </p:nvSpPr>
-        <p:spPr>
-          <a:xfrm>
-            <a:off x="685800" y="1828800"/>
-            <a:ext cx="3566160" cy="2560320"/>
-          </a:xfrm>
-          <a:prstGeom prst="rect">
-            <a:avLst/>
-          </a:prstGeom>
-          <a:noFill/>
-          <a:ln/>
-        </p:spPr>
-        <p:txBody>
-          <a:bodyPr wrap="square" lIns="0" tIns="0" rIns="0" bIns="0" rtlCol="0" anchor="t"/>
-          <a:lstStyle/>
-          <a:p>
-            <a:pPr marL="342900" indent="-342900">
-              <a:spcAft>
-                <a:spcPts val="700"/>
-              </a:spcAft>
-              <a:buSzPct val="100000"/>
-              <a:buChar char="•"/>
-            </a:pPr>
-            <a:r>
-              <a:rPr lang="en-US" sz="1400" dirty="0">
+              <a:t>5 to 0</a:t>
+            </a:r>
+            <a:endParaRPr lang="en-US" sz="2400" dirty="0"/>
+          </a:p>
+        </p:txBody>
+      </p:sp>
+      <p:sp>
+        <p:nvSpPr>
+          <p:cNvPr id="7" name="LLM card text 1"/>
+          <p:cNvSpPr txBox="1"/>
+          <p:nvPr/>
+        </p:nvSpPr>
+        <p:spPr>
+          <a:xfrm>
+            <a:off x="7406640" y="1481328"/>
+            <a:ext cx="1188720" cy="566928"/>
+          </a:xfrm>
+          <a:prstGeom prst="rect">
+            <a:avLst/>
+          </a:prstGeom>
+          <a:noFill/>
+          <a:ln/>
+        </p:spPr>
+        <p:txBody>
+          <a:bodyPr wrap="square" lIns="0" tIns="0" rIns="0" bIns="0" rtlCol="0" anchor="ctr"/>
+          <a:lstStyle/>
+          <a:p>
+            <a:pPr indent="0" marL="0">
+              <a:buNone/>
+            </a:pPr>
+            <a:r>
+              <a:rPr lang="en-US" sz="1100" dirty="0">
                 <a:solidFill>
                   <a:schemeClr val="tx1"/>
                 </a:solidFill>
               </a:rPr>
-              <a:t>All data is synthetic and the summaries are templated</a:t>
-            </a:r>
-            <a:endParaRPr lang="en-US" sz="1400" dirty="0"/>
-          </a:p>
-          <a:p>
-            <a:pPr marL="342900" indent="-342900">
-              <a:spcAft>
-                <a:spcPts val="700"/>
-              </a:spcAft>
-              <a:buSzPct val="100000"/>
-              <a:buChar char="•"/>
-            </a:pPr>
-            <a:r>
-              <a:rPr lang="en-US" sz="1400" dirty="0">
-                <a:solidFill>
-                  <a:schemeClr val="tx1"/>
-                </a:solidFill>
-              </a:rPr>
-              <a:t>Clinical abbreviations can hide a pre-existing condition</a:t>
-            </a:r>
-            <a:endParaRPr lang="en-US" sz="1400" dirty="0"/>
-          </a:p>
-          <a:p>
-            <a:pPr marL="342900" indent="-342900">
-              <a:spcAft>
-                <a:spcPts val="700"/>
-              </a:spcAft>
-              <a:buSzPct val="100000"/>
-              <a:buChar char="•"/>
-            </a:pPr>
-            <a:r>
-              <a:rPr lang="en-US" sz="1400" dirty="0">
-                <a:solidFill>
-                  <a:schemeClr val="tx1"/>
-                </a:solidFill>
-              </a:rPr>
-              <a:t>Fraud weights and tariffs are hand-set, not learned</a:t>
-            </a:r>
-            <a:endParaRPr lang="en-US" sz="1400" dirty="0"/>
-          </a:p>
-          <a:p>
-            <a:pPr marL="342900" indent="-342900">
-              <a:spcAft>
-                <a:spcPts val="700"/>
-              </a:spcAft>
-              <a:buSzPct val="100000"/>
-              <a:buChar char="•"/>
-            </a:pPr>
-            <a:r>
-              <a:rPr lang="en-US" sz="1400" dirty="0">
-                <a:solidFill>
-                  <a:schemeClr val="tx1"/>
-                </a:solidFill>
-              </a:rPr>
-              <a:t>The 25-minute manual baseline is an assumption</a:t>
-            </a:r>
-            <a:endParaRPr lang="en-US" sz="1400" dirty="0"/>
-          </a:p>
-        </p:txBody>
-      </p:sp>
-      <p:sp>
-        <p:nvSpPr>
-          <p:cNvPr id="6" name="Future card"/>
+              <a:t>risky claims wrongly paid, of 48</a:t>
+            </a:r>
+            <a:endParaRPr lang="en-US" sz="1100" dirty="0"/>
+          </a:p>
+        </p:txBody>
+      </p:sp>
+      <p:sp>
+        <p:nvSpPr>
+          <p:cNvPr id="8" name="LLM card 2"/>
           <p:cNvSpPr/>
           <p:nvPr/>
         </p:nvSpPr>
         <p:spPr>
           <a:xfrm>
-            <a:off x="4709160" y="1234440"/>
-            <a:ext cx="3977640" cy="3246120"/>
+            <a:off x="5989320" y="2267712"/>
+            <a:ext cx="2697480" cy="950976"/>
           </a:xfrm>
           <a:prstGeom prst="roundRect">
             <a:avLst>
-              <a:gd name="adj" fmla="val 2254"/>
+              <a:gd name="adj" fmla="val 7692"/>
             </a:avLst>
           </a:prstGeom>
           <a:solidFill>
@@ -8798,14 +9650,14 @@
       </p:sp>
       <p:sp>
         <p:nvSpPr>
-          <p:cNvPr id="7" name="Future heading"/>
-          <p:cNvSpPr txBox="1"/>
-          <p:nvPr/>
-        </p:nvSpPr>
-        <p:spPr>
-          <a:xfrm>
-            <a:off x="4937760" y="1371600"/>
-            <a:ext cx="3566160" cy="365760"/>
+          <p:cNvPr id="9" name="LLM card head 2"/>
+          <p:cNvSpPr txBox="1"/>
+          <p:nvPr/>
+        </p:nvSpPr>
+        <p:spPr>
+          <a:xfrm>
+            <a:off x="6126480" y="2331720"/>
+            <a:ext cx="2468880" cy="228600"/>
           </a:xfrm>
           <a:prstGeom prst="rect">
             <a:avLst/>
@@ -8821,7 +9673,43 @@
               <a:buNone/>
             </a:pPr>
             <a:r>
-              <a:rPr lang="en-US" sz="2000" b="1" dirty="0">
+              <a:rPr lang="en-US" sz="1100" b="1" spc="100" kern="0" dirty="0">
+                <a:solidFill>
+                  <a:schemeClr val="tx2"/>
+                </a:solidFill>
+              </a:rPr>
+              <a:t>Telegraphic notes</a:t>
+            </a:r>
+            <a:endParaRPr lang="en-US" sz="1100" dirty="0"/>
+          </a:p>
+        </p:txBody>
+      </p:sp>
+      <p:sp>
+        <p:nvSpPr>
+          <p:cNvPr id="10" name="LLM card value 2"/>
+          <p:cNvSpPr txBox="1"/>
+          <p:nvPr/>
+        </p:nvSpPr>
+        <p:spPr>
+          <a:xfrm>
+            <a:off x="6126480" y="2542032"/>
+            <a:ext cx="1325880" cy="585216"/>
+          </a:xfrm>
+          <a:prstGeom prst="rect">
+            <a:avLst/>
+          </a:prstGeom>
+          <a:noFill/>
+          <a:ln/>
+        </p:spPr>
+        <p:txBody>
+          <a:bodyPr wrap="square" lIns="0" tIns="0" rIns="0" bIns="0" rtlCol="0" anchor="ctr"/>
+          <a:lstStyle/>
+          <a:p>
+            <a:pPr indent="0" marL="0">
+              <a:buNone/>
+            </a:pPr>
+            <a:r>
+              <a:rPr lang="en-US" sz="2400" b="1" dirty="0">
                 <a:solidFill>
                   <a:schemeClr val="accent1"/>
                 </a:solidFill>
@@ -8829,22 +9717,80 @@
                 <a:ea typeface="Cambria" pitchFamily="34" charset="-122"/>
                 <a:cs typeface="Cambria" pitchFamily="34" charset="-120"/>
               </a:rPr>
-              <a:t>Future scope</a:t>
-            </a:r>
-            <a:endParaRPr lang="en-US" sz="2000" dirty="0"/>
-          </a:p>
-        </p:txBody>
-      </p:sp>
-      <p:sp>
-        <p:nvSpPr>
-          <p:cNvPr id="8" name="Future list"/>
-          <p:cNvSpPr txBox="1"/>
-          <p:nvPr/>
-        </p:nvSpPr>
-        <p:spPr>
-          <a:xfrm>
-            <a:off x="4937760" y="1828800"/>
-            <a:ext cx="3566160" cy="2560320"/>
+              <a:t>8 to 0</a:t>
+            </a:r>
+            <a:endParaRPr lang="en-US" sz="2400" dirty="0"/>
+          </a:p>
+        </p:txBody>
+      </p:sp>
+      <p:sp>
+        <p:nvSpPr>
+          <p:cNvPr id="11" name="LLM card text 2"/>
+          <p:cNvSpPr txBox="1"/>
+          <p:nvPr/>
+        </p:nvSpPr>
+        <p:spPr>
+          <a:xfrm>
+            <a:off x="7406640" y="2560320"/>
+            <a:ext cx="1188720" cy="566928"/>
+          </a:xfrm>
+          <a:prstGeom prst="rect">
+            <a:avLst/>
+          </a:prstGeom>
+          <a:noFill/>
+          <a:ln/>
+        </p:spPr>
+        <p:txBody>
+          <a:bodyPr wrap="square" lIns="0" tIns="0" rIns="0" bIns="0" rtlCol="0" anchor="ctr"/>
+          <a:lstStyle/>
+          <a:p>
+            <a:pPr indent="0" marL="0">
+              <a:buNone/>
+            </a:pPr>
+            <a:r>
+              <a:rPr lang="en-US" sz="1100" dirty="0">
+                <a:solidFill>
+                  <a:schemeClr val="tx1"/>
+                </a:solidFill>
+              </a:rPr>
+              <a:t>risky claims wrongly paid, of 48</a:t>
+            </a:r>
+            <a:endParaRPr lang="en-US" sz="1100" dirty="0"/>
+          </a:p>
+        </p:txBody>
+      </p:sp>
+      <p:sp>
+        <p:nvSpPr>
+          <p:cNvPr id="12" name="LLM card 3"/>
+          <p:cNvSpPr/>
+          <p:nvPr/>
+        </p:nvSpPr>
+        <p:spPr>
+          <a:xfrm>
+            <a:off x="5989320" y="3346704"/>
+            <a:ext cx="2697480" cy="950976"/>
+          </a:xfrm>
+          <a:prstGeom prst="roundRect">
+            <a:avLst>
+              <a:gd name="adj" fmla="val 7692"/>
+            </a:avLst>
+          </a:prstGeom>
+          <a:solidFill>
+            <a:schemeClr val="bg2"/>
+          </a:solidFill>
+          <a:ln/>
+        </p:spPr>
+      </p:sp>
+      <p:sp>
+        <p:nvSpPr>
+          <p:cNvPr id="13" name="LLM card head 3"/>
+          <p:cNvSpPr txBox="1"/>
+          <p:nvPr/>
+        </p:nvSpPr>
+        <p:spPr>
+          <a:xfrm>
+            <a:off x="6126480" y="3410712"/>
+            <a:ext cx="2468880" cy="228600"/>
           </a:xfrm>
           <a:prstGeom prst="rect">
             <a:avLst/>
@@ -8856,76 +9802,129 @@
           <a:bodyPr wrap="square" lIns="0" tIns="0" rIns="0" bIns="0" rtlCol="0" anchor="t"/>
           <a:lstStyle/>
           <a:p>
-            <a:pPr marL="342900" indent="-342900">
-              <a:spcAft>
-                <a:spcPts val="700"/>
-              </a:spcAft>
-              <a:buSzPct val="100000"/>
-              <a:buChar char="•"/>
-            </a:pPr>
-            <a:r>
-              <a:rPr lang="en-US" sz="1400" dirty="0">
+            <a:pPr indent="0" marL="0">
+              <a:buNone/>
+            </a:pPr>
+            <a:r>
+              <a:rPr lang="en-US" sz="1100" b="1" spc="100" kern="0" dirty="0">
+                <a:solidFill>
+                  <a:schemeClr val="tx2"/>
+                </a:solidFill>
+              </a:rPr>
+              <a:t>Needless holds</a:t>
+            </a:r>
+            <a:endParaRPr lang="en-US" sz="1100" dirty="0"/>
+          </a:p>
+        </p:txBody>
+      </p:sp>
+      <p:sp>
+        <p:nvSpPr>
+          <p:cNvPr id="14" name="LLM card value 3"/>
+          <p:cNvSpPr txBox="1"/>
+          <p:nvPr/>
+        </p:nvSpPr>
+        <p:spPr>
+          <a:xfrm>
+            <a:off x="6126480" y="3621024"/>
+            <a:ext cx="1325880" cy="585216"/>
+          </a:xfrm>
+          <a:prstGeom prst="rect">
+            <a:avLst/>
+          </a:prstGeom>
+          <a:noFill/>
+          <a:ln/>
+        </p:spPr>
+        <p:txBody>
+          <a:bodyPr wrap="square" lIns="0" tIns="0" rIns="0" bIns="0" rtlCol="0" anchor="ctr"/>
+          <a:lstStyle/>
+          <a:p>
+            <a:pPr indent="0" marL="0">
+              <a:buNone/>
+            </a:pPr>
+            <a:r>
+              <a:rPr lang="en-US" sz="2400" b="1" dirty="0">
+                <a:solidFill>
+                  <a:schemeClr val="accent1"/>
+                </a:solidFill>
+                <a:latin typeface="Cambria" pitchFamily="34" charset="0"/>
+                <a:ea typeface="Cambria" pitchFamily="34" charset="-122"/>
+                <a:cs typeface="Cambria" pitchFamily="34" charset="-120"/>
+              </a:rPr>
+              <a:t>0</a:t>
+            </a:r>
+            <a:endParaRPr lang="en-US" sz="2400" dirty="0"/>
+          </a:p>
+        </p:txBody>
+      </p:sp>
+      <p:sp>
+        <p:nvSpPr>
+          <p:cNvPr id="15" name="LLM card text 3"/>
+          <p:cNvSpPr txBox="1"/>
+          <p:nvPr/>
+        </p:nvSpPr>
+        <p:spPr>
+          <a:xfrm>
+            <a:off x="7406640" y="3639312"/>
+            <a:ext cx="1188720" cy="566928"/>
+          </a:xfrm>
+          <a:prstGeom prst="rect">
+            <a:avLst/>
+          </a:prstGeom>
+          <a:noFill/>
+          <a:ln/>
+        </p:spPr>
+        <p:txBody>
+          <a:bodyPr wrap="square" lIns="0" tIns="0" rIns="0" bIns="0" rtlCol="0" anchor="ctr"/>
+          <a:lstStyle/>
+          <a:p>
+            <a:pPr indent="0" marL="0">
+              <a:buNone/>
+            </a:pPr>
+            <a:r>
+              <a:rPr lang="en-US" sz="1100" dirty="0">
                 <a:solidFill>
                   <a:schemeClr val="tx1"/>
                 </a:solidFill>
               </a:rPr>
-              <a:t>Language-model extractor for real, messy documents</a:t>
-            </a:r>
-            <a:endParaRPr lang="en-US" sz="1400" dirty="0"/>
-          </a:p>
-          <a:p>
-            <a:pPr marL="342900" indent="-342900">
-              <a:spcAft>
-                <a:spcPts val="700"/>
-              </a:spcAft>
-              <a:buSzPct val="100000"/>
-              <a:buChar char="•"/>
-            </a:pPr>
-            <a:r>
-              <a:rPr lang="en-US" sz="1400" dirty="0">
-                <a:solidFill>
-                  <a:schemeClr val="tx1"/>
-                </a:solidFill>
-              </a:rPr>
-              <a:t>OCR for scanned bills and summaries</a:t>
-            </a:r>
-            <a:endParaRPr lang="en-US" sz="1400" dirty="0"/>
-          </a:p>
-          <a:p>
-            <a:pPr marL="342900" indent="-342900">
-              <a:spcAft>
-                <a:spcPts val="700"/>
-              </a:spcAft>
-              <a:buSzPct val="100000"/>
-              <a:buChar char="•"/>
-            </a:pPr>
-            <a:r>
-              <a:rPr lang="en-US" sz="1400" dirty="0">
-                <a:solidFill>
-                  <a:schemeClr val="tx1"/>
-                </a:solidFill>
-              </a:rPr>
-              <a:t>Strict mode: hold any claim whose history cannot be verified</a:t>
-            </a:r>
-            <a:endParaRPr lang="en-US" sz="1400" dirty="0"/>
-          </a:p>
-          <a:p>
-            <a:pPr marL="342900" indent="-342900">
-              <a:spcAft>
-                <a:spcPts val="700"/>
-              </a:spcAft>
-              <a:buSzPct val="100000"/>
-              <a:buChar char="•"/>
-            </a:pPr>
-            <a:r>
-              <a:rPr lang="en-US" sz="1400" dirty="0">
-                <a:solidFill>
-                  <a:schemeClr val="tx1"/>
-                </a:solidFill>
-              </a:rPr>
-              <a:t>Learn fraud weights from real outcomes, with human review feedback</a:t>
-            </a:r>
-            <a:endParaRPr lang="en-US" sz="1400" dirty="0"/>
+              <a:t>of 164 payable claims held by mistake</a:t>
+            </a:r>
+            <a:endParaRPr lang="en-US" sz="1100" dirty="0"/>
+          </a:p>
+        </p:txBody>
+      </p:sp>
+      <p:sp>
+        <p:nvSpPr>
+          <p:cNvPr id="16" name="LLM note"/>
+          <p:cNvSpPr txBox="1"/>
+          <p:nvPr/>
+        </p:nvSpPr>
+        <p:spPr>
+          <a:xfrm>
+            <a:off x="457200" y="4389120"/>
+            <a:ext cx="8138160" cy="320040"/>
+          </a:xfrm>
+          <a:prstGeom prst="rect">
+            <a:avLst/>
+          </a:prstGeom>
+          <a:noFill/>
+          <a:ln/>
+        </p:spPr>
+        <p:txBody>
+          <a:bodyPr wrap="square" lIns="0" tIns="0" rIns="0" bIns="0" rtlCol="0" anchor="t"/>
+          <a:lstStyle/>
+          <a:p>
+            <a:pPr indent="0" marL="0">
+              <a:buNone/>
+            </a:pPr>
+            <a:r>
+              <a:rPr lang="en-US" sz="1100" i="1" dirty="0">
+                <a:solidFill>
+                  <a:schemeClr val="tx2"/>
+                </a:solidFill>
+              </a:rPr>
+              <a:t>Same 89 claims for both columns. The model's prompt was tuned on other claims; telegraphic notes were written after tuning.</a:t>
+            </a:r>
+            <a:endParaRPr lang="en-US" sz="1100" dirty="0"/>
           </a:p>
         </p:txBody>
       </p:sp>
@@ -9009,8 +10008,8 @@
         </p:nvSpPr>
         <p:spPr>
           <a:xfrm>
-            <a:off x="548640" y="822960"/>
-            <a:ext cx="8046720" cy="822960"/>
+            <a:off x="457200" y="292608"/>
+            <a:ext cx="8229600" cy="777240"/>
           </a:xfrm>
           <a:prstGeom prst="rect">
             <a:avLst/>
@@ -9026,87 +10025,49 @@
               <a:buNone/>
             </a:pPr>
             <a:r>
-              <a:rPr lang="en-US" sz="4000" b="1" dirty="0">
-                <a:solidFill>
-                  <a:schemeClr val="bg1"/>
-                </a:solidFill>
-              </a:rPr>
-              <a:t>Thank you</a:t>
-            </a:r>
-            <a:endParaRPr lang="en-US" sz="4000" dirty="0"/>
-          </a:p>
-        </p:txBody>
-      </p:sp>
-      <p:sp>
-        <p:nvSpPr>
-          <p:cNvPr id="3" name="Text 0"/>
+              <a:rPr lang="en-US" sz="2800" b="1" dirty="0">
+                <a:solidFill>
+                  <a:schemeClr val="tx1"/>
+                </a:solidFill>
+              </a:rPr>
+              <a:t>Limitations and what comes next</a:t>
+            </a:r>
+            <a:endParaRPr lang="en-US" sz="2800" dirty="0"/>
+          </a:p>
+        </p:txBody>
+      </p:sp>
+      <p:sp>
+        <p:nvSpPr>
+          <p:cNvPr id="3" name="Limits card"/>
           <p:cNvSpPr/>
-          <p:nvPr>
-            <p:ph idx="101" type="body" hasCustomPrompt="1"/>
-          </p:nvPr>
-        </p:nvSpPr>
-        <p:spPr>
-          <a:xfrm>
-            <a:off x="548640" y="1691640"/>
-            <a:ext cx="7498080" cy="731520"/>
-          </a:xfrm>
-          <a:prstGeom prst="rect">
-            <a:avLst/>
-          </a:prstGeom>
-          <a:noFill/>
-          <a:ln/>
-        </p:spPr>
-        <p:txBody>
-          <a:bodyPr wrap="square" lIns="0" tIns="0" rIns="0" bIns="0" rtlCol="0" anchor="t"/>
-          <a:lstStyle/>
-          <a:p>
-            <a:pPr algn="l" indent="0" marL="0">
-              <a:buNone/>
-            </a:pPr>
-            <a:r>
-              <a:rPr lang="en-US" sz="1800" dirty="0">
-                <a:solidFill>
-                  <a:schemeClr val="bg2"/>
-                </a:solidFill>
-              </a:rPr>
-              <a:t>Questions welcome</a:t>
-            </a:r>
-            <a:endParaRPr lang="en-US" sz="1800" dirty="0"/>
-          </a:p>
-        </p:txBody>
-      </p:sp>
-      <p:sp>
-        <p:nvSpPr>
-          <p:cNvPr id="4" name="Closing members card"/>
-          <p:cNvSpPr/>
-          <p:nvPr/>
-        </p:nvSpPr>
-        <p:spPr>
-          <a:xfrm>
-            <a:off x="548640" y="2651760"/>
-            <a:ext cx="8046720" cy="1051560"/>
+          <p:nvPr/>
+        </p:nvSpPr>
+        <p:spPr>
+          <a:xfrm>
+            <a:off x="457200" y="1234440"/>
+            <a:ext cx="3977640" cy="3246120"/>
           </a:xfrm>
           <a:prstGeom prst="roundRect">
             <a:avLst>
-              <a:gd name="adj" fmla="val 6957"/>
+              <a:gd name="adj" fmla="val 2254"/>
             </a:avLst>
           </a:prstGeom>
           <a:solidFill>
-            <a:schemeClr val="tx2"/>
+            <a:schemeClr val="bg2"/>
           </a:solidFill>
           <a:ln/>
         </p:spPr>
       </p:sp>
       <p:sp>
         <p:nvSpPr>
-          <p:cNvPr id="5" name="Closing label"/>
-          <p:cNvSpPr txBox="1"/>
-          <p:nvPr/>
-        </p:nvSpPr>
-        <p:spPr>
-          <a:xfrm>
-            <a:off x="822960" y="2743200"/>
-            <a:ext cx="2743200" cy="228600"/>
+          <p:cNvPr id="4" name="Limits heading"/>
+          <p:cNvSpPr txBox="1"/>
+          <p:nvPr/>
+        </p:nvSpPr>
+        <p:spPr>
+          <a:xfrm>
+            <a:off x="685800" y="1371600"/>
+            <a:ext cx="3566160" cy="365760"/>
           </a:xfrm>
           <a:prstGeom prst="rect">
             <a:avLst/>
@@ -9122,51 +10083,15 @@
               <a:buNone/>
             </a:pPr>
             <a:r>
-              <a:rPr lang="en-US" sz="1100" b="1" spc="300" kern="0" dirty="0">
-                <a:solidFill>
-                  <a:schemeClr val="bg2"/>
-                </a:solidFill>
-              </a:rPr>
-              <a:t>GROUP MEMBERS</a:t>
-            </a:r>
-            <a:endParaRPr lang="en-US" sz="1100" dirty="0"/>
-          </a:p>
-        </p:txBody>
-      </p:sp>
-      <p:sp>
-        <p:nvSpPr>
-          <p:cNvPr id="6" name="Closing name 1"/>
-          <p:cNvSpPr txBox="1"/>
-          <p:nvPr/>
-        </p:nvSpPr>
-        <p:spPr>
-          <a:xfrm>
-            <a:off x="822960" y="3035808"/>
-            <a:ext cx="3017520" cy="365760"/>
-          </a:xfrm>
-          <a:prstGeom prst="rect">
-            <a:avLst/>
-          </a:prstGeom>
-          <a:noFill/>
-          <a:ln/>
-        </p:spPr>
-        <p:txBody>
-          <a:bodyPr wrap="square" lIns="0" tIns="0" rIns="0" bIns="0" rtlCol="0" anchor="t"/>
-          <a:lstStyle/>
-          <a:p>
-            <a:pPr indent="0" marL="0">
-              <a:buNone/>
-            </a:pPr>
-            <a:r>
               <a:rPr lang="en-US" sz="2000" b="1" dirty="0">
                 <a:solidFill>
-                  <a:schemeClr val="bg1"/>
+                  <a:schemeClr val="accent2"/>
                 </a:solidFill>
                 <a:latin typeface="Cambria" pitchFamily="34" charset="0"/>
                 <a:ea typeface="Cambria" pitchFamily="34" charset="-122"/>
                 <a:cs typeface="Cambria" pitchFamily="34" charset="-120"/>
               </a:rPr>
-              <a:t>Harsh Salunkhe</a:t>
+              <a:t>Limitations</a:t>
             </a:r>
             <a:endParaRPr lang="en-US" sz="2000" dirty="0"/>
           </a:p>
@@ -9174,14 +10099,14 @@
       </p:sp>
       <p:sp>
         <p:nvSpPr>
-          <p:cNvPr id="7" name="Closing roll 1"/>
-          <p:cNvSpPr txBox="1"/>
-          <p:nvPr/>
-        </p:nvSpPr>
-        <p:spPr>
-          <a:xfrm>
-            <a:off x="822960" y="3419856"/>
-            <a:ext cx="3017520" cy="274320"/>
+          <p:cNvPr id="5" name="Limits list"/>
+          <p:cNvSpPr txBox="1"/>
+          <p:nvPr/>
+        </p:nvSpPr>
+        <p:spPr>
+          <a:xfrm>
+            <a:off x="685800" y="1828800"/>
+            <a:ext cx="3566160" cy="2560320"/>
           </a:xfrm>
           <a:prstGeom prst="rect">
             <a:avLst/>
@@ -9193,55 +10118,135 @@
           <a:bodyPr wrap="square" lIns="0" tIns="0" rIns="0" bIns="0" rtlCol="0" anchor="t"/>
           <a:lstStyle/>
           <a:p>
+            <a:pPr marL="342900" indent="-342900">
+              <a:spcAft>
+                <a:spcPts val="700"/>
+              </a:spcAft>
+              <a:buSzPct val="100000"/>
+              <a:buChar char="•"/>
+            </a:pPr>
+            <a:r>
+              <a:rPr lang="en-US" sz="1400" dirty="0">
+                <a:solidFill>
+                  <a:schemeClr val="tx1"/>
+                </a:solidFill>
+              </a:rPr>
+              <a:t>All data is synthetic and the summaries are templated</a:t>
+            </a:r>
+            <a:endParaRPr lang="en-US" sz="1400" dirty="0"/>
+          </a:p>
+          <a:p>
+            <a:pPr marL="342900" indent="-342900">
+              <a:spcAft>
+                <a:spcPts val="700"/>
+              </a:spcAft>
+              <a:buSzPct val="100000"/>
+              <a:buChar char="•"/>
+            </a:pPr>
+            <a:r>
+              <a:rPr lang="en-US" sz="1400" dirty="0">
+                <a:solidFill>
+                  <a:schemeClr val="tx1"/>
+                </a:solidFill>
+              </a:rPr>
+              <a:t>Clinical abbreviations can hide a pre-existing condition</a:t>
+            </a:r>
+            <a:endParaRPr lang="en-US" sz="1400" dirty="0"/>
+          </a:p>
+          <a:p>
+            <a:pPr marL="342900" indent="-342900">
+              <a:spcAft>
+                <a:spcPts val="700"/>
+              </a:spcAft>
+              <a:buSzPct val="100000"/>
+              <a:buChar char="•"/>
+            </a:pPr>
+            <a:r>
+              <a:rPr lang="en-US" sz="1400" dirty="0">
+                <a:solidFill>
+                  <a:schemeClr val="tx1"/>
+                </a:solidFill>
+              </a:rPr>
+              <a:t>Fraud weights and tariffs are hand-set, not learned</a:t>
+            </a:r>
+            <a:endParaRPr lang="en-US" sz="1400" dirty="0"/>
+          </a:p>
+          <a:p>
+            <a:pPr marL="342900" indent="-342900">
+              <a:spcAft>
+                <a:spcPts val="700"/>
+              </a:spcAft>
+              <a:buSzPct val="100000"/>
+              <a:buChar char="•"/>
+            </a:pPr>
+            <a:r>
+              <a:rPr lang="en-US" sz="1400" dirty="0">
+                <a:solidFill>
+                  <a:schemeClr val="tx1"/>
+                </a:solidFill>
+              </a:rPr>
+              <a:t>The 25-minute manual baseline is an assumption</a:t>
+            </a:r>
+            <a:endParaRPr lang="en-US" sz="1400" dirty="0"/>
+          </a:p>
+        </p:txBody>
+      </p:sp>
+      <p:sp>
+        <p:nvSpPr>
+          <p:cNvPr id="6" name="Future card"/>
+          <p:cNvSpPr/>
+          <p:nvPr/>
+        </p:nvSpPr>
+        <p:spPr>
+          <a:xfrm>
+            <a:off x="4709160" y="1234440"/>
+            <a:ext cx="3977640" cy="3246120"/>
+          </a:xfrm>
+          <a:prstGeom prst="roundRect">
+            <a:avLst>
+              <a:gd name="adj" fmla="val 2254"/>
+            </a:avLst>
+          </a:prstGeom>
+          <a:solidFill>
+            <a:schemeClr val="bg2"/>
+          </a:solidFill>
+          <a:ln/>
+        </p:spPr>
+      </p:sp>
+      <p:sp>
+        <p:nvSpPr>
+          <p:cNvPr id="7" name="Future heading"/>
+          <p:cNvSpPr txBox="1"/>
+          <p:nvPr/>
+        </p:nvSpPr>
+        <p:spPr>
+          <a:xfrm>
+            <a:off x="4937760" y="1371600"/>
+            <a:ext cx="3566160" cy="365760"/>
+          </a:xfrm>
+          <a:prstGeom prst="rect">
+            <a:avLst/>
+          </a:prstGeom>
+          <a:noFill/>
+          <a:ln/>
+        </p:spPr>
+        <p:txBody>
+          <a:bodyPr wrap="square" lIns="0" tIns="0" rIns="0" bIns="0" rtlCol="0" anchor="t"/>
+          <a:lstStyle/>
+          <a:p>
             <a:pPr indent="0" marL="0">
               <a:buNone/>
             </a:pPr>
             <a:r>
-              <a:rPr lang="en-US" sz="1400" dirty="0">
-                <a:solidFill>
-                  <a:schemeClr val="bg2"/>
-                </a:solidFill>
-              </a:rPr>
-              <a:t>24070126066</a:t>
-            </a:r>
-            <a:endParaRPr lang="en-US" sz="1400" dirty="0"/>
-          </a:p>
-        </p:txBody>
-      </p:sp>
-      <p:sp>
-        <p:nvSpPr>
-          <p:cNvPr id="8" name="Closing name 2"/>
-          <p:cNvSpPr txBox="1"/>
-          <p:nvPr/>
-        </p:nvSpPr>
-        <p:spPr>
-          <a:xfrm>
-            <a:off x="4023360" y="3035808"/>
-            <a:ext cx="3017520" cy="365760"/>
-          </a:xfrm>
-          <a:prstGeom prst="rect">
-            <a:avLst/>
-          </a:prstGeom>
-          <a:noFill/>
-          <a:ln/>
-        </p:spPr>
-        <p:txBody>
-          <a:bodyPr wrap="square" lIns="0" tIns="0" rIns="0" bIns="0" rtlCol="0" anchor="t"/>
-          <a:lstStyle/>
-          <a:p>
-            <a:pPr indent="0" marL="0">
-              <a:buNone/>
-            </a:pPr>
-            <a:r>
               <a:rPr lang="en-US" sz="2000" b="1" dirty="0">
                 <a:solidFill>
-                  <a:schemeClr val="bg1"/>
+                  <a:schemeClr val="accent1"/>
                 </a:solidFill>
                 <a:latin typeface="Cambria" pitchFamily="34" charset="0"/>
                 <a:ea typeface="Cambria" pitchFamily="34" charset="-122"/>
                 <a:cs typeface="Cambria" pitchFamily="34" charset="-120"/>
               </a:rPr>
-              <a:t>Dharna Sharma</a:t>
+              <a:t>Future scope</a:t>
             </a:r>
             <a:endParaRPr lang="en-US" sz="2000" dirty="0"/>
           </a:p>
@@ -9249,14 +10254,14 @@
       </p:sp>
       <p:sp>
         <p:nvSpPr>
-          <p:cNvPr id="9" name="Closing roll 2"/>
-          <p:cNvSpPr txBox="1"/>
-          <p:nvPr/>
-        </p:nvSpPr>
-        <p:spPr>
-          <a:xfrm>
-            <a:off x="4023360" y="3419856"/>
-            <a:ext cx="3017520" cy="274320"/>
+          <p:cNvPr id="8" name="Future list"/>
+          <p:cNvSpPr txBox="1"/>
+          <p:nvPr/>
+        </p:nvSpPr>
+        <p:spPr>
+          <a:xfrm>
+            <a:off x="4937760" y="1828800"/>
+            <a:ext cx="3566160" cy="2560320"/>
           </a:xfrm>
           <a:prstGeom prst="rect">
             <a:avLst/>
@@ -9268,54 +10273,121 @@
           <a:bodyPr wrap="square" lIns="0" tIns="0" rIns="0" bIns="0" rtlCol="0" anchor="t"/>
           <a:lstStyle/>
           <a:p>
-            <a:pPr indent="0" marL="0">
-              <a:buNone/>
+            <a:pPr marL="342900" indent="-342900">
+              <a:spcAft>
+                <a:spcPts val="700"/>
+              </a:spcAft>
+              <a:buSzPct val="100000"/>
+              <a:buChar char="•"/>
             </a:pPr>
             <a:r>
               <a:rPr lang="en-US" sz="1400" dirty="0">
                 <a:solidFill>
-                  <a:schemeClr val="bg2"/>
-                </a:solidFill>
-              </a:rPr>
-              <a:t>24070126053</a:t>
+                  <a:schemeClr val="tx1"/>
+                </a:solidFill>
+              </a:rPr>
+              <a:t>Language-model extractor for real, messy documents</a:t>
             </a:r>
             <a:endParaRPr lang="en-US" sz="1400" dirty="0"/>
           </a:p>
-        </p:txBody>
-      </p:sp>
-      <p:sp>
-        <p:nvSpPr>
-          <p:cNvPr id="10" name="Live app"/>
-          <p:cNvSpPr txBox="1"/>
-          <p:nvPr/>
-        </p:nvSpPr>
-        <p:spPr>
-          <a:xfrm>
-            <a:off x="548640" y="4114800"/>
-            <a:ext cx="8046720" cy="274320"/>
-          </a:xfrm>
-          <a:prstGeom prst="rect">
-            <a:avLst/>
-          </a:prstGeom>
-          <a:noFill/>
-          <a:ln/>
-        </p:spPr>
-        <p:txBody>
-          <a:bodyPr wrap="square" lIns="0" tIns="0" rIns="0" bIns="0" rtlCol="0" anchor="t"/>
-          <a:lstStyle/>
-          <a:p>
-            <a:pPr indent="0" marL="0">
-              <a:buNone/>
+          <a:p>
+            <a:pPr marL="342900" indent="-342900">
+              <a:spcAft>
+                <a:spcPts val="700"/>
+              </a:spcAft>
+              <a:buSzPct val="100000"/>
+              <a:buChar char="•"/>
             </a:pPr>
             <a:r>
               <a:rPr lang="en-US" sz="1400" dirty="0">
                 <a:solidFill>
-                  <a:schemeClr val="bg2"/>
-                </a:solidFill>
-              </a:rPr>
-              <a:t>Live app: claims-adjudication-agent.onrender.com</a:t>
+                  <a:schemeClr val="tx1"/>
+                </a:solidFill>
+              </a:rPr>
+              <a:t>OCR for scanned bills and summaries</a:t>
             </a:r>
             <a:endParaRPr lang="en-US" sz="1400" dirty="0"/>
+          </a:p>
+          <a:p>
+            <a:pPr marL="342900" indent="-342900">
+              <a:spcAft>
+                <a:spcPts val="700"/>
+              </a:spcAft>
+              <a:buSzPct val="100000"/>
+              <a:buChar char="•"/>
+            </a:pPr>
+            <a:r>
+              <a:rPr lang="en-US" sz="1400" dirty="0">
+                <a:solidFill>
+                  <a:schemeClr val="tx1"/>
+                </a:solidFill>
+              </a:rPr>
+              <a:t>Strict mode: hold any claim whose history cannot be verified</a:t>
+            </a:r>
+            <a:endParaRPr lang="en-US" sz="1400" dirty="0"/>
+          </a:p>
+          <a:p>
+            <a:pPr marL="342900" indent="-342900">
+              <a:spcAft>
+                <a:spcPts val="700"/>
+              </a:spcAft>
+              <a:buSzPct val="100000"/>
+              <a:buChar char="•"/>
+            </a:pPr>
+            <a:r>
+              <a:rPr lang="en-US" sz="1400" dirty="0">
+                <a:solidFill>
+                  <a:schemeClr val="tx1"/>
+                </a:solidFill>
+              </a:rPr>
+              <a:t>Learn fraud weights from real outcomes, with human review feedback</a:t>
+            </a:r>
+            <a:endParaRPr lang="en-US" sz="1400" dirty="0"/>
+          </a:p>
+        </p:txBody>
+      </p:sp>
+      <p:sp>
+        <p:nvSpPr>
+          <p:cNvPr id="25" name="Slide Number Placeholder 0"/>
+          <p:cNvSpPr>
+            <a:spLocks noGrp="1"/>
+          </p:cNvSpPr>
+          <p:nvPr>
+            <p:ph type="sldNum" sz="quarter" idx="4294967295"/>
+          </p:nvPr>
+        </p:nvSpPr>
+        <p:spPr>
+          <a:xfrm>
+            <a:off x="8321040" y="4773168"/>
+            <a:ext cx="457200" cy="228600"/>
+          </a:xfrm>
+          <a:prstGeom prst="rect">
+            <a:avLst/>
+          </a:prstGeom>
+          <a:extLst>
+            <a:ext uri="{C572A759-6A51-4108-AA02-DFA0A04FC94B}">
+              <ma14:wrappingTextBoxFlag xmlns:ma14="http://schemas.microsoft.com/office/mac/drawingml/2011/main" val="0"/>
+            </a:ext>
+          </a:extLst>
+        </p:spPr>
+        <p:txBody>
+          <a:bodyPr/>
+          <a:lstStyle>
+            <a:lvl1pPr>
+              <a:defRPr sz="1000">
+                <a:solidFill>
+                  <a:schemeClr val="tx2"/>
+                </a:solidFill>
+              </a:defRPr>
+            </a:lvl1pPr>
+          </a:lstStyle>
+          <a:p>
+            <a:pPr algn="r"/>
+            <a:fld id="{F7021451-1387-4CA6-816F-3879F97B5CBC}" type="slidenum">
+              <a:rPr b="0" lang="en-US"/>
+              <a:t>9</a:t>
+            </a:fld>
+            <a:endParaRPr lang="en-US"/>
           </a:p>
         </p:txBody>
       </p:sp>
